--- a/figures/ppt/fig1_framework.pptx
+++ b/figures/ppt/fig1_framework.pptx
@@ -7,7 +7,7 @@
   <p:sldIdLst>
     <p:sldId id="256" r:id="rId7"/>
   </p:sldIdLst>
-  <p:sldSz cx="6547104" cy="2606040" type="screen4x3"/>
+  <p:sldSz cx="6547104" cy="2240280" type="screen4x3"/>
   <p:notesSz cx="6858000" cy="9144000"/>
   <p:defaultTextStyle>
     <a:defPPr>
@@ -3090,26 +3090,26 @@
       <p:grpSpPr/>
       <p:sp>
         <p:nvSpPr>
-          <p:cNvPr id="2" name="Rounded Rectangle 1"/>
+          <p:cNvPr id="2" name="region_offline"/>
           <p:cNvSpPr/>
           <p:nvPr/>
         </p:nvSpPr>
         <p:spPr>
           <a:xfrm>
-            <a:off x="45720" y="301752"/>
-            <a:ext cx="1481328" cy="1920240"/>
+            <a:off x="36576" y="36576"/>
+            <a:ext cx="4005072" cy="2167128"/>
           </a:xfrm>
           <a:prstGeom prst="roundRect">
             <a:avLst>
-              <a:gd name="adj" fmla="val 3703"/>
+              <a:gd name="adj" fmla="val 3375"/>
             </a:avLst>
           </a:prstGeom>
           <a:solidFill>
-            <a:srgbClr val="E8EFF6"/>
+            <a:srgbClr val="FBEFE3"/>
           </a:solidFill>
-          <a:ln w="11430">
+          <a:ln w="12700">
             <a:solidFill>
-              <a:srgbClr val="2E5A87"/>
+              <a:srgbClr val="A65E1A"/>
             </a:solidFill>
           </a:ln>
           <a:effectLst/>
@@ -3138,14 +3138,62 @@
       </p:sp>
       <p:sp>
         <p:nvSpPr>
-          <p:cNvPr id="3" name="TextBox 2"/>
+          <p:cNvPr id="3" name="region_online"/>
+          <p:cNvSpPr/>
+          <p:nvPr/>
+        </p:nvSpPr>
+        <p:spPr>
+          <a:xfrm>
+            <a:off x="4443984" y="36576"/>
+            <a:ext cx="2066543" cy="2167128"/>
+          </a:xfrm>
+          <a:prstGeom prst="roundRect">
+            <a:avLst>
+              <a:gd name="adj" fmla="val 3539"/>
+            </a:avLst>
+          </a:prstGeom>
+          <a:solidFill>
+            <a:srgbClr val="E7F3EC"/>
+          </a:solidFill>
+          <a:ln w="12700">
+            <a:solidFill>
+              <a:srgbClr val="2F7D4F"/>
+            </a:solidFill>
+          </a:ln>
+          <a:effectLst/>
+        </p:spPr>
+        <p:style>
+          <a:lnRef idx="1">
+            <a:schemeClr val="accent1"/>
+          </a:lnRef>
+          <a:fillRef idx="3">
+            <a:schemeClr val="accent1"/>
+          </a:fillRef>
+          <a:effectRef idx="2">
+            <a:schemeClr val="accent1"/>
+          </a:effectRef>
+          <a:fontRef idx="minor">
+            <a:schemeClr val="lt1"/>
+          </a:fontRef>
+        </p:style>
+        <p:txBody>
+          <a:bodyPr rtlCol="0" anchor="ctr"/>
+          <a:lstStyle/>
+          <a:p>
+            <a:pPr algn="ctr"/>
+          </a:p>
+        </p:txBody>
+      </p:sp>
+      <p:sp>
+        <p:nvSpPr>
+          <p:cNvPr id="4" name="TextBox 3"/>
           <p:cNvSpPr txBox="1"/>
           <p:nvPr/>
         </p:nvSpPr>
         <p:spPr>
           <a:xfrm>
-            <a:off x="45720" y="342011"/>
-            <a:ext cx="1481328" cy="138938"/>
+            <a:off x="128016" y="82296"/>
+            <a:ext cx="2743200" cy="201168"/>
           </a:xfrm>
           <a:prstGeom prst="rect">
             <a:avLst/>
@@ -3158,37 +3206,94 @@
           </a:bodyPr>
           <a:lstStyle/>
           <a:p>
-            <a:pPr algn="ctr">
+            <a:pPr algn="l">
               <a:lnSpc>
                 <a:spcPct val="105000"/>
               </a:lnSpc>
             </a:pPr>
             <a:r>
-              <a:rPr sz="760" b="1" i="0">
-                <a:solidFill>
-                  <a:srgbClr val="2E5A87"/>
+              <a:rPr sz="800" b="1" i="0">
+                <a:solidFill>
+                  <a:srgbClr val="A65E1A"/>
                 </a:solidFill>
                 <a:latin typeface="Times New Roman"/>
               </a:rPr>
-              <a:t>Vessel with gear shift dwell</a:t>
-            </a:r>
-          </a:p>
-        </p:txBody>
-      </p:sp>
-      <p:sp>
-        <p:nvSpPr>
-          <p:cNvPr id="4" name="Rounded Rectangle 3"/>
+              <a:t>Offline</a:t>
+            </a:r>
+            <a:r>
+              <a:rPr sz="800" b="0" i="0">
+                <a:solidFill>
+                  <a:srgbClr val="A65E1A"/>
+                </a:solidFill>
+                <a:latin typeface="Times New Roman"/>
+              </a:rPr>
+              <a:t> training in simulation</a:t>
+            </a:r>
+          </a:p>
+        </p:txBody>
+      </p:sp>
+      <p:sp>
+        <p:nvSpPr>
+          <p:cNvPr id="5" name="TextBox 4"/>
+          <p:cNvSpPr txBox="1"/>
+          <p:nvPr/>
+        </p:nvSpPr>
+        <p:spPr>
+          <a:xfrm>
+            <a:off x="4535424" y="82296"/>
+            <a:ext cx="1920240" cy="201168"/>
+          </a:xfrm>
+          <a:prstGeom prst="rect">
+            <a:avLst/>
+          </a:prstGeom>
+          <a:noFill/>
+        </p:spPr>
+        <p:txBody>
+          <a:bodyPr wrap="none" lIns="0" rIns="0" tIns="0" bIns="0" anchor="ctr">
+            <a:noAutofit/>
+          </a:bodyPr>
+          <a:lstStyle/>
+          <a:p>
+            <a:pPr algn="l">
+              <a:lnSpc>
+                <a:spcPct val="105000"/>
+              </a:lnSpc>
+            </a:pPr>
+            <a:r>
+              <a:rPr sz="800" b="1" i="0">
+                <a:solidFill>
+                  <a:srgbClr val="2F7D4F"/>
+                </a:solidFill>
+                <a:latin typeface="Times New Roman"/>
+              </a:rPr>
+              <a:t>Online</a:t>
+            </a:r>
+            <a:r>
+              <a:rPr sz="800" b="0" i="0">
+                <a:solidFill>
+                  <a:srgbClr val="2F7D4F"/>
+                </a:solidFill>
+                <a:latin typeface="Times New Roman"/>
+              </a:rPr>
+              <a:t> deployment on the vessel</a:t>
+            </a:r>
+          </a:p>
+        </p:txBody>
+      </p:sp>
+      <p:sp>
+        <p:nvSpPr>
+          <p:cNvPr id="6" name="simulator"/>
           <p:cNvSpPr/>
           <p:nvPr/>
         </p:nvSpPr>
         <p:spPr>
           <a:xfrm>
-            <a:off x="128016" y="539496"/>
-            <a:ext cx="1316736" cy="365759"/>
+            <a:off x="146304" y="365760"/>
+            <a:ext cx="932688" cy="1719072"/>
           </a:xfrm>
           <a:prstGeom prst="roundRect">
             <a:avLst>
-              <a:gd name="adj" fmla="val 10000"/>
+              <a:gd name="adj" fmla="val 3921"/>
             </a:avLst>
           </a:prstGeom>
           <a:solidFill>
@@ -3216,7 +3321,31 @@
           </a:fontRef>
         </p:style>
         <p:txBody>
-          <a:bodyPr rtlCol="0" anchor="ctr" wrap="none" lIns="0" rIns="0" tIns="0" bIns="0">
+          <a:bodyPr rtlCol="0" anchor="ctr"/>
+          <a:lstStyle/>
+          <a:p>
+            <a:pPr algn="ctr"/>
+          </a:p>
+        </p:txBody>
+      </p:sp>
+      <p:sp>
+        <p:nvSpPr>
+          <p:cNvPr id="7" name="TextBox 6"/>
+          <p:cNvSpPr txBox="1"/>
+          <p:nvPr/>
+        </p:nvSpPr>
+        <p:spPr>
+          <a:xfrm>
+            <a:off x="146304" y="420624"/>
+            <a:ext cx="932688" cy="164592"/>
+          </a:xfrm>
+          <a:prstGeom prst="rect">
+            <a:avLst/>
+          </a:prstGeom>
+          <a:noFill/>
+        </p:spPr>
+        <p:txBody>
+          <a:bodyPr wrap="none" lIns="0" rIns="0" tIns="0" bIns="0" anchor="ctr">
             <a:noAutofit/>
           </a:bodyPr>
           <a:lstStyle/>
@@ -3227,33 +3356,342 @@
               </a:lnSpc>
             </a:pPr>
             <a:r>
-              <a:rPr sz="700" b="0" i="0">
-                <a:solidFill>
-                  <a:srgbClr val="000000"/>
+              <a:rPr sz="720" b="1" i="0">
+                <a:solidFill>
+                  <a:srgbClr val="2E5A87"/>
                 </a:solidFill>
                 <a:latin typeface="Times New Roman"/>
               </a:rPr>
-              <a:t>Gear shift </a:t>
-            </a:r>
-            <a:r>
-              <a:rPr sz="700" b="0" i="1">
-                <a:solidFill>
-                  <a:srgbClr val="000000"/>
+              <a:t>Simulator</a:t>
+            </a:r>
+          </a:p>
+        </p:txBody>
+      </p:sp>
+      <p:sp>
+        <p:nvSpPr>
+          <p:cNvPr id="8" name="boat_hull"/>
+          <p:cNvSpPr/>
+          <p:nvPr/>
+        </p:nvSpPr>
+        <p:spPr>
+          <a:xfrm>
+            <a:off x="329184" y="1042416"/>
+            <a:ext cx="621792" cy="228600"/>
+          </a:xfrm>
+          <a:custGeom>
+            <a:avLst/>
+            <a:gdLst/>
+            <a:ahLst/>
+            <a:cxnLst/>
+            <a:rect l="l" t="t" r="r" b="b"/>
+            <a:pathLst>
+              <a:path w="621792" h="228600">
+                <a:moveTo>
+                  <a:pt x="0" y="27432"/>
+                </a:moveTo>
+                <a:lnTo>
+                  <a:pt x="385511" y="0"/>
+                </a:lnTo>
+                <a:lnTo>
+                  <a:pt x="534741" y="27432"/>
+                </a:lnTo>
+                <a:lnTo>
+                  <a:pt x="621792" y="114300"/>
+                </a:lnTo>
+                <a:lnTo>
+                  <a:pt x="534741" y="201168"/>
+                </a:lnTo>
+                <a:lnTo>
+                  <a:pt x="385511" y="228600"/>
+                </a:lnTo>
+                <a:lnTo>
+                  <a:pt x="0" y="201168"/>
+                </a:lnTo>
+                <a:close/>
+              </a:path>
+            </a:pathLst>
+          </a:custGeom>
+          <a:solidFill>
+            <a:srgbClr val="2E5A87"/>
+          </a:solidFill>
+          <a:ln>
+            <a:noFill/>
+          </a:ln>
+          <a:effectLst/>
+        </p:spPr>
+        <p:style>
+          <a:lnRef idx="1">
+            <a:schemeClr val="accent1"/>
+          </a:lnRef>
+          <a:fillRef idx="3">
+            <a:schemeClr val="accent1"/>
+          </a:fillRef>
+          <a:effectRef idx="2">
+            <a:schemeClr val="accent1"/>
+          </a:effectRef>
+          <a:fontRef idx="minor">
+            <a:schemeClr val="lt1"/>
+          </a:fontRef>
+        </p:style>
+        <p:txBody>
+          <a:bodyPr rtlCol="0" anchor="ctr"/>
+          <a:lstStyle/>
+          <a:p>
+            <a:pPr algn="ctr"/>
+          </a:p>
+        </p:txBody>
+      </p:sp>
+      <p:sp>
+        <p:nvSpPr>
+          <p:cNvPr id="9" name="boat_sterndrive"/>
+          <p:cNvSpPr/>
+          <p:nvPr/>
+        </p:nvSpPr>
+        <p:spPr>
+          <a:xfrm>
+            <a:off x="285658" y="1129284"/>
+            <a:ext cx="43526" cy="54864"/>
+          </a:xfrm>
+          <a:custGeom>
+            <a:avLst/>
+            <a:gdLst/>
+            <a:ahLst/>
+            <a:cxnLst/>
+            <a:rect l="l" t="t" r="r" b="b"/>
+            <a:pathLst>
+              <a:path w="43526" h="54864">
+                <a:moveTo>
+                  <a:pt x="0" y="0"/>
+                </a:moveTo>
+                <a:lnTo>
+                  <a:pt x="43526" y="0"/>
+                </a:lnTo>
+                <a:lnTo>
+                  <a:pt x="43526" y="54864"/>
+                </a:lnTo>
+                <a:lnTo>
+                  <a:pt x="0" y="54864"/>
+                </a:lnTo>
+                <a:close/>
+              </a:path>
+            </a:pathLst>
+          </a:custGeom>
+          <a:solidFill>
+            <a:srgbClr val="1B3A5C"/>
+          </a:solidFill>
+          <a:ln>
+            <a:noFill/>
+          </a:ln>
+          <a:effectLst/>
+        </p:spPr>
+        <p:style>
+          <a:lnRef idx="1">
+            <a:schemeClr val="accent1"/>
+          </a:lnRef>
+          <a:fillRef idx="3">
+            <a:schemeClr val="accent1"/>
+          </a:fillRef>
+          <a:effectRef idx="2">
+            <a:schemeClr val="accent1"/>
+          </a:effectRef>
+          <a:fontRef idx="minor">
+            <a:schemeClr val="lt1"/>
+          </a:fontRef>
+        </p:style>
+        <p:txBody>
+          <a:bodyPr rtlCol="0" anchor="ctr"/>
+          <a:lstStyle/>
+          <a:p>
+            <a:pPr algn="ctr"/>
+          </a:p>
+        </p:txBody>
+      </p:sp>
+      <p:cxnSp>
+        <p:nvCxnSpPr>
+          <p:cNvPr id="10" name="Connector 9"/>
+          <p:cNvCxnSpPr/>
+          <p:nvPr/>
+        </p:nvCxnSpPr>
+        <p:spPr>
+          <a:xfrm>
+            <a:off x="237744" y="749808"/>
+            <a:ext cx="137160" cy="0"/>
+          </a:xfrm>
+          <a:prstGeom prst="line">
+            <a:avLst/>
+          </a:prstGeom>
+          <a:ln w="10160">
+            <a:solidFill>
+              <a:srgbClr val="8A8A8A"/>
+            </a:solidFill>
+            <a:tailEnd type="triangle" w="sm" len="sm"/>
+          </a:ln>
+        </p:spPr>
+        <p:style>
+          <a:lnRef idx="2">
+            <a:schemeClr val="accent1"/>
+          </a:lnRef>
+          <a:fillRef idx="0">
+            <a:schemeClr val="accent1"/>
+          </a:fillRef>
+          <a:effectRef idx="1">
+            <a:schemeClr val="accent1"/>
+          </a:effectRef>
+          <a:fontRef idx="minor">
+            <a:schemeClr val="tx1"/>
+          </a:fontRef>
+        </p:style>
+      </p:cxnSp>
+      <p:cxnSp>
+        <p:nvCxnSpPr>
+          <p:cNvPr id="11" name="Connector 10"/>
+          <p:cNvCxnSpPr/>
+          <p:nvPr/>
+        </p:nvCxnSpPr>
+        <p:spPr>
+          <a:xfrm>
+            <a:off x="237744" y="804672"/>
+            <a:ext cx="137160" cy="0"/>
+          </a:xfrm>
+          <a:prstGeom prst="line">
+            <a:avLst/>
+          </a:prstGeom>
+          <a:ln w="10160">
+            <a:solidFill>
+              <a:srgbClr val="8A8A8A"/>
+            </a:solidFill>
+            <a:tailEnd type="triangle" w="sm" len="sm"/>
+          </a:ln>
+        </p:spPr>
+        <p:style>
+          <a:lnRef idx="2">
+            <a:schemeClr val="accent1"/>
+          </a:lnRef>
+          <a:fillRef idx="0">
+            <a:schemeClr val="accent1"/>
+          </a:fillRef>
+          <a:effectRef idx="1">
+            <a:schemeClr val="accent1"/>
+          </a:effectRef>
+          <a:fontRef idx="minor">
+            <a:schemeClr val="tx1"/>
+          </a:fontRef>
+        </p:style>
+      </p:cxnSp>
+      <p:cxnSp>
+        <p:nvCxnSpPr>
+          <p:cNvPr id="12" name="Connector 11"/>
+          <p:cNvCxnSpPr/>
+          <p:nvPr/>
+        </p:nvCxnSpPr>
+        <p:spPr>
+          <a:xfrm>
+            <a:off x="237744" y="859536"/>
+            <a:ext cx="137160" cy="0"/>
+          </a:xfrm>
+          <a:prstGeom prst="line">
+            <a:avLst/>
+          </a:prstGeom>
+          <a:ln w="10160">
+            <a:solidFill>
+              <a:srgbClr val="8A8A8A"/>
+            </a:solidFill>
+            <a:tailEnd type="triangle" w="sm" len="sm"/>
+          </a:ln>
+        </p:spPr>
+        <p:style>
+          <a:lnRef idx="2">
+            <a:schemeClr val="accent1"/>
+          </a:lnRef>
+          <a:fillRef idx="0">
+            <a:schemeClr val="accent1"/>
+          </a:fillRef>
+          <a:effectRef idx="1">
+            <a:schemeClr val="accent1"/>
+          </a:effectRef>
+          <a:fontRef idx="minor">
+            <a:schemeClr val="tx1"/>
+          </a:fontRef>
+        </p:style>
+      </p:cxnSp>
+      <p:sp>
+        <p:nvSpPr>
+          <p:cNvPr id="13" name="TextBox 12"/>
+          <p:cNvSpPr txBox="1"/>
+          <p:nvPr/>
+        </p:nvSpPr>
+        <p:spPr>
+          <a:xfrm>
+            <a:off x="420623" y="740664"/>
+            <a:ext cx="548640" cy="128016"/>
+          </a:xfrm>
+          <a:prstGeom prst="rect">
+            <a:avLst/>
+          </a:prstGeom>
+          <a:noFill/>
+        </p:spPr>
+        <p:txBody>
+          <a:bodyPr wrap="none" lIns="0" rIns="0" tIns="0" bIns="0" anchor="ctr">
+            <a:noAutofit/>
+          </a:bodyPr>
+          <a:lstStyle/>
+          <a:p>
+            <a:pPr algn="l">
+              <a:lnSpc>
+                <a:spcPct val="105000"/>
+              </a:lnSpc>
+            </a:pPr>
+            <a:r>
+              <a:rPr sz="650" b="0" i="1">
+                <a:solidFill>
+                  <a:srgbClr val="6B6B6B"/>
                 </a:solidFill>
                 <a:latin typeface="Times New Roman"/>
               </a:rPr>
-              <a:t>g</a:t>
-            </a:r>
-            <a:r>
-              <a:rPr sz="700" b="0" i="0">
-                <a:solidFill>
-                  <a:srgbClr val="000000"/>
+              <a:t>d</a:t>
+            </a:r>
+            <a:r>
+              <a:rPr sz="650" b="0" i="0">
+                <a:solidFill>
+                  <a:srgbClr val="6B6B6B"/>
                 </a:solidFill>
                 <a:latin typeface="Times New Roman"/>
               </a:rPr>
-              <a:t> ∈ {R, N, F}</a:t>
-            </a:r>
-          </a:p>
+              <a:t> ∈ </a:t>
+            </a:r>
+            <a:r>
+              <a:rPr sz="650" b="0" i="0">
+                <a:solidFill>
+                  <a:srgbClr val="6B6B6B"/>
+                </a:solidFill>
+                <a:latin typeface="Cambria Math"/>
+              </a:rPr>
+              <a:t>𝒲</a:t>
+            </a:r>
+          </a:p>
+        </p:txBody>
+      </p:sp>
+      <p:sp>
+        <p:nvSpPr>
+          <p:cNvPr id="14" name="TextBox 13"/>
+          <p:cNvSpPr txBox="1"/>
+          <p:nvPr/>
+        </p:nvSpPr>
+        <p:spPr>
+          <a:xfrm>
+            <a:off x="146304" y="1444752"/>
+            <a:ext cx="932688" cy="566928"/>
+          </a:xfrm>
+          <a:prstGeom prst="rect">
+            <a:avLst/>
+          </a:prstGeom>
+          <a:noFill/>
+        </p:spPr>
+        <p:txBody>
+          <a:bodyPr wrap="none" lIns="0" rIns="0" tIns="0" bIns="0" anchor="ctr">
+            <a:noAutofit/>
+          </a:bodyPr>
+          <a:lstStyle/>
           <a:p>
             <a:pPr algn="ctr">
               <a:lnSpc>
@@ -3261,89 +3699,33 @@
               </a:lnSpc>
             </a:pPr>
             <a:r>
-              <a:rPr sz="700" b="0" i="0">
+              <a:rPr sz="650" b="0" i="0">
                 <a:solidFill>
                   <a:srgbClr val="000000"/>
                 </a:solidFill>
                 <a:latin typeface="Times New Roman"/>
               </a:rPr>
-              <a:t>held </a:t>
-            </a:r>
-            <a:r>
-              <a:rPr sz="700" b="0" i="1">
+              <a:t>gear </a:t>
+            </a:r>
+            <a:r>
+              <a:rPr sz="650" b="0" i="1">
                 <a:solidFill>
                   <a:srgbClr val="000000"/>
                 </a:solidFill>
                 <a:latin typeface="Times New Roman"/>
               </a:rPr>
-              <a:t>D</a:t>
-            </a:r>
-            <a:r>
-              <a:rPr sz="700" b="0" i="1" baseline="-25000">
+              <a:t>g</a:t>
+            </a:r>
+            <a:r>
+              <a:rPr sz="650" b="0" i="0">
                 <a:solidFill>
                   <a:srgbClr val="000000"/>
                 </a:solidFill>
                 <a:latin typeface="Times New Roman"/>
               </a:rPr>
-              <a:t>g</a:t>
-            </a:r>
-            <a:r>
-              <a:rPr sz="700" b="0" i="0">
-                <a:solidFill>
-                  <a:srgbClr val="000000"/>
-                </a:solidFill>
-                <a:latin typeface="Times New Roman"/>
-              </a:rPr>
-              <a:t> = 6 steps (3 s)</a:t>
-            </a:r>
-          </a:p>
-        </p:txBody>
-      </p:sp>
-      <p:sp>
-        <p:nvSpPr>
-          <p:cNvPr id="5" name="Rounded Rectangle 4"/>
-          <p:cNvSpPr/>
-          <p:nvPr/>
-        </p:nvSpPr>
-        <p:spPr>
-          <a:xfrm>
-            <a:off x="128016" y="996696"/>
-            <a:ext cx="1316736" cy="365759"/>
-          </a:xfrm>
-          <a:prstGeom prst="roundRect">
-            <a:avLst>
-              <a:gd name="adj" fmla="val 10000"/>
-            </a:avLst>
-          </a:prstGeom>
-          <a:solidFill>
-            <a:srgbClr val="FFFFFF"/>
-          </a:solidFill>
-          <a:ln w="8890">
-            <a:solidFill>
-              <a:srgbClr val="2E5A87"/>
-            </a:solidFill>
-          </a:ln>
-          <a:effectLst/>
-        </p:spPr>
-        <p:style>
-          <a:lnRef idx="1">
-            <a:schemeClr val="accent1"/>
-          </a:lnRef>
-          <a:fillRef idx="3">
-            <a:schemeClr val="accent1"/>
-          </a:fillRef>
-          <a:effectRef idx="2">
-            <a:schemeClr val="accent1"/>
-          </a:effectRef>
-          <a:fontRef idx="minor">
-            <a:schemeClr val="lt1"/>
-          </a:fontRef>
-        </p:style>
-        <p:txBody>
-          <a:bodyPr rtlCol="0" anchor="ctr" wrap="none" lIns="0" rIns="0" tIns="0" bIns="0">
-            <a:noAutofit/>
-          </a:bodyPr>
-          <a:lstStyle/>
+              <a:t> ∈ {R, N, F}</a:t>
+            </a:r>
+          </a:p>
           <a:p>
             <a:pPr algn="ctr">
               <a:lnSpc>
@@ -3351,22 +3733,40 @@
               </a:lnSpc>
             </a:pPr>
             <a:r>
-              <a:rPr sz="700" b="0" i="0">
+              <a:rPr sz="650" b="0" i="0">
                 <a:solidFill>
                   <a:srgbClr val="000000"/>
                 </a:solidFill>
                 <a:latin typeface="Times New Roman"/>
               </a:rPr>
-              <a:t>Sterndrive steering </a:t>
-            </a:r>
-            <a:r>
-              <a:rPr sz="700" b="0" i="1">
+              <a:t>dwell </a:t>
+            </a:r>
+            <a:r>
+              <a:rPr sz="650" b="0" i="1">
                 <a:solidFill>
                   <a:srgbClr val="000000"/>
                 </a:solidFill>
                 <a:latin typeface="Times New Roman"/>
               </a:rPr>
-              <a:t>δ</a:t>
+              <a:t>D</a:t>
+            </a:r>
+            <a:r>
+              <a:rPr sz="650" b="0" i="1" baseline="-25000">
+                <a:solidFill>
+                  <a:srgbClr val="000000"/>
+                </a:solidFill>
+                <a:latin typeface="Times New Roman"/>
+              </a:rPr>
+              <a:t>g</a:t>
+            </a:r>
+            <a:r>
+              <a:rPr sz="650" b="0" i="0">
+                <a:solidFill>
+                  <a:srgbClr val="000000"/>
+                </a:solidFill>
+                <a:latin typeface="Times New Roman"/>
+              </a:rPr>
+              <a:t> = 3 s</a:t>
             </a:r>
           </a:p>
           <a:p>
@@ -3376,279 +3776,40 @@
               </a:lnSpc>
             </a:pPr>
             <a:r>
-              <a:rPr sz="700" b="0" i="0">
+              <a:rPr sz="650" b="0" i="0">
                 <a:solidFill>
                   <a:srgbClr val="000000"/>
                 </a:solidFill>
                 <a:latin typeface="Times New Roman"/>
               </a:rPr>
-              <a:t>rate limited, no dwell</a:t>
-            </a:r>
-          </a:p>
-        </p:txBody>
-      </p:sp>
-      <p:sp>
-        <p:nvSpPr>
-          <p:cNvPr id="6" name="Rounded Rectangle 5"/>
+              <a:t>steering </a:t>
+            </a:r>
+            <a:r>
+              <a:rPr sz="650" b="0" i="1">
+                <a:solidFill>
+                  <a:srgbClr val="000000"/>
+                </a:solidFill>
+                <a:latin typeface="Times New Roman"/>
+              </a:rPr>
+              <a:t>δ</a:t>
+            </a:r>
+          </a:p>
+        </p:txBody>
+      </p:sp>
+      <p:sp>
+        <p:nvSpPr>
+          <p:cNvPr id="15" name="stage1"/>
           <p:cNvSpPr/>
           <p:nvPr/>
         </p:nvSpPr>
         <p:spPr>
           <a:xfrm>
-            <a:off x="128016" y="1453896"/>
-            <a:ext cx="1316736" cy="365760"/>
+            <a:off x="1298448" y="365760"/>
+            <a:ext cx="2615184" cy="896112"/>
           </a:xfrm>
           <a:prstGeom prst="roundRect">
             <a:avLst>
-              <a:gd name="adj" fmla="val 10000"/>
-            </a:avLst>
-          </a:prstGeom>
-          <a:solidFill>
-            <a:srgbClr val="FFFFFF"/>
-          </a:solidFill>
-          <a:ln w="8890">
-            <a:solidFill>
-              <a:srgbClr val="2E5A87"/>
-            </a:solidFill>
-          </a:ln>
-          <a:effectLst/>
-        </p:spPr>
-        <p:style>
-          <a:lnRef idx="1">
-            <a:schemeClr val="accent1"/>
-          </a:lnRef>
-          <a:fillRef idx="3">
-            <a:schemeClr val="accent1"/>
-          </a:fillRef>
-          <a:effectRef idx="2">
-            <a:schemeClr val="accent1"/>
-          </a:effectRef>
-          <a:fontRef idx="minor">
-            <a:schemeClr val="lt1"/>
-          </a:fontRef>
-        </p:style>
-        <p:txBody>
-          <a:bodyPr rtlCol="0" anchor="ctr" wrap="none" lIns="0" rIns="0" tIns="0" bIns="0">
-            <a:noAutofit/>
-          </a:bodyPr>
-          <a:lstStyle/>
-          <a:p>
-            <a:pPr algn="ctr">
-              <a:lnSpc>
-                <a:spcPct val="105000"/>
-              </a:lnSpc>
-            </a:pPr>
-            <a:r>
-              <a:rPr sz="700" b="0" i="0">
-                <a:solidFill>
-                  <a:srgbClr val="000000"/>
-                </a:solidFill>
-                <a:latin typeface="Times New Roman"/>
-              </a:rPr>
-              <a:t>Disturbance </a:t>
-            </a:r>
-            <a:r>
-              <a:rPr sz="700" b="0" i="1">
-                <a:solidFill>
-                  <a:srgbClr val="000000"/>
-                </a:solidFill>
-                <a:latin typeface="Times New Roman"/>
-              </a:rPr>
-              <a:t>d</a:t>
-            </a:r>
-            <a:r>
-              <a:rPr sz="700" b="0" i="0">
-                <a:solidFill>
-                  <a:srgbClr val="000000"/>
-                </a:solidFill>
-                <a:latin typeface="Times New Roman"/>
-              </a:rPr>
-              <a:t> ∈ </a:t>
-            </a:r>
-            <a:r>
-              <a:rPr sz="700" b="0" i="0">
-                <a:solidFill>
-                  <a:srgbClr val="000000"/>
-                </a:solidFill>
-                <a:latin typeface="Cambria Math"/>
-              </a:rPr>
-              <a:t>𝒲</a:t>
-            </a:r>
-          </a:p>
-          <a:p>
-            <a:pPr algn="ctr">
-              <a:lnSpc>
-                <a:spcPct val="105000"/>
-              </a:lnSpc>
-            </a:pPr>
-            <a:r>
-              <a:rPr sz="700" b="0" i="0">
-                <a:solidFill>
-                  <a:srgbClr val="000000"/>
-                </a:solidFill>
-                <a:latin typeface="Times New Roman"/>
-              </a:rPr>
-              <a:t>wind and current</a:t>
-            </a:r>
-          </a:p>
-        </p:txBody>
-      </p:sp>
-      <p:sp>
-        <p:nvSpPr>
-          <p:cNvPr id="7" name="TextBox 6"/>
-          <p:cNvSpPr txBox="1"/>
-          <p:nvPr/>
-        </p:nvSpPr>
-        <p:spPr>
-          <a:xfrm>
-            <a:off x="45720" y="1903730"/>
-            <a:ext cx="1481328" cy="234188"/>
-          </a:xfrm>
-          <a:prstGeom prst="rect">
-            <a:avLst/>
-          </a:prstGeom>
-          <a:noFill/>
-        </p:spPr>
-        <p:txBody>
-          <a:bodyPr wrap="none" lIns="0" rIns="0" tIns="0" bIns="0" anchor="ctr">
-            <a:noAutofit/>
-          </a:bodyPr>
-          <a:lstStyle/>
-          <a:p>
-            <a:pPr algn="ctr">
-              <a:lnSpc>
-                <a:spcPct val="105000"/>
-              </a:lnSpc>
-            </a:pPr>
-            <a:r>
-              <a:rPr sz="680" b="0" i="1">
-                <a:solidFill>
-                  <a:srgbClr val="9B2222"/>
-                </a:solidFill>
-                <a:latin typeface="Times New Roman"/>
-              </a:rPr>
-              <a:t>Locked in N, thrust and</a:t>
-            </a:r>
-          </a:p>
-          <a:p>
-            <a:pPr algn="ctr">
-              <a:lnSpc>
-                <a:spcPct val="105000"/>
-              </a:lnSpc>
-            </a:pPr>
-            <a:r>
-              <a:rPr sz="680" b="0" i="1">
-                <a:solidFill>
-                  <a:srgbClr val="9B2222"/>
-                </a:solidFill>
-                <a:latin typeface="Times New Roman"/>
-              </a:rPr>
-              <a:t>steering force both vanish</a:t>
-            </a:r>
-          </a:p>
-        </p:txBody>
-      </p:sp>
-      <p:sp>
-        <p:nvSpPr>
-          <p:cNvPr id="8" name="Rounded Rectangle 7"/>
-          <p:cNvSpPr/>
-          <p:nvPr/>
-        </p:nvSpPr>
-        <p:spPr>
-          <a:xfrm>
-            <a:off x="1764792" y="301752"/>
-            <a:ext cx="2011680" cy="1920240"/>
-          </a:xfrm>
-          <a:prstGeom prst="roundRect">
-            <a:avLst>
-              <a:gd name="adj" fmla="val 2857"/>
-            </a:avLst>
-          </a:prstGeom>
-          <a:solidFill>
-            <a:srgbClr val="FBEFE3"/>
-          </a:solidFill>
-          <a:ln w="11430">
-            <a:solidFill>
-              <a:srgbClr val="A65E1A"/>
-            </a:solidFill>
-          </a:ln>
-          <a:effectLst/>
-        </p:spPr>
-        <p:style>
-          <a:lnRef idx="1">
-            <a:schemeClr val="accent1"/>
-          </a:lnRef>
-          <a:fillRef idx="3">
-            <a:schemeClr val="accent1"/>
-          </a:fillRef>
-          <a:effectRef idx="2">
-            <a:schemeClr val="accent1"/>
-          </a:effectRef>
-          <a:fontRef idx="minor">
-            <a:schemeClr val="lt1"/>
-          </a:fontRef>
-        </p:style>
-        <p:txBody>
-          <a:bodyPr rtlCol="0" anchor="ctr"/>
-          <a:lstStyle/>
-          <a:p>
-            <a:pPr algn="ctr"/>
-          </a:p>
-        </p:txBody>
-      </p:sp>
-      <p:sp>
-        <p:nvSpPr>
-          <p:cNvPr id="9" name="TextBox 8"/>
-          <p:cNvSpPr txBox="1"/>
-          <p:nvPr/>
-        </p:nvSpPr>
-        <p:spPr>
-          <a:xfrm>
-            <a:off x="1764792" y="342011"/>
-            <a:ext cx="2011680" cy="138938"/>
-          </a:xfrm>
-          <a:prstGeom prst="rect">
-            <a:avLst/>
-          </a:prstGeom>
-          <a:noFill/>
-        </p:spPr>
-        <p:txBody>
-          <a:bodyPr wrap="none" lIns="0" rIns="0" tIns="0" bIns="0" anchor="ctr">
-            <a:noAutofit/>
-          </a:bodyPr>
-          <a:lstStyle/>
-          <a:p>
-            <a:pPr algn="ctr">
-              <a:lnSpc>
-                <a:spcPct val="105000"/>
-              </a:lnSpc>
-            </a:pPr>
-            <a:r>
-              <a:rPr sz="760" b="1" i="0">
-                <a:solidFill>
-                  <a:srgbClr val="A65E1A"/>
-                </a:solidFill>
-                <a:latin typeface="Times New Roman"/>
-              </a:rPr>
-              <a:t>Stage 1 offline, dwell indexed RIS</a:t>
-            </a:r>
-          </a:p>
-        </p:txBody>
-      </p:sp>
-      <p:sp>
-        <p:nvSpPr>
-          <p:cNvPr id="10" name="Rounded Rectangle 9"/>
-          <p:cNvSpPr/>
-          <p:nvPr/>
-        </p:nvSpPr>
-        <p:spPr>
-          <a:xfrm>
-            <a:off x="1847088" y="539496"/>
-            <a:ext cx="1847088" cy="329183"/>
-          </a:xfrm>
-          <a:prstGeom prst="roundRect">
-            <a:avLst>
-              <a:gd name="adj" fmla="val 11111"/>
+              <a:gd name="adj" fmla="val 4081"/>
             </a:avLst>
           </a:prstGeom>
           <a:solidFill>
@@ -3676,238 +3837,75 @@
           </a:fontRef>
         </p:style>
         <p:txBody>
-          <a:bodyPr rtlCol="0" anchor="ctr" wrap="none" lIns="0" rIns="0" tIns="0" bIns="0">
+          <a:bodyPr rtlCol="0" anchor="ctr"/>
+          <a:lstStyle/>
+          <a:p>
+            <a:pPr algn="ctr"/>
+          </a:p>
+        </p:txBody>
+      </p:sp>
+      <p:sp>
+        <p:nvSpPr>
+          <p:cNvPr id="16" name="TextBox 15"/>
+          <p:cNvSpPr txBox="1"/>
+          <p:nvPr/>
+        </p:nvSpPr>
+        <p:spPr>
+          <a:xfrm>
+            <a:off x="1371600" y="402336"/>
+            <a:ext cx="2377440" cy="164592"/>
+          </a:xfrm>
+          <a:prstGeom prst="rect">
+            <a:avLst/>
+          </a:prstGeom>
+          <a:noFill/>
+        </p:spPr>
+        <p:txBody>
+          <a:bodyPr wrap="none" lIns="0" rIns="0" tIns="0" bIns="0" anchor="ctr">
             <a:noAutofit/>
           </a:bodyPr>
           <a:lstStyle/>
           <a:p>
-            <a:pPr algn="ctr">
+            <a:pPr algn="l">
               <a:lnSpc>
                 <a:spcPct val="105000"/>
               </a:lnSpc>
             </a:pPr>
             <a:r>
+              <a:rPr sz="700" b="1" i="0">
+                <a:solidFill>
+                  <a:srgbClr val="A65E1A"/>
+                </a:solidFill>
+                <a:latin typeface="Times New Roman"/>
+              </a:rPr>
+              <a:t>Stage 1</a:t>
+            </a:r>
+            <a:r>
               <a:rPr sz="700" b="0" i="0">
                 <a:solidFill>
-                  <a:srgbClr val="000000"/>
+                  <a:srgbClr val="A65E1A"/>
                 </a:solidFill>
                 <a:latin typeface="Times New Roman"/>
               </a:rPr>
-              <a:t>Augmented state</a:t>
-            </a:r>
-          </a:p>
-          <a:p>
-            <a:pPr algn="ctr">
-              <a:lnSpc>
-                <a:spcPct val="105000"/>
-              </a:lnSpc>
-            </a:pPr>
-            <a:r>
-              <a:rPr sz="700" b="0" i="1">
-                <a:solidFill>
-                  <a:srgbClr val="000000"/>
-                </a:solidFill>
-                <a:latin typeface="Times New Roman"/>
-              </a:rPr>
-              <a:t>ξ</a:t>
-            </a:r>
-            <a:r>
-              <a:rPr sz="700" b="0" i="0">
-                <a:solidFill>
-                  <a:srgbClr val="000000"/>
-                </a:solidFill>
-                <a:latin typeface="Times New Roman"/>
-              </a:rPr>
-              <a:t> = (</a:t>
-            </a:r>
-            <a:r>
-              <a:rPr sz="700" b="0" i="1">
-                <a:solidFill>
-                  <a:srgbClr val="000000"/>
-                </a:solidFill>
-                <a:latin typeface="Times New Roman"/>
-              </a:rPr>
-              <a:t>x̃</a:t>
-            </a:r>
-            <a:r>
-              <a:rPr sz="700" b="0" i="0">
-                <a:solidFill>
-                  <a:srgbClr val="000000"/>
-                </a:solidFill>
-                <a:latin typeface="Times New Roman"/>
-              </a:rPr>
-              <a:t>, </a:t>
-            </a:r>
-            <a:r>
-              <a:rPr sz="700" b="0" i="1">
-                <a:solidFill>
-                  <a:srgbClr val="000000"/>
-                </a:solidFill>
-                <a:latin typeface="Times New Roman"/>
-              </a:rPr>
-              <a:t>ỹ</a:t>
-            </a:r>
-            <a:r>
-              <a:rPr sz="700" b="0" i="0">
-                <a:solidFill>
-                  <a:srgbClr val="000000"/>
-                </a:solidFill>
-                <a:latin typeface="Times New Roman"/>
-              </a:rPr>
-              <a:t>, </a:t>
-            </a:r>
-            <a:r>
-              <a:rPr sz="700" b="0" i="1">
-                <a:solidFill>
-                  <a:srgbClr val="000000"/>
-                </a:solidFill>
-                <a:latin typeface="Times New Roman"/>
-              </a:rPr>
-              <a:t>ψ̃</a:t>
-            </a:r>
-            <a:r>
-              <a:rPr sz="700" b="0" i="0">
-                <a:solidFill>
-                  <a:srgbClr val="000000"/>
-                </a:solidFill>
-                <a:latin typeface="Times New Roman"/>
-              </a:rPr>
-              <a:t>, </a:t>
-            </a:r>
-            <a:r>
-              <a:rPr sz="700" b="0" i="1">
-                <a:solidFill>
-                  <a:srgbClr val="000000"/>
-                </a:solidFill>
-                <a:latin typeface="Times New Roman"/>
-              </a:rPr>
-              <a:t>u</a:t>
-            </a:r>
-            <a:r>
-              <a:rPr sz="700" b="0" i="0">
-                <a:solidFill>
-                  <a:srgbClr val="000000"/>
-                </a:solidFill>
-                <a:latin typeface="Times New Roman"/>
-              </a:rPr>
-              <a:t>, </a:t>
-            </a:r>
-            <a:r>
-              <a:rPr sz="700" b="0" i="1">
-                <a:solidFill>
-                  <a:srgbClr val="000000"/>
-                </a:solidFill>
-                <a:latin typeface="Times New Roman"/>
-              </a:rPr>
-              <a:t>v</a:t>
-            </a:r>
-            <a:r>
-              <a:rPr sz="700" b="0" i="0">
-                <a:solidFill>
-                  <a:srgbClr val="000000"/>
-                </a:solidFill>
-                <a:latin typeface="Times New Roman"/>
-              </a:rPr>
-              <a:t>, </a:t>
-            </a:r>
-            <a:r>
-              <a:rPr sz="700" b="0" i="1">
-                <a:solidFill>
-                  <a:srgbClr val="000000"/>
-                </a:solidFill>
-                <a:latin typeface="Times New Roman"/>
-              </a:rPr>
-              <a:t>r</a:t>
-            </a:r>
-            <a:r>
-              <a:rPr sz="700" b="0" i="0">
-                <a:solidFill>
-                  <a:srgbClr val="000000"/>
-                </a:solidFill>
-                <a:latin typeface="Times New Roman"/>
-              </a:rPr>
-              <a:t>, </a:t>
-            </a:r>
-            <a:r>
-              <a:rPr sz="700" b="0" i="1">
-                <a:solidFill>
-                  <a:srgbClr val="000000"/>
-                </a:solidFill>
-                <a:latin typeface="Times New Roman"/>
-              </a:rPr>
-              <a:t>δ</a:t>
-            </a:r>
-            <a:r>
-              <a:rPr sz="700" b="0" i="0">
-                <a:solidFill>
-                  <a:srgbClr val="000000"/>
-                </a:solidFill>
-                <a:latin typeface="Times New Roman"/>
-              </a:rPr>
-              <a:t>, </a:t>
-            </a:r>
-            <a:r>
-              <a:rPr sz="700" b="0" i="1">
-                <a:solidFill>
-                  <a:srgbClr val="000000"/>
-                </a:solidFill>
-                <a:latin typeface="Times New Roman"/>
-              </a:rPr>
-              <a:t>g</a:t>
-            </a:r>
-            <a:r>
-              <a:rPr sz="700" b="0" i="0">
-                <a:solidFill>
-                  <a:srgbClr val="000000"/>
-                </a:solidFill>
-                <a:latin typeface="Times New Roman"/>
-              </a:rPr>
-              <a:t>, </a:t>
-            </a:r>
-            <a:r>
-              <a:rPr sz="700" b="0" i="1">
-                <a:solidFill>
-                  <a:srgbClr val="000000"/>
-                </a:solidFill>
-                <a:latin typeface="Times New Roman"/>
-              </a:rPr>
-              <a:t>τ</a:t>
-            </a:r>
-            <a:r>
-              <a:rPr sz="700" b="0" i="1" baseline="-25000">
-                <a:solidFill>
-                  <a:srgbClr val="000000"/>
-                </a:solidFill>
-                <a:latin typeface="Times New Roman"/>
-              </a:rPr>
-              <a:t>g</a:t>
-            </a:r>
-            <a:r>
-              <a:rPr sz="700" b="0" i="0">
-                <a:solidFill>
-                  <a:srgbClr val="000000"/>
-                </a:solidFill>
-                <a:latin typeface="Times New Roman"/>
-              </a:rPr>
-              <a:t>)</a:t>
-            </a:r>
-          </a:p>
-        </p:txBody>
-      </p:sp>
-      <p:sp>
-        <p:nvSpPr>
-          <p:cNvPr id="11" name="Rounded Rectangle 10"/>
+              <a:t>  dwell indexed safety value</a:t>
+            </a:r>
+          </a:p>
+        </p:txBody>
+      </p:sp>
+      <p:sp>
+        <p:nvSpPr>
+          <p:cNvPr id="17" name="Rounded Rectangle 16"/>
           <p:cNvSpPr/>
           <p:nvPr/>
         </p:nvSpPr>
         <p:spPr>
           <a:xfrm>
-            <a:off x="1847088" y="960120"/>
-            <a:ext cx="886968" cy="347472"/>
+            <a:off x="1408176" y="640080"/>
+            <a:ext cx="420624" cy="237744"/>
           </a:xfrm>
           <a:prstGeom prst="roundRect">
             <a:avLst>
-              <a:gd name="adj" fmla="val 10526"/>
+              <a:gd name="adj" fmla="val 15384"/>
             </a:avLst>
           </a:prstGeom>
           <a:solidFill>
@@ -3946,101 +3944,40 @@
               </a:lnSpc>
             </a:pPr>
             <a:r>
-              <a:rPr sz="700" b="0" i="0">
+              <a:rPr sz="750" b="0" i="1">
                 <a:solidFill>
                   <a:srgbClr val="000000"/>
                 </a:solidFill>
                 <a:latin typeface="Times New Roman"/>
               </a:rPr>
-              <a:t>Protagonist </a:t>
-            </a:r>
-            <a:r>
-              <a:rPr sz="700" b="0" i="1">
+              <a:t>π</a:t>
+            </a:r>
+            <a:r>
+              <a:rPr sz="750" b="0" i="1" baseline="-25000">
                 <a:solidFill>
                   <a:srgbClr val="000000"/>
                 </a:solidFill>
                 <a:latin typeface="Times New Roman"/>
               </a:rPr>
-              <a:t>π</a:t>
-            </a:r>
-            <a:r>
-              <a:rPr sz="700" b="0" i="1" baseline="-25000">
-                <a:solidFill>
-                  <a:srgbClr val="000000"/>
-                </a:solidFill>
-                <a:latin typeface="Times New Roman"/>
-              </a:rPr>
               <a:t>h</a:t>
             </a:r>
           </a:p>
-          <a:p>
-            <a:pPr algn="ctr">
-              <a:lnSpc>
-                <a:spcPct val="105000"/>
-              </a:lnSpc>
-            </a:pPr>
-            <a:r>
-              <a:rPr sz="700" b="0" i="0">
-                <a:solidFill>
-                  <a:srgbClr val="000000"/>
-                </a:solidFill>
-                <a:latin typeface="Times New Roman"/>
-              </a:rPr>
-              <a:t>max over </a:t>
-            </a:r>
-            <a:r>
-              <a:rPr sz="700" b="0" i="1">
-                <a:solidFill>
-                  <a:srgbClr val="000000"/>
-                </a:solidFill>
-                <a:latin typeface="Times New Roman"/>
-              </a:rPr>
-              <a:t>C</a:t>
-            </a:r>
-            <a:r>
-              <a:rPr sz="700" b="0" i="0">
-                <a:solidFill>
-                  <a:srgbClr val="000000"/>
-                </a:solidFill>
-                <a:latin typeface="Times New Roman"/>
-              </a:rPr>
-              <a:t>(</a:t>
-            </a:r>
-            <a:r>
-              <a:rPr sz="700" b="0" i="1">
-                <a:solidFill>
-                  <a:srgbClr val="000000"/>
-                </a:solidFill>
-                <a:latin typeface="Times New Roman"/>
-              </a:rPr>
-              <a:t>ξ</a:t>
-            </a:r>
-            <a:r>
-              <a:rPr sz="700" b="0" i="0">
-                <a:solidFill>
-                  <a:srgbClr val="000000"/>
-                </a:solidFill>
-                <a:latin typeface="Times New Roman"/>
-              </a:rPr>
-              <a:t>)</a:t>
-            </a:r>
-          </a:p>
-        </p:txBody>
-      </p:sp>
-      <p:sp>
-        <p:nvSpPr>
-          <p:cNvPr id="12" name="Rounded Rectangle 11"/>
+        </p:txBody>
+      </p:sp>
+      <p:sp>
+        <p:nvSpPr>
+          <p:cNvPr id="18" name="Rounded Rectangle 17"/>
           <p:cNvSpPr/>
           <p:nvPr/>
         </p:nvSpPr>
         <p:spPr>
           <a:xfrm>
-            <a:off x="2807208" y="960120"/>
-            <a:ext cx="886968" cy="347472"/>
+            <a:off x="1408176" y="950976"/>
+            <a:ext cx="420624" cy="237744"/>
           </a:xfrm>
           <a:prstGeom prst="roundRect">
             <a:avLst>
-              <a:gd name="adj" fmla="val 10526"/>
+              <a:gd name="adj" fmla="val 15384"/>
             </a:avLst>
           </a:prstGeom>
           <a:solidFill>
@@ -4079,65 +4016,31 @@
               </a:lnSpc>
             </a:pPr>
             <a:r>
-              <a:rPr sz="700" b="0" i="0">
+              <a:rPr sz="750" b="0" i="1">
                 <a:solidFill>
                   <a:srgbClr val="000000"/>
                 </a:solidFill>
                 <a:latin typeface="Times New Roman"/>
               </a:rPr>
-              <a:t>Adversary </a:t>
-            </a:r>
-            <a:r>
-              <a:rPr sz="700" b="0" i="1">
-                <a:solidFill>
-                  <a:srgbClr val="000000"/>
-                </a:solidFill>
-                <a:latin typeface="Times New Roman"/>
-              </a:rPr>
               <a:t>μ</a:t>
             </a:r>
           </a:p>
-          <a:p>
-            <a:pPr algn="ctr">
-              <a:lnSpc>
-                <a:spcPct val="105000"/>
-              </a:lnSpc>
-            </a:pPr>
-            <a:r>
-              <a:rPr sz="700" b="0" i="0">
-                <a:solidFill>
-                  <a:srgbClr val="000000"/>
-                </a:solidFill>
-                <a:latin typeface="Times New Roman"/>
-              </a:rPr>
-              <a:t>min over </a:t>
-            </a:r>
-            <a:r>
-              <a:rPr sz="700" b="0" i="0">
-                <a:solidFill>
-                  <a:srgbClr val="000000"/>
-                </a:solidFill>
-                <a:latin typeface="Cambria Math"/>
-              </a:rPr>
-              <a:t>𝒲</a:t>
-            </a:r>
-          </a:p>
-        </p:txBody>
-      </p:sp>
-      <p:sp>
-        <p:nvSpPr>
-          <p:cNvPr id="13" name="Rounded Rectangle 12"/>
+        </p:txBody>
+      </p:sp>
+      <p:sp>
+        <p:nvSpPr>
+          <p:cNvPr id="19" name="Rounded Rectangle 18"/>
           <p:cNvSpPr/>
           <p:nvPr/>
         </p:nvSpPr>
         <p:spPr>
           <a:xfrm>
-            <a:off x="1847088" y="1399032"/>
-            <a:ext cx="1847088" cy="347472"/>
+            <a:off x="2194560" y="731520"/>
+            <a:ext cx="475488" cy="365760"/>
           </a:xfrm>
           <a:prstGeom prst="roundRect">
             <a:avLst>
-              <a:gd name="adj" fmla="val 10526"/>
+              <a:gd name="adj" fmla="val 10000"/>
             </a:avLst>
           </a:prstGeom>
           <a:solidFill>
@@ -4176,60 +4079,119 @@
               </a:lnSpc>
             </a:pPr>
             <a:r>
-              <a:rPr sz="700" b="0" i="0">
+              <a:rPr sz="750" b="0" i="1">
                 <a:solidFill>
                   <a:srgbClr val="000000"/>
                 </a:solidFill>
                 <a:latin typeface="Times New Roman"/>
               </a:rPr>
-              <a:t>Twin safety critics </a:t>
-            </a:r>
-            <a:r>
-              <a:rPr sz="700" b="0" i="1">
+              <a:t>Q</a:t>
+            </a:r>
+            <a:r>
+              <a:rPr sz="750" b="0" i="1" baseline="-25000">
                 <a:solidFill>
                   <a:srgbClr val="000000"/>
                 </a:solidFill>
                 <a:latin typeface="Times New Roman"/>
               </a:rPr>
-              <a:t>Q</a:t>
-            </a:r>
-            <a:r>
-              <a:rPr sz="700" b="0" i="1" baseline="-25000">
-                <a:solidFill>
-                  <a:srgbClr val="000000"/>
-                </a:solidFill>
-                <a:latin typeface="Times New Roman"/>
-              </a:rPr>
-              <a:t>h,1</a:t>
-            </a:r>
-            <a:r>
-              <a:rPr sz="700" b="0" i="0">
-                <a:solidFill>
-                  <a:srgbClr val="000000"/>
-                </a:solidFill>
-                <a:latin typeface="Times New Roman"/>
-              </a:rPr>
-              <a:t>, </a:t>
-            </a:r>
-            <a:r>
-              <a:rPr sz="700" b="0" i="1">
-                <a:solidFill>
-                  <a:srgbClr val="000000"/>
-                </a:solidFill>
-                <a:latin typeface="Times New Roman"/>
-              </a:rPr>
-              <a:t>Q</a:t>
-            </a:r>
-            <a:r>
-              <a:rPr sz="700" b="0" i="1" baseline="-25000">
-                <a:solidFill>
-                  <a:srgbClr val="000000"/>
-                </a:solidFill>
-                <a:latin typeface="Times New Roman"/>
-              </a:rPr>
-              <a:t>h,2</a:t>
-            </a:r>
-          </a:p>
+              <a:t>h</a:t>
+            </a:r>
+          </a:p>
+        </p:txBody>
+      </p:sp>
+      <p:cxnSp>
+        <p:nvCxnSpPr>
+          <p:cNvPr id="20" name="Connector 19"/>
+          <p:cNvCxnSpPr/>
+          <p:nvPr/>
+        </p:nvCxnSpPr>
+        <p:spPr>
+          <a:xfrm>
+            <a:off x="1828800" y="758952"/>
+            <a:ext cx="365760" cy="91440"/>
+          </a:xfrm>
+          <a:prstGeom prst="line">
+            <a:avLst/>
+          </a:prstGeom>
+          <a:ln w="11430">
+            <a:solidFill>
+              <a:srgbClr val="A65E1A"/>
+            </a:solidFill>
+            <a:tailEnd type="triangle" w="sm" len="sm"/>
+          </a:ln>
+        </p:spPr>
+        <p:style>
+          <a:lnRef idx="2">
+            <a:schemeClr val="accent1"/>
+          </a:lnRef>
+          <a:fillRef idx="0">
+            <a:schemeClr val="accent1"/>
+          </a:fillRef>
+          <a:effectRef idx="1">
+            <a:schemeClr val="accent1"/>
+          </a:effectRef>
+          <a:fontRef idx="minor">
+            <a:schemeClr val="tx1"/>
+          </a:fontRef>
+        </p:style>
+      </p:cxnSp>
+      <p:cxnSp>
+        <p:nvCxnSpPr>
+          <p:cNvPr id="21" name="Connector 20"/>
+          <p:cNvCxnSpPr/>
+          <p:nvPr/>
+        </p:nvCxnSpPr>
+        <p:spPr>
+          <a:xfrm flipV="1">
+            <a:off x="1828800" y="978408"/>
+            <a:ext cx="365760" cy="91440"/>
+          </a:xfrm>
+          <a:prstGeom prst="line">
+            <a:avLst/>
+          </a:prstGeom>
+          <a:ln w="11430">
+            <a:solidFill>
+              <a:srgbClr val="A65E1A"/>
+            </a:solidFill>
+            <a:tailEnd type="triangle" w="sm" len="sm"/>
+          </a:ln>
+        </p:spPr>
+        <p:style>
+          <a:lnRef idx="2">
+            <a:schemeClr val="accent1"/>
+          </a:lnRef>
+          <a:fillRef idx="0">
+            <a:schemeClr val="accent1"/>
+          </a:fillRef>
+          <a:effectRef idx="1">
+            <a:schemeClr val="accent1"/>
+          </a:effectRef>
+          <a:fontRef idx="minor">
+            <a:schemeClr val="tx1"/>
+          </a:fontRef>
+        </p:style>
+      </p:cxnSp>
+      <p:sp>
+        <p:nvSpPr>
+          <p:cNvPr id="22" name="TextBox 21"/>
+          <p:cNvSpPr txBox="1"/>
+          <p:nvPr/>
+        </p:nvSpPr>
+        <p:spPr>
+          <a:xfrm>
+            <a:off x="1847088" y="612648"/>
+            <a:ext cx="329184" cy="128016"/>
+          </a:xfrm>
+          <a:prstGeom prst="rect">
+            <a:avLst/>
+          </a:prstGeom>
+          <a:noFill/>
+        </p:spPr>
+        <p:txBody>
+          <a:bodyPr wrap="none" lIns="0" rIns="0" tIns="0" bIns="0" anchor="ctr">
+            <a:noAutofit/>
+          </a:bodyPr>
+          <a:lstStyle/>
           <a:p>
             <a:pPr algn="ctr">
               <a:lnSpc>
@@ -4237,27 +4199,66 @@
               </a:lnSpc>
             </a:pPr>
             <a:r>
-              <a:rPr sz="700" b="0" i="0">
-                <a:solidFill>
-                  <a:srgbClr val="000000"/>
+              <a:rPr sz="620" b="0" i="0">
+                <a:solidFill>
+                  <a:srgbClr val="6B6B6B"/>
                 </a:solidFill>
                 <a:latin typeface="Times New Roman"/>
               </a:rPr>
-              <a:t>one step discounted backup, masked</a:t>
-            </a:r>
-          </a:p>
-        </p:txBody>
-      </p:sp>
-      <p:sp>
-        <p:nvSpPr>
-          <p:cNvPr id="14" name="Oval 13"/>
+              <a:t>max</a:t>
+            </a:r>
+          </a:p>
+        </p:txBody>
+      </p:sp>
+      <p:sp>
+        <p:nvSpPr>
+          <p:cNvPr id="23" name="TextBox 22"/>
+          <p:cNvSpPr txBox="1"/>
+          <p:nvPr/>
+        </p:nvSpPr>
+        <p:spPr>
+          <a:xfrm>
+            <a:off x="1847088" y="1097280"/>
+            <a:ext cx="329184" cy="128016"/>
+          </a:xfrm>
+          <a:prstGeom prst="rect">
+            <a:avLst/>
+          </a:prstGeom>
+          <a:noFill/>
+        </p:spPr>
+        <p:txBody>
+          <a:bodyPr wrap="none" lIns="0" rIns="0" tIns="0" bIns="0" anchor="ctr">
+            <a:noAutofit/>
+          </a:bodyPr>
+          <a:lstStyle/>
+          <a:p>
+            <a:pPr algn="ctr">
+              <a:lnSpc>
+                <a:spcPct val="105000"/>
+              </a:lnSpc>
+            </a:pPr>
+            <a:r>
+              <a:rPr sz="620" b="0" i="0">
+                <a:solidFill>
+                  <a:srgbClr val="6B6B6B"/>
+                </a:solidFill>
+                <a:latin typeface="Times New Roman"/>
+              </a:rPr>
+              <a:t>min</a:t>
+            </a:r>
+          </a:p>
+        </p:txBody>
+      </p:sp>
+      <p:sp>
+        <p:nvSpPr>
+          <p:cNvPr id="24" name="Oval 23"/>
           <p:cNvSpPr/>
           <p:nvPr/>
         </p:nvSpPr>
         <p:spPr>
           <a:xfrm>
-            <a:off x="1874519" y="1865376"/>
-            <a:ext cx="676656" cy="310896"/>
+            <a:off x="2916936" y="658368"/>
+            <a:ext cx="786384" cy="438912"/>
           </a:xfrm>
           <a:prstGeom prst="ellipse">
             <a:avLst/>
@@ -4298,14 +4299,14 @@
       </p:sp>
       <p:sp>
         <p:nvSpPr>
-          <p:cNvPr id="15" name="Oval 14"/>
+          <p:cNvPr id="25" name="Oval 24"/>
           <p:cNvSpPr/>
           <p:nvPr/>
         </p:nvSpPr>
         <p:spPr>
           <a:xfrm>
-            <a:off x="1984248" y="1915667"/>
-            <a:ext cx="457200" cy="210312"/>
+            <a:off x="3044952" y="731520"/>
+            <a:ext cx="530352" cy="292608"/>
           </a:xfrm>
           <a:prstGeom prst="ellipse">
             <a:avLst/>
@@ -4346,14 +4347,14 @@
       </p:sp>
       <p:sp>
         <p:nvSpPr>
-          <p:cNvPr id="16" name="Oval 15"/>
+          <p:cNvPr id="26" name="Oval 25"/>
           <p:cNvSpPr/>
           <p:nvPr/>
         </p:nvSpPr>
         <p:spPr>
           <a:xfrm>
-            <a:off x="2093976" y="1965960"/>
-            <a:ext cx="237744" cy="109728"/>
+            <a:off x="3172968" y="800100"/>
+            <a:ext cx="274320" cy="155448"/>
           </a:xfrm>
           <a:prstGeom prst="ellipse">
             <a:avLst/>
@@ -4394,14 +4395,14 @@
       </p:sp>
       <p:sp>
         <p:nvSpPr>
-          <p:cNvPr id="17" name="TextBox 16"/>
+          <p:cNvPr id="27" name="TextBox 26"/>
           <p:cNvSpPr txBox="1"/>
           <p:nvPr/>
         </p:nvSpPr>
         <p:spPr>
           <a:xfrm>
-            <a:off x="2441448" y="1962467"/>
-            <a:ext cx="109728" cy="116713"/>
+            <a:off x="2916936" y="484632"/>
+            <a:ext cx="786384" cy="128016"/>
           </a:xfrm>
           <a:prstGeom prst="rect">
             <a:avLst/>
@@ -4420,27 +4421,81 @@
               </a:lnSpc>
             </a:pPr>
             <a:r>
-              <a:rPr sz="620" b="0" i="0">
+              <a:rPr sz="650" b="0" i="0">
                 <a:solidFill>
                   <a:srgbClr val="A65E1A"/>
                 </a:solidFill>
+                <a:latin typeface="Cambria Math"/>
+              </a:rPr>
+              <a:t>𝒮</a:t>
+            </a:r>
+            <a:r>
+              <a:rPr sz="650" b="0" i="0">
+                <a:solidFill>
+                  <a:srgbClr val="A65E1A"/>
+                </a:solidFill>
                 <a:latin typeface="Times New Roman"/>
               </a:rPr>
-              <a:t>0</a:t>
-            </a:r>
-          </a:p>
-        </p:txBody>
-      </p:sp>
-      <p:sp>
-        <p:nvSpPr>
-          <p:cNvPr id="18" name="TextBox 17"/>
+              <a:t>(</a:t>
+            </a:r>
+            <a:r>
+              <a:rPr sz="650" b="0" i="1">
+                <a:solidFill>
+                  <a:srgbClr val="A65E1A"/>
+                </a:solidFill>
+                <a:latin typeface="Times New Roman"/>
+              </a:rPr>
+              <a:t>g</a:t>
+            </a:r>
+            <a:r>
+              <a:rPr sz="650" b="0" i="0">
+                <a:solidFill>
+                  <a:srgbClr val="A65E1A"/>
+                </a:solidFill>
+                <a:latin typeface="Times New Roman"/>
+              </a:rPr>
+              <a:t>, </a:t>
+            </a:r>
+            <a:r>
+              <a:rPr sz="650" b="0" i="1">
+                <a:solidFill>
+                  <a:srgbClr val="A65E1A"/>
+                </a:solidFill>
+                <a:latin typeface="Times New Roman"/>
+              </a:rPr>
+              <a:t>τ</a:t>
+            </a:r>
+            <a:r>
+              <a:rPr sz="650" b="0" i="1" baseline="-25000">
+                <a:solidFill>
+                  <a:srgbClr val="A65E1A"/>
+                </a:solidFill>
+                <a:latin typeface="Times New Roman"/>
+              </a:rPr>
+              <a:t>g</a:t>
+            </a:r>
+            <a:r>
+              <a:rPr sz="650" b="0" i="0">
+                <a:solidFill>
+                  <a:srgbClr val="A65E1A"/>
+                </a:solidFill>
+                <a:latin typeface="Times New Roman"/>
+              </a:rPr>
+              <a:t>)</a:t>
+            </a:r>
+          </a:p>
+        </p:txBody>
+      </p:sp>
+      <p:sp>
+        <p:nvSpPr>
+          <p:cNvPr id="28" name="TextBox 27"/>
           <p:cNvSpPr txBox="1"/>
           <p:nvPr/>
         </p:nvSpPr>
         <p:spPr>
           <a:xfrm>
-            <a:off x="2331720" y="1962467"/>
-            <a:ext cx="109728" cy="116713"/>
+            <a:off x="3593592" y="813816"/>
+            <a:ext cx="91440" cy="128016"/>
           </a:xfrm>
           <a:prstGeom prst="rect">
             <a:avLst/>
@@ -4459,27 +4514,27 @@
               </a:lnSpc>
             </a:pPr>
             <a:r>
-              <a:rPr sz="620" b="0" i="0">
+              <a:rPr sz="600" b="0" i="0">
                 <a:solidFill>
                   <a:srgbClr val="A65E1A"/>
                 </a:solidFill>
                 <a:latin typeface="Times New Roman"/>
               </a:rPr>
-              <a:t>3</a:t>
-            </a:r>
-          </a:p>
-        </p:txBody>
-      </p:sp>
-      <p:sp>
-        <p:nvSpPr>
-          <p:cNvPr id="19" name="TextBox 18"/>
+              <a:t>0</a:t>
+            </a:r>
+          </a:p>
+        </p:txBody>
+      </p:sp>
+      <p:sp>
+        <p:nvSpPr>
+          <p:cNvPr id="29" name="TextBox 28"/>
           <p:cNvSpPr txBox="1"/>
           <p:nvPr/>
         </p:nvSpPr>
         <p:spPr>
           <a:xfrm>
-            <a:off x="2157984" y="1962467"/>
-            <a:ext cx="109728" cy="116713"/>
+            <a:off x="3465576" y="813816"/>
+            <a:ext cx="91440" cy="128016"/>
           </a:xfrm>
           <a:prstGeom prst="rect">
             <a:avLst/>
@@ -4498,27 +4553,27 @@
               </a:lnSpc>
             </a:pPr>
             <a:r>
-              <a:rPr sz="620" b="0" i="0">
-                <a:solidFill>
-                  <a:srgbClr val="FFFFFF"/>
+              <a:rPr sz="600" b="0" i="0">
+                <a:solidFill>
+                  <a:srgbClr val="A65E1A"/>
                 </a:solidFill>
                 <a:latin typeface="Times New Roman"/>
               </a:rPr>
-              <a:t>5</a:t>
-            </a:r>
-          </a:p>
-        </p:txBody>
-      </p:sp>
-      <p:sp>
-        <p:nvSpPr>
-          <p:cNvPr id="20" name="TextBox 19"/>
+              <a:t>3</a:t>
+            </a:r>
+          </a:p>
+        </p:txBody>
+      </p:sp>
+      <p:sp>
+        <p:nvSpPr>
+          <p:cNvPr id="30" name="TextBox 29"/>
           <p:cNvSpPr txBox="1"/>
           <p:nvPr/>
         </p:nvSpPr>
         <p:spPr>
           <a:xfrm>
-            <a:off x="1847088" y="1746789"/>
-            <a:ext cx="731520" cy="118300"/>
+            <a:off x="3264408" y="813816"/>
+            <a:ext cx="91440" cy="128016"/>
           </a:xfrm>
           <a:prstGeom prst="rect">
             <a:avLst/>
@@ -4537,261 +4592,67 @@
               </a:lnSpc>
             </a:pPr>
             <a:r>
-              <a:rPr sz="630" b="0" i="1">
-                <a:solidFill>
-                  <a:srgbClr val="A65E1A"/>
+              <a:rPr sz="600" b="0" i="0">
+                <a:solidFill>
+                  <a:srgbClr val="FFFFFF"/>
                 </a:solidFill>
                 <a:latin typeface="Times New Roman"/>
               </a:rPr>
-              <a:t>τ</a:t>
-            </a:r>
-            <a:r>
-              <a:rPr sz="630" b="0" i="1" baseline="-25000">
-                <a:solidFill>
-                  <a:srgbClr val="A65E1A"/>
-                </a:solidFill>
-                <a:latin typeface="Times New Roman"/>
-              </a:rPr>
-              <a:t>g</a:t>
-            </a:r>
-            <a:r>
-              <a:rPr sz="630" b="0" i="0">
-                <a:solidFill>
-                  <a:srgbClr val="A65E1A"/>
-                </a:solidFill>
-                <a:latin typeface="Times New Roman"/>
-              </a:rPr>
-              <a:t> = 0, 3, 5</a:t>
-            </a:r>
-          </a:p>
-        </p:txBody>
-      </p:sp>
-      <p:sp>
-        <p:nvSpPr>
-          <p:cNvPr id="21" name="TextBox 20"/>
-          <p:cNvSpPr txBox="1"/>
+              <a:t>5</a:t>
+            </a:r>
+          </a:p>
+        </p:txBody>
+      </p:sp>
+      <p:cxnSp>
+        <p:nvCxnSpPr>
+          <p:cNvPr id="31" name="Connector 30"/>
+          <p:cNvCxnSpPr/>
           <p:nvPr/>
-        </p:nvSpPr>
-        <p:spPr>
-          <a:xfrm>
-            <a:off x="2670048" y="1822323"/>
-            <a:ext cx="1005840" cy="342138"/>
-          </a:xfrm>
-          <a:prstGeom prst="rect">
+        </p:nvCxnSpPr>
+        <p:spPr>
+          <a:xfrm>
+            <a:off x="2670048" y="914400"/>
+            <a:ext cx="228600" cy="0"/>
+          </a:xfrm>
+          <a:prstGeom prst="line">
             <a:avLst/>
           </a:prstGeom>
-          <a:noFill/>
-        </p:spPr>
-        <p:txBody>
-          <a:bodyPr wrap="none" lIns="0" rIns="0" tIns="0" bIns="0" anchor="ctr">
-            <a:noAutofit/>
-          </a:bodyPr>
-          <a:lstStyle/>
-          <a:p>
-            <a:pPr algn="r">
-              <a:lnSpc>
-                <a:spcPct val="105000"/>
-              </a:lnSpc>
-            </a:pPr>
-            <a:r>
-              <a:rPr sz="680" b="0" i="0">
-                <a:solidFill>
-                  <a:srgbClr val="000000"/>
-                </a:solidFill>
-                <a:latin typeface="Times New Roman"/>
-              </a:rPr>
-              <a:t>Safe set family</a:t>
-            </a:r>
-          </a:p>
-          <a:p>
-            <a:pPr algn="r">
-              <a:lnSpc>
-                <a:spcPct val="105000"/>
-              </a:lnSpc>
-            </a:pPr>
-            <a:r>
-              <a:rPr sz="680" b="0" i="0">
-                <a:solidFill>
-                  <a:srgbClr val="000000"/>
-                </a:solidFill>
-                <a:latin typeface="Cambria Math"/>
-              </a:rPr>
-              <a:t>𝒮</a:t>
-            </a:r>
-            <a:r>
-              <a:rPr sz="680" b="0" i="0">
-                <a:solidFill>
-                  <a:srgbClr val="000000"/>
-                </a:solidFill>
-                <a:latin typeface="Times New Roman"/>
-              </a:rPr>
-              <a:t>(</a:t>
-            </a:r>
-            <a:r>
-              <a:rPr sz="680" b="0" i="1">
-                <a:solidFill>
-                  <a:srgbClr val="000000"/>
-                </a:solidFill>
-                <a:latin typeface="Times New Roman"/>
-              </a:rPr>
-              <a:t>g</a:t>
-            </a:r>
-            <a:r>
-              <a:rPr sz="680" b="0" i="0">
-                <a:solidFill>
-                  <a:srgbClr val="000000"/>
-                </a:solidFill>
-                <a:latin typeface="Times New Roman"/>
-              </a:rPr>
-              <a:t>, </a:t>
-            </a:r>
-            <a:r>
-              <a:rPr sz="680" b="0" i="1">
-                <a:solidFill>
-                  <a:srgbClr val="000000"/>
-                </a:solidFill>
-                <a:latin typeface="Times New Roman"/>
-              </a:rPr>
-              <a:t>τ</a:t>
-            </a:r>
-            <a:r>
-              <a:rPr sz="680" b="0" i="1" baseline="-25000">
-                <a:solidFill>
-                  <a:srgbClr val="000000"/>
-                </a:solidFill>
-                <a:latin typeface="Times New Roman"/>
-              </a:rPr>
-              <a:t>g</a:t>
-            </a:r>
-            <a:r>
-              <a:rPr sz="680" b="0" i="0">
-                <a:solidFill>
-                  <a:srgbClr val="000000"/>
-                </a:solidFill>
-                <a:latin typeface="Times New Roman"/>
-              </a:rPr>
-              <a:t>), smaller</a:t>
-            </a:r>
-          </a:p>
-          <a:p>
-            <a:pPr algn="r">
-              <a:lnSpc>
-                <a:spcPct val="105000"/>
-              </a:lnSpc>
-            </a:pPr>
-            <a:r>
-              <a:rPr sz="680" b="0" i="0">
-                <a:solidFill>
-                  <a:srgbClr val="000000"/>
-                </a:solidFill>
-                <a:latin typeface="Times New Roman"/>
-              </a:rPr>
-              <a:t>deeper in a lock</a:t>
-            </a:r>
-          </a:p>
-        </p:txBody>
-      </p:sp>
-      <p:sp>
-        <p:nvSpPr>
-          <p:cNvPr id="22" name="Rounded Rectangle 21"/>
-          <p:cNvSpPr/>
-          <p:nvPr/>
-        </p:nvSpPr>
-        <p:spPr>
-          <a:xfrm>
-            <a:off x="4014215" y="301752"/>
-            <a:ext cx="1069848" cy="1920240"/>
-          </a:xfrm>
-          <a:prstGeom prst="roundRect">
-            <a:avLst>
-              <a:gd name="adj" fmla="val 5128"/>
-            </a:avLst>
-          </a:prstGeom>
-          <a:solidFill>
-            <a:srgbClr val="FBEFE3"/>
-          </a:solidFill>
           <a:ln w="11430">
             <a:solidFill>
               <a:srgbClr val="A65E1A"/>
             </a:solidFill>
+            <a:tailEnd type="triangle" w="sm" len="sm"/>
           </a:ln>
-          <a:effectLst/>
         </p:spPr>
         <p:style>
-          <a:lnRef idx="1">
+          <a:lnRef idx="2">
             <a:schemeClr val="accent1"/>
           </a:lnRef>
-          <a:fillRef idx="3">
+          <a:fillRef idx="0">
             <a:schemeClr val="accent1"/>
           </a:fillRef>
-          <a:effectRef idx="2">
+          <a:effectRef idx="1">
             <a:schemeClr val="accent1"/>
           </a:effectRef>
           <a:fontRef idx="minor">
-            <a:schemeClr val="lt1"/>
+            <a:schemeClr val="tx1"/>
           </a:fontRef>
         </p:style>
-        <p:txBody>
-          <a:bodyPr rtlCol="0" anchor="ctr"/>
-          <a:lstStyle/>
-          <a:p>
-            <a:pPr algn="ctr"/>
-          </a:p>
-        </p:txBody>
-      </p:sp>
-      <p:sp>
-        <p:nvSpPr>
-          <p:cNvPr id="23" name="TextBox 22"/>
-          <p:cNvSpPr txBox="1"/>
-          <p:nvPr/>
-        </p:nvSpPr>
-        <p:spPr>
-          <a:xfrm>
-            <a:off x="4014215" y="342011"/>
-            <a:ext cx="1069848" cy="138938"/>
-          </a:xfrm>
-          <a:prstGeom prst="rect">
-            <a:avLst/>
-          </a:prstGeom>
-          <a:noFill/>
-        </p:spPr>
-        <p:txBody>
-          <a:bodyPr wrap="none" lIns="0" rIns="0" tIns="0" bIns="0" anchor="ctr">
-            <a:noAutofit/>
-          </a:bodyPr>
-          <a:lstStyle/>
-          <a:p>
-            <a:pPr algn="ctr">
-              <a:lnSpc>
-                <a:spcPct val="105000"/>
-              </a:lnSpc>
-            </a:pPr>
-            <a:r>
-              <a:rPr sz="760" b="1" i="0">
-                <a:solidFill>
-                  <a:srgbClr val="A65E1A"/>
-                </a:solidFill>
-                <a:latin typeface="Times New Roman"/>
-              </a:rPr>
-              <a:t>Stage 2 offline</a:t>
-            </a:r>
-          </a:p>
-        </p:txBody>
-      </p:sp>
-      <p:sp>
-        <p:nvSpPr>
-          <p:cNvPr id="24" name="Rounded Rectangle 23"/>
+      </p:cxnSp>
+      <p:sp>
+        <p:nvSpPr>
+          <p:cNvPr id="32" name="stage2"/>
           <p:cNvSpPr/>
           <p:nvPr/>
         </p:nvSpPr>
         <p:spPr>
           <a:xfrm>
-            <a:off x="4087368" y="557783"/>
-            <a:ext cx="923544" cy="493776"/>
+            <a:off x="1298448" y="1353312"/>
+            <a:ext cx="2615184" cy="731520"/>
           </a:xfrm>
           <a:prstGeom prst="roundRect">
             <a:avLst>
-              <a:gd name="adj" fmla="val 7407"/>
+              <a:gd name="adj" fmla="val 5000"/>
             </a:avLst>
           </a:prstGeom>
           <a:solidFill>
@@ -4819,6 +4680,102 @@
           </a:fontRef>
         </p:style>
         <p:txBody>
+          <a:bodyPr rtlCol="0" anchor="ctr"/>
+          <a:lstStyle/>
+          <a:p>
+            <a:pPr algn="ctr"/>
+          </a:p>
+        </p:txBody>
+      </p:sp>
+      <p:sp>
+        <p:nvSpPr>
+          <p:cNvPr id="33" name="TextBox 32"/>
+          <p:cNvSpPr txBox="1"/>
+          <p:nvPr/>
+        </p:nvSpPr>
+        <p:spPr>
+          <a:xfrm>
+            <a:off x="1371600" y="1389888"/>
+            <a:ext cx="2377440" cy="164592"/>
+          </a:xfrm>
+          <a:prstGeom prst="rect">
+            <a:avLst/>
+          </a:prstGeom>
+          <a:noFill/>
+        </p:spPr>
+        <p:txBody>
+          <a:bodyPr wrap="none" lIns="0" rIns="0" tIns="0" bIns="0" anchor="ctr">
+            <a:noAutofit/>
+          </a:bodyPr>
+          <a:lstStyle/>
+          <a:p>
+            <a:pPr algn="l">
+              <a:lnSpc>
+                <a:spcPct val="105000"/>
+              </a:lnSpc>
+            </a:pPr>
+            <a:r>
+              <a:rPr sz="700" b="1" i="0">
+                <a:solidFill>
+                  <a:srgbClr val="A65E1A"/>
+                </a:solidFill>
+                <a:latin typeface="Times New Roman"/>
+              </a:rPr>
+              <a:t>Stage 2</a:t>
+            </a:r>
+            <a:r>
+              <a:rPr sz="700" b="0" i="0">
+                <a:solidFill>
+                  <a:srgbClr val="A65E1A"/>
+                </a:solidFill>
+                <a:latin typeface="Times New Roman"/>
+              </a:rPr>
+              <a:t>  task policy</a:t>
+            </a:r>
+          </a:p>
+        </p:txBody>
+      </p:sp>
+      <p:sp>
+        <p:nvSpPr>
+          <p:cNvPr id="34" name="Rounded Rectangle 33"/>
+          <p:cNvSpPr/>
+          <p:nvPr/>
+        </p:nvSpPr>
+        <p:spPr>
+          <a:xfrm>
+            <a:off x="1408176" y="1664208"/>
+            <a:ext cx="786384" cy="292608"/>
+          </a:xfrm>
+          <a:prstGeom prst="roundRect">
+            <a:avLst>
+              <a:gd name="adj" fmla="val 12500"/>
+            </a:avLst>
+          </a:prstGeom>
+          <a:solidFill>
+            <a:srgbClr val="F2F2F2"/>
+          </a:solidFill>
+          <a:ln w="8890">
+            <a:solidFill>
+              <a:srgbClr val="6B6B6B"/>
+            </a:solidFill>
+          </a:ln>
+          <a:effectLst/>
+        </p:spPr>
+        <p:style>
+          <a:lnRef idx="1">
+            <a:schemeClr val="accent1"/>
+          </a:lnRef>
+          <a:fillRef idx="3">
+            <a:schemeClr val="accent1"/>
+          </a:fillRef>
+          <a:effectRef idx="2">
+            <a:schemeClr val="accent1"/>
+          </a:effectRef>
+          <a:fontRef idx="minor">
+            <a:schemeClr val="lt1"/>
+          </a:fontRef>
+        </p:style>
+        <p:txBody>
           <a:bodyPr rtlCol="0" anchor="ctr" wrap="none" lIns="0" rIns="0" tIns="0" bIns="0">
             <a:noAutofit/>
           </a:bodyPr>
@@ -4830,65 +4787,49 @@
               </a:lnSpc>
             </a:pPr>
             <a:r>
+              <a:rPr sz="700" b="0" i="1">
+                <a:solidFill>
+                  <a:srgbClr val="000000"/>
+                </a:solidFill>
+                <a:latin typeface="Times New Roman"/>
+              </a:rPr>
+              <a:t>Q</a:t>
+            </a:r>
+            <a:r>
+              <a:rPr sz="700" b="0" i="1" baseline="-25000">
+                <a:solidFill>
+                  <a:srgbClr val="000000"/>
+                </a:solidFill>
+                <a:latin typeface="Times New Roman"/>
+              </a:rPr>
+              <a:t>h</a:t>
+            </a:r>
+            <a:r>
               <a:rPr sz="700" b="0" i="0">
                 <a:solidFill>
                   <a:srgbClr val="000000"/>
                 </a:solidFill>
                 <a:latin typeface="Times New Roman"/>
               </a:rPr>
-              <a:t>Task policy </a:t>
-            </a:r>
-            <a:r>
-              <a:rPr sz="700" b="0" i="1">
-                <a:solidFill>
-                  <a:srgbClr val="000000"/>
-                </a:solidFill>
-                <a:latin typeface="Times New Roman"/>
-              </a:rPr>
-              <a:t>π</a:t>
-            </a:r>
-            <a:r>
-              <a:rPr sz="700" b="0" i="1" baseline="-25000">
-                <a:solidFill>
-                  <a:srgbClr val="000000"/>
-                </a:solidFill>
-                <a:latin typeface="Times New Roman"/>
-              </a:rPr>
-              <a:t>t</a:t>
-            </a:r>
-          </a:p>
-          <a:p>
-            <a:pPr algn="ctr">
-              <a:lnSpc>
-                <a:spcPct val="105000"/>
-              </a:lnSpc>
-            </a:pPr>
-            <a:r>
-              <a:rPr sz="700" b="0" i="0">
-                <a:solidFill>
-                  <a:srgbClr val="000000"/>
-                </a:solidFill>
-                <a:latin typeface="Times New Roman"/>
-              </a:rPr>
-              <a:t>soft actor critic</a:t>
-            </a:r>
-          </a:p>
-        </p:txBody>
-      </p:sp>
-      <p:sp>
-        <p:nvSpPr>
-          <p:cNvPr id="25" name="Rounded Rectangle 24"/>
+              <a:t> frozen</a:t>
+            </a:r>
+          </a:p>
+        </p:txBody>
+      </p:sp>
+      <p:sp>
+        <p:nvSpPr>
+          <p:cNvPr id="35" name="Rounded Rectangle 34"/>
           <p:cNvSpPr/>
           <p:nvPr/>
         </p:nvSpPr>
         <p:spPr>
           <a:xfrm>
-            <a:off x="4087368" y="1161288"/>
-            <a:ext cx="923544" cy="475488"/>
+            <a:off x="2578608" y="1664208"/>
+            <a:ext cx="512064" cy="292608"/>
           </a:xfrm>
           <a:prstGeom prst="roundRect">
             <a:avLst>
-              <a:gd name="adj" fmla="val 7692"/>
+              <a:gd name="adj" fmla="val 12500"/>
             </a:avLst>
           </a:prstGeom>
           <a:solidFill>
@@ -4927,15 +4868,83 @@
               </a:lnSpc>
             </a:pPr>
             <a:r>
-              <a:rPr sz="700" b="0" i="0">
+              <a:rPr sz="750" b="0" i="1">
                 <a:solidFill>
                   <a:srgbClr val="000000"/>
                 </a:solidFill>
                 <a:latin typeface="Times New Roman"/>
               </a:rPr>
-              <a:t>Lagrangian on</a:t>
-            </a:r>
-          </a:p>
+              <a:t>π</a:t>
+            </a:r>
+            <a:r>
+              <a:rPr sz="750" b="0" i="1" baseline="-25000">
+                <a:solidFill>
+                  <a:srgbClr val="000000"/>
+                </a:solidFill>
+                <a:latin typeface="Times New Roman"/>
+              </a:rPr>
+              <a:t>t</a:t>
+            </a:r>
+          </a:p>
+        </p:txBody>
+      </p:sp>
+      <p:cxnSp>
+        <p:nvCxnSpPr>
+          <p:cNvPr id="36" name="Connector 35"/>
+          <p:cNvCxnSpPr/>
+          <p:nvPr/>
+        </p:nvCxnSpPr>
+        <p:spPr>
+          <a:xfrm>
+            <a:off x="2194560" y="1810512"/>
+            <a:ext cx="384048" cy="0"/>
+          </a:xfrm>
+          <a:prstGeom prst="line">
+            <a:avLst/>
+          </a:prstGeom>
+          <a:ln w="11430">
+            <a:solidFill>
+              <a:srgbClr val="A65E1A"/>
+            </a:solidFill>
+            <a:tailEnd type="triangle" w="sm" len="sm"/>
+          </a:ln>
+        </p:spPr>
+        <p:style>
+          <a:lnRef idx="2">
+            <a:schemeClr val="accent1"/>
+          </a:lnRef>
+          <a:fillRef idx="0">
+            <a:schemeClr val="accent1"/>
+          </a:fillRef>
+          <a:effectRef idx="1">
+            <a:schemeClr val="accent1"/>
+          </a:effectRef>
+          <a:fontRef idx="minor">
+            <a:schemeClr val="tx1"/>
+          </a:fontRef>
+        </p:style>
+      </p:cxnSp>
+      <p:sp>
+        <p:nvSpPr>
+          <p:cNvPr id="37" name="TextBox 36"/>
+          <p:cNvSpPr txBox="1"/>
+          <p:nvPr/>
+        </p:nvSpPr>
+        <p:spPr>
+          <a:xfrm>
+            <a:off x="3145536" y="1627632"/>
+            <a:ext cx="731520" cy="365760"/>
+          </a:xfrm>
+          <a:prstGeom prst="rect">
+            <a:avLst/>
+          </a:prstGeom>
+          <a:noFill/>
+        </p:spPr>
+        <p:txBody>
+          <a:bodyPr wrap="none" lIns="0" rIns="0" tIns="0" bIns="0" anchor="ctr">
+            <a:noAutofit/>
+          </a:bodyPr>
+          <a:lstStyle/>
           <a:p>
             <a:pPr algn="ctr">
               <a:lnSpc>
@@ -4943,101 +4952,15 @@
               </a:lnSpc>
             </a:pPr>
             <a:r>
-              <a:rPr sz="700" b="0" i="1">
+              <a:rPr sz="650" b="0" i="0">
                 <a:solidFill>
                   <a:srgbClr val="000000"/>
                 </a:solidFill>
                 <a:latin typeface="Times New Roman"/>
               </a:rPr>
-              <a:t>q</a:t>
-            </a:r>
-            <a:r>
-              <a:rPr sz="700" b="0" i="0">
-                <a:solidFill>
-                  <a:srgbClr val="000000"/>
-                </a:solidFill>
-                <a:latin typeface="Times New Roman"/>
-              </a:rPr>
-              <a:t> ≥ </a:t>
-            </a:r>
-            <a:r>
-              <a:rPr sz="700" b="0" i="1">
-                <a:solidFill>
-                  <a:srgbClr val="000000"/>
-                </a:solidFill>
-                <a:latin typeface="Times New Roman"/>
-              </a:rPr>
-              <a:t>τ</a:t>
-            </a:r>
-            <a:r>
-              <a:rPr sz="700" b="0" i="0">
-                <a:solidFill>
-                  <a:srgbClr val="000000"/>
-                </a:solidFill>
-                <a:latin typeface="Times New Roman"/>
-              </a:rPr>
-              <a:t>, </a:t>
-            </a:r>
-            <a:r>
-              <a:rPr sz="700" b="0" i="1">
-                <a:solidFill>
-                  <a:srgbClr val="000000"/>
-                </a:solidFill>
-                <a:latin typeface="Times New Roman"/>
-              </a:rPr>
-              <a:t>λ</a:t>
-            </a:r>
-            <a:r>
-              <a:rPr sz="700" b="0" i="0">
-                <a:solidFill>
-                  <a:srgbClr val="000000"/>
-                </a:solidFill>
-                <a:latin typeface="Times New Roman"/>
-              </a:rPr>
-              <a:t> ≥ </a:t>
-            </a:r>
-            <a:r>
-              <a:rPr sz="700" b="0" i="1">
-                <a:solidFill>
-                  <a:srgbClr val="000000"/>
-                </a:solidFill>
-                <a:latin typeface="Times New Roman"/>
-              </a:rPr>
-              <a:t>λ</a:t>
-            </a:r>
-            <a:r>
-              <a:rPr sz="700" b="0" i="0" baseline="-25000">
-                <a:solidFill>
-                  <a:srgbClr val="000000"/>
-                </a:solidFill>
-                <a:latin typeface="Times New Roman"/>
-              </a:rPr>
-              <a:t>min</a:t>
-            </a:r>
-          </a:p>
-        </p:txBody>
-      </p:sp>
-      <p:sp>
-        <p:nvSpPr>
-          <p:cNvPr id="26" name="TextBox 25"/>
-          <p:cNvSpPr txBox="1"/>
-          <p:nvPr/>
-        </p:nvSpPr>
-        <p:spPr>
-          <a:xfrm>
-            <a:off x="4014215" y="1763077"/>
-            <a:ext cx="1069848" cy="332613"/>
-          </a:xfrm>
-          <a:prstGeom prst="rect">
-            <a:avLst/>
-          </a:prstGeom>
-          <a:noFill/>
-        </p:spPr>
-        <p:txBody>
-          <a:bodyPr wrap="none" lIns="0" rIns="0" tIns="0" bIns="0" anchor="ctr">
-            <a:noAutofit/>
-          </a:bodyPr>
-          <a:lstStyle/>
+              <a:t>reward</a:t>
+            </a:r>
+          </a:p>
           <a:p>
             <a:pPr algn="ctr">
               <a:lnSpc>
@@ -5045,24 +4968,211 @@
               </a:lnSpc>
             </a:pPr>
             <a:r>
-              <a:rPr sz="660" b="0" i="0">
-                <a:solidFill>
-                  <a:srgbClr val="6B6B6B"/>
+              <a:rPr sz="650" b="0" i="0">
+                <a:solidFill>
+                  <a:srgbClr val="000000"/>
                 </a:solidFill>
                 <a:latin typeface="Times New Roman"/>
               </a:rPr>
-              <a:t>safety critic </a:t>
-            </a:r>
-            <a:r>
-              <a:rPr sz="660" b="0" i="1">
-                <a:solidFill>
-                  <a:srgbClr val="6B6B6B"/>
+              <a:t>s.t. </a:t>
+            </a:r>
+            <a:r>
+              <a:rPr sz="650" b="0" i="1">
+                <a:solidFill>
+                  <a:srgbClr val="000000"/>
                 </a:solidFill>
                 <a:latin typeface="Times New Roman"/>
               </a:rPr>
               <a:t>q</a:t>
             </a:r>
-          </a:p>
+            <a:r>
+              <a:rPr sz="650" b="0" i="0">
+                <a:solidFill>
+                  <a:srgbClr val="000000"/>
+                </a:solidFill>
+                <a:latin typeface="Times New Roman"/>
+              </a:rPr>
+              <a:t> ≥ </a:t>
+            </a:r>
+            <a:r>
+              <a:rPr sz="650" b="0" i="1">
+                <a:solidFill>
+                  <a:srgbClr val="000000"/>
+                </a:solidFill>
+                <a:latin typeface="Times New Roman"/>
+              </a:rPr>
+              <a:t>τ</a:t>
+            </a:r>
+          </a:p>
+        </p:txBody>
+      </p:sp>
+      <p:cxnSp>
+        <p:nvCxnSpPr>
+          <p:cNvPr id="38" name="Connector 37"/>
+          <p:cNvCxnSpPr/>
+          <p:nvPr/>
+        </p:nvCxnSpPr>
+        <p:spPr>
+          <a:xfrm>
+            <a:off x="1664207" y="1261872"/>
+            <a:ext cx="0" cy="402336"/>
+          </a:xfrm>
+          <a:prstGeom prst="line">
+            <a:avLst/>
+          </a:prstGeom>
+          <a:ln w="11430">
+            <a:solidFill>
+              <a:srgbClr val="A65E1A"/>
+            </a:solidFill>
+            <a:tailEnd type="triangle" w="sm" len="sm"/>
+          </a:ln>
+        </p:spPr>
+        <p:style>
+          <a:lnRef idx="2">
+            <a:schemeClr val="accent1"/>
+          </a:lnRef>
+          <a:fillRef idx="0">
+            <a:schemeClr val="accent1"/>
+          </a:fillRef>
+          <a:effectRef idx="1">
+            <a:schemeClr val="accent1"/>
+          </a:effectRef>
+          <a:fontRef idx="minor">
+            <a:schemeClr val="tx1"/>
+          </a:fontRef>
+        </p:style>
+      </p:cxnSp>
+      <p:cxnSp>
+        <p:nvCxnSpPr>
+          <p:cNvPr id="39" name="Connector 38"/>
+          <p:cNvCxnSpPr/>
+          <p:nvPr/>
+        </p:nvCxnSpPr>
+        <p:spPr>
+          <a:xfrm>
+            <a:off x="1078992" y="813816"/>
+            <a:ext cx="219456" cy="0"/>
+          </a:xfrm>
+          <a:prstGeom prst="line">
+            <a:avLst/>
+          </a:prstGeom>
+          <a:ln w="11430">
+            <a:solidFill>
+              <a:srgbClr val="2E5A87"/>
+            </a:solidFill>
+            <a:headEnd type="triangle" w="sm" len="sm"/>
+            <a:tailEnd type="triangle" w="sm" len="sm"/>
+          </a:ln>
+        </p:spPr>
+        <p:style>
+          <a:lnRef idx="2">
+            <a:schemeClr val="accent1"/>
+          </a:lnRef>
+          <a:fillRef idx="0">
+            <a:schemeClr val="accent1"/>
+          </a:fillRef>
+          <a:effectRef idx="1">
+            <a:schemeClr val="accent1"/>
+          </a:effectRef>
+          <a:fontRef idx="minor">
+            <a:schemeClr val="tx1"/>
+          </a:fontRef>
+        </p:style>
+      </p:cxnSp>
+      <p:cxnSp>
+        <p:nvCxnSpPr>
+          <p:cNvPr id="40" name="Connector 39"/>
+          <p:cNvCxnSpPr/>
+          <p:nvPr/>
+        </p:nvCxnSpPr>
+        <p:spPr>
+          <a:xfrm>
+            <a:off x="1078992" y="1719072"/>
+            <a:ext cx="219456" cy="0"/>
+          </a:xfrm>
+          <a:prstGeom prst="line">
+            <a:avLst/>
+          </a:prstGeom>
+          <a:ln w="11430">
+            <a:solidFill>
+              <a:srgbClr val="2E5A87"/>
+            </a:solidFill>
+            <a:headEnd type="triangle" w="sm" len="sm"/>
+            <a:tailEnd type="triangle" w="sm" len="sm"/>
+          </a:ln>
+        </p:spPr>
+        <p:style>
+          <a:lnRef idx="2">
+            <a:schemeClr val="accent1"/>
+          </a:lnRef>
+          <a:fillRef idx="0">
+            <a:schemeClr val="accent1"/>
+          </a:fillRef>
+          <a:effectRef idx="1">
+            <a:schemeClr val="accent1"/>
+          </a:effectRef>
+          <a:fontRef idx="minor">
+            <a:schemeClr val="tx1"/>
+          </a:fontRef>
+        </p:style>
+      </p:cxnSp>
+      <p:cxnSp>
+        <p:nvCxnSpPr>
+          <p:cNvPr id="41" name="Connector 40"/>
+          <p:cNvCxnSpPr/>
+          <p:nvPr/>
+        </p:nvCxnSpPr>
+        <p:spPr>
+          <a:xfrm>
+            <a:off x="4041648" y="1133856"/>
+            <a:ext cx="402336" cy="0"/>
+          </a:xfrm>
+          <a:prstGeom prst="line">
+            <a:avLst/>
+          </a:prstGeom>
+          <a:ln w="17780">
+            <a:solidFill>
+              <a:srgbClr val="000000"/>
+            </a:solidFill>
+            <a:tailEnd type="triangle" w="sm" len="sm"/>
+          </a:ln>
+        </p:spPr>
+        <p:style>
+          <a:lnRef idx="2">
+            <a:schemeClr val="accent1"/>
+          </a:lnRef>
+          <a:fillRef idx="0">
+            <a:schemeClr val="accent1"/>
+          </a:fillRef>
+          <a:effectRef idx="1">
+            <a:schemeClr val="accent1"/>
+          </a:effectRef>
+          <a:fontRef idx="minor">
+            <a:schemeClr val="tx1"/>
+          </a:fontRef>
+        </p:style>
+      </p:cxnSp>
+      <p:sp>
+        <p:nvSpPr>
+          <p:cNvPr id="42" name="TextBox 41"/>
+          <p:cNvSpPr txBox="1"/>
+          <p:nvPr/>
+        </p:nvSpPr>
+        <p:spPr>
+          <a:xfrm>
+            <a:off x="4023360" y="914400"/>
+            <a:ext cx="438912" cy="146304"/>
+          </a:xfrm>
+          <a:prstGeom prst="rect">
+            <a:avLst/>
+          </a:prstGeom>
+          <a:noFill/>
+        </p:spPr>
+        <p:txBody>
+          <a:bodyPr wrap="none" lIns="0" rIns="0" tIns="0" bIns="0" anchor="ctr">
+            <a:noAutofit/>
+          </a:bodyPr>
+          <a:lstStyle/>
           <a:p>
             <a:pPr algn="ctr">
               <a:lnSpc>
@@ -5070,15 +5180,38 @@
               </a:lnSpc>
             </a:pPr>
             <a:r>
-              <a:rPr sz="660" b="0" i="0">
-                <a:solidFill>
-                  <a:srgbClr val="6B6B6B"/>
+              <a:rPr sz="650" b="0" i="0">
+                <a:solidFill>
+                  <a:srgbClr val="000000"/>
                 </a:solidFill>
                 <a:latin typeface="Times New Roman"/>
               </a:rPr>
-              <a:t>frozen from</a:t>
-            </a:r>
-          </a:p>
+              <a:t>deploy</a:t>
+            </a:r>
+          </a:p>
+        </p:txBody>
+      </p:sp>
+      <p:sp>
+        <p:nvSpPr>
+          <p:cNvPr id="43" name="TextBox 42"/>
+          <p:cNvSpPr txBox="1"/>
+          <p:nvPr/>
+        </p:nvSpPr>
+        <p:spPr>
+          <a:xfrm>
+            <a:off x="4023360" y="1188720"/>
+            <a:ext cx="438912" cy="146304"/>
+          </a:xfrm>
+          <a:prstGeom prst="rect">
+            <a:avLst/>
+          </a:prstGeom>
+          <a:noFill/>
+        </p:spPr>
+        <p:txBody>
+          <a:bodyPr wrap="none" lIns="0" rIns="0" tIns="0" bIns="0" anchor="ctr">
+            <a:noAutofit/>
+          </a:bodyPr>
+          <a:lstStyle/>
           <a:p>
             <a:pPr algn="ctr">
               <a:lnSpc>
@@ -5086,118 +5219,31 @@
               </a:lnSpc>
             </a:pPr>
             <a:r>
-              <a:rPr sz="660" b="0" i="0">
+              <a:rPr sz="650" b="0" i="0">
                 <a:solidFill>
                   <a:srgbClr val="6B6B6B"/>
                 </a:solidFill>
                 <a:latin typeface="Times New Roman"/>
               </a:rPr>
-              <a:t>Stage 1</a:t>
-            </a:r>
-          </a:p>
-        </p:txBody>
-      </p:sp>
-      <p:sp>
-        <p:nvSpPr>
-          <p:cNvPr id="27" name="Rounded Rectangle 26"/>
+              <a:t>frozen</a:t>
+            </a:r>
+          </a:p>
+        </p:txBody>
+      </p:sp>
+      <p:sp>
+        <p:nvSpPr>
+          <p:cNvPr id="44" name="Rounded Rectangle 43"/>
           <p:cNvSpPr/>
           <p:nvPr/>
         </p:nvSpPr>
         <p:spPr>
           <a:xfrm>
-            <a:off x="5321808" y="301752"/>
-            <a:ext cx="1179576" cy="1920240"/>
+            <a:off x="4572000" y="365760"/>
+            <a:ext cx="512064" cy="292608"/>
           </a:xfrm>
           <a:prstGeom prst="roundRect">
             <a:avLst>
-              <a:gd name="adj" fmla="val 4651"/>
-            </a:avLst>
-          </a:prstGeom>
-          <a:solidFill>
-            <a:srgbClr val="E7F3EC"/>
-          </a:solidFill>
-          <a:ln w="11430">
-            <a:solidFill>
-              <a:srgbClr val="2F7D4F"/>
-            </a:solidFill>
-          </a:ln>
-          <a:effectLst/>
-        </p:spPr>
-        <p:style>
-          <a:lnRef idx="1">
-            <a:schemeClr val="accent1"/>
-          </a:lnRef>
-          <a:fillRef idx="3">
-            <a:schemeClr val="accent1"/>
-          </a:fillRef>
-          <a:effectRef idx="2">
-            <a:schemeClr val="accent1"/>
-          </a:effectRef>
-          <a:fontRef idx="minor">
-            <a:schemeClr val="lt1"/>
-          </a:fontRef>
-        </p:style>
-        <p:txBody>
-          <a:bodyPr rtlCol="0" anchor="ctr"/>
-          <a:lstStyle/>
-          <a:p>
-            <a:pPr algn="ctr"/>
-          </a:p>
-        </p:txBody>
-      </p:sp>
-      <p:sp>
-        <p:nvSpPr>
-          <p:cNvPr id="28" name="TextBox 27"/>
-          <p:cNvSpPr txBox="1"/>
-          <p:nvPr/>
-        </p:nvSpPr>
-        <p:spPr>
-          <a:xfrm>
-            <a:off x="5321808" y="342011"/>
-            <a:ext cx="1179576" cy="138938"/>
-          </a:xfrm>
-          <a:prstGeom prst="rect">
-            <a:avLst/>
-          </a:prstGeom>
-          <a:noFill/>
-        </p:spPr>
-        <p:txBody>
-          <a:bodyPr wrap="none" lIns="0" rIns="0" tIns="0" bIns="0" anchor="ctr">
-            <a:noAutofit/>
-          </a:bodyPr>
-          <a:lstStyle/>
-          <a:p>
-            <a:pPr algn="ctr">
-              <a:lnSpc>
-                <a:spcPct val="105000"/>
-              </a:lnSpc>
-            </a:pPr>
-            <a:r>
-              <a:rPr sz="760" b="1" i="0">
-                <a:solidFill>
-                  <a:srgbClr val="2F7D4F"/>
-                </a:solidFill>
-                <a:latin typeface="Times New Roman"/>
-              </a:rPr>
-              <a:t>Onboard, every 0.5 s</a:t>
-            </a:r>
-          </a:p>
-        </p:txBody>
-      </p:sp>
-      <p:sp>
-        <p:nvSpPr>
-          <p:cNvPr id="29" name="Rounded Rectangle 28"/>
-          <p:cNvSpPr/>
-          <p:nvPr/>
-        </p:nvSpPr>
-        <p:spPr>
-          <a:xfrm>
-            <a:off x="5394960" y="539496"/>
-            <a:ext cx="1033272" cy="347471"/>
-          </a:xfrm>
-          <a:prstGeom prst="roundRect">
-            <a:avLst>
-              <a:gd name="adj" fmla="val 10526"/>
+              <a:gd name="adj" fmla="val 12500"/>
             </a:avLst>
           </a:prstGeom>
           <a:solidFill>
@@ -5242,59 +5288,25 @@
                 </a:solidFill>
                 <a:latin typeface="Times New Roman"/>
               </a:rPr>
-              <a:t>EKF state </a:t>
-            </a:r>
-            <a:r>
-              <a:rPr sz="700" b="0" i="1">
-                <a:solidFill>
-                  <a:srgbClr val="000000"/>
-                </a:solidFill>
-                <a:latin typeface="Times New Roman"/>
-              </a:rPr>
-              <a:t>ξ</a:t>
-            </a:r>
-            <a:r>
-              <a:rPr sz="700" b="0" i="1" baseline="-25000">
-                <a:solidFill>
-                  <a:srgbClr val="000000"/>
-                </a:solidFill>
-                <a:latin typeface="Times New Roman"/>
-              </a:rPr>
-              <a:t>k</a:t>
-            </a:r>
-          </a:p>
-          <a:p>
-            <a:pPr algn="ctr">
-              <a:lnSpc>
-                <a:spcPct val="105000"/>
-              </a:lnSpc>
-            </a:pPr>
-            <a:r>
-              <a:rPr sz="700" b="0" i="0">
-                <a:solidFill>
-                  <a:srgbClr val="000000"/>
-                </a:solidFill>
-                <a:latin typeface="Times New Roman"/>
-              </a:rPr>
-              <a:t>at 10 Hz</a:t>
-            </a:r>
-          </a:p>
-        </p:txBody>
-      </p:sp>
-      <p:sp>
-        <p:nvSpPr>
-          <p:cNvPr id="30" name="Rounded Rectangle 29"/>
+              <a:t>EKF</a:t>
+            </a:r>
+          </a:p>
+        </p:txBody>
+      </p:sp>
+      <p:sp>
+        <p:nvSpPr>
+          <p:cNvPr id="45" name="Rounded Rectangle 44"/>
           <p:cNvSpPr/>
           <p:nvPr/>
         </p:nvSpPr>
         <p:spPr>
           <a:xfrm>
-            <a:off x="5394960" y="996696"/>
-            <a:ext cx="1033272" cy="548640"/>
+            <a:off x="5230368" y="365760"/>
+            <a:ext cx="457200" cy="292608"/>
           </a:xfrm>
           <a:prstGeom prst="roundRect">
             <a:avLst>
-              <a:gd name="adj" fmla="val 6666"/>
+              <a:gd name="adj" fmla="val 12500"/>
             </a:avLst>
           </a:prstGeom>
           <a:solidFill>
@@ -5302,7 +5314,7 @@
           </a:solidFill>
           <a:ln w="8890">
             <a:solidFill>
-              <a:srgbClr val="2F7D4F"/>
+              <a:srgbClr val="A65E1A"/>
             </a:solidFill>
           </a:ln>
           <a:effectLst/>
@@ -5333,207 +5345,40 @@
               </a:lnSpc>
             </a:pPr>
             <a:r>
-              <a:rPr sz="700" b="0" i="0">
+              <a:rPr sz="750" b="0" i="1">
                 <a:solidFill>
                   <a:srgbClr val="000000"/>
                 </a:solidFill>
                 <a:latin typeface="Times New Roman"/>
               </a:rPr>
-              <a:t>Shield</a:t>
-            </a:r>
-          </a:p>
-          <a:p>
-            <a:pPr algn="ctr">
-              <a:lnSpc>
-                <a:spcPct val="105000"/>
-              </a:lnSpc>
-            </a:pPr>
-            <a:r>
-              <a:rPr sz="700" b="0" i="0">
+              <a:t>π</a:t>
+            </a:r>
+            <a:r>
+              <a:rPr sz="750" b="0" i="1" baseline="-25000">
                 <a:solidFill>
                   <a:srgbClr val="000000"/>
                 </a:solidFill>
                 <a:latin typeface="Times New Roman"/>
               </a:rPr>
-              <a:t>apply </a:t>
-            </a:r>
-            <a:r>
-              <a:rPr sz="700" b="0" i="1">
-                <a:solidFill>
-                  <a:srgbClr val="000000"/>
-                </a:solidFill>
-                <a:latin typeface="Times New Roman"/>
-              </a:rPr>
-              <a:t>a</a:t>
-            </a:r>
-            <a:r>
-              <a:rPr sz="700" b="0" i="1" baseline="-25000">
-                <a:solidFill>
-                  <a:srgbClr val="000000"/>
-                </a:solidFill>
-                <a:latin typeface="Times New Roman"/>
-              </a:rPr>
               <a:t>t</a:t>
             </a:r>
-            <a:r>
-              <a:rPr sz="700" b="0" i="0">
-                <a:solidFill>
-                  <a:srgbClr val="000000"/>
-                </a:solidFill>
-                <a:latin typeface="Times New Roman"/>
-              </a:rPr>
-              <a:t> if </a:t>
-            </a:r>
-            <a:r>
-              <a:rPr sz="700" b="0" i="1">
-                <a:solidFill>
-                  <a:srgbClr val="000000"/>
-                </a:solidFill>
-                <a:latin typeface="Times New Roman"/>
-              </a:rPr>
-              <a:t>q</a:t>
-            </a:r>
-            <a:r>
-              <a:rPr sz="700" b="0" i="0">
-                <a:solidFill>
-                  <a:srgbClr val="000000"/>
-                </a:solidFill>
-                <a:latin typeface="Times New Roman"/>
-              </a:rPr>
-              <a:t>(</a:t>
-            </a:r>
-            <a:r>
-              <a:rPr sz="700" b="0" i="1">
-                <a:solidFill>
-                  <a:srgbClr val="000000"/>
-                </a:solidFill>
-                <a:latin typeface="Times New Roman"/>
-              </a:rPr>
-              <a:t>ξ</a:t>
-            </a:r>
-            <a:r>
-              <a:rPr sz="700" b="0" i="0">
-                <a:solidFill>
-                  <a:srgbClr val="000000"/>
-                </a:solidFill>
-                <a:latin typeface="Times New Roman"/>
-              </a:rPr>
-              <a:t>, </a:t>
-            </a:r>
-            <a:r>
-              <a:rPr sz="700" b="0" i="1">
-                <a:solidFill>
-                  <a:srgbClr val="000000"/>
-                </a:solidFill>
-                <a:latin typeface="Times New Roman"/>
-              </a:rPr>
-              <a:t>a</a:t>
-            </a:r>
-            <a:r>
-              <a:rPr sz="700" b="0" i="1" baseline="-25000">
-                <a:solidFill>
-                  <a:srgbClr val="000000"/>
-                </a:solidFill>
-                <a:latin typeface="Times New Roman"/>
-              </a:rPr>
-              <a:t>t</a:t>
-            </a:r>
-            <a:r>
-              <a:rPr sz="700" b="0" i="0">
-                <a:solidFill>
-                  <a:srgbClr val="000000"/>
-                </a:solidFill>
-                <a:latin typeface="Times New Roman"/>
-              </a:rPr>
-              <a:t>) ≥ </a:t>
-            </a:r>
-            <a:r>
-              <a:rPr sz="700" b="0" i="1">
-                <a:solidFill>
-                  <a:srgbClr val="000000"/>
-                </a:solidFill>
-                <a:latin typeface="Times New Roman"/>
-              </a:rPr>
-              <a:t>τ</a:t>
-            </a:r>
-          </a:p>
-          <a:p>
-            <a:pPr algn="ctr">
-              <a:lnSpc>
-                <a:spcPct val="105000"/>
-              </a:lnSpc>
-            </a:pPr>
-            <a:r>
-              <a:rPr sz="700" b="0" i="0">
-                <a:solidFill>
-                  <a:srgbClr val="000000"/>
-                </a:solidFill>
-                <a:latin typeface="Times New Roman"/>
-              </a:rPr>
-              <a:t>else apply </a:t>
-            </a:r>
-            <a:r>
-              <a:rPr sz="700" b="0" i="1">
-                <a:solidFill>
-                  <a:srgbClr val="000000"/>
-                </a:solidFill>
-                <a:latin typeface="Times New Roman"/>
-              </a:rPr>
-              <a:t>π</a:t>
-            </a:r>
-            <a:r>
-              <a:rPr sz="700" b="0" i="1" baseline="-25000">
-                <a:solidFill>
-                  <a:srgbClr val="000000"/>
-                </a:solidFill>
-                <a:latin typeface="Times New Roman"/>
-              </a:rPr>
-              <a:t>h</a:t>
-            </a:r>
-            <a:r>
-              <a:rPr sz="700" b="0" i="0">
-                <a:solidFill>
-                  <a:srgbClr val="000000"/>
-                </a:solidFill>
-                <a:latin typeface="Times New Roman"/>
-              </a:rPr>
-              <a:t>(</a:t>
-            </a:r>
-            <a:r>
-              <a:rPr sz="700" b="0" i="1">
-                <a:solidFill>
-                  <a:srgbClr val="000000"/>
-                </a:solidFill>
-                <a:latin typeface="Times New Roman"/>
-              </a:rPr>
-              <a:t>ξ</a:t>
-            </a:r>
-            <a:r>
-              <a:rPr sz="700" b="0" i="0">
-                <a:solidFill>
-                  <a:srgbClr val="000000"/>
-                </a:solidFill>
-                <a:latin typeface="Times New Roman"/>
-              </a:rPr>
-              <a:t>)</a:t>
-            </a:r>
-          </a:p>
-        </p:txBody>
-      </p:sp>
-      <p:sp>
-        <p:nvSpPr>
-          <p:cNvPr id="31" name="Rounded Rectangle 30"/>
+          </a:p>
+        </p:txBody>
+      </p:sp>
+      <p:sp>
+        <p:nvSpPr>
+          <p:cNvPr id="46" name="Rounded Rectangle 45"/>
           <p:cNvSpPr/>
           <p:nvPr/>
         </p:nvSpPr>
         <p:spPr>
           <a:xfrm>
-            <a:off x="5394960" y="1655064"/>
-            <a:ext cx="1033272" cy="475488"/>
+            <a:off x="5815584" y="365760"/>
+            <a:ext cx="585216" cy="420624"/>
           </a:xfrm>
           <a:prstGeom prst="roundRect">
             <a:avLst>
-              <a:gd name="adj" fmla="val 7692"/>
+              <a:gd name="adj" fmla="val 8695"/>
             </a:avLst>
           </a:prstGeom>
           <a:solidFill>
@@ -5541,7 +5386,7 @@
           </a:solidFill>
           <a:ln w="8890">
             <a:solidFill>
-              <a:srgbClr val="2F7D4F"/>
+              <a:srgbClr val="A65E1A"/>
             </a:solidFill>
           </a:ln>
           <a:effectLst/>
@@ -5572,13 +5417,13 @@
               </a:lnSpc>
             </a:pPr>
             <a:r>
-              <a:rPr sz="700" b="0" i="0">
+              <a:rPr sz="680" b="0" i="0">
                 <a:solidFill>
                   <a:srgbClr val="000000"/>
                 </a:solidFill>
                 <a:latin typeface="Times New Roman"/>
               </a:rPr>
-              <a:t>PLC and</a:t>
+              <a:t>Shield</a:t>
             </a:r>
           </a:p>
           <a:p>
@@ -5588,27 +5433,79 @@
               </a:lnSpc>
             </a:pPr>
             <a:r>
-              <a:rPr sz="700" b="0" i="0">
+              <a:rPr sz="680" b="0" i="1">
                 <a:solidFill>
                   <a:srgbClr val="000000"/>
                 </a:solidFill>
                 <a:latin typeface="Times New Roman"/>
               </a:rPr>
-              <a:t>servo cylinders</a:t>
+              <a:t>q</a:t>
+            </a:r>
+            <a:r>
+              <a:rPr sz="680" b="0" i="0">
+                <a:solidFill>
+                  <a:srgbClr val="000000"/>
+                </a:solidFill>
+                <a:latin typeface="Times New Roman"/>
+              </a:rPr>
+              <a:t> ≥ </a:t>
+            </a:r>
+            <a:r>
+              <a:rPr sz="680" b="0" i="1">
+                <a:solidFill>
+                  <a:srgbClr val="000000"/>
+                </a:solidFill>
+                <a:latin typeface="Times New Roman"/>
+              </a:rPr>
+              <a:t>τ</a:t>
+            </a:r>
+          </a:p>
+          <a:p>
+            <a:pPr algn="ctr">
+              <a:lnSpc>
+                <a:spcPct val="105000"/>
+              </a:lnSpc>
+            </a:pPr>
+            <a:r>
+              <a:rPr sz="680" b="0" i="0">
+                <a:solidFill>
+                  <a:srgbClr val="000000"/>
+                </a:solidFill>
+                <a:latin typeface="Times New Roman"/>
+              </a:rPr>
+              <a:t>else </a:t>
+            </a:r>
+            <a:r>
+              <a:rPr sz="680" b="0" i="1">
+                <a:solidFill>
+                  <a:srgbClr val="000000"/>
+                </a:solidFill>
+                <a:latin typeface="Times New Roman"/>
+              </a:rPr>
+              <a:t>π</a:t>
+            </a:r>
+            <a:r>
+              <a:rPr sz="680" b="0" i="1" baseline="-25000">
+                <a:solidFill>
+                  <a:srgbClr val="000000"/>
+                </a:solidFill>
+                <a:latin typeface="Times New Roman"/>
+              </a:rPr>
+              <a:t>h</a:t>
             </a:r>
           </a:p>
         </p:txBody>
       </p:sp>
       <p:cxnSp>
         <p:nvCxnSpPr>
-          <p:cNvPr id="32" name="Connector 31"/>
+          <p:cNvPr id="47" name="Connector 46"/>
           <p:cNvCxnSpPr/>
           <p:nvPr/>
         </p:nvCxnSpPr>
         <p:spPr>
           <a:xfrm>
-            <a:off x="5911596" y="886968"/>
-            <a:ext cx="0" cy="109728"/>
+            <a:off x="5084064" y="512064"/>
+            <a:ext cx="146304" cy="0"/>
           </a:xfrm>
           <a:prstGeom prst="line">
             <a:avLst/>
@@ -5637,14 +5534,14 @@
       </p:cxnSp>
       <p:cxnSp>
         <p:nvCxnSpPr>
-          <p:cNvPr id="33" name="Connector 32"/>
+          <p:cNvPr id="48" name="Connector 47"/>
           <p:cNvCxnSpPr/>
           <p:nvPr/>
         </p:nvCxnSpPr>
         <p:spPr>
           <a:xfrm>
-            <a:off x="5911596" y="1545336"/>
-            <a:ext cx="0" cy="109728"/>
+            <a:off x="5687568" y="512064"/>
+            <a:ext cx="128016" cy="0"/>
           </a:xfrm>
           <a:prstGeom prst="line">
             <a:avLst/>
@@ -5671,277 +5568,64 @@
           </a:fontRef>
         </p:style>
       </p:cxnSp>
-      <p:cxnSp>
-        <p:nvCxnSpPr>
-          <p:cNvPr id="34" name="Connector 33"/>
-          <p:cNvCxnSpPr/>
+      <p:sp>
+        <p:nvSpPr>
+          <p:cNvPr id="49" name="vessel"/>
+          <p:cNvSpPr/>
           <p:nvPr/>
-        </p:nvCxnSpPr>
-        <p:spPr>
-          <a:xfrm>
-            <a:off x="1527048" y="1179576"/>
-            <a:ext cx="237744" cy="0"/>
-          </a:xfrm>
-          <a:prstGeom prst="line">
-            <a:avLst/>
+        </p:nvSpPr>
+        <p:spPr>
+          <a:xfrm>
+            <a:off x="4718304" y="1335024"/>
+            <a:ext cx="1481328" cy="749808"/>
+          </a:xfrm>
+          <a:prstGeom prst="roundRect">
+            <a:avLst>
+              <a:gd name="adj" fmla="val 4878"/>
+            </a:avLst>
           </a:prstGeom>
-          <a:ln w="11430">
+          <a:solidFill>
+            <a:srgbClr val="FFFFFF"/>
+          </a:solidFill>
+          <a:ln w="8890">
             <a:solidFill>
-              <a:srgbClr val="000000"/>
+              <a:srgbClr val="2E5A87"/>
             </a:solidFill>
-            <a:tailEnd type="triangle" w="sm" len="sm"/>
           </a:ln>
+          <a:effectLst/>
         </p:spPr>
         <p:style>
-          <a:lnRef idx="2">
+          <a:lnRef idx="1">
             <a:schemeClr val="accent1"/>
           </a:lnRef>
-          <a:fillRef idx="0">
+          <a:fillRef idx="3">
             <a:schemeClr val="accent1"/>
           </a:fillRef>
-          <a:effectRef idx="1">
+          <a:effectRef idx="2">
             <a:schemeClr val="accent1"/>
           </a:effectRef>
           <a:fontRef idx="minor">
-            <a:schemeClr val="tx1"/>
+            <a:schemeClr val="lt1"/>
           </a:fontRef>
         </p:style>
-      </p:cxnSp>
-      <p:sp>
-        <p:nvSpPr>
-          <p:cNvPr id="35" name="TextBox 34"/>
-          <p:cNvSpPr txBox="1"/>
-          <p:nvPr/>
-        </p:nvSpPr>
-        <p:spPr>
-          <a:xfrm>
-            <a:off x="1463040" y="999966"/>
-            <a:ext cx="365760" cy="121475"/>
-          </a:xfrm>
-          <a:prstGeom prst="rect">
-            <a:avLst/>
-          </a:prstGeom>
-          <a:noFill/>
-        </p:spPr>
-        <p:txBody>
-          <a:bodyPr wrap="none" lIns="0" rIns="0" tIns="0" bIns="0" anchor="ctr">
-            <a:noAutofit/>
-          </a:bodyPr>
-          <a:lstStyle/>
-          <a:p>
-            <a:pPr algn="ctr">
-              <a:lnSpc>
-                <a:spcPct val="105000"/>
-              </a:lnSpc>
-            </a:pPr>
-            <a:r>
-              <a:rPr sz="650" b="0" i="0">
-                <a:solidFill>
-                  <a:srgbClr val="000000"/>
-                </a:solidFill>
-                <a:latin typeface="Times New Roman"/>
-              </a:rPr>
-              <a:t>model</a:t>
-            </a:r>
-          </a:p>
-        </p:txBody>
-      </p:sp>
-      <p:cxnSp>
-        <p:nvCxnSpPr>
-          <p:cNvPr id="36" name="Connector 35"/>
-          <p:cNvCxnSpPr/>
-          <p:nvPr/>
-        </p:nvCxnSpPr>
-        <p:spPr>
-          <a:xfrm>
-            <a:off x="3776472" y="1179576"/>
-            <a:ext cx="237743" cy="0"/>
-          </a:xfrm>
-          <a:prstGeom prst="line">
-            <a:avLst/>
-          </a:prstGeom>
-          <a:ln w="11430">
-            <a:solidFill>
-              <a:srgbClr val="000000"/>
-            </a:solidFill>
-            <a:tailEnd type="triangle" w="sm" len="sm"/>
-          </a:ln>
-        </p:spPr>
-        <p:style>
-          <a:lnRef idx="2">
-            <a:schemeClr val="accent1"/>
-          </a:lnRef>
-          <a:fillRef idx="0">
-            <a:schemeClr val="accent1"/>
-          </a:fillRef>
-          <a:effectRef idx="1">
-            <a:schemeClr val="accent1"/>
-          </a:effectRef>
-          <a:fontRef idx="minor">
-            <a:schemeClr val="tx1"/>
-          </a:fontRef>
-        </p:style>
-      </p:cxnSp>
-      <p:sp>
-        <p:nvSpPr>
-          <p:cNvPr id="37" name="TextBox 36"/>
-          <p:cNvSpPr txBox="1"/>
-          <p:nvPr/>
-        </p:nvSpPr>
-        <p:spPr>
-          <a:xfrm>
-            <a:off x="3712463" y="999966"/>
-            <a:ext cx="365760" cy="121475"/>
-          </a:xfrm>
-          <a:prstGeom prst="rect">
-            <a:avLst/>
-          </a:prstGeom>
-          <a:noFill/>
-        </p:spPr>
-        <p:txBody>
-          <a:bodyPr wrap="none" lIns="0" rIns="0" tIns="0" bIns="0" anchor="ctr">
-            <a:noAutofit/>
-          </a:bodyPr>
-          <a:lstStyle/>
-          <a:p>
-            <a:pPr algn="ctr">
-              <a:lnSpc>
-                <a:spcPct val="105000"/>
-              </a:lnSpc>
-            </a:pPr>
-            <a:r>
-              <a:rPr sz="650" b="0" i="1">
-                <a:solidFill>
-                  <a:srgbClr val="000000"/>
-                </a:solidFill>
-                <a:latin typeface="Times New Roman"/>
-              </a:rPr>
-              <a:t>q</a:t>
-            </a:r>
-            <a:r>
-              <a:rPr sz="650" b="0" i="0">
-                <a:solidFill>
-                  <a:srgbClr val="000000"/>
-                </a:solidFill>
-                <a:latin typeface="Times New Roman"/>
-              </a:rPr>
-              <a:t>, </a:t>
-            </a:r>
-            <a:r>
-              <a:rPr sz="650" b="0" i="1">
-                <a:solidFill>
-                  <a:srgbClr val="000000"/>
-                </a:solidFill>
-                <a:latin typeface="Times New Roman"/>
-              </a:rPr>
-              <a:t>π</a:t>
-            </a:r>
-            <a:r>
-              <a:rPr sz="650" b="0" i="1" baseline="-25000">
-                <a:solidFill>
-                  <a:srgbClr val="000000"/>
-                </a:solidFill>
-                <a:latin typeface="Times New Roman"/>
-              </a:rPr>
-              <a:t>h</a:t>
-            </a:r>
-          </a:p>
-        </p:txBody>
-      </p:sp>
-      <p:cxnSp>
-        <p:nvCxnSpPr>
-          <p:cNvPr id="38" name="Connector 37"/>
-          <p:cNvCxnSpPr/>
-          <p:nvPr/>
-        </p:nvCxnSpPr>
-        <p:spPr>
-          <a:xfrm>
-            <a:off x="5084064" y="1179576"/>
-            <a:ext cx="237744" cy="0"/>
-          </a:xfrm>
-          <a:prstGeom prst="line">
-            <a:avLst/>
-          </a:prstGeom>
-          <a:ln w="11430">
-            <a:solidFill>
-              <a:srgbClr val="000000"/>
-            </a:solidFill>
-            <a:tailEnd type="triangle" w="sm" len="sm"/>
-          </a:ln>
-        </p:spPr>
-        <p:style>
-          <a:lnRef idx="2">
-            <a:schemeClr val="accent1"/>
-          </a:lnRef>
-          <a:fillRef idx="0">
-            <a:schemeClr val="accent1"/>
-          </a:fillRef>
-          <a:effectRef idx="1">
-            <a:schemeClr val="accent1"/>
-          </a:effectRef>
-          <a:fontRef idx="minor">
-            <a:schemeClr val="tx1"/>
-          </a:fontRef>
-        </p:style>
-      </p:cxnSp>
-      <p:sp>
-        <p:nvSpPr>
-          <p:cNvPr id="39" name="TextBox 38"/>
-          <p:cNvSpPr txBox="1"/>
-          <p:nvPr/>
-        </p:nvSpPr>
-        <p:spPr>
-          <a:xfrm>
-            <a:off x="5020055" y="999966"/>
-            <a:ext cx="365760" cy="121475"/>
-          </a:xfrm>
-          <a:prstGeom prst="rect">
-            <a:avLst/>
-          </a:prstGeom>
-          <a:noFill/>
-        </p:spPr>
-        <p:txBody>
-          <a:bodyPr wrap="none" lIns="0" rIns="0" tIns="0" bIns="0" anchor="ctr">
-            <a:noAutofit/>
-          </a:bodyPr>
-          <a:lstStyle/>
-          <a:p>
-            <a:pPr algn="ctr">
-              <a:lnSpc>
-                <a:spcPct val="105000"/>
-              </a:lnSpc>
-            </a:pPr>
-            <a:r>
-              <a:rPr sz="650" b="0" i="1">
-                <a:solidFill>
-                  <a:srgbClr val="000000"/>
-                </a:solidFill>
-                <a:latin typeface="Times New Roman"/>
-              </a:rPr>
-              <a:t>π</a:t>
-            </a:r>
-            <a:r>
-              <a:rPr sz="650" b="0" i="1" baseline="-25000">
-                <a:solidFill>
-                  <a:srgbClr val="000000"/>
-                </a:solidFill>
-                <a:latin typeface="Times New Roman"/>
-              </a:rPr>
-              <a:t>t</a:t>
-            </a:r>
-          </a:p>
-        </p:txBody>
-      </p:sp>
-      <p:sp>
-        <p:nvSpPr>
-          <p:cNvPr id="40" name="Freeform 39"/>
+        <p:txBody>
+          <a:bodyPr rtlCol="0" anchor="ctr"/>
+          <a:lstStyle/>
+          <a:p>
+            <a:pPr algn="ctr"/>
+          </a:p>
+        </p:txBody>
+      </p:sp>
+      <p:sp>
+        <p:nvSpPr>
+          <p:cNvPr id="50" name="boat_hull"/>
           <p:cNvSpPr/>
           <p:nvPr/>
         </p:nvSpPr>
         <p:spPr>
           <a:xfrm>
-            <a:off x="3273552" y="155447"/>
-            <a:ext cx="2402128" cy="146305"/>
+            <a:off x="5102352" y="1481328"/>
+            <a:ext cx="786384" cy="274320"/>
           </a:xfrm>
           <a:custGeom>
             <a:avLst/>
@@ -5950,18 +5634,298 @@
             <a:cxnLst/>
             <a:rect l="l" t="t" r="r" b="b"/>
             <a:pathLst>
-              <a:path w="2402128" h="146305">
+              <a:path w="786384" h="274320">
                 <a:moveTo>
-                  <a:pt x="0" y="146305"/>
+                  <a:pt x="0" y="32918"/>
                 </a:moveTo>
                 <a:lnTo>
-                  <a:pt x="0" y="0"/>
+                  <a:pt x="487558" y="0"/>
                 </a:lnTo>
                 <a:lnTo>
-                  <a:pt x="2402128" y="0"/>
+                  <a:pt x="676290" y="32918"/>
                 </a:lnTo>
                 <a:lnTo>
-                  <a:pt x="2402128" y="146305"/>
+                  <a:pt x="786384" y="137159"/>
+                </a:lnTo>
+                <a:lnTo>
+                  <a:pt x="676290" y="241401"/>
+                </a:lnTo>
+                <a:lnTo>
+                  <a:pt x="487558" y="274320"/>
+                </a:lnTo>
+                <a:lnTo>
+                  <a:pt x="0" y="241401"/>
+                </a:lnTo>
+                <a:close/>
+              </a:path>
+            </a:pathLst>
+          </a:custGeom>
+          <a:solidFill>
+            <a:srgbClr val="2E5A87"/>
+          </a:solidFill>
+          <a:ln>
+            <a:noFill/>
+          </a:ln>
+          <a:effectLst/>
+        </p:spPr>
+        <p:style>
+          <a:lnRef idx="1">
+            <a:schemeClr val="accent1"/>
+          </a:lnRef>
+          <a:fillRef idx="3">
+            <a:schemeClr val="accent1"/>
+          </a:fillRef>
+          <a:effectRef idx="2">
+            <a:schemeClr val="accent1"/>
+          </a:effectRef>
+          <a:fontRef idx="minor">
+            <a:schemeClr val="lt1"/>
+          </a:fontRef>
+        </p:style>
+        <p:txBody>
+          <a:bodyPr rtlCol="0" anchor="ctr"/>
+          <a:lstStyle/>
+          <a:p>
+            <a:pPr algn="ctr"/>
+          </a:p>
+        </p:txBody>
+      </p:sp>
+      <p:sp>
+        <p:nvSpPr>
+          <p:cNvPr id="51" name="boat_sterndrive"/>
+          <p:cNvSpPr/>
+          <p:nvPr/>
+        </p:nvSpPr>
+        <p:spPr>
+          <a:xfrm>
+            <a:off x="5047305" y="1585569"/>
+            <a:ext cx="55047" cy="65837"/>
+          </a:xfrm>
+          <a:custGeom>
+            <a:avLst/>
+            <a:gdLst/>
+            <a:ahLst/>
+            <a:cxnLst/>
+            <a:rect l="l" t="t" r="r" b="b"/>
+            <a:pathLst>
+              <a:path w="55047" h="65837">
+                <a:moveTo>
+                  <a:pt x="0" y="0"/>
+                </a:moveTo>
+                <a:lnTo>
+                  <a:pt x="55047" y="0"/>
+                </a:lnTo>
+                <a:lnTo>
+                  <a:pt x="55047" y="65837"/>
+                </a:lnTo>
+                <a:lnTo>
+                  <a:pt x="0" y="65837"/>
+                </a:lnTo>
+                <a:close/>
+              </a:path>
+            </a:pathLst>
+          </a:custGeom>
+          <a:solidFill>
+            <a:srgbClr val="1B3A5C"/>
+          </a:solidFill>
+          <a:ln>
+            <a:noFill/>
+          </a:ln>
+          <a:effectLst/>
+        </p:spPr>
+        <p:style>
+          <a:lnRef idx="1">
+            <a:schemeClr val="accent1"/>
+          </a:lnRef>
+          <a:fillRef idx="3">
+            <a:schemeClr val="accent1"/>
+          </a:fillRef>
+          <a:effectRef idx="2">
+            <a:schemeClr val="accent1"/>
+          </a:effectRef>
+          <a:fontRef idx="minor">
+            <a:schemeClr val="lt1"/>
+          </a:fontRef>
+        </p:style>
+        <p:txBody>
+          <a:bodyPr rtlCol="0" anchor="ctr"/>
+          <a:lstStyle/>
+          <a:p>
+            <a:pPr algn="ctr"/>
+          </a:p>
+        </p:txBody>
+      </p:sp>
+      <p:cxnSp>
+        <p:nvCxnSpPr>
+          <p:cNvPr id="52" name="Connector 51"/>
+          <p:cNvCxnSpPr/>
+          <p:nvPr/>
+        </p:nvCxnSpPr>
+        <p:spPr>
+          <a:xfrm>
+            <a:off x="4809744" y="1408176"/>
+            <a:ext cx="164592" cy="0"/>
+          </a:xfrm>
+          <a:prstGeom prst="line">
+            <a:avLst/>
+          </a:prstGeom>
+          <a:ln w="10160">
+            <a:solidFill>
+              <a:srgbClr val="8A8A8A"/>
+            </a:solidFill>
+            <a:tailEnd type="triangle" w="sm" len="sm"/>
+          </a:ln>
+        </p:spPr>
+        <p:style>
+          <a:lnRef idx="2">
+            <a:schemeClr val="accent1"/>
+          </a:lnRef>
+          <a:fillRef idx="0">
+            <a:schemeClr val="accent1"/>
+          </a:fillRef>
+          <a:effectRef idx="1">
+            <a:schemeClr val="accent1"/>
+          </a:effectRef>
+          <a:fontRef idx="minor">
+            <a:schemeClr val="tx1"/>
+          </a:fontRef>
+        </p:style>
+      </p:cxnSp>
+      <p:cxnSp>
+        <p:nvCxnSpPr>
+          <p:cNvPr id="53" name="Connector 52"/>
+          <p:cNvCxnSpPr/>
+          <p:nvPr/>
+        </p:nvCxnSpPr>
+        <p:spPr>
+          <a:xfrm>
+            <a:off x="4809744" y="1472184"/>
+            <a:ext cx="164592" cy="0"/>
+          </a:xfrm>
+          <a:prstGeom prst="line">
+            <a:avLst/>
+          </a:prstGeom>
+          <a:ln w="10160">
+            <a:solidFill>
+              <a:srgbClr val="8A8A8A"/>
+            </a:solidFill>
+            <a:tailEnd type="triangle" w="sm" len="sm"/>
+          </a:ln>
+        </p:spPr>
+        <p:style>
+          <a:lnRef idx="2">
+            <a:schemeClr val="accent1"/>
+          </a:lnRef>
+          <a:fillRef idx="0">
+            <a:schemeClr val="accent1"/>
+          </a:fillRef>
+          <a:effectRef idx="1">
+            <a:schemeClr val="accent1"/>
+          </a:effectRef>
+          <a:fontRef idx="minor">
+            <a:schemeClr val="tx1"/>
+          </a:fontRef>
+        </p:style>
+      </p:cxnSp>
+      <p:cxnSp>
+        <p:nvCxnSpPr>
+          <p:cNvPr id="54" name="Connector 53"/>
+          <p:cNvCxnSpPr/>
+          <p:nvPr/>
+        </p:nvCxnSpPr>
+        <p:spPr>
+          <a:xfrm>
+            <a:off x="4809744" y="1536192"/>
+            <a:ext cx="164592" cy="0"/>
+          </a:xfrm>
+          <a:prstGeom prst="line">
+            <a:avLst/>
+          </a:prstGeom>
+          <a:ln w="10160">
+            <a:solidFill>
+              <a:srgbClr val="8A8A8A"/>
+            </a:solidFill>
+            <a:tailEnd type="triangle" w="sm" len="sm"/>
+          </a:ln>
+        </p:spPr>
+        <p:style>
+          <a:lnRef idx="2">
+            <a:schemeClr val="accent1"/>
+          </a:lnRef>
+          <a:fillRef idx="0">
+            <a:schemeClr val="accent1"/>
+          </a:fillRef>
+          <a:effectRef idx="1">
+            <a:schemeClr val="accent1"/>
+          </a:effectRef>
+          <a:fontRef idx="minor">
+            <a:schemeClr val="tx1"/>
+          </a:fontRef>
+        </p:style>
+      </p:cxnSp>
+      <p:sp>
+        <p:nvSpPr>
+          <p:cNvPr id="55" name="TextBox 54"/>
+          <p:cNvSpPr txBox="1"/>
+          <p:nvPr/>
+        </p:nvSpPr>
+        <p:spPr>
+          <a:xfrm>
+            <a:off x="4718304" y="1810512"/>
+            <a:ext cx="1481328" cy="219456"/>
+          </a:xfrm>
+          <a:prstGeom prst="rect">
+            <a:avLst/>
+          </a:prstGeom>
+          <a:noFill/>
+        </p:spPr>
+        <p:txBody>
+          <a:bodyPr wrap="none" lIns="0" rIns="0" tIns="0" bIns="0" anchor="ctr">
+            <a:noAutofit/>
+          </a:bodyPr>
+          <a:lstStyle/>
+          <a:p>
+            <a:pPr algn="ctr">
+              <a:lnSpc>
+                <a:spcPct val="105000"/>
+              </a:lnSpc>
+            </a:pPr>
+            <a:r>
+              <a:rPr sz="650" b="0" i="0">
+                <a:solidFill>
+                  <a:srgbClr val="000000"/>
+                </a:solidFill>
+                <a:latin typeface="Times New Roman"/>
+              </a:rPr>
+              <a:t>Vessel, PLC, servo cylinders</a:t>
+            </a:r>
+          </a:p>
+        </p:txBody>
+      </p:sp>
+      <p:sp>
+        <p:nvSpPr>
+          <p:cNvPr id="56" name="Freeform 55"/>
+          <p:cNvSpPr/>
+          <p:nvPr/>
+        </p:nvSpPr>
+        <p:spPr>
+          <a:xfrm>
+            <a:off x="6108192" y="786384"/>
+            <a:ext cx="0" cy="548640"/>
+          </a:xfrm>
+          <a:custGeom>
+            <a:avLst/>
+            <a:gdLst/>
+            <a:ahLst/>
+            <a:cxnLst/>
+            <a:rect l="l" t="t" r="r" b="b"/>
+            <a:pathLst>
+              <a:path w="0" h="548640">
+                <a:moveTo>
+                  <a:pt x="0" y="0"/>
+                </a:moveTo>
+                <a:lnTo>
+                  <a:pt x="0" y="548640"/>
                 </a:lnTo>
               </a:path>
             </a:pathLst>
@@ -5969,7 +5933,7 @@
           <a:noFill/>
           <a:ln w="11430">
             <a:solidFill>
-              <a:srgbClr val="000000"/>
+              <a:srgbClr val="2F7D4F"/>
             </a:solidFill>
             <a:tailEnd type="triangle" w="sm" len="sm"/>
           </a:ln>
@@ -5999,14 +5963,14 @@
       </p:sp>
       <p:sp>
         <p:nvSpPr>
-          <p:cNvPr id="41" name="TextBox 40"/>
+          <p:cNvPr id="57" name="TextBox 56"/>
           <p:cNvSpPr txBox="1"/>
           <p:nvPr/>
         </p:nvSpPr>
         <p:spPr>
           <a:xfrm>
-            <a:off x="3377336" y="12414"/>
-            <a:ext cx="2194560" cy="121475"/>
+            <a:off x="6144768" y="1024128"/>
+            <a:ext cx="365760" cy="219456"/>
           </a:xfrm>
           <a:prstGeom prst="rect">
             <a:avLst/>
@@ -6019,87 +5983,51 @@
           </a:bodyPr>
           <a:lstStyle/>
           <a:p>
-            <a:pPr algn="ctr">
+            <a:pPr algn="l">
               <a:lnSpc>
                 <a:spcPct val="105000"/>
               </a:lnSpc>
             </a:pPr>
             <a:r>
-              <a:rPr sz="650" b="0" i="0">
+              <a:rPr sz="680" b="0" i="1">
                 <a:solidFill>
                   <a:srgbClr val="000000"/>
                 </a:solidFill>
                 <a:latin typeface="Times New Roman"/>
               </a:rPr>
-              <a:t>certified </a:t>
-            </a:r>
-            <a:r>
-              <a:rPr sz="650" b="0" i="1">
+              <a:t>g</a:t>
+            </a:r>
+            <a:r>
+              <a:rPr sz="680" b="0" i="0">
                 <a:solidFill>
                   <a:srgbClr val="000000"/>
                 </a:solidFill>
                 <a:latin typeface="Times New Roman"/>
               </a:rPr>
-              <a:t>q</a:t>
-            </a:r>
-            <a:r>
-              <a:rPr sz="650" b="0" i="0">
+              <a:t>, </a:t>
+            </a:r>
+            <a:r>
+              <a:rPr sz="680" b="0" i="1">
                 <a:solidFill>
                   <a:srgbClr val="000000"/>
                 </a:solidFill>
                 <a:latin typeface="Times New Roman"/>
               </a:rPr>
-              <a:t>, </a:t>
-            </a:r>
-            <a:r>
-              <a:rPr sz="650" b="0" i="1">
-                <a:solidFill>
-                  <a:srgbClr val="000000"/>
-                </a:solidFill>
-                <a:latin typeface="Times New Roman"/>
-              </a:rPr>
-              <a:t>π</a:t>
-            </a:r>
-            <a:r>
-              <a:rPr sz="650" b="0" i="1" baseline="-25000">
-                <a:solidFill>
-                  <a:srgbClr val="000000"/>
-                </a:solidFill>
-                <a:latin typeface="Times New Roman"/>
-              </a:rPr>
-              <a:t>h</a:t>
-            </a:r>
-            <a:r>
-              <a:rPr sz="650" b="0" i="0">
-                <a:solidFill>
-                  <a:srgbClr val="000000"/>
-                </a:solidFill>
-                <a:latin typeface="Times New Roman"/>
-              </a:rPr>
-              <a:t>, and margin </a:t>
-            </a:r>
-            <a:r>
-              <a:rPr sz="650" b="0" i="1">
-                <a:solidFill>
-                  <a:srgbClr val="000000"/>
-                </a:solidFill>
-                <a:latin typeface="Times New Roman"/>
-              </a:rPr>
-              <a:t>τ</a:t>
-            </a:r>
-          </a:p>
-        </p:txBody>
-      </p:sp>
-      <p:sp>
-        <p:nvSpPr>
-          <p:cNvPr id="42" name="Freeform 41"/>
+              <a:t>δ</a:t>
+            </a:r>
+          </a:p>
+        </p:txBody>
+      </p:sp>
+      <p:sp>
+        <p:nvSpPr>
+          <p:cNvPr id="58" name="Freeform 57"/>
           <p:cNvSpPr/>
           <p:nvPr/>
         </p:nvSpPr>
         <p:spPr>
           <a:xfrm>
-            <a:off x="923544" y="2221992"/>
-            <a:ext cx="4988052" cy="137160"/>
+            <a:off x="4828032" y="658368"/>
+            <a:ext cx="0" cy="676656"/>
           </a:xfrm>
           <a:custGeom>
             <a:avLst/>
@@ -6108,16 +6036,10 @@
             <a:cxnLst/>
             <a:rect l="l" t="t" r="r" b="b"/>
             <a:pathLst>
-              <a:path w="4988052" h="137160">
+              <a:path w="0" h="676656">
                 <a:moveTo>
-                  <a:pt x="4988052" y="0"/>
+                  <a:pt x="0" y="676656"/>
                 </a:moveTo>
-                <a:lnTo>
-                  <a:pt x="4988052" y="137160"/>
-                </a:lnTo>
-                <a:lnTo>
-                  <a:pt x="0" y="137160"/>
-                </a:lnTo>
                 <a:lnTo>
                   <a:pt x="0" y="0"/>
                 </a:lnTo>
@@ -6157,14 +6079,69 @@
       </p:sp>
       <p:sp>
         <p:nvSpPr>
-          <p:cNvPr id="43" name="TextBox 42"/>
+          <p:cNvPr id="59" name="TextBox 58"/>
           <p:cNvSpPr txBox="1"/>
           <p:nvPr/>
         </p:nvSpPr>
         <p:spPr>
           <a:xfrm>
-            <a:off x="1977390" y="2225262"/>
-            <a:ext cx="2743200" cy="121475"/>
+            <a:off x="4462272" y="914400"/>
+            <a:ext cx="347472" cy="310896"/>
+          </a:xfrm>
+          <a:prstGeom prst="rect">
+            <a:avLst/>
+          </a:prstGeom>
+          <a:noFill/>
+        </p:spPr>
+        <p:txBody>
+          <a:bodyPr wrap="none" lIns="0" rIns="0" tIns="0" bIns="0" anchor="ctr">
+            <a:noAutofit/>
+          </a:bodyPr>
+          <a:lstStyle/>
+          <a:p>
+            <a:pPr algn="r">
+              <a:lnSpc>
+                <a:spcPct val="105000"/>
+              </a:lnSpc>
+            </a:pPr>
+            <a:r>
+              <a:rPr sz="630" b="0" i="0">
+                <a:solidFill>
+                  <a:srgbClr val="6B6B6B"/>
+                </a:solidFill>
+                <a:latin typeface="Times New Roman"/>
+              </a:rPr>
+              <a:t>GNSS</a:t>
+            </a:r>
+          </a:p>
+          <a:p>
+            <a:pPr algn="r">
+              <a:lnSpc>
+                <a:spcPct val="105000"/>
+              </a:lnSpc>
+            </a:pPr>
+            <a:r>
+              <a:rPr sz="630" b="0" i="0">
+                <a:solidFill>
+                  <a:srgbClr val="6B6B6B"/>
+                </a:solidFill>
+                <a:latin typeface="Times New Roman"/>
+              </a:rPr>
+              <a:t>IMU</a:t>
+            </a:r>
+          </a:p>
+        </p:txBody>
+      </p:sp>
+      <p:sp>
+        <p:nvSpPr>
+          <p:cNvPr id="60" name="TextBox 59"/>
+          <p:cNvSpPr txBox="1"/>
+          <p:nvPr/>
+        </p:nvSpPr>
+        <p:spPr>
+          <a:xfrm>
+            <a:off x="5010912" y="1005840"/>
+            <a:ext cx="1005840" cy="146304"/>
           </a:xfrm>
           <a:prstGeom prst="rect">
             <a:avLst/>
@@ -6183,117 +6160,13 @@
               </a:lnSpc>
             </a:pPr>
             <a:r>
-              <a:rPr sz="650" b="0" i="0">
+              <a:rPr sz="630" b="0" i="0">
                 <a:solidFill>
                   <a:srgbClr val="2F7D4F"/>
                 </a:solidFill>
                 <a:latin typeface="Times New Roman"/>
               </a:rPr>
-              <a:t>gear and steering commands to the vessel</a:t>
-            </a:r>
-          </a:p>
-        </p:txBody>
-      </p:sp>
-      <p:sp>
-        <p:nvSpPr>
-          <p:cNvPr id="44" name="Freeform 43"/>
-          <p:cNvSpPr/>
-          <p:nvPr/>
-        </p:nvSpPr>
-        <p:spPr>
-          <a:xfrm>
-            <a:off x="649224" y="2221992"/>
-            <a:ext cx="5490972" cy="283464"/>
-          </a:xfrm>
-          <a:custGeom>
-            <a:avLst/>
-            <a:gdLst/>
-            <a:ahLst/>
-            <a:cxnLst/>
-            <a:rect l="l" t="t" r="r" b="b"/>
-            <a:pathLst>
-              <a:path w="5490972" h="283464">
-                <a:moveTo>
-                  <a:pt x="0" y="0"/>
-                </a:moveTo>
-                <a:lnTo>
-                  <a:pt x="0" y="283464"/>
-                </a:lnTo>
-                <a:lnTo>
-                  <a:pt x="5490972" y="283464"/>
-                </a:lnTo>
-                <a:lnTo>
-                  <a:pt x="5490972" y="0"/>
-                </a:lnTo>
-              </a:path>
-            </a:pathLst>
-          </a:custGeom>
-          <a:noFill/>
-          <a:ln w="11430">
-            <a:solidFill>
-              <a:srgbClr val="2E5A87"/>
-            </a:solidFill>
-            <a:tailEnd type="triangle" w="sm" len="sm"/>
-          </a:ln>
-          <a:effectLst/>
-        </p:spPr>
-        <p:style>
-          <a:lnRef idx="1">
-            <a:schemeClr val="accent1"/>
-          </a:lnRef>
-          <a:fillRef idx="3">
-            <a:schemeClr val="accent1"/>
-          </a:fillRef>
-          <a:effectRef idx="2">
-            <a:schemeClr val="accent1"/>
-          </a:effectRef>
-          <a:fontRef idx="minor">
-            <a:schemeClr val="lt1"/>
-          </a:fontRef>
-        </p:style>
-        <p:txBody>
-          <a:bodyPr rtlCol="0" anchor="ctr"/>
-          <a:lstStyle/>
-          <a:p>
-            <a:pPr algn="ctr"/>
-          </a:p>
-        </p:txBody>
-      </p:sp>
-      <p:sp>
-        <p:nvSpPr>
-          <p:cNvPr id="45" name="TextBox 44"/>
-          <p:cNvSpPr txBox="1"/>
-          <p:nvPr/>
-        </p:nvSpPr>
-        <p:spPr>
-          <a:xfrm>
-            <a:off x="1977390" y="2513298"/>
-            <a:ext cx="2743200" cy="121475"/>
-          </a:xfrm>
-          <a:prstGeom prst="rect">
-            <a:avLst/>
-          </a:prstGeom>
-          <a:noFill/>
-        </p:spPr>
-        <p:txBody>
-          <a:bodyPr wrap="none" lIns="0" rIns="0" tIns="0" bIns="0" anchor="ctr">
-            <a:noAutofit/>
-          </a:bodyPr>
-          <a:lstStyle/>
-          <a:p>
-            <a:pPr algn="ctr">
-              <a:lnSpc>
-                <a:spcPct val="105000"/>
-              </a:lnSpc>
-            </a:pPr>
-            <a:r>
-              <a:rPr sz="650" b="0" i="0">
-                <a:solidFill>
-                  <a:srgbClr val="2E5A87"/>
-                </a:solidFill>
-                <a:latin typeface="Times New Roman"/>
-              </a:rPr>
-              <a:t>GNSS and IMU measurements</a:t>
+              <a:t>every 0.5 s</a:t>
             </a:r>
           </a:p>
         </p:txBody>

--- a/figures/ppt/fig1_framework.pptx
+++ b/figures/ppt/fig1_framework.pptx
@@ -3501,6 +3501,7 @@
             </a:solidFill>
             <a:tailEnd type="triangle" w="sm" len="sm"/>
           </a:ln>
+          <a:effectLst/>
         </p:spPr>
         <p:style>
           <a:lnRef idx="2">
@@ -3537,6 +3538,7 @@
             </a:solidFill>
             <a:tailEnd type="triangle" w="sm" len="sm"/>
           </a:ln>
+          <a:effectLst/>
         </p:spPr>
         <p:style>
           <a:lnRef idx="2">
@@ -3573,6 +3575,7 @@
             </a:solidFill>
             <a:tailEnd type="triangle" w="sm" len="sm"/>
           </a:ln>
+          <a:effectLst/>
         </p:spPr>
         <p:style>
           <a:lnRef idx="2">
@@ -4212,6 +4215,7 @@
                 <a:srgbClr val="E3B48A"/>
               </a:solidFill>
             </a:ln>
+            <a:effectLst/>
           </p:spPr>
           <p:style>
             <a:lnRef idx="2">
@@ -4247,6 +4251,7 @@
                 <a:srgbClr val="E3B48A"/>
               </a:solidFill>
             </a:ln>
+            <a:effectLst/>
           </p:spPr>
           <p:style>
             <a:lnRef idx="2">
@@ -4282,6 +4287,7 @@
                 <a:srgbClr val="E3B48A"/>
               </a:solidFill>
             </a:ln>
+            <a:effectLst/>
           </p:spPr>
           <p:style>
             <a:lnRef idx="2">
@@ -4317,6 +4323,7 @@
                 <a:srgbClr val="E3B48A"/>
               </a:solidFill>
             </a:ln>
+            <a:effectLst/>
           </p:spPr>
           <p:style>
             <a:lnRef idx="2">
@@ -4352,6 +4359,7 @@
                 <a:srgbClr val="E3B48A"/>
               </a:solidFill>
             </a:ln>
+            <a:effectLst/>
           </p:spPr>
           <p:style>
             <a:lnRef idx="2">
@@ -4387,6 +4395,7 @@
                 <a:srgbClr val="E3B48A"/>
               </a:solidFill>
             </a:ln>
+            <a:effectLst/>
           </p:spPr>
           <p:style>
             <a:lnRef idx="2">
@@ -4422,6 +4431,7 @@
                 <a:srgbClr val="E3B48A"/>
               </a:solidFill>
             </a:ln>
+            <a:effectLst/>
           </p:spPr>
           <p:style>
             <a:lnRef idx="2">
@@ -4457,6 +4467,7 @@
                 <a:srgbClr val="E3B48A"/>
               </a:solidFill>
             </a:ln>
+            <a:effectLst/>
           </p:spPr>
           <p:style>
             <a:lnRef idx="2">
@@ -4492,6 +4503,7 @@
                 <a:srgbClr val="E3B48A"/>
               </a:solidFill>
             </a:ln>
+            <a:effectLst/>
           </p:spPr>
           <p:style>
             <a:lnRef idx="2">
@@ -4527,6 +4539,7 @@
                 <a:srgbClr val="E3B48A"/>
               </a:solidFill>
             </a:ln>
+            <a:effectLst/>
           </p:spPr>
           <p:style>
             <a:lnRef idx="2">
@@ -4562,6 +4575,7 @@
                 <a:srgbClr val="E3B48A"/>
               </a:solidFill>
             </a:ln>
+            <a:effectLst/>
           </p:spPr>
           <p:style>
             <a:lnRef idx="2">
@@ -4597,6 +4611,7 @@
                 <a:srgbClr val="E3B48A"/>
               </a:solidFill>
             </a:ln>
+            <a:effectLst/>
           </p:spPr>
           <p:style>
             <a:lnRef idx="2">
@@ -4632,6 +4647,7 @@
                 <a:srgbClr val="E3B48A"/>
               </a:solidFill>
             </a:ln>
+            <a:effectLst/>
           </p:spPr>
           <p:style>
             <a:lnRef idx="2">
@@ -4667,6 +4683,7 @@
                 <a:srgbClr val="E3B48A"/>
               </a:solidFill>
             </a:ln>
+            <a:effectLst/>
           </p:spPr>
           <p:style>
             <a:lnRef idx="2">
@@ -4702,6 +4719,7 @@
                 <a:srgbClr val="E3B48A"/>
               </a:solidFill>
             </a:ln>
+            <a:effectLst/>
           </p:spPr>
           <p:style>
             <a:lnRef idx="2">
@@ -4737,6 +4755,7 @@
                 <a:srgbClr val="E3B48A"/>
               </a:solidFill>
             </a:ln>
+            <a:effectLst/>
           </p:spPr>
           <p:style>
             <a:lnRef idx="2">
@@ -4772,6 +4791,7 @@
                 <a:srgbClr val="E3B48A"/>
               </a:solidFill>
             </a:ln>
+            <a:effectLst/>
           </p:spPr>
           <p:style>
             <a:lnRef idx="2">
@@ -4807,6 +4827,7 @@
                 <a:srgbClr val="E3B48A"/>
               </a:solidFill>
             </a:ln>
+            <a:effectLst/>
           </p:spPr>
           <p:style>
             <a:lnRef idx="2">
@@ -4842,6 +4863,7 @@
                 <a:srgbClr val="E3B48A"/>
               </a:solidFill>
             </a:ln>
+            <a:effectLst/>
           </p:spPr>
           <p:style>
             <a:lnRef idx="2">
@@ -4877,6 +4899,7 @@
                 <a:srgbClr val="E3B48A"/>
               </a:solidFill>
             </a:ln>
+            <a:effectLst/>
           </p:spPr>
           <p:style>
             <a:lnRef idx="2">
@@ -4912,6 +4935,7 @@
                 <a:srgbClr val="E3B48A"/>
               </a:solidFill>
             </a:ln>
+            <a:effectLst/>
           </p:spPr>
           <p:style>
             <a:lnRef idx="2">
@@ -4947,6 +4971,7 @@
                 <a:srgbClr val="E3B48A"/>
               </a:solidFill>
             </a:ln>
+            <a:effectLst/>
           </p:spPr>
           <p:style>
             <a:lnRef idx="2">
@@ -4982,6 +5007,7 @@
                 <a:srgbClr val="E3B48A"/>
               </a:solidFill>
             </a:ln>
+            <a:effectLst/>
           </p:spPr>
           <p:style>
             <a:lnRef idx="2">
@@ -5017,6 +5043,7 @@
                 <a:srgbClr val="E3B48A"/>
               </a:solidFill>
             </a:ln>
+            <a:effectLst/>
           </p:spPr>
           <p:style>
             <a:lnRef idx="2">
@@ -5555,6 +5582,7 @@
                 <a:srgbClr val="E3B48A"/>
               </a:solidFill>
             </a:ln>
+            <a:effectLst/>
           </p:spPr>
           <p:style>
             <a:lnRef idx="2">
@@ -5590,6 +5618,7 @@
                 <a:srgbClr val="E3B48A"/>
               </a:solidFill>
             </a:ln>
+            <a:effectLst/>
           </p:spPr>
           <p:style>
             <a:lnRef idx="2">
@@ -5625,6 +5654,7 @@
                 <a:srgbClr val="E3B48A"/>
               </a:solidFill>
             </a:ln>
+            <a:effectLst/>
           </p:spPr>
           <p:style>
             <a:lnRef idx="2">
@@ -5660,6 +5690,7 @@
                 <a:srgbClr val="E3B48A"/>
               </a:solidFill>
             </a:ln>
+            <a:effectLst/>
           </p:spPr>
           <p:style>
             <a:lnRef idx="2">
@@ -5695,6 +5726,7 @@
                 <a:srgbClr val="E3B48A"/>
               </a:solidFill>
             </a:ln>
+            <a:effectLst/>
           </p:spPr>
           <p:style>
             <a:lnRef idx="2">
@@ -5730,6 +5762,7 @@
                 <a:srgbClr val="E3B48A"/>
               </a:solidFill>
             </a:ln>
+            <a:effectLst/>
           </p:spPr>
           <p:style>
             <a:lnRef idx="2">
@@ -5765,6 +5798,7 @@
                 <a:srgbClr val="E3B48A"/>
               </a:solidFill>
             </a:ln>
+            <a:effectLst/>
           </p:spPr>
           <p:style>
             <a:lnRef idx="2">
@@ -5800,6 +5834,7 @@
                 <a:srgbClr val="E3B48A"/>
               </a:solidFill>
             </a:ln>
+            <a:effectLst/>
           </p:spPr>
           <p:style>
             <a:lnRef idx="2">
@@ -5835,6 +5870,7 @@
                 <a:srgbClr val="E3B48A"/>
               </a:solidFill>
             </a:ln>
+            <a:effectLst/>
           </p:spPr>
           <p:style>
             <a:lnRef idx="2">
@@ -5870,6 +5906,7 @@
                 <a:srgbClr val="E3B48A"/>
               </a:solidFill>
             </a:ln>
+            <a:effectLst/>
           </p:spPr>
           <p:style>
             <a:lnRef idx="2">
@@ -5905,6 +5942,7 @@
                 <a:srgbClr val="E3B48A"/>
               </a:solidFill>
             </a:ln>
+            <a:effectLst/>
           </p:spPr>
           <p:style>
             <a:lnRef idx="2">
@@ -5940,6 +5978,7 @@
                 <a:srgbClr val="E3B48A"/>
               </a:solidFill>
             </a:ln>
+            <a:effectLst/>
           </p:spPr>
           <p:style>
             <a:lnRef idx="2">
@@ -5975,6 +6014,7 @@
                 <a:srgbClr val="E3B48A"/>
               </a:solidFill>
             </a:ln>
+            <a:effectLst/>
           </p:spPr>
           <p:style>
             <a:lnRef idx="2">
@@ -6010,6 +6050,7 @@
                 <a:srgbClr val="E3B48A"/>
               </a:solidFill>
             </a:ln>
+            <a:effectLst/>
           </p:spPr>
           <p:style>
             <a:lnRef idx="2">
@@ -6045,6 +6086,7 @@
                 <a:srgbClr val="E3B48A"/>
               </a:solidFill>
             </a:ln>
+            <a:effectLst/>
           </p:spPr>
           <p:style>
             <a:lnRef idx="2">
@@ -6080,6 +6122,7 @@
                 <a:srgbClr val="E3B48A"/>
               </a:solidFill>
             </a:ln>
+            <a:effectLst/>
           </p:spPr>
           <p:style>
             <a:lnRef idx="2">
@@ -6115,6 +6158,7 @@
                 <a:srgbClr val="E3B48A"/>
               </a:solidFill>
             </a:ln>
+            <a:effectLst/>
           </p:spPr>
           <p:style>
             <a:lnRef idx="2">
@@ -6150,6 +6194,7 @@
                 <a:srgbClr val="E3B48A"/>
               </a:solidFill>
             </a:ln>
+            <a:effectLst/>
           </p:spPr>
           <p:style>
             <a:lnRef idx="2">
@@ -6185,6 +6230,7 @@
                 <a:srgbClr val="E3B48A"/>
               </a:solidFill>
             </a:ln>
+            <a:effectLst/>
           </p:spPr>
           <p:style>
             <a:lnRef idx="2">
@@ -6220,6 +6266,7 @@
                 <a:srgbClr val="E3B48A"/>
               </a:solidFill>
             </a:ln>
+            <a:effectLst/>
           </p:spPr>
           <p:style>
             <a:lnRef idx="2">
@@ -6255,6 +6302,7 @@
                 <a:srgbClr val="E3B48A"/>
               </a:solidFill>
             </a:ln>
+            <a:effectLst/>
           </p:spPr>
           <p:style>
             <a:lnRef idx="2">
@@ -6290,6 +6338,7 @@
                 <a:srgbClr val="E3B48A"/>
               </a:solidFill>
             </a:ln>
+            <a:effectLst/>
           </p:spPr>
           <p:style>
             <a:lnRef idx="2">
@@ -6325,6 +6374,7 @@
                 <a:srgbClr val="E3B48A"/>
               </a:solidFill>
             </a:ln>
+            <a:effectLst/>
           </p:spPr>
           <p:style>
             <a:lnRef idx="2">
@@ -6360,6 +6410,7 @@
                 <a:srgbClr val="E3B48A"/>
               </a:solidFill>
             </a:ln>
+            <a:effectLst/>
           </p:spPr>
           <p:style>
             <a:lnRef idx="2">
@@ -6912,6 +6963,7 @@
             </a:solidFill>
             <a:tailEnd type="triangle" w="sm" len="sm"/>
           </a:ln>
+          <a:effectLst/>
         </p:spPr>
         <p:style>
           <a:lnRef idx="2">
@@ -7009,6 +7061,7 @@
                 <a:srgbClr val="E3B48A"/>
               </a:solidFill>
             </a:ln>
+            <a:effectLst/>
           </p:spPr>
           <p:style>
             <a:lnRef idx="2">
@@ -7044,6 +7097,7 @@
                 <a:srgbClr val="E3B48A"/>
               </a:solidFill>
             </a:ln>
+            <a:effectLst/>
           </p:spPr>
           <p:style>
             <a:lnRef idx="2">
@@ -7079,6 +7133,7 @@
                 <a:srgbClr val="E3B48A"/>
               </a:solidFill>
             </a:ln>
+            <a:effectLst/>
           </p:spPr>
           <p:style>
             <a:lnRef idx="2">
@@ -7114,6 +7169,7 @@
                 <a:srgbClr val="E3B48A"/>
               </a:solidFill>
             </a:ln>
+            <a:effectLst/>
           </p:spPr>
           <p:style>
             <a:lnRef idx="2">
@@ -7149,6 +7205,7 @@
                 <a:srgbClr val="E3B48A"/>
               </a:solidFill>
             </a:ln>
+            <a:effectLst/>
           </p:spPr>
           <p:style>
             <a:lnRef idx="2">
@@ -7184,6 +7241,7 @@
                 <a:srgbClr val="E3B48A"/>
               </a:solidFill>
             </a:ln>
+            <a:effectLst/>
           </p:spPr>
           <p:style>
             <a:lnRef idx="2">
@@ -7219,6 +7277,7 @@
                 <a:srgbClr val="E3B48A"/>
               </a:solidFill>
             </a:ln>
+            <a:effectLst/>
           </p:spPr>
           <p:style>
             <a:lnRef idx="2">
@@ -7254,6 +7313,7 @@
                 <a:srgbClr val="E3B48A"/>
               </a:solidFill>
             </a:ln>
+            <a:effectLst/>
           </p:spPr>
           <p:style>
             <a:lnRef idx="2">
@@ -7289,6 +7349,7 @@
                 <a:srgbClr val="E3B48A"/>
               </a:solidFill>
             </a:ln>
+            <a:effectLst/>
           </p:spPr>
           <p:style>
             <a:lnRef idx="2">
@@ -7324,6 +7385,7 @@
                 <a:srgbClr val="E3B48A"/>
               </a:solidFill>
             </a:ln>
+            <a:effectLst/>
           </p:spPr>
           <p:style>
             <a:lnRef idx="2">
@@ -7359,6 +7421,7 @@
                 <a:srgbClr val="E3B48A"/>
               </a:solidFill>
             </a:ln>
+            <a:effectLst/>
           </p:spPr>
           <p:style>
             <a:lnRef idx="2">
@@ -7394,6 +7457,7 @@
                 <a:srgbClr val="E3B48A"/>
               </a:solidFill>
             </a:ln>
+            <a:effectLst/>
           </p:spPr>
           <p:style>
             <a:lnRef idx="2">
@@ -7429,6 +7493,7 @@
                 <a:srgbClr val="E3B48A"/>
               </a:solidFill>
             </a:ln>
+            <a:effectLst/>
           </p:spPr>
           <p:style>
             <a:lnRef idx="2">
@@ -7464,6 +7529,7 @@
                 <a:srgbClr val="E3B48A"/>
               </a:solidFill>
             </a:ln>
+            <a:effectLst/>
           </p:spPr>
           <p:style>
             <a:lnRef idx="2">
@@ -7499,6 +7565,7 @@
                 <a:srgbClr val="E3B48A"/>
               </a:solidFill>
             </a:ln>
+            <a:effectLst/>
           </p:spPr>
           <p:style>
             <a:lnRef idx="2">
@@ -7949,6 +8016,7 @@
                 <a:srgbClr val="E3B48A"/>
               </a:solidFill>
             </a:ln>
+            <a:effectLst/>
           </p:spPr>
           <p:style>
             <a:lnRef idx="2">
@@ -7984,6 +8052,7 @@
                 <a:srgbClr val="E3B48A"/>
               </a:solidFill>
             </a:ln>
+            <a:effectLst/>
           </p:spPr>
           <p:style>
             <a:lnRef idx="2">
@@ -8019,6 +8088,7 @@
                 <a:srgbClr val="E3B48A"/>
               </a:solidFill>
             </a:ln>
+            <a:effectLst/>
           </p:spPr>
           <p:style>
             <a:lnRef idx="2">
@@ -8054,6 +8124,7 @@
                 <a:srgbClr val="E3B48A"/>
               </a:solidFill>
             </a:ln>
+            <a:effectLst/>
           </p:spPr>
           <p:style>
             <a:lnRef idx="2">
@@ -8089,6 +8160,7 @@
                 <a:srgbClr val="E3B48A"/>
               </a:solidFill>
             </a:ln>
+            <a:effectLst/>
           </p:spPr>
           <p:style>
             <a:lnRef idx="2">
@@ -8124,6 +8196,7 @@
                 <a:srgbClr val="E3B48A"/>
               </a:solidFill>
             </a:ln>
+            <a:effectLst/>
           </p:spPr>
           <p:style>
             <a:lnRef idx="2">
@@ -8159,6 +8232,7 @@
                 <a:srgbClr val="E3B48A"/>
               </a:solidFill>
             </a:ln>
+            <a:effectLst/>
           </p:spPr>
           <p:style>
             <a:lnRef idx="2">
@@ -8194,6 +8268,7 @@
                 <a:srgbClr val="E3B48A"/>
               </a:solidFill>
             </a:ln>
+            <a:effectLst/>
           </p:spPr>
           <p:style>
             <a:lnRef idx="2">
@@ -8229,6 +8304,7 @@
                 <a:srgbClr val="E3B48A"/>
               </a:solidFill>
             </a:ln>
+            <a:effectLst/>
           </p:spPr>
           <p:style>
             <a:lnRef idx="2">
@@ -8264,6 +8340,7 @@
                 <a:srgbClr val="E3B48A"/>
               </a:solidFill>
             </a:ln>
+            <a:effectLst/>
           </p:spPr>
           <p:style>
             <a:lnRef idx="2">
@@ -8299,6 +8376,7 @@
                 <a:srgbClr val="E3B48A"/>
               </a:solidFill>
             </a:ln>
+            <a:effectLst/>
           </p:spPr>
           <p:style>
             <a:lnRef idx="2">
@@ -8334,6 +8412,7 @@
                 <a:srgbClr val="E3B48A"/>
               </a:solidFill>
             </a:ln>
+            <a:effectLst/>
           </p:spPr>
           <p:style>
             <a:lnRef idx="2">
@@ -8369,6 +8448,7 @@
                 <a:srgbClr val="E3B48A"/>
               </a:solidFill>
             </a:ln>
+            <a:effectLst/>
           </p:spPr>
           <p:style>
             <a:lnRef idx="2">
@@ -8404,6 +8484,7 @@
                 <a:srgbClr val="E3B48A"/>
               </a:solidFill>
             </a:ln>
+            <a:effectLst/>
           </p:spPr>
           <p:style>
             <a:lnRef idx="2">
@@ -8439,6 +8520,7 @@
                 <a:srgbClr val="E3B48A"/>
               </a:solidFill>
             </a:ln>
+            <a:effectLst/>
           </p:spPr>
           <p:style>
             <a:lnRef idx="2">
@@ -8948,6 +9030,7 @@
             <a:prstDash val="dash"/>
             <a:tailEnd type="triangle" w="sm" len="sm"/>
           </a:ln>
+          <a:effectLst/>
         </p:spPr>
         <p:style>
           <a:lnRef idx="2">
@@ -8985,6 +9068,7 @@
             <a:prstDash val="dash"/>
             <a:tailEnd type="triangle" w="sm" len="sm"/>
           </a:ln>
+          <a:effectLst/>
         </p:spPr>
         <p:style>
           <a:lnRef idx="2">
@@ -9806,6 +9890,7 @@
                 <a:srgbClr val="E3B48A"/>
               </a:solidFill>
             </a:ln>
+            <a:effectLst/>
           </p:spPr>
           <p:style>
             <a:lnRef idx="2">
@@ -9841,6 +9926,7 @@
                 <a:srgbClr val="E3B48A"/>
               </a:solidFill>
             </a:ln>
+            <a:effectLst/>
           </p:spPr>
           <p:style>
             <a:lnRef idx="2">
@@ -9876,6 +9962,7 @@
                 <a:srgbClr val="E3B48A"/>
               </a:solidFill>
             </a:ln>
+            <a:effectLst/>
           </p:spPr>
           <p:style>
             <a:lnRef idx="2">
@@ -9911,6 +9998,7 @@
                 <a:srgbClr val="E3B48A"/>
               </a:solidFill>
             </a:ln>
+            <a:effectLst/>
           </p:spPr>
           <p:style>
             <a:lnRef idx="2">
@@ -9946,6 +10034,7 @@
                 <a:srgbClr val="E3B48A"/>
               </a:solidFill>
             </a:ln>
+            <a:effectLst/>
           </p:spPr>
           <p:style>
             <a:lnRef idx="2">
@@ -9981,6 +10070,7 @@
                 <a:srgbClr val="E3B48A"/>
               </a:solidFill>
             </a:ln>
+            <a:effectLst/>
           </p:spPr>
           <p:style>
             <a:lnRef idx="2">
@@ -10016,6 +10106,7 @@
                 <a:srgbClr val="E3B48A"/>
               </a:solidFill>
             </a:ln>
+            <a:effectLst/>
           </p:spPr>
           <p:style>
             <a:lnRef idx="2">
@@ -10051,6 +10142,7 @@
                 <a:srgbClr val="E3B48A"/>
               </a:solidFill>
             </a:ln>
+            <a:effectLst/>
           </p:spPr>
           <p:style>
             <a:lnRef idx="2">
@@ -10086,6 +10178,7 @@
                 <a:srgbClr val="E3B48A"/>
               </a:solidFill>
             </a:ln>
+            <a:effectLst/>
           </p:spPr>
           <p:style>
             <a:lnRef idx="2">
@@ -10121,6 +10214,7 @@
                 <a:srgbClr val="E3B48A"/>
               </a:solidFill>
             </a:ln>
+            <a:effectLst/>
           </p:spPr>
           <p:style>
             <a:lnRef idx="2">
@@ -10156,6 +10250,7 @@
                 <a:srgbClr val="E3B48A"/>
               </a:solidFill>
             </a:ln>
+            <a:effectLst/>
           </p:spPr>
           <p:style>
             <a:lnRef idx="2">
@@ -10191,6 +10286,7 @@
                 <a:srgbClr val="E3B48A"/>
               </a:solidFill>
             </a:ln>
+            <a:effectLst/>
           </p:spPr>
           <p:style>
             <a:lnRef idx="2">
@@ -10226,6 +10322,7 @@
                 <a:srgbClr val="E3B48A"/>
               </a:solidFill>
             </a:ln>
+            <a:effectLst/>
           </p:spPr>
           <p:style>
             <a:lnRef idx="2">
@@ -10261,6 +10358,7 @@
                 <a:srgbClr val="E3B48A"/>
               </a:solidFill>
             </a:ln>
+            <a:effectLst/>
           </p:spPr>
           <p:style>
             <a:lnRef idx="2">
@@ -10296,6 +10394,7 @@
                 <a:srgbClr val="E3B48A"/>
               </a:solidFill>
             </a:ln>
+            <a:effectLst/>
           </p:spPr>
           <p:style>
             <a:lnRef idx="2">
@@ -10331,6 +10430,7 @@
                 <a:srgbClr val="E3B48A"/>
               </a:solidFill>
             </a:ln>
+            <a:effectLst/>
           </p:spPr>
           <p:style>
             <a:lnRef idx="2">
@@ -10366,6 +10466,7 @@
                 <a:srgbClr val="E3B48A"/>
               </a:solidFill>
             </a:ln>
+            <a:effectLst/>
           </p:spPr>
           <p:style>
             <a:lnRef idx="2">
@@ -10401,6 +10502,7 @@
                 <a:srgbClr val="E3B48A"/>
               </a:solidFill>
             </a:ln>
+            <a:effectLst/>
           </p:spPr>
           <p:style>
             <a:lnRef idx="2">
@@ -10436,6 +10538,7 @@
                 <a:srgbClr val="E3B48A"/>
               </a:solidFill>
             </a:ln>
+            <a:effectLst/>
           </p:spPr>
           <p:style>
             <a:lnRef idx="2">
@@ -10471,6 +10574,7 @@
                 <a:srgbClr val="E3B48A"/>
               </a:solidFill>
             </a:ln>
+            <a:effectLst/>
           </p:spPr>
           <p:style>
             <a:lnRef idx="2">
@@ -10506,6 +10610,7 @@
                 <a:srgbClr val="E3B48A"/>
               </a:solidFill>
             </a:ln>
+            <a:effectLst/>
           </p:spPr>
           <p:style>
             <a:lnRef idx="2">
@@ -10541,6 +10646,7 @@
                 <a:srgbClr val="E3B48A"/>
               </a:solidFill>
             </a:ln>
+            <a:effectLst/>
           </p:spPr>
           <p:style>
             <a:lnRef idx="2">
@@ -10576,6 +10682,7 @@
                 <a:srgbClr val="E3B48A"/>
               </a:solidFill>
             </a:ln>
+            <a:effectLst/>
           </p:spPr>
           <p:style>
             <a:lnRef idx="2">
@@ -10611,6 +10718,7 @@
                 <a:srgbClr val="E3B48A"/>
               </a:solidFill>
             </a:ln>
+            <a:effectLst/>
           </p:spPr>
           <p:style>
             <a:lnRef idx="2">
@@ -11198,6 +11306,7 @@
                 <a:srgbClr val="C8C8C8"/>
               </a:solidFill>
             </a:ln>
+            <a:effectLst/>
           </p:spPr>
           <p:style>
             <a:lnRef idx="2">
@@ -11233,6 +11342,7 @@
                 <a:srgbClr val="C8C8C8"/>
               </a:solidFill>
             </a:ln>
+            <a:effectLst/>
           </p:spPr>
           <p:style>
             <a:lnRef idx="2">
@@ -11268,6 +11378,7 @@
                 <a:srgbClr val="C8C8C8"/>
               </a:solidFill>
             </a:ln>
+            <a:effectLst/>
           </p:spPr>
           <p:style>
             <a:lnRef idx="2">
@@ -11303,6 +11414,7 @@
                 <a:srgbClr val="C8C8C8"/>
               </a:solidFill>
             </a:ln>
+            <a:effectLst/>
           </p:spPr>
           <p:style>
             <a:lnRef idx="2">
@@ -11338,6 +11450,7 @@
                 <a:srgbClr val="C8C8C8"/>
               </a:solidFill>
             </a:ln>
+            <a:effectLst/>
           </p:spPr>
           <p:style>
             <a:lnRef idx="2">
@@ -11373,6 +11486,7 @@
                 <a:srgbClr val="C8C8C8"/>
               </a:solidFill>
             </a:ln>
+            <a:effectLst/>
           </p:spPr>
           <p:style>
             <a:lnRef idx="2">
@@ -11408,6 +11522,7 @@
                 <a:srgbClr val="C8C8C8"/>
               </a:solidFill>
             </a:ln>
+            <a:effectLst/>
           </p:spPr>
           <p:style>
             <a:lnRef idx="2">
@@ -11443,6 +11558,7 @@
                 <a:srgbClr val="C8C8C8"/>
               </a:solidFill>
             </a:ln>
+            <a:effectLst/>
           </p:spPr>
           <p:style>
             <a:lnRef idx="2">
@@ -11478,6 +11594,7 @@
                 <a:srgbClr val="C8C8C8"/>
               </a:solidFill>
             </a:ln>
+            <a:effectLst/>
           </p:spPr>
           <p:style>
             <a:lnRef idx="2">
@@ -11513,6 +11630,7 @@
                 <a:srgbClr val="C8C8C8"/>
               </a:solidFill>
             </a:ln>
+            <a:effectLst/>
           </p:spPr>
           <p:style>
             <a:lnRef idx="2">
@@ -11548,6 +11666,7 @@
                 <a:srgbClr val="C8C8C8"/>
               </a:solidFill>
             </a:ln>
+            <a:effectLst/>
           </p:spPr>
           <p:style>
             <a:lnRef idx="2">
@@ -11583,6 +11702,7 @@
                 <a:srgbClr val="C8C8C8"/>
               </a:solidFill>
             </a:ln>
+            <a:effectLst/>
           </p:spPr>
           <p:style>
             <a:lnRef idx="2">
@@ -11618,6 +11738,7 @@
                 <a:srgbClr val="C8C8C8"/>
               </a:solidFill>
             </a:ln>
+            <a:effectLst/>
           </p:spPr>
           <p:style>
             <a:lnRef idx="2">
@@ -11653,6 +11774,7 @@
                 <a:srgbClr val="C8C8C8"/>
               </a:solidFill>
             </a:ln>
+            <a:effectLst/>
           </p:spPr>
           <p:style>
             <a:lnRef idx="2">
@@ -11688,6 +11810,7 @@
                 <a:srgbClr val="C8C8C8"/>
               </a:solidFill>
             </a:ln>
+            <a:effectLst/>
           </p:spPr>
           <p:style>
             <a:lnRef idx="2">
@@ -11723,6 +11846,7 @@
                 <a:srgbClr val="C8C8C8"/>
               </a:solidFill>
             </a:ln>
+            <a:effectLst/>
           </p:spPr>
           <p:style>
             <a:lnRef idx="2">
@@ -11758,6 +11882,7 @@
                 <a:srgbClr val="C8C8C8"/>
               </a:solidFill>
             </a:ln>
+            <a:effectLst/>
           </p:spPr>
           <p:style>
             <a:lnRef idx="2">
@@ -11793,6 +11918,7 @@
                 <a:srgbClr val="C8C8C8"/>
               </a:solidFill>
             </a:ln>
+            <a:effectLst/>
           </p:spPr>
           <p:style>
             <a:lnRef idx="2">
@@ -11828,6 +11954,7 @@
                 <a:srgbClr val="C8C8C8"/>
               </a:solidFill>
             </a:ln>
+            <a:effectLst/>
           </p:spPr>
           <p:style>
             <a:lnRef idx="2">
@@ -11863,6 +11990,7 @@
                 <a:srgbClr val="C8C8C8"/>
               </a:solidFill>
             </a:ln>
+            <a:effectLst/>
           </p:spPr>
           <p:style>
             <a:lnRef idx="2">
@@ -11898,6 +12026,7 @@
                 <a:srgbClr val="C8C8C8"/>
               </a:solidFill>
             </a:ln>
+            <a:effectLst/>
           </p:spPr>
           <p:style>
             <a:lnRef idx="2">
@@ -11933,6 +12062,7 @@
                 <a:srgbClr val="C8C8C8"/>
               </a:solidFill>
             </a:ln>
+            <a:effectLst/>
           </p:spPr>
           <p:style>
             <a:lnRef idx="2">
@@ -11968,6 +12098,7 @@
                 <a:srgbClr val="C8C8C8"/>
               </a:solidFill>
             </a:ln>
+            <a:effectLst/>
           </p:spPr>
           <p:style>
             <a:lnRef idx="2">
@@ -12003,6 +12134,7 @@
                 <a:srgbClr val="C8C8C8"/>
               </a:solidFill>
             </a:ln>
+            <a:effectLst/>
           </p:spPr>
           <p:style>
             <a:lnRef idx="2">
@@ -12537,6 +12669,7 @@
             </a:solidFill>
             <a:tailEnd type="triangle" w="sm" len="sm"/>
           </a:ln>
+          <a:effectLst/>
         </p:spPr>
         <p:style>
           <a:lnRef idx="2">
@@ -12639,6 +12772,7 @@
             </a:solidFill>
             <a:tailEnd type="triangle" w="sm" len="sm"/>
           </a:ln>
+          <a:effectLst/>
         </p:spPr>
         <p:style>
           <a:lnRef idx="2">
@@ -12715,6 +12849,7 @@
             <a:headEnd type="triangle" w="sm" len="sm"/>
             <a:tailEnd type="triangle" w="sm" len="sm"/>
           </a:ln>
+          <a:effectLst/>
         </p:spPr>
         <p:style>
           <a:lnRef idx="2">
@@ -12830,6 +12965,7 @@
             <a:headEnd type="triangle" w="sm" len="sm"/>
             <a:tailEnd type="triangle" w="sm" len="sm"/>
           </a:ln>
+          <a:effectLst/>
         </p:spPr>
         <p:style>
           <a:lnRef idx="2">
@@ -12944,6 +13080,7 @@
             </a:solidFill>
             <a:tailEnd type="triangle" w="sm" len="sm"/>
           </a:ln>
+          <a:effectLst/>
         </p:spPr>
         <p:style>
           <a:lnRef idx="2">
@@ -13182,6 +13319,7 @@
                 <a:srgbClr val="E3B48A"/>
               </a:solidFill>
             </a:ln>
+            <a:effectLst/>
           </p:spPr>
           <p:style>
             <a:lnRef idx="2">
@@ -13217,6 +13355,7 @@
                 <a:srgbClr val="E3B48A"/>
               </a:solidFill>
             </a:ln>
+            <a:effectLst/>
           </p:spPr>
           <p:style>
             <a:lnRef idx="2">
@@ -13252,6 +13391,7 @@
                 <a:srgbClr val="E3B48A"/>
               </a:solidFill>
             </a:ln>
+            <a:effectLst/>
           </p:spPr>
           <p:style>
             <a:lnRef idx="2">
@@ -13287,6 +13427,7 @@
                 <a:srgbClr val="E3B48A"/>
               </a:solidFill>
             </a:ln>
+            <a:effectLst/>
           </p:spPr>
           <p:style>
             <a:lnRef idx="2">
@@ -13322,6 +13463,7 @@
                 <a:srgbClr val="E3B48A"/>
               </a:solidFill>
             </a:ln>
+            <a:effectLst/>
           </p:spPr>
           <p:style>
             <a:lnRef idx="2">
@@ -13357,6 +13499,7 @@
                 <a:srgbClr val="E3B48A"/>
               </a:solidFill>
             </a:ln>
+            <a:effectLst/>
           </p:spPr>
           <p:style>
             <a:lnRef idx="2">
@@ -13392,6 +13535,7 @@
                 <a:srgbClr val="E3B48A"/>
               </a:solidFill>
             </a:ln>
+            <a:effectLst/>
           </p:spPr>
           <p:style>
             <a:lnRef idx="2">
@@ -13427,6 +13571,7 @@
                 <a:srgbClr val="E3B48A"/>
               </a:solidFill>
             </a:ln>
+            <a:effectLst/>
           </p:spPr>
           <p:style>
             <a:lnRef idx="2">
@@ -13462,6 +13607,7 @@
                 <a:srgbClr val="E3B48A"/>
               </a:solidFill>
             </a:ln>
+            <a:effectLst/>
           </p:spPr>
           <p:style>
             <a:lnRef idx="2">
@@ -13497,6 +13643,7 @@
                 <a:srgbClr val="E3B48A"/>
               </a:solidFill>
             </a:ln>
+            <a:effectLst/>
           </p:spPr>
           <p:style>
             <a:lnRef idx="2">
@@ -13532,6 +13679,7 @@
                 <a:srgbClr val="E3B48A"/>
               </a:solidFill>
             </a:ln>
+            <a:effectLst/>
           </p:spPr>
           <p:style>
             <a:lnRef idx="2">
@@ -13567,6 +13715,7 @@
                 <a:srgbClr val="E3B48A"/>
               </a:solidFill>
             </a:ln>
+            <a:effectLst/>
           </p:spPr>
           <p:style>
             <a:lnRef idx="2">
@@ -13602,6 +13751,7 @@
                 <a:srgbClr val="E3B48A"/>
               </a:solidFill>
             </a:ln>
+            <a:effectLst/>
           </p:spPr>
           <p:style>
             <a:lnRef idx="2">
@@ -13637,6 +13787,7 @@
                 <a:srgbClr val="E3B48A"/>
               </a:solidFill>
             </a:ln>
+            <a:effectLst/>
           </p:spPr>
           <p:style>
             <a:lnRef idx="2">
@@ -13672,6 +13823,7 @@
                 <a:srgbClr val="E3B48A"/>
               </a:solidFill>
             </a:ln>
+            <a:effectLst/>
           </p:spPr>
           <p:style>
             <a:lnRef idx="2">
@@ -13707,6 +13859,7 @@
                 <a:srgbClr val="E3B48A"/>
               </a:solidFill>
             </a:ln>
+            <a:effectLst/>
           </p:spPr>
           <p:style>
             <a:lnRef idx="2">
@@ -13742,6 +13895,7 @@
                 <a:srgbClr val="E3B48A"/>
               </a:solidFill>
             </a:ln>
+            <a:effectLst/>
           </p:spPr>
           <p:style>
             <a:lnRef idx="2">
@@ -13777,6 +13931,7 @@
                 <a:srgbClr val="E3B48A"/>
               </a:solidFill>
             </a:ln>
+            <a:effectLst/>
           </p:spPr>
           <p:style>
             <a:lnRef idx="2">
@@ -13812,6 +13967,7 @@
                 <a:srgbClr val="E3B48A"/>
               </a:solidFill>
             </a:ln>
+            <a:effectLst/>
           </p:spPr>
           <p:style>
             <a:lnRef idx="2">
@@ -13847,6 +14003,7 @@
                 <a:srgbClr val="E3B48A"/>
               </a:solidFill>
             </a:ln>
+            <a:effectLst/>
           </p:spPr>
           <p:style>
             <a:lnRef idx="2">
@@ -13882,6 +14039,7 @@
                 <a:srgbClr val="E3B48A"/>
               </a:solidFill>
             </a:ln>
+            <a:effectLst/>
           </p:spPr>
           <p:style>
             <a:lnRef idx="2">
@@ -13917,6 +14075,7 @@
                 <a:srgbClr val="E3B48A"/>
               </a:solidFill>
             </a:ln>
+            <a:effectLst/>
           </p:spPr>
           <p:style>
             <a:lnRef idx="2">
@@ -13952,6 +14111,7 @@
                 <a:srgbClr val="E3B48A"/>
               </a:solidFill>
             </a:ln>
+            <a:effectLst/>
           </p:spPr>
           <p:style>
             <a:lnRef idx="2">
@@ -13987,6 +14147,7 @@
                 <a:srgbClr val="E3B48A"/>
               </a:solidFill>
             </a:ln>
+            <a:effectLst/>
           </p:spPr>
           <p:style>
             <a:lnRef idx="2">
@@ -14643,6 +14804,7 @@
             </a:solidFill>
             <a:tailEnd type="triangle" w="sm" len="sm"/>
           </a:ln>
+          <a:effectLst/>
         </p:spPr>
         <p:style>
           <a:lnRef idx="2">
@@ -14679,6 +14841,7 @@
             </a:solidFill>
             <a:tailEnd type="triangle" w="sm" len="sm"/>
           </a:ln>
+          <a:effectLst/>
         </p:spPr>
         <p:style>
           <a:lnRef idx="2">
@@ -14739,6 +14902,7 @@
             </a:solidFill>
             <a:tailEnd type="triangle" w="sm" len="sm"/>
           </a:ln>
+          <a:effectLst/>
         </p:spPr>
         <p:style>
           <a:lnRef idx="2">
@@ -14775,6 +14939,7 @@
             </a:solidFill>
             <a:tailEnd type="triangle" w="sm" len="sm"/>
           </a:ln>
+          <a:effectLst/>
         </p:spPr>
         <p:style>
           <a:lnRef idx="2">
@@ -14811,6 +14976,7 @@
             </a:solidFill>
             <a:tailEnd type="triangle" w="sm" len="sm"/>
           </a:ln>
+          <a:effectLst/>
         </p:spPr>
         <p:style>
           <a:lnRef idx="2">
@@ -14886,6 +15052,7 @@
             </a:solidFill>
             <a:tailEnd type="triangle" w="sm" len="sm"/>
           </a:ln>
+          <a:effectLst/>
         </p:spPr>
         <p:style>
           <a:lnRef idx="2">
@@ -14979,6 +15146,7 @@
             </a:solidFill>
             <a:tailEnd type="triangle" w="sm" len="sm"/>
           </a:ln>
+          <a:effectLst/>
         </p:spPr>
         <p:style>
           <a:lnRef idx="2">
@@ -15228,42 +15396,13 @@
       </a:lnStyleLst>
       <a:effectStyleLst>
         <a:effectStyle>
-          <a:effectLst>
-            <a:outerShdw blurRad="40000" dist="20000" dir="5400000" rotWithShape="0">
-              <a:srgbClr val="000000">
-                <a:alpha val="38000"/>
-              </a:srgbClr>
-            </a:outerShdw>
-          </a:effectLst>
+          <a:effectLst/>
         </a:effectStyle>
         <a:effectStyle>
-          <a:effectLst>
-            <a:outerShdw blurRad="40000" dist="23000" dir="5400000" rotWithShape="0">
-              <a:srgbClr val="000000">
-                <a:alpha val="35000"/>
-              </a:srgbClr>
-            </a:outerShdw>
-          </a:effectLst>
+          <a:effectLst/>
         </a:effectStyle>
         <a:effectStyle>
-          <a:effectLst>
-            <a:outerShdw blurRad="40000" dist="23000" dir="5400000" rotWithShape="0">
-              <a:srgbClr val="000000">
-                <a:alpha val="35000"/>
-              </a:srgbClr>
-            </a:outerShdw>
-          </a:effectLst>
-          <a:scene3d>
-            <a:camera prst="orthographicFront">
-              <a:rot lat="0" lon="0" rev="0"/>
-            </a:camera>
-            <a:lightRig rig="threePt" dir="t">
-              <a:rot lat="0" lon="0" rev="1200000"/>
-            </a:lightRig>
-          </a:scene3d>
-          <a:sp3d>
-            <a:bevelT w="63500" h="25400"/>
-          </a:sp3d>
+          <a:effectLst/>
         </a:effectStyle>
       </a:effectStyleLst>
       <a:bgFillStyleLst>

--- a/figures/ppt/fig1_framework.pptx
+++ b/figures/ppt/fig1_framework.pptx
@@ -4052,7 +4052,7 @@
                 </a:solidFill>
                 <a:latin typeface="Times New Roman"/>
               </a:rPr>
-              <a:t>  dwell indexed RIS by adversarial RL</a:t>
+              <a:t>  dwell constrained RIS by adversarial RL</a:t>
             </a:r>
           </a:p>
         </p:txBody>
@@ -15197,7 +15197,7 @@
                 </a:solidFill>
                 <a:latin typeface="Times New Roman"/>
               </a:rPr>
-              <a:t>GNSS, IMU</a:t>
+              <a:t>GPS, AHRS</a:t>
             </a:r>
           </a:p>
         </p:txBody>

--- a/figures/ppt/fig1_framework.pptx
+++ b/figures/ppt/fig1_framework.pptx
@@ -3963,18 +3963,18 @@
       </p:sp>
       <p:sp>
         <p:nvSpPr>
-          <p:cNvPr id="18" name="stage1"/>
+          <p:cNvPr id="18" name="rl_smdp"/>
           <p:cNvSpPr/>
           <p:nvPr/>
         </p:nvSpPr>
         <p:spPr>
           <a:xfrm>
             <a:off x="1243584" y="310896"/>
-            <a:ext cx="2816352" cy="1005840"/>
+            <a:ext cx="2816352" cy="1810512"/>
           </a:xfrm>
           <a:prstGeom prst="roundRect">
             <a:avLst>
-              <a:gd name="adj" fmla="val 3636"/>
+              <a:gd name="adj" fmla="val 2020"/>
             </a:avLst>
           </a:prstGeom>
           <a:solidFill>
@@ -4043,7 +4043,7 @@
                 </a:solidFill>
                 <a:latin typeface="Times New Roman"/>
               </a:rPr>
-              <a:t>Stage 1</a:t>
+              <a:t>Dwell constrained RIS</a:t>
             </a:r>
             <a:r>
               <a:rPr sz="700" b="0" i="0">
@@ -4052,111 +4052,34 @@
                 </a:solidFill>
                 <a:latin typeface="Times New Roman"/>
               </a:rPr>
-              <a:t>  dwell constrained RIS by adversarial RL</a:t>
-            </a:r>
-          </a:p>
-        </p:txBody>
-      </p:sp>
-      <p:sp>
-        <p:nvSpPr>
-          <p:cNvPr id="20" name="replay_buffer"/>
-          <p:cNvSpPr/>
-          <p:nvPr/>
-        </p:nvSpPr>
-        <p:spPr>
-          <a:xfrm>
-            <a:off x="1335024" y="603504"/>
-            <a:ext cx="402336" cy="475488"/>
-          </a:xfrm>
-          <a:prstGeom prst="can">
-            <a:avLst/>
-          </a:prstGeom>
-          <a:solidFill>
-            <a:srgbClr val="FBEFE3"/>
-          </a:solidFill>
-          <a:ln w="8890">
-            <a:solidFill>
-              <a:srgbClr val="A65E1A"/>
-            </a:solidFill>
-          </a:ln>
-          <a:effectLst/>
-        </p:spPr>
-        <p:style>
-          <a:lnRef idx="1">
-            <a:schemeClr val="accent1"/>
-          </a:lnRef>
-          <a:fillRef idx="3">
-            <a:schemeClr val="accent1"/>
-          </a:fillRef>
-          <a:effectRef idx="2">
-            <a:schemeClr val="accent1"/>
-          </a:effectRef>
-          <a:fontRef idx="minor">
-            <a:schemeClr val="lt1"/>
-          </a:fontRef>
-        </p:style>
-        <p:txBody>
-          <a:bodyPr rtlCol="0" anchor="ctr" wrap="none" lIns="0" rIns="0" tIns="0" bIns="0">
-            <a:noAutofit/>
-          </a:bodyPr>
-          <a:lstStyle/>
-          <a:p>
-            <a:pPr algn="ctr">
-              <a:lnSpc>
-                <a:spcPct val="100000"/>
-              </a:lnSpc>
-            </a:pPr>
-            <a:r>
-              <a:rPr sz="600" b="0" i="0">
-                <a:solidFill>
-                  <a:srgbClr val="000000"/>
-                </a:solidFill>
-                <a:latin typeface="Times New Roman"/>
-              </a:rPr>
-              <a:t>replay</a:t>
-            </a:r>
-          </a:p>
-          <a:p>
-            <a:pPr algn="ctr">
-              <a:lnSpc>
-                <a:spcPct val="100000"/>
-              </a:lnSpc>
-            </a:pPr>
-            <a:r>
-              <a:rPr sz="600" b="0" i="0">
-                <a:solidFill>
-                  <a:srgbClr val="000000"/>
-                </a:solidFill>
-                <a:latin typeface="Times New Roman"/>
-              </a:rPr>
-              <a:t>buffer</a:t>
+              <a:t>  by adversarial RL on the SMDP</a:t>
             </a:r>
           </a:p>
         </p:txBody>
       </p:sp>
       <p:grpSp>
         <p:nvGrpSpPr>
-          <p:cNvPr id="21" name="critic_2"/>
+          <p:cNvPr id="20" name="critic_2"/>
           <p:cNvGrpSpPr/>
           <p:nvPr/>
         </p:nvGrpSpPr>
         <p:grpSpPr>
           <a:xfrm>
-            <a:off x="1956816" y="585216"/>
+            <a:off x="1481328" y="585216"/>
             <a:ext cx="512064" cy="384048"/>
-            <a:chOff x="1956816" y="585216"/>
+            <a:chOff x="1481328" y="585216"/>
             <a:chExt cx="512064" cy="384048"/>
           </a:xfrm>
         </p:grpSpPr>
         <p:sp>
           <p:nvSpPr>
-            <p:cNvPr id="22" name="Rounded Rectangle 21"/>
+            <p:cNvPr id="21" name="Rounded Rectangle 20"/>
             <p:cNvSpPr/>
             <p:nvPr/>
           </p:nvSpPr>
           <p:spPr>
             <a:xfrm>
-              <a:off x="1956816" y="585216"/>
+              <a:off x="1481328" y="585216"/>
               <a:ext cx="512064" cy="384048"/>
             </a:xfrm>
             <a:prstGeom prst="roundRect">
@@ -4198,13 +4121,49 @@
         </p:sp>
         <p:cxnSp>
           <p:nvCxnSpPr>
+            <p:cNvPr id="22" name="Connector 21"/>
+            <p:cNvCxnSpPr/>
+            <p:nvPr/>
+          </p:nvCxnSpPr>
+          <p:spPr>
+            <a:xfrm flipV="1">
+              <a:off x="1545336" y="630936"/>
+              <a:ext cx="192024" cy="48768"/>
+            </a:xfrm>
+            <a:prstGeom prst="line">
+              <a:avLst/>
+            </a:prstGeom>
+            <a:ln w="4445">
+              <a:solidFill>
+                <a:srgbClr val="E3B48A"/>
+              </a:solidFill>
+            </a:ln>
+            <a:effectLst/>
+          </p:spPr>
+          <p:style>
+            <a:lnRef idx="2">
+              <a:schemeClr val="accent1"/>
+            </a:lnRef>
+            <a:fillRef idx="0">
+              <a:schemeClr val="accent1"/>
+            </a:fillRef>
+            <a:effectRef idx="1">
+              <a:schemeClr val="accent1"/>
+            </a:effectRef>
+            <a:fontRef idx="minor">
+              <a:schemeClr val="tx1"/>
+            </a:fontRef>
+          </p:style>
+        </p:cxnSp>
+        <p:cxnSp>
+          <p:nvCxnSpPr>
             <p:cNvPr id="23" name="Connector 22"/>
             <p:cNvCxnSpPr/>
             <p:nvPr/>
           </p:nvCxnSpPr>
           <p:spPr>
-            <a:xfrm flipV="1">
-              <a:off x="2020824" y="630936"/>
+            <a:xfrm>
+              <a:off x="1545336" y="679704"/>
               <a:ext cx="192024" cy="48768"/>
             </a:xfrm>
             <a:prstGeom prst="line">
@@ -4240,8 +4199,8 @@
           </p:nvCxnSpPr>
           <p:spPr>
             <a:xfrm>
-              <a:off x="2020824" y="679704"/>
-              <a:ext cx="192024" cy="48768"/>
+              <a:off x="1545336" y="679704"/>
+              <a:ext cx="192024" cy="146303"/>
             </a:xfrm>
             <a:prstGeom prst="line">
               <a:avLst/>
@@ -4276,8 +4235,8 @@
           </p:nvCxnSpPr>
           <p:spPr>
             <a:xfrm>
-              <a:off x="2020824" y="679704"/>
-              <a:ext cx="192024" cy="146303"/>
+              <a:off x="1545336" y="679704"/>
+              <a:ext cx="192024" cy="243839"/>
             </a:xfrm>
             <a:prstGeom prst="line">
               <a:avLst/>
@@ -4311,9 +4270,9 @@
             <p:nvPr/>
           </p:nvCxnSpPr>
           <p:spPr>
-            <a:xfrm>
-              <a:off x="2020824" y="679704"/>
-              <a:ext cx="192024" cy="243839"/>
+            <a:xfrm flipV="1">
+              <a:off x="1545336" y="630936"/>
+              <a:ext cx="192024" cy="146304"/>
             </a:xfrm>
             <a:prstGeom prst="line">
               <a:avLst/>
@@ -4348,8 +4307,8 @@
           </p:nvCxnSpPr>
           <p:spPr>
             <a:xfrm flipV="1">
-              <a:off x="2020824" y="630936"/>
-              <a:ext cx="192024" cy="146304"/>
+              <a:off x="1545336" y="728472"/>
+              <a:ext cx="192024" cy="48768"/>
             </a:xfrm>
             <a:prstGeom prst="line">
               <a:avLst/>
@@ -4383,9 +4342,9 @@
             <p:nvPr/>
           </p:nvCxnSpPr>
           <p:spPr>
-            <a:xfrm flipV="1">
-              <a:off x="2020824" y="728472"/>
-              <a:ext cx="192024" cy="48768"/>
+            <a:xfrm>
+              <a:off x="1545336" y="777240"/>
+              <a:ext cx="192024" cy="48767"/>
             </a:xfrm>
             <a:prstGeom prst="line">
               <a:avLst/>
@@ -4420,8 +4379,8 @@
           </p:nvCxnSpPr>
           <p:spPr>
             <a:xfrm>
-              <a:off x="2020824" y="777240"/>
-              <a:ext cx="192024" cy="48767"/>
+              <a:off x="1545336" y="777240"/>
+              <a:ext cx="192024" cy="146303"/>
             </a:xfrm>
             <a:prstGeom prst="line">
               <a:avLst/>
@@ -4455,9 +4414,9 @@
             <p:nvPr/>
           </p:nvCxnSpPr>
           <p:spPr>
-            <a:xfrm>
-              <a:off x="2020824" y="777240"/>
-              <a:ext cx="192024" cy="146303"/>
+            <a:xfrm flipV="1">
+              <a:off x="1545336" y="630936"/>
+              <a:ext cx="192024" cy="243839"/>
             </a:xfrm>
             <a:prstGeom prst="line">
               <a:avLst/>
@@ -4492,8 +4451,8 @@
           </p:nvCxnSpPr>
           <p:spPr>
             <a:xfrm flipV="1">
-              <a:off x="2020824" y="630936"/>
-              <a:ext cx="192024" cy="243839"/>
+              <a:off x="1545336" y="728472"/>
+              <a:ext cx="192024" cy="146303"/>
             </a:xfrm>
             <a:prstGeom prst="line">
               <a:avLst/>
@@ -4528,8 +4487,8 @@
           </p:nvCxnSpPr>
           <p:spPr>
             <a:xfrm flipV="1">
-              <a:off x="2020824" y="728472"/>
-              <a:ext cx="192024" cy="146303"/>
+              <a:off x="1545336" y="826007"/>
+              <a:ext cx="192024" cy="48768"/>
             </a:xfrm>
             <a:prstGeom prst="line">
               <a:avLst/>
@@ -4563,8 +4522,8 @@
             <p:nvPr/>
           </p:nvCxnSpPr>
           <p:spPr>
-            <a:xfrm flipV="1">
-              <a:off x="2020824" y="826007"/>
+            <a:xfrm>
+              <a:off x="1545336" y="874775"/>
               <a:ext cx="192024" cy="48768"/>
             </a:xfrm>
             <a:prstGeom prst="line">
@@ -4600,7 +4559,7 @@
           </p:nvCxnSpPr>
           <p:spPr>
             <a:xfrm>
-              <a:off x="2020824" y="874775"/>
+              <a:off x="1737360" y="630936"/>
               <a:ext cx="192024" cy="48768"/>
             </a:xfrm>
             <a:prstGeom prst="line">
@@ -4636,8 +4595,8 @@
           </p:nvCxnSpPr>
           <p:spPr>
             <a:xfrm>
-              <a:off x="2212848" y="630936"/>
-              <a:ext cx="192024" cy="48768"/>
+              <a:off x="1737360" y="630936"/>
+              <a:ext cx="192024" cy="146304"/>
             </a:xfrm>
             <a:prstGeom prst="line">
               <a:avLst/>
@@ -4672,8 +4631,8 @@
           </p:nvCxnSpPr>
           <p:spPr>
             <a:xfrm>
-              <a:off x="2212848" y="630936"/>
-              <a:ext cx="192024" cy="146304"/>
+              <a:off x="1737360" y="630936"/>
+              <a:ext cx="192024" cy="243839"/>
             </a:xfrm>
             <a:prstGeom prst="line">
               <a:avLst/>
@@ -4707,9 +4666,9 @@
             <p:nvPr/>
           </p:nvCxnSpPr>
           <p:spPr>
-            <a:xfrm>
-              <a:off x="2212848" y="630936"/>
-              <a:ext cx="192024" cy="243839"/>
+            <a:xfrm flipV="1">
+              <a:off x="1737360" y="679704"/>
+              <a:ext cx="192024" cy="48768"/>
             </a:xfrm>
             <a:prstGeom prst="line">
               <a:avLst/>
@@ -4743,8 +4702,8 @@
             <p:nvPr/>
           </p:nvCxnSpPr>
           <p:spPr>
-            <a:xfrm flipV="1">
-              <a:off x="2212848" y="679704"/>
+            <a:xfrm>
+              <a:off x="1737360" y="728472"/>
               <a:ext cx="192024" cy="48768"/>
             </a:xfrm>
             <a:prstGeom prst="line">
@@ -4780,8 +4739,8 @@
           </p:nvCxnSpPr>
           <p:spPr>
             <a:xfrm>
-              <a:off x="2212848" y="728472"/>
-              <a:ext cx="192024" cy="48768"/>
+              <a:off x="1737360" y="728472"/>
+              <a:ext cx="192024" cy="146303"/>
             </a:xfrm>
             <a:prstGeom prst="line">
               <a:avLst/>
@@ -4815,8 +4774,8 @@
             <p:nvPr/>
           </p:nvCxnSpPr>
           <p:spPr>
-            <a:xfrm>
-              <a:off x="2212848" y="728472"/>
+            <a:xfrm flipV="1">
+              <a:off x="1737360" y="679704"/>
               <a:ext cx="192024" cy="146303"/>
             </a:xfrm>
             <a:prstGeom prst="line">
@@ -4852,8 +4811,8 @@
           </p:nvCxnSpPr>
           <p:spPr>
             <a:xfrm flipV="1">
-              <a:off x="2212848" y="679704"/>
-              <a:ext cx="192024" cy="146303"/>
+              <a:off x="1737360" y="777240"/>
+              <a:ext cx="192024" cy="48767"/>
             </a:xfrm>
             <a:prstGeom prst="line">
               <a:avLst/>
@@ -4887,9 +4846,9 @@
             <p:nvPr/>
           </p:nvCxnSpPr>
           <p:spPr>
-            <a:xfrm flipV="1">
-              <a:off x="2212848" y="777240"/>
-              <a:ext cx="192024" cy="48767"/>
+            <a:xfrm>
+              <a:off x="1737360" y="826007"/>
+              <a:ext cx="192024" cy="48768"/>
             </a:xfrm>
             <a:prstGeom prst="line">
               <a:avLst/>
@@ -4923,9 +4882,9 @@
             <p:nvPr/>
           </p:nvCxnSpPr>
           <p:spPr>
-            <a:xfrm>
-              <a:off x="2212848" y="826007"/>
-              <a:ext cx="192024" cy="48768"/>
+            <a:xfrm flipV="1">
+              <a:off x="1737360" y="679704"/>
+              <a:ext cx="192024" cy="243839"/>
             </a:xfrm>
             <a:prstGeom prst="line">
               <a:avLst/>
@@ -4960,8 +4919,8 @@
           </p:nvCxnSpPr>
           <p:spPr>
             <a:xfrm flipV="1">
-              <a:off x="2212848" y="679704"/>
-              <a:ext cx="192024" cy="243839"/>
+              <a:off x="1737360" y="777240"/>
+              <a:ext cx="192024" cy="146303"/>
             </a:xfrm>
             <a:prstGeom prst="line">
               <a:avLst/>
@@ -4996,8 +4955,8 @@
           </p:nvCxnSpPr>
           <p:spPr>
             <a:xfrm flipV="1">
-              <a:off x="2212848" y="777240"/>
-              <a:ext cx="192024" cy="146303"/>
+              <a:off x="1737360" y="874775"/>
+              <a:ext cx="192024" cy="48768"/>
             </a:xfrm>
             <a:prstGeom prst="line">
               <a:avLst/>
@@ -5024,42 +4983,50 @@
             </a:fontRef>
           </p:style>
         </p:cxnSp>
-        <p:cxnSp>
-          <p:nvCxnSpPr>
-            <p:cNvPr id="46" name="Connector 45"/>
-            <p:cNvCxnSpPr/>
-            <p:nvPr/>
-          </p:nvCxnSpPr>
-          <p:spPr>
-            <a:xfrm flipV="1">
-              <a:off x="2212848" y="874775"/>
-              <a:ext cx="192024" cy="48768"/>
-            </a:xfrm>
-            <a:prstGeom prst="line">
-              <a:avLst/>
-            </a:prstGeom>
-            <a:ln w="4445">
-              <a:solidFill>
-                <a:srgbClr val="E3B48A"/>
-              </a:solidFill>
-            </a:ln>
-            <a:effectLst/>
-          </p:spPr>
-          <p:style>
-            <a:lnRef idx="2">
-              <a:schemeClr val="accent1"/>
-            </a:lnRef>
-            <a:fillRef idx="0">
-              <a:schemeClr val="accent1"/>
-            </a:fillRef>
-            <a:effectRef idx="1">
-              <a:schemeClr val="accent1"/>
-            </a:effectRef>
-            <a:fontRef idx="minor">
-              <a:schemeClr val="tx1"/>
-            </a:fontRef>
-          </p:style>
-        </p:cxnSp>
+        <p:sp>
+          <p:nvSpPr>
+            <p:cNvPr id="46" name="Oval 45"/>
+            <p:cNvSpPr/>
+            <p:nvPr/>
+          </p:nvSpPr>
+          <p:spPr>
+            <a:xfrm>
+              <a:off x="1521131" y="655499"/>
+              <a:ext cx="48409" cy="48409"/>
+            </a:xfrm>
+            <a:prstGeom prst="ellipse">
+              <a:avLst/>
+            </a:prstGeom>
+            <a:solidFill>
+              <a:srgbClr val="A65E1A"/>
+            </a:solidFill>
+            <a:ln>
+              <a:noFill/>
+            </a:ln>
+            <a:effectLst/>
+          </p:spPr>
+          <p:style>
+            <a:lnRef idx="1">
+              <a:schemeClr val="accent1"/>
+            </a:lnRef>
+            <a:fillRef idx="3">
+              <a:schemeClr val="accent1"/>
+            </a:fillRef>
+            <a:effectRef idx="2">
+              <a:schemeClr val="accent1"/>
+            </a:effectRef>
+            <a:fontRef idx="minor">
+              <a:schemeClr val="lt1"/>
+            </a:fontRef>
+          </p:style>
+          <p:txBody>
+            <a:bodyPr rtlCol="0" anchor="ctr"/>
+            <a:lstStyle/>
+            <a:p>
+              <a:pPr algn="ctr"/>
+            </a:p>
+          </p:txBody>
+        </p:sp>
         <p:sp>
           <p:nvSpPr>
             <p:cNvPr id="47" name="Oval 46"/>
@@ -5068,7 +5035,7 @@
           </p:nvSpPr>
           <p:spPr>
             <a:xfrm>
-              <a:off x="1996619" y="655499"/>
+              <a:off x="1521131" y="753035"/>
               <a:ext cx="48409" cy="48409"/>
             </a:xfrm>
             <a:prstGeom prst="ellipse">
@@ -5112,7 +5079,7 @@
           </p:nvSpPr>
           <p:spPr>
             <a:xfrm>
-              <a:off x="1996619" y="753035"/>
+              <a:off x="1521131" y="850571"/>
               <a:ext cx="48409" cy="48409"/>
             </a:xfrm>
             <a:prstGeom prst="ellipse">
@@ -5156,7 +5123,7 @@
           </p:nvSpPr>
           <p:spPr>
             <a:xfrm>
-              <a:off x="1996619" y="850571"/>
+              <a:off x="1713155" y="606731"/>
               <a:ext cx="48409" cy="48409"/>
             </a:xfrm>
             <a:prstGeom prst="ellipse">
@@ -5200,7 +5167,7 @@
           </p:nvSpPr>
           <p:spPr>
             <a:xfrm>
-              <a:off x="2188643" y="606731"/>
+              <a:off x="1713155" y="704267"/>
               <a:ext cx="48409" cy="48409"/>
             </a:xfrm>
             <a:prstGeom prst="ellipse">
@@ -5244,7 +5211,7 @@
           </p:nvSpPr>
           <p:spPr>
             <a:xfrm>
-              <a:off x="2188643" y="704267"/>
+              <a:off x="1713155" y="801803"/>
               <a:ext cx="48409" cy="48409"/>
             </a:xfrm>
             <a:prstGeom prst="ellipse">
@@ -5288,7 +5255,7 @@
           </p:nvSpPr>
           <p:spPr>
             <a:xfrm>
-              <a:off x="2188643" y="801803"/>
+              <a:off x="1713155" y="899339"/>
               <a:ext cx="48409" cy="48409"/>
             </a:xfrm>
             <a:prstGeom prst="ellipse">
@@ -5332,7 +5299,7 @@
           </p:nvSpPr>
           <p:spPr>
             <a:xfrm>
-              <a:off x="2188643" y="899339"/>
+              <a:off x="1905179" y="655499"/>
               <a:ext cx="48409" cy="48409"/>
             </a:xfrm>
             <a:prstGeom prst="ellipse">
@@ -5376,7 +5343,7 @@
           </p:nvSpPr>
           <p:spPr>
             <a:xfrm>
-              <a:off x="2380667" y="655499"/>
+              <a:off x="1905179" y="753035"/>
               <a:ext cx="48409" cy="48409"/>
             </a:xfrm>
             <a:prstGeom prst="ellipse">
@@ -5420,51 +5387,7 @@
           </p:nvSpPr>
           <p:spPr>
             <a:xfrm>
-              <a:off x="2380667" y="753035"/>
-              <a:ext cx="48409" cy="48409"/>
-            </a:xfrm>
-            <a:prstGeom prst="ellipse">
-              <a:avLst/>
-            </a:prstGeom>
-            <a:solidFill>
-              <a:srgbClr val="A65E1A"/>
-            </a:solidFill>
-            <a:ln>
-              <a:noFill/>
-            </a:ln>
-            <a:effectLst/>
-          </p:spPr>
-          <p:style>
-            <a:lnRef idx="1">
-              <a:schemeClr val="accent1"/>
-            </a:lnRef>
-            <a:fillRef idx="3">
-              <a:schemeClr val="accent1"/>
-            </a:fillRef>
-            <a:effectRef idx="2">
-              <a:schemeClr val="accent1"/>
-            </a:effectRef>
-            <a:fontRef idx="minor">
-              <a:schemeClr val="lt1"/>
-            </a:fontRef>
-          </p:style>
-          <p:txBody>
-            <a:bodyPr rtlCol="0" anchor="ctr"/>
-            <a:lstStyle/>
-            <a:p>
-              <a:pPr algn="ctr"/>
-            </a:p>
-          </p:txBody>
-        </p:sp>
-        <p:sp>
-          <p:nvSpPr>
-            <p:cNvPr id="56" name="Oval 55"/>
-            <p:cNvSpPr/>
-            <p:nvPr/>
-          </p:nvSpPr>
-          <p:spPr>
-            <a:xfrm>
-              <a:off x="2380667" y="850571"/>
+              <a:off x="1905179" y="850571"/>
               <a:ext cx="48409" cy="48409"/>
             </a:xfrm>
             <a:prstGeom prst="ellipse">
@@ -5503,27 +5426,27 @@
       </p:grpSp>
       <p:grpSp>
         <p:nvGrpSpPr>
-          <p:cNvPr id="57" name="critic_1"/>
+          <p:cNvPr id="56" name="critic_1"/>
           <p:cNvGrpSpPr/>
           <p:nvPr/>
         </p:nvGrpSpPr>
         <p:grpSpPr>
           <a:xfrm>
-            <a:off x="1901952" y="640080"/>
+            <a:off x="1426464" y="640080"/>
             <a:ext cx="512064" cy="384048"/>
-            <a:chOff x="1901952" y="640080"/>
+            <a:chOff x="1426464" y="640080"/>
             <a:chExt cx="512064" cy="384048"/>
           </a:xfrm>
         </p:grpSpPr>
         <p:sp>
           <p:nvSpPr>
-            <p:cNvPr id="58" name="Rounded Rectangle 57"/>
+            <p:cNvPr id="57" name="Rounded Rectangle 56"/>
             <p:cNvSpPr/>
             <p:nvPr/>
           </p:nvSpPr>
           <p:spPr>
             <a:xfrm>
-              <a:off x="1901952" y="640080"/>
+              <a:off x="1426464" y="640080"/>
               <a:ext cx="512064" cy="384048"/>
             </a:xfrm>
             <a:prstGeom prst="roundRect">
@@ -5565,14 +5488,50 @@
         </p:sp>
         <p:cxnSp>
           <p:nvCxnSpPr>
+            <p:cNvPr id="58" name="Connector 57"/>
+            <p:cNvCxnSpPr/>
+            <p:nvPr/>
+          </p:nvCxnSpPr>
+          <p:spPr>
+            <a:xfrm flipV="1">
+              <a:off x="1490472" y="685800"/>
+              <a:ext cx="192024" cy="48767"/>
+            </a:xfrm>
+            <a:prstGeom prst="line">
+              <a:avLst/>
+            </a:prstGeom>
+            <a:ln w="4445">
+              <a:solidFill>
+                <a:srgbClr val="E3B48A"/>
+              </a:solidFill>
+            </a:ln>
+            <a:effectLst/>
+          </p:spPr>
+          <p:style>
+            <a:lnRef idx="2">
+              <a:schemeClr val="accent1"/>
+            </a:lnRef>
+            <a:fillRef idx="0">
+              <a:schemeClr val="accent1"/>
+            </a:fillRef>
+            <a:effectRef idx="1">
+              <a:schemeClr val="accent1"/>
+            </a:effectRef>
+            <a:fontRef idx="minor">
+              <a:schemeClr val="tx1"/>
+            </a:fontRef>
+          </p:style>
+        </p:cxnSp>
+        <p:cxnSp>
+          <p:nvCxnSpPr>
             <p:cNvPr id="59" name="Connector 58"/>
             <p:cNvCxnSpPr/>
             <p:nvPr/>
           </p:nvCxnSpPr>
           <p:spPr>
-            <a:xfrm flipV="1">
-              <a:off x="1965960" y="685800"/>
-              <a:ext cx="192024" cy="48767"/>
+            <a:xfrm>
+              <a:off x="1490472" y="734567"/>
+              <a:ext cx="192024" cy="48769"/>
             </a:xfrm>
             <a:prstGeom prst="line">
               <a:avLst/>
@@ -5607,8 +5566,8 @@
           </p:nvCxnSpPr>
           <p:spPr>
             <a:xfrm>
-              <a:off x="1965960" y="734567"/>
-              <a:ext cx="192024" cy="48769"/>
+              <a:off x="1490472" y="734567"/>
+              <a:ext cx="192024" cy="146304"/>
             </a:xfrm>
             <a:prstGeom prst="line">
               <a:avLst/>
@@ -5643,8 +5602,8 @@
           </p:nvCxnSpPr>
           <p:spPr>
             <a:xfrm>
-              <a:off x="1965960" y="734567"/>
-              <a:ext cx="192024" cy="146304"/>
+              <a:off x="1490472" y="734567"/>
+              <a:ext cx="192024" cy="243840"/>
             </a:xfrm>
             <a:prstGeom prst="line">
               <a:avLst/>
@@ -5678,9 +5637,9 @@
             <p:nvPr/>
           </p:nvCxnSpPr>
           <p:spPr>
-            <a:xfrm>
-              <a:off x="1965960" y="734567"/>
-              <a:ext cx="192024" cy="243840"/>
+            <a:xfrm flipV="1">
+              <a:off x="1490472" y="685800"/>
+              <a:ext cx="192024" cy="146303"/>
             </a:xfrm>
             <a:prstGeom prst="line">
               <a:avLst/>
@@ -5715,8 +5674,8 @@
           </p:nvCxnSpPr>
           <p:spPr>
             <a:xfrm flipV="1">
-              <a:off x="1965960" y="685800"/>
-              <a:ext cx="192024" cy="146303"/>
+              <a:off x="1490472" y="783336"/>
+              <a:ext cx="192024" cy="48767"/>
             </a:xfrm>
             <a:prstGeom prst="line">
               <a:avLst/>
@@ -5750,9 +5709,9 @@
             <p:nvPr/>
           </p:nvCxnSpPr>
           <p:spPr>
-            <a:xfrm flipV="1">
-              <a:off x="1965960" y="783336"/>
-              <a:ext cx="192024" cy="48767"/>
+            <a:xfrm>
+              <a:off x="1490472" y="832103"/>
+              <a:ext cx="192024" cy="48768"/>
             </a:xfrm>
             <a:prstGeom prst="line">
               <a:avLst/>
@@ -5787,8 +5746,8 @@
           </p:nvCxnSpPr>
           <p:spPr>
             <a:xfrm>
-              <a:off x="1965960" y="832103"/>
-              <a:ext cx="192024" cy="48768"/>
+              <a:off x="1490472" y="832103"/>
+              <a:ext cx="192024" cy="146304"/>
             </a:xfrm>
             <a:prstGeom prst="line">
               <a:avLst/>
@@ -5822,9 +5781,9 @@
             <p:nvPr/>
           </p:nvCxnSpPr>
           <p:spPr>
-            <a:xfrm>
-              <a:off x="1965960" y="832103"/>
-              <a:ext cx="192024" cy="146304"/>
+            <a:xfrm flipV="1">
+              <a:off x="1490472" y="685800"/>
+              <a:ext cx="192024" cy="243840"/>
             </a:xfrm>
             <a:prstGeom prst="line">
               <a:avLst/>
@@ -5859,8 +5818,8 @@
           </p:nvCxnSpPr>
           <p:spPr>
             <a:xfrm flipV="1">
-              <a:off x="1965960" y="685800"/>
-              <a:ext cx="192024" cy="243840"/>
+              <a:off x="1490472" y="783336"/>
+              <a:ext cx="192024" cy="146304"/>
             </a:xfrm>
             <a:prstGeom prst="line">
               <a:avLst/>
@@ -5895,8 +5854,8 @@
           </p:nvCxnSpPr>
           <p:spPr>
             <a:xfrm flipV="1">
-              <a:off x="1965960" y="783336"/>
-              <a:ext cx="192024" cy="146304"/>
+              <a:off x="1490472" y="880871"/>
+              <a:ext cx="192024" cy="48769"/>
             </a:xfrm>
             <a:prstGeom prst="line">
               <a:avLst/>
@@ -5930,9 +5889,9 @@
             <p:nvPr/>
           </p:nvCxnSpPr>
           <p:spPr>
-            <a:xfrm flipV="1">
-              <a:off x="1965960" y="880871"/>
-              <a:ext cx="192024" cy="48769"/>
+            <a:xfrm>
+              <a:off x="1490472" y="929640"/>
+              <a:ext cx="192024" cy="48767"/>
             </a:xfrm>
             <a:prstGeom prst="line">
               <a:avLst/>
@@ -5967,7 +5926,7 @@
           </p:nvCxnSpPr>
           <p:spPr>
             <a:xfrm>
-              <a:off x="1965960" y="929640"/>
+              <a:off x="1682496" y="685800"/>
               <a:ext cx="192024" cy="48767"/>
             </a:xfrm>
             <a:prstGeom prst="line">
@@ -6003,8 +5962,8 @@
           </p:nvCxnSpPr>
           <p:spPr>
             <a:xfrm>
-              <a:off x="2157984" y="685800"/>
-              <a:ext cx="192024" cy="48767"/>
+              <a:off x="1682496" y="685800"/>
+              <a:ext cx="192024" cy="146303"/>
             </a:xfrm>
             <a:prstGeom prst="line">
               <a:avLst/>
@@ -6039,8 +5998,8 @@
           </p:nvCxnSpPr>
           <p:spPr>
             <a:xfrm>
-              <a:off x="2157984" y="685800"/>
-              <a:ext cx="192024" cy="146303"/>
+              <a:off x="1682496" y="685800"/>
+              <a:ext cx="192024" cy="243840"/>
             </a:xfrm>
             <a:prstGeom prst="line">
               <a:avLst/>
@@ -6074,9 +6033,9 @@
             <p:nvPr/>
           </p:nvCxnSpPr>
           <p:spPr>
-            <a:xfrm>
-              <a:off x="2157984" y="685800"/>
-              <a:ext cx="192024" cy="243840"/>
+            <a:xfrm flipV="1">
+              <a:off x="1682496" y="734567"/>
+              <a:ext cx="192024" cy="48769"/>
             </a:xfrm>
             <a:prstGeom prst="line">
               <a:avLst/>
@@ -6110,9 +6069,9 @@
             <p:nvPr/>
           </p:nvCxnSpPr>
           <p:spPr>
-            <a:xfrm flipV="1">
-              <a:off x="2157984" y="734567"/>
-              <a:ext cx="192024" cy="48769"/>
+            <a:xfrm>
+              <a:off x="1682496" y="783336"/>
+              <a:ext cx="192024" cy="48767"/>
             </a:xfrm>
             <a:prstGeom prst="line">
               <a:avLst/>
@@ -6147,8 +6106,8 @@
           </p:nvCxnSpPr>
           <p:spPr>
             <a:xfrm>
-              <a:off x="2157984" y="783336"/>
-              <a:ext cx="192024" cy="48767"/>
+              <a:off x="1682496" y="783336"/>
+              <a:ext cx="192024" cy="146304"/>
             </a:xfrm>
             <a:prstGeom prst="line">
               <a:avLst/>
@@ -6182,8 +6141,8 @@
             <p:nvPr/>
           </p:nvCxnSpPr>
           <p:spPr>
-            <a:xfrm>
-              <a:off x="2157984" y="783336"/>
+            <a:xfrm flipV="1">
+              <a:off x="1682496" y="734567"/>
               <a:ext cx="192024" cy="146304"/>
             </a:xfrm>
             <a:prstGeom prst="line">
@@ -6219,8 +6178,8 @@
           </p:nvCxnSpPr>
           <p:spPr>
             <a:xfrm flipV="1">
-              <a:off x="2157984" y="734567"/>
-              <a:ext cx="192024" cy="146304"/>
+              <a:off x="1682496" y="832103"/>
+              <a:ext cx="192024" cy="48768"/>
             </a:xfrm>
             <a:prstGeom prst="line">
               <a:avLst/>
@@ -6254,9 +6213,9 @@
             <p:nvPr/>
           </p:nvCxnSpPr>
           <p:spPr>
-            <a:xfrm flipV="1">
-              <a:off x="2157984" y="832103"/>
-              <a:ext cx="192024" cy="48768"/>
+            <a:xfrm>
+              <a:off x="1682496" y="880871"/>
+              <a:ext cx="192024" cy="48769"/>
             </a:xfrm>
             <a:prstGeom prst="line">
               <a:avLst/>
@@ -6290,9 +6249,9 @@
             <p:nvPr/>
           </p:nvCxnSpPr>
           <p:spPr>
-            <a:xfrm>
-              <a:off x="2157984" y="880871"/>
-              <a:ext cx="192024" cy="48769"/>
+            <a:xfrm flipV="1">
+              <a:off x="1682496" y="734567"/>
+              <a:ext cx="192024" cy="243840"/>
             </a:xfrm>
             <a:prstGeom prst="line">
               <a:avLst/>
@@ -6327,8 +6286,8 @@
           </p:nvCxnSpPr>
           <p:spPr>
             <a:xfrm flipV="1">
-              <a:off x="2157984" y="734567"/>
-              <a:ext cx="192024" cy="243840"/>
+              <a:off x="1682496" y="832103"/>
+              <a:ext cx="192024" cy="146304"/>
             </a:xfrm>
             <a:prstGeom prst="line">
               <a:avLst/>
@@ -6363,8 +6322,8 @@
           </p:nvCxnSpPr>
           <p:spPr>
             <a:xfrm flipV="1">
-              <a:off x="2157984" y="832103"/>
-              <a:ext cx="192024" cy="146304"/>
+              <a:off x="1682496" y="929640"/>
+              <a:ext cx="192024" cy="48767"/>
             </a:xfrm>
             <a:prstGeom prst="line">
               <a:avLst/>
@@ -6391,42 +6350,50 @@
             </a:fontRef>
           </p:style>
         </p:cxnSp>
-        <p:cxnSp>
-          <p:nvCxnSpPr>
-            <p:cNvPr id="82" name="Connector 81"/>
-            <p:cNvCxnSpPr/>
-            <p:nvPr/>
-          </p:nvCxnSpPr>
-          <p:spPr>
-            <a:xfrm flipV="1">
-              <a:off x="2157984" y="929640"/>
-              <a:ext cx="192024" cy="48767"/>
-            </a:xfrm>
-            <a:prstGeom prst="line">
-              <a:avLst/>
-            </a:prstGeom>
-            <a:ln w="4445">
-              <a:solidFill>
-                <a:srgbClr val="E3B48A"/>
-              </a:solidFill>
-            </a:ln>
-            <a:effectLst/>
-          </p:spPr>
-          <p:style>
-            <a:lnRef idx="2">
-              <a:schemeClr val="accent1"/>
-            </a:lnRef>
-            <a:fillRef idx="0">
-              <a:schemeClr val="accent1"/>
-            </a:fillRef>
-            <a:effectRef idx="1">
-              <a:schemeClr val="accent1"/>
-            </a:effectRef>
-            <a:fontRef idx="minor">
-              <a:schemeClr val="tx1"/>
-            </a:fontRef>
-          </p:style>
-        </p:cxnSp>
+        <p:sp>
+          <p:nvSpPr>
+            <p:cNvPr id="82" name="Oval 81"/>
+            <p:cNvSpPr/>
+            <p:nvPr/>
+          </p:nvSpPr>
+          <p:spPr>
+            <a:xfrm>
+              <a:off x="1466267" y="710363"/>
+              <a:ext cx="48409" cy="48409"/>
+            </a:xfrm>
+            <a:prstGeom prst="ellipse">
+              <a:avLst/>
+            </a:prstGeom>
+            <a:solidFill>
+              <a:srgbClr val="A65E1A"/>
+            </a:solidFill>
+            <a:ln>
+              <a:noFill/>
+            </a:ln>
+            <a:effectLst/>
+          </p:spPr>
+          <p:style>
+            <a:lnRef idx="1">
+              <a:schemeClr val="accent1"/>
+            </a:lnRef>
+            <a:fillRef idx="3">
+              <a:schemeClr val="accent1"/>
+            </a:fillRef>
+            <a:effectRef idx="2">
+              <a:schemeClr val="accent1"/>
+            </a:effectRef>
+            <a:fontRef idx="minor">
+              <a:schemeClr val="lt1"/>
+            </a:fontRef>
+          </p:style>
+          <p:txBody>
+            <a:bodyPr rtlCol="0" anchor="ctr"/>
+            <a:lstStyle/>
+            <a:p>
+              <a:pPr algn="ctr"/>
+            </a:p>
+          </p:txBody>
+        </p:sp>
         <p:sp>
           <p:nvSpPr>
             <p:cNvPr id="83" name="Oval 82"/>
@@ -6435,7 +6402,7 @@
           </p:nvSpPr>
           <p:spPr>
             <a:xfrm>
-              <a:off x="1941755" y="710363"/>
+              <a:off x="1466267" y="807899"/>
               <a:ext cx="48409" cy="48409"/>
             </a:xfrm>
             <a:prstGeom prst="ellipse">
@@ -6479,7 +6446,7 @@
           </p:nvSpPr>
           <p:spPr>
             <a:xfrm>
-              <a:off x="1941755" y="807899"/>
+              <a:off x="1466267" y="905435"/>
               <a:ext cx="48409" cy="48409"/>
             </a:xfrm>
             <a:prstGeom prst="ellipse">
@@ -6523,7 +6490,7 @@
           </p:nvSpPr>
           <p:spPr>
             <a:xfrm>
-              <a:off x="1941755" y="905435"/>
+              <a:off x="1658291" y="661595"/>
               <a:ext cx="48409" cy="48409"/>
             </a:xfrm>
             <a:prstGeom prst="ellipse">
@@ -6567,7 +6534,7 @@
           </p:nvSpPr>
           <p:spPr>
             <a:xfrm>
-              <a:off x="2133779" y="661595"/>
+              <a:off x="1658291" y="759131"/>
               <a:ext cx="48409" cy="48409"/>
             </a:xfrm>
             <a:prstGeom prst="ellipse">
@@ -6611,7 +6578,7 @@
           </p:nvSpPr>
           <p:spPr>
             <a:xfrm>
-              <a:off x="2133779" y="759131"/>
+              <a:off x="1658291" y="856667"/>
               <a:ext cx="48409" cy="48409"/>
             </a:xfrm>
             <a:prstGeom prst="ellipse">
@@ -6655,7 +6622,7 @@
           </p:nvSpPr>
           <p:spPr>
             <a:xfrm>
-              <a:off x="2133779" y="856667"/>
+              <a:off x="1658291" y="954203"/>
               <a:ext cx="48409" cy="48409"/>
             </a:xfrm>
             <a:prstGeom prst="ellipse">
@@ -6699,7 +6666,7 @@
           </p:nvSpPr>
           <p:spPr>
             <a:xfrm>
-              <a:off x="2133779" y="954203"/>
+              <a:off x="1850315" y="710363"/>
               <a:ext cx="48409" cy="48409"/>
             </a:xfrm>
             <a:prstGeom prst="ellipse">
@@ -6743,7 +6710,7 @@
           </p:nvSpPr>
           <p:spPr>
             <a:xfrm>
-              <a:off x="2325803" y="710363"/>
+              <a:off x="1850315" y="807899"/>
               <a:ext cx="48409" cy="48409"/>
             </a:xfrm>
             <a:prstGeom prst="ellipse">
@@ -6787,51 +6754,7 @@
           </p:nvSpPr>
           <p:spPr>
             <a:xfrm>
-              <a:off x="2325803" y="807899"/>
-              <a:ext cx="48409" cy="48409"/>
-            </a:xfrm>
-            <a:prstGeom prst="ellipse">
-              <a:avLst/>
-            </a:prstGeom>
-            <a:solidFill>
-              <a:srgbClr val="A65E1A"/>
-            </a:solidFill>
-            <a:ln>
-              <a:noFill/>
-            </a:ln>
-            <a:effectLst/>
-          </p:spPr>
-          <p:style>
-            <a:lnRef idx="1">
-              <a:schemeClr val="accent1"/>
-            </a:lnRef>
-            <a:fillRef idx="3">
-              <a:schemeClr val="accent1"/>
-            </a:fillRef>
-            <a:effectRef idx="2">
-              <a:schemeClr val="accent1"/>
-            </a:effectRef>
-            <a:fontRef idx="minor">
-              <a:schemeClr val="lt1"/>
-            </a:fontRef>
-          </p:style>
-          <p:txBody>
-            <a:bodyPr rtlCol="0" anchor="ctr"/>
-            <a:lstStyle/>
-            <a:p>
-              <a:pPr algn="ctr"/>
-            </a:p>
-          </p:txBody>
-        </p:sp>
-        <p:sp>
-          <p:nvSpPr>
-            <p:cNvPr id="92" name="Oval 91"/>
-            <p:cNvSpPr/>
-            <p:nvPr/>
-          </p:nvSpPr>
-          <p:spPr>
-            <a:xfrm>
-              <a:off x="2325803" y="905435"/>
+              <a:off x="1850315" y="905435"/>
               <a:ext cx="48409" cy="48409"/>
             </a:xfrm>
             <a:prstGeom prst="ellipse">
@@ -6870,13 +6793,13 @@
       </p:grpSp>
       <p:sp>
         <p:nvSpPr>
-          <p:cNvPr id="93" name="TextBox 92"/>
+          <p:cNvPr id="92" name="TextBox 91"/>
           <p:cNvSpPr txBox="1"/>
           <p:nvPr/>
         </p:nvSpPr>
         <p:spPr>
           <a:xfrm>
-            <a:off x="1810512" y="1033272"/>
+            <a:off x="1335024" y="1033272"/>
             <a:ext cx="731520" cy="128016"/>
           </a:xfrm>
           <a:prstGeom prst="rect">
@@ -6943,66 +6866,29 @@
           </a:p>
         </p:txBody>
       </p:sp>
-      <p:cxnSp>
-        <p:nvCxnSpPr>
-          <p:cNvPr id="94" name="Connector 93"/>
-          <p:cNvCxnSpPr/>
-          <p:nvPr/>
-        </p:nvCxnSpPr>
-        <p:spPr>
-          <a:xfrm>
-            <a:off x="1737360" y="841247"/>
-            <a:ext cx="164592" cy="0"/>
-          </a:xfrm>
-          <a:prstGeom prst="line">
-            <a:avLst/>
-          </a:prstGeom>
-          <a:ln w="11430">
-            <a:solidFill>
-              <a:srgbClr val="A65E1A"/>
-            </a:solidFill>
-            <a:tailEnd type="triangle" w="sm" len="sm"/>
-          </a:ln>
-          <a:effectLst/>
-        </p:spPr>
-        <p:style>
-          <a:lnRef idx="2">
-            <a:schemeClr val="accent1"/>
-          </a:lnRef>
-          <a:fillRef idx="0">
-            <a:schemeClr val="accent1"/>
-          </a:fillRef>
-          <a:effectRef idx="1">
-            <a:schemeClr val="accent1"/>
-          </a:effectRef>
-          <a:fontRef idx="minor">
-            <a:schemeClr val="tx1"/>
-          </a:fontRef>
-        </p:style>
-      </p:cxnSp>
       <p:grpSp>
         <p:nvGrpSpPr>
-          <p:cNvPr id="95" name="protagonist"/>
+          <p:cNvPr id="93" name="protagonist"/>
           <p:cNvGrpSpPr/>
           <p:nvPr/>
         </p:nvGrpSpPr>
         <p:grpSpPr>
           <a:xfrm>
-            <a:off x="2724912" y="548640"/>
+            <a:off x="2286000" y="548640"/>
             <a:ext cx="402336" cy="274320"/>
-            <a:chOff x="2724912" y="548640"/>
+            <a:chOff x="2286000" y="548640"/>
             <a:chExt cx="402336" cy="274320"/>
           </a:xfrm>
         </p:grpSpPr>
         <p:sp>
           <p:nvSpPr>
-            <p:cNvPr id="96" name="Rounded Rectangle 95"/>
+            <p:cNvPr id="94" name="Rounded Rectangle 93"/>
             <p:cNvSpPr/>
             <p:nvPr/>
           </p:nvSpPr>
           <p:spPr>
             <a:xfrm>
-              <a:off x="2724912" y="548640"/>
+              <a:off x="2286000" y="548640"/>
               <a:ext cx="402336" cy="274320"/>
             </a:xfrm>
             <a:prstGeom prst="roundRect">
@@ -7044,14 +6930,86 @@
         </p:sp>
         <p:cxnSp>
           <p:nvCxnSpPr>
+            <p:cNvPr id="95" name="Connector 94"/>
+            <p:cNvCxnSpPr/>
+            <p:nvPr/>
+          </p:nvCxnSpPr>
+          <p:spPr>
+            <a:xfrm>
+              <a:off x="2350008" y="594360"/>
+              <a:ext cx="137160" cy="0"/>
+            </a:xfrm>
+            <a:prstGeom prst="line">
+              <a:avLst/>
+            </a:prstGeom>
+            <a:ln w="4445">
+              <a:solidFill>
+                <a:srgbClr val="E3B48A"/>
+              </a:solidFill>
+            </a:ln>
+            <a:effectLst/>
+          </p:spPr>
+          <p:style>
+            <a:lnRef idx="2">
+              <a:schemeClr val="accent1"/>
+            </a:lnRef>
+            <a:fillRef idx="0">
+              <a:schemeClr val="accent1"/>
+            </a:fillRef>
+            <a:effectRef idx="1">
+              <a:schemeClr val="accent1"/>
+            </a:effectRef>
+            <a:fontRef idx="minor">
+              <a:schemeClr val="tx1"/>
+            </a:fontRef>
+          </p:style>
+        </p:cxnSp>
+        <p:cxnSp>
+          <p:nvCxnSpPr>
+            <p:cNvPr id="96" name="Connector 95"/>
+            <p:cNvCxnSpPr/>
+            <p:nvPr/>
+          </p:nvCxnSpPr>
+          <p:spPr>
+            <a:xfrm>
+              <a:off x="2350008" y="594360"/>
+              <a:ext cx="137160" cy="91440"/>
+            </a:xfrm>
+            <a:prstGeom prst="line">
+              <a:avLst/>
+            </a:prstGeom>
+            <a:ln w="4445">
+              <a:solidFill>
+                <a:srgbClr val="E3B48A"/>
+              </a:solidFill>
+            </a:ln>
+            <a:effectLst/>
+          </p:spPr>
+          <p:style>
+            <a:lnRef idx="2">
+              <a:schemeClr val="accent1"/>
+            </a:lnRef>
+            <a:fillRef idx="0">
+              <a:schemeClr val="accent1"/>
+            </a:fillRef>
+            <a:effectRef idx="1">
+              <a:schemeClr val="accent1"/>
+            </a:effectRef>
+            <a:fontRef idx="minor">
+              <a:schemeClr val="tx1"/>
+            </a:fontRef>
+          </p:style>
+        </p:cxnSp>
+        <p:cxnSp>
+          <p:nvCxnSpPr>
             <p:cNvPr id="97" name="Connector 96"/>
             <p:cNvCxnSpPr/>
             <p:nvPr/>
           </p:nvCxnSpPr>
           <p:spPr>
             <a:xfrm>
-              <a:off x="2788920" y="594360"/>
-              <a:ext cx="137160" cy="0"/>
+              <a:off x="2350008" y="594360"/>
+              <a:ext cx="137160" cy="182880"/>
             </a:xfrm>
             <a:prstGeom prst="line">
               <a:avLst/>
@@ -7085,8 +7043,8 @@
             <p:nvPr/>
           </p:nvCxnSpPr>
           <p:spPr>
-            <a:xfrm>
-              <a:off x="2788920" y="594360"/>
+            <a:xfrm flipV="1">
+              <a:off x="2350008" y="594360"/>
               <a:ext cx="137160" cy="91440"/>
             </a:xfrm>
             <a:prstGeom prst="line">
@@ -7122,8 +7080,8 @@
           </p:nvCxnSpPr>
           <p:spPr>
             <a:xfrm>
-              <a:off x="2788920" y="594360"/>
-              <a:ext cx="137160" cy="182880"/>
+              <a:off x="2350008" y="685800"/>
+              <a:ext cx="137160" cy="0"/>
             </a:xfrm>
             <a:prstGeom prst="line">
               <a:avLst/>
@@ -7157,8 +7115,8 @@
             <p:nvPr/>
           </p:nvCxnSpPr>
           <p:spPr>
-            <a:xfrm flipV="1">
-              <a:off x="2788920" y="594360"/>
+            <a:xfrm>
+              <a:off x="2350008" y="685800"/>
               <a:ext cx="137160" cy="91440"/>
             </a:xfrm>
             <a:prstGeom prst="line">
@@ -7193,9 +7151,9 @@
             <p:nvPr/>
           </p:nvCxnSpPr>
           <p:spPr>
-            <a:xfrm>
-              <a:off x="2788920" y="685800"/>
-              <a:ext cx="137160" cy="0"/>
+            <a:xfrm flipV="1">
+              <a:off x="2350008" y="594360"/>
+              <a:ext cx="137160" cy="182880"/>
             </a:xfrm>
             <a:prstGeom prst="line">
               <a:avLst/>
@@ -7229,8 +7187,8 @@
             <p:nvPr/>
           </p:nvCxnSpPr>
           <p:spPr>
-            <a:xfrm>
-              <a:off x="2788920" y="685800"/>
+            <a:xfrm flipV="1">
+              <a:off x="2350008" y="685800"/>
               <a:ext cx="137160" cy="91440"/>
             </a:xfrm>
             <a:prstGeom prst="line">
@@ -7265,9 +7223,9 @@
             <p:nvPr/>
           </p:nvCxnSpPr>
           <p:spPr>
-            <a:xfrm flipV="1">
-              <a:off x="2788920" y="594360"/>
-              <a:ext cx="137160" cy="182880"/>
+            <a:xfrm>
+              <a:off x="2350008" y="777240"/>
+              <a:ext cx="137160" cy="0"/>
             </a:xfrm>
             <a:prstGeom prst="line">
               <a:avLst/>
@@ -7301,9 +7259,9 @@
             <p:nvPr/>
           </p:nvCxnSpPr>
           <p:spPr>
-            <a:xfrm flipV="1">
-              <a:off x="2788920" y="685800"/>
-              <a:ext cx="137160" cy="91440"/>
+            <a:xfrm>
+              <a:off x="2487168" y="594360"/>
+              <a:ext cx="137159" cy="45720"/>
             </a:xfrm>
             <a:prstGeom prst="line">
               <a:avLst/>
@@ -7338,8 +7296,8 @@
           </p:nvCxnSpPr>
           <p:spPr>
             <a:xfrm>
-              <a:off x="2788920" y="777240"/>
-              <a:ext cx="137160" cy="0"/>
+              <a:off x="2487168" y="594360"/>
+              <a:ext cx="137159" cy="137160"/>
             </a:xfrm>
             <a:prstGeom prst="line">
               <a:avLst/>
@@ -7373,9 +7331,9 @@
             <p:nvPr/>
           </p:nvCxnSpPr>
           <p:spPr>
-            <a:xfrm>
-              <a:off x="2926080" y="594360"/>
-              <a:ext cx="137160" cy="45720"/>
+            <a:xfrm flipV="1">
+              <a:off x="2487168" y="640080"/>
+              <a:ext cx="137159" cy="45720"/>
             </a:xfrm>
             <a:prstGeom prst="line">
               <a:avLst/>
@@ -7410,8 +7368,8 @@
           </p:nvCxnSpPr>
           <p:spPr>
             <a:xfrm>
-              <a:off x="2926080" y="594360"/>
-              <a:ext cx="137160" cy="137160"/>
+              <a:off x="2487168" y="685800"/>
+              <a:ext cx="137159" cy="45720"/>
             </a:xfrm>
             <a:prstGeom prst="line">
               <a:avLst/>
@@ -7446,8 +7404,8 @@
           </p:nvCxnSpPr>
           <p:spPr>
             <a:xfrm flipV="1">
-              <a:off x="2926080" y="640080"/>
-              <a:ext cx="137160" cy="45720"/>
+              <a:off x="2487168" y="640080"/>
+              <a:ext cx="137159" cy="137160"/>
             </a:xfrm>
             <a:prstGeom prst="line">
               <a:avLst/>
@@ -7481,9 +7439,9 @@
             <p:nvPr/>
           </p:nvCxnSpPr>
           <p:spPr>
-            <a:xfrm>
-              <a:off x="2926080" y="685800"/>
-              <a:ext cx="137160" cy="45720"/>
+            <a:xfrm flipV="1">
+              <a:off x="2487168" y="731520"/>
+              <a:ext cx="137159" cy="45720"/>
             </a:xfrm>
             <a:prstGeom prst="line">
               <a:avLst/>
@@ -7510,78 +7468,94 @@
             </a:fontRef>
           </p:style>
         </p:cxnSp>
-        <p:cxnSp>
-          <p:nvCxnSpPr>
-            <p:cNvPr id="110" name="Connector 109"/>
-            <p:cNvCxnSpPr/>
-            <p:nvPr/>
-          </p:nvCxnSpPr>
-          <p:spPr>
-            <a:xfrm flipV="1">
-              <a:off x="2926080" y="640080"/>
-              <a:ext cx="137160" cy="137160"/>
-            </a:xfrm>
-            <a:prstGeom prst="line">
-              <a:avLst/>
-            </a:prstGeom>
-            <a:ln w="4445">
-              <a:solidFill>
-                <a:srgbClr val="E3B48A"/>
-              </a:solidFill>
-            </a:ln>
-            <a:effectLst/>
-          </p:spPr>
-          <p:style>
-            <a:lnRef idx="2">
-              <a:schemeClr val="accent1"/>
-            </a:lnRef>
-            <a:fillRef idx="0">
-              <a:schemeClr val="accent1"/>
-            </a:fillRef>
-            <a:effectRef idx="1">
-              <a:schemeClr val="accent1"/>
-            </a:effectRef>
-            <a:fontRef idx="minor">
-              <a:schemeClr val="tx1"/>
-            </a:fontRef>
-          </p:style>
-        </p:cxnSp>
-        <p:cxnSp>
-          <p:nvCxnSpPr>
-            <p:cNvPr id="111" name="Connector 110"/>
-            <p:cNvCxnSpPr/>
-            <p:nvPr/>
-          </p:nvCxnSpPr>
-          <p:spPr>
-            <a:xfrm flipV="1">
-              <a:off x="2926080" y="731520"/>
-              <a:ext cx="137160" cy="45720"/>
-            </a:xfrm>
-            <a:prstGeom prst="line">
-              <a:avLst/>
-            </a:prstGeom>
-            <a:ln w="4445">
-              <a:solidFill>
-                <a:srgbClr val="E3B48A"/>
-              </a:solidFill>
-            </a:ln>
-            <a:effectLst/>
-          </p:spPr>
-          <p:style>
-            <a:lnRef idx="2">
-              <a:schemeClr val="accent1"/>
-            </a:lnRef>
-            <a:fillRef idx="0">
-              <a:schemeClr val="accent1"/>
-            </a:fillRef>
-            <a:effectRef idx="1">
-              <a:schemeClr val="accent1"/>
-            </a:effectRef>
-            <a:fontRef idx="minor">
-              <a:schemeClr val="tx1"/>
-            </a:fontRef>
-          </p:style>
-        </p:cxnSp>
+        <p:sp>
+          <p:nvSpPr>
+            <p:cNvPr id="110" name="Oval 109"/>
+            <p:cNvSpPr/>
+            <p:nvPr/>
+          </p:nvSpPr>
+          <p:spPr>
+            <a:xfrm>
+              <a:off x="2328492" y="572844"/>
+              <a:ext cx="43030" cy="43030"/>
+            </a:xfrm>
+            <a:prstGeom prst="ellipse">
+              <a:avLst/>
+            </a:prstGeom>
+            <a:solidFill>
+              <a:srgbClr val="A65E1A"/>
+            </a:solidFill>
+            <a:ln>
+              <a:noFill/>
+            </a:ln>
+            <a:effectLst/>
+          </p:spPr>
+          <p:style>
+            <a:lnRef idx="1">
+              <a:schemeClr val="accent1"/>
+            </a:lnRef>
+            <a:fillRef idx="3">
+              <a:schemeClr val="accent1"/>
+            </a:fillRef>
+            <a:effectRef idx="2">
+              <a:schemeClr val="accent1"/>
+            </a:effectRef>
+            <a:fontRef idx="minor">
+              <a:schemeClr val="lt1"/>
+            </a:fontRef>
+          </p:style>
+          <p:txBody>
+            <a:bodyPr rtlCol="0" anchor="ctr"/>
+            <a:lstStyle/>
+            <a:p>
+              <a:pPr algn="ctr"/>
+            </a:p>
+          </p:txBody>
+        </p:sp>
+        <p:sp>
+          <p:nvSpPr>
+            <p:cNvPr id="111" name="Oval 110"/>
+            <p:cNvSpPr/>
+            <p:nvPr/>
+          </p:nvSpPr>
+          <p:spPr>
+            <a:xfrm>
+              <a:off x="2328492" y="664284"/>
+              <a:ext cx="43030" cy="43030"/>
+            </a:xfrm>
+            <a:prstGeom prst="ellipse">
+              <a:avLst/>
+            </a:prstGeom>
+            <a:solidFill>
+              <a:srgbClr val="A65E1A"/>
+            </a:solidFill>
+            <a:ln>
+              <a:noFill/>
+            </a:ln>
+            <a:effectLst/>
+          </p:spPr>
+          <p:style>
+            <a:lnRef idx="1">
+              <a:schemeClr val="accent1"/>
+            </a:lnRef>
+            <a:fillRef idx="3">
+              <a:schemeClr val="accent1"/>
+            </a:fillRef>
+            <a:effectRef idx="2">
+              <a:schemeClr val="accent1"/>
+            </a:effectRef>
+            <a:fontRef idx="minor">
+              <a:schemeClr val="lt1"/>
+            </a:fontRef>
+          </p:style>
+          <p:txBody>
+            <a:bodyPr rtlCol="0" anchor="ctr"/>
+            <a:lstStyle/>
+            <a:p>
+              <a:pPr algn="ctr"/>
+            </a:p>
+          </p:txBody>
+        </p:sp>
         <p:sp>
           <p:nvSpPr>
             <p:cNvPr id="112" name="Oval 111"/>
@@ -7590,7 +7564,7 @@
           </p:nvSpPr>
           <p:spPr>
             <a:xfrm>
-              <a:off x="2767404" y="572844"/>
+              <a:off x="2328492" y="755724"/>
               <a:ext cx="43030" cy="43030"/>
             </a:xfrm>
             <a:prstGeom prst="ellipse">
@@ -7634,7 +7608,7 @@
           </p:nvSpPr>
           <p:spPr>
             <a:xfrm>
-              <a:off x="2767404" y="664284"/>
+              <a:off x="2465652" y="572844"/>
               <a:ext cx="43030" cy="43030"/>
             </a:xfrm>
             <a:prstGeom prst="ellipse">
@@ -7678,7 +7652,7 @@
           </p:nvSpPr>
           <p:spPr>
             <a:xfrm>
-              <a:off x="2767404" y="755724"/>
+              <a:off x="2465652" y="664284"/>
               <a:ext cx="43030" cy="43030"/>
             </a:xfrm>
             <a:prstGeom prst="ellipse">
@@ -7722,7 +7696,7 @@
           </p:nvSpPr>
           <p:spPr>
             <a:xfrm>
-              <a:off x="2904564" y="572844"/>
+              <a:off x="2465652" y="755724"/>
               <a:ext cx="43030" cy="43030"/>
             </a:xfrm>
             <a:prstGeom prst="ellipse">
@@ -7766,7 +7740,7 @@
           </p:nvSpPr>
           <p:spPr>
             <a:xfrm>
-              <a:off x="2904564" y="664284"/>
+              <a:off x="2602812" y="618564"/>
               <a:ext cx="43030" cy="43030"/>
             </a:xfrm>
             <a:prstGeom prst="ellipse">
@@ -7810,95 +7784,7 @@
           </p:nvSpPr>
           <p:spPr>
             <a:xfrm>
-              <a:off x="2904564" y="755724"/>
-              <a:ext cx="43030" cy="43030"/>
-            </a:xfrm>
-            <a:prstGeom prst="ellipse">
-              <a:avLst/>
-            </a:prstGeom>
-            <a:solidFill>
-              <a:srgbClr val="A65E1A"/>
-            </a:solidFill>
-            <a:ln>
-              <a:noFill/>
-            </a:ln>
-            <a:effectLst/>
-          </p:spPr>
-          <p:style>
-            <a:lnRef idx="1">
-              <a:schemeClr val="accent1"/>
-            </a:lnRef>
-            <a:fillRef idx="3">
-              <a:schemeClr val="accent1"/>
-            </a:fillRef>
-            <a:effectRef idx="2">
-              <a:schemeClr val="accent1"/>
-            </a:effectRef>
-            <a:fontRef idx="minor">
-              <a:schemeClr val="lt1"/>
-            </a:fontRef>
-          </p:style>
-          <p:txBody>
-            <a:bodyPr rtlCol="0" anchor="ctr"/>
-            <a:lstStyle/>
-            <a:p>
-              <a:pPr algn="ctr"/>
-            </a:p>
-          </p:txBody>
-        </p:sp>
-        <p:sp>
-          <p:nvSpPr>
-            <p:cNvPr id="118" name="Oval 117"/>
-            <p:cNvSpPr/>
-            <p:nvPr/>
-          </p:nvSpPr>
-          <p:spPr>
-            <a:xfrm>
-              <a:off x="3041724" y="618564"/>
-              <a:ext cx="43030" cy="43030"/>
-            </a:xfrm>
-            <a:prstGeom prst="ellipse">
-              <a:avLst/>
-            </a:prstGeom>
-            <a:solidFill>
-              <a:srgbClr val="A65E1A"/>
-            </a:solidFill>
-            <a:ln>
-              <a:noFill/>
-            </a:ln>
-            <a:effectLst/>
-          </p:spPr>
-          <p:style>
-            <a:lnRef idx="1">
-              <a:schemeClr val="accent1"/>
-            </a:lnRef>
-            <a:fillRef idx="3">
-              <a:schemeClr val="accent1"/>
-            </a:fillRef>
-            <a:effectRef idx="2">
-              <a:schemeClr val="accent1"/>
-            </a:effectRef>
-            <a:fontRef idx="minor">
-              <a:schemeClr val="lt1"/>
-            </a:fontRef>
-          </p:style>
-          <p:txBody>
-            <a:bodyPr rtlCol="0" anchor="ctr"/>
-            <a:lstStyle/>
-            <a:p>
-              <a:pPr algn="ctr"/>
-            </a:p>
-          </p:txBody>
-        </p:sp>
-        <p:sp>
-          <p:nvSpPr>
-            <p:cNvPr id="119" name="Oval 118"/>
-            <p:cNvSpPr/>
-            <p:nvPr/>
-          </p:nvSpPr>
-          <p:spPr>
-            <a:xfrm>
-              <a:off x="3041724" y="710004"/>
+              <a:off x="2602812" y="710004"/>
               <a:ext cx="43030" cy="43030"/>
             </a:xfrm>
             <a:prstGeom prst="ellipse">
@@ -7937,27 +7823,27 @@
       </p:grpSp>
       <p:grpSp>
         <p:nvGrpSpPr>
-          <p:cNvPr id="120" name="adversary"/>
+          <p:cNvPr id="118" name="adversary"/>
           <p:cNvGrpSpPr/>
           <p:nvPr/>
         </p:nvGrpSpPr>
         <p:grpSpPr>
           <a:xfrm>
-            <a:off x="2724912" y="896112"/>
+            <a:off x="2286000" y="896112"/>
             <a:ext cx="402336" cy="274320"/>
-            <a:chOff x="2724912" y="896112"/>
+            <a:chOff x="2286000" y="896112"/>
             <a:chExt cx="402336" cy="274320"/>
           </a:xfrm>
         </p:grpSpPr>
         <p:sp>
           <p:nvSpPr>
-            <p:cNvPr id="121" name="Rounded Rectangle 120"/>
+            <p:cNvPr id="119" name="Rounded Rectangle 118"/>
             <p:cNvSpPr/>
             <p:nvPr/>
           </p:nvSpPr>
           <p:spPr>
             <a:xfrm>
-              <a:off x="2724912" y="896112"/>
+              <a:off x="2286000" y="896112"/>
               <a:ext cx="402336" cy="274320"/>
             </a:xfrm>
             <a:prstGeom prst="roundRect">
@@ -7999,14 +7885,86 @@
         </p:sp>
         <p:cxnSp>
           <p:nvCxnSpPr>
+            <p:cNvPr id="120" name="Connector 119"/>
+            <p:cNvCxnSpPr/>
+            <p:nvPr/>
+          </p:nvCxnSpPr>
+          <p:spPr>
+            <a:xfrm>
+              <a:off x="2350008" y="941831"/>
+              <a:ext cx="137160" cy="0"/>
+            </a:xfrm>
+            <a:prstGeom prst="line">
+              <a:avLst/>
+            </a:prstGeom>
+            <a:ln w="4445">
+              <a:solidFill>
+                <a:srgbClr val="E3B48A"/>
+              </a:solidFill>
+            </a:ln>
+            <a:effectLst/>
+          </p:spPr>
+          <p:style>
+            <a:lnRef idx="2">
+              <a:schemeClr val="accent1"/>
+            </a:lnRef>
+            <a:fillRef idx="0">
+              <a:schemeClr val="accent1"/>
+            </a:fillRef>
+            <a:effectRef idx="1">
+              <a:schemeClr val="accent1"/>
+            </a:effectRef>
+            <a:fontRef idx="minor">
+              <a:schemeClr val="tx1"/>
+            </a:fontRef>
+          </p:style>
+        </p:cxnSp>
+        <p:cxnSp>
+          <p:nvCxnSpPr>
+            <p:cNvPr id="121" name="Connector 120"/>
+            <p:cNvCxnSpPr/>
+            <p:nvPr/>
+          </p:nvCxnSpPr>
+          <p:spPr>
+            <a:xfrm>
+              <a:off x="2350008" y="941831"/>
+              <a:ext cx="137160" cy="91440"/>
+            </a:xfrm>
+            <a:prstGeom prst="line">
+              <a:avLst/>
+            </a:prstGeom>
+            <a:ln w="4445">
+              <a:solidFill>
+                <a:srgbClr val="E3B48A"/>
+              </a:solidFill>
+            </a:ln>
+            <a:effectLst/>
+          </p:spPr>
+          <p:style>
+            <a:lnRef idx="2">
+              <a:schemeClr val="accent1"/>
+            </a:lnRef>
+            <a:fillRef idx="0">
+              <a:schemeClr val="accent1"/>
+            </a:fillRef>
+            <a:effectRef idx="1">
+              <a:schemeClr val="accent1"/>
+            </a:effectRef>
+            <a:fontRef idx="minor">
+              <a:schemeClr val="tx1"/>
+            </a:fontRef>
+          </p:style>
+        </p:cxnSp>
+        <p:cxnSp>
+          <p:nvCxnSpPr>
             <p:cNvPr id="122" name="Connector 121"/>
             <p:cNvCxnSpPr/>
             <p:nvPr/>
           </p:nvCxnSpPr>
           <p:spPr>
             <a:xfrm>
-              <a:off x="2788920" y="941831"/>
-              <a:ext cx="137160" cy="0"/>
+              <a:off x="2350008" y="941831"/>
+              <a:ext cx="137160" cy="182880"/>
             </a:xfrm>
             <a:prstGeom prst="line">
               <a:avLst/>
@@ -8040,8 +7998,8 @@
             <p:nvPr/>
           </p:nvCxnSpPr>
           <p:spPr>
-            <a:xfrm>
-              <a:off x="2788920" y="941831"/>
+            <a:xfrm flipV="1">
+              <a:off x="2350008" y="941831"/>
               <a:ext cx="137160" cy="91440"/>
             </a:xfrm>
             <a:prstGeom prst="line">
@@ -8077,8 +8035,8 @@
           </p:nvCxnSpPr>
           <p:spPr>
             <a:xfrm>
-              <a:off x="2788920" y="941831"/>
-              <a:ext cx="137160" cy="182880"/>
+              <a:off x="2350008" y="1033271"/>
+              <a:ext cx="137160" cy="0"/>
             </a:xfrm>
             <a:prstGeom prst="line">
               <a:avLst/>
@@ -8112,8 +8070,8 @@
             <p:nvPr/>
           </p:nvCxnSpPr>
           <p:spPr>
-            <a:xfrm flipV="1">
-              <a:off x="2788920" y="941831"/>
+            <a:xfrm>
+              <a:off x="2350008" y="1033271"/>
               <a:ext cx="137160" cy="91440"/>
             </a:xfrm>
             <a:prstGeom prst="line">
@@ -8148,9 +8106,9 @@
             <p:nvPr/>
           </p:nvCxnSpPr>
           <p:spPr>
-            <a:xfrm>
-              <a:off x="2788920" y="1033271"/>
-              <a:ext cx="137160" cy="0"/>
+            <a:xfrm flipV="1">
+              <a:off x="2350008" y="941831"/>
+              <a:ext cx="137160" cy="182880"/>
             </a:xfrm>
             <a:prstGeom prst="line">
               <a:avLst/>
@@ -8184,8 +8142,8 @@
             <p:nvPr/>
           </p:nvCxnSpPr>
           <p:spPr>
-            <a:xfrm>
-              <a:off x="2788920" y="1033271"/>
+            <a:xfrm flipV="1">
+              <a:off x="2350008" y="1033271"/>
               <a:ext cx="137160" cy="91440"/>
             </a:xfrm>
             <a:prstGeom prst="line">
@@ -8220,9 +8178,9 @@
             <p:nvPr/>
           </p:nvCxnSpPr>
           <p:spPr>
-            <a:xfrm flipV="1">
-              <a:off x="2788920" y="941831"/>
-              <a:ext cx="137160" cy="182880"/>
+            <a:xfrm>
+              <a:off x="2350008" y="1124711"/>
+              <a:ext cx="137160" cy="0"/>
             </a:xfrm>
             <a:prstGeom prst="line">
               <a:avLst/>
@@ -8256,9 +8214,9 @@
             <p:nvPr/>
           </p:nvCxnSpPr>
           <p:spPr>
-            <a:xfrm flipV="1">
-              <a:off x="2788920" y="1033271"/>
-              <a:ext cx="137160" cy="91440"/>
+            <a:xfrm>
+              <a:off x="2487168" y="941831"/>
+              <a:ext cx="137159" cy="45720"/>
             </a:xfrm>
             <a:prstGeom prst="line">
               <a:avLst/>
@@ -8293,8 +8251,8 @@
           </p:nvCxnSpPr>
           <p:spPr>
             <a:xfrm>
-              <a:off x="2788920" y="1124711"/>
-              <a:ext cx="137160" cy="0"/>
+              <a:off x="2487168" y="941831"/>
+              <a:ext cx="137159" cy="137161"/>
             </a:xfrm>
             <a:prstGeom prst="line">
               <a:avLst/>
@@ -8328,9 +8286,9 @@
             <p:nvPr/>
           </p:nvCxnSpPr>
           <p:spPr>
-            <a:xfrm>
-              <a:off x="2926080" y="941831"/>
-              <a:ext cx="137160" cy="45720"/>
+            <a:xfrm flipV="1">
+              <a:off x="2487168" y="987551"/>
+              <a:ext cx="137159" cy="45720"/>
             </a:xfrm>
             <a:prstGeom prst="line">
               <a:avLst/>
@@ -8365,8 +8323,8 @@
           </p:nvCxnSpPr>
           <p:spPr>
             <a:xfrm>
-              <a:off x="2926080" y="941831"/>
-              <a:ext cx="137160" cy="137161"/>
+              <a:off x="2487168" y="1033271"/>
+              <a:ext cx="137159" cy="45721"/>
             </a:xfrm>
             <a:prstGeom prst="line">
               <a:avLst/>
@@ -8401,8 +8359,8 @@
           </p:nvCxnSpPr>
           <p:spPr>
             <a:xfrm flipV="1">
-              <a:off x="2926080" y="987551"/>
-              <a:ext cx="137160" cy="45720"/>
+              <a:off x="2487168" y="987551"/>
+              <a:ext cx="137159" cy="137160"/>
             </a:xfrm>
             <a:prstGeom prst="line">
               <a:avLst/>
@@ -8436,9 +8394,9 @@
             <p:nvPr/>
           </p:nvCxnSpPr>
           <p:spPr>
-            <a:xfrm>
-              <a:off x="2926080" y="1033271"/>
-              <a:ext cx="137160" cy="45721"/>
+            <a:xfrm flipV="1">
+              <a:off x="2487168" y="1078992"/>
+              <a:ext cx="137159" cy="45719"/>
             </a:xfrm>
             <a:prstGeom prst="line">
               <a:avLst/>
@@ -8465,78 +8423,94 @@
             </a:fontRef>
           </p:style>
         </p:cxnSp>
-        <p:cxnSp>
-          <p:nvCxnSpPr>
-            <p:cNvPr id="135" name="Connector 134"/>
-            <p:cNvCxnSpPr/>
-            <p:nvPr/>
-          </p:nvCxnSpPr>
-          <p:spPr>
-            <a:xfrm flipV="1">
-              <a:off x="2926080" y="987551"/>
-              <a:ext cx="137160" cy="137160"/>
-            </a:xfrm>
-            <a:prstGeom prst="line">
-              <a:avLst/>
-            </a:prstGeom>
-            <a:ln w="4445">
-              <a:solidFill>
-                <a:srgbClr val="E3B48A"/>
-              </a:solidFill>
-            </a:ln>
-            <a:effectLst/>
-          </p:spPr>
-          <p:style>
-            <a:lnRef idx="2">
-              <a:schemeClr val="accent1"/>
-            </a:lnRef>
-            <a:fillRef idx="0">
-              <a:schemeClr val="accent1"/>
-            </a:fillRef>
-            <a:effectRef idx="1">
-              <a:schemeClr val="accent1"/>
-            </a:effectRef>
-            <a:fontRef idx="minor">
-              <a:schemeClr val="tx1"/>
-            </a:fontRef>
-          </p:style>
-        </p:cxnSp>
-        <p:cxnSp>
-          <p:nvCxnSpPr>
-            <p:cNvPr id="136" name="Connector 135"/>
-            <p:cNvCxnSpPr/>
-            <p:nvPr/>
-          </p:nvCxnSpPr>
-          <p:spPr>
-            <a:xfrm flipV="1">
-              <a:off x="2926080" y="1078992"/>
-              <a:ext cx="137160" cy="45719"/>
-            </a:xfrm>
-            <a:prstGeom prst="line">
-              <a:avLst/>
-            </a:prstGeom>
-            <a:ln w="4445">
-              <a:solidFill>
-                <a:srgbClr val="E3B48A"/>
-              </a:solidFill>
-            </a:ln>
-            <a:effectLst/>
-          </p:spPr>
-          <p:style>
-            <a:lnRef idx="2">
-              <a:schemeClr val="accent1"/>
-            </a:lnRef>
-            <a:fillRef idx="0">
-              <a:schemeClr val="accent1"/>
-            </a:fillRef>
-            <a:effectRef idx="1">
-              <a:schemeClr val="accent1"/>
-            </a:effectRef>
-            <a:fontRef idx="minor">
-              <a:schemeClr val="tx1"/>
-            </a:fontRef>
-          </p:style>
-        </p:cxnSp>
+        <p:sp>
+          <p:nvSpPr>
+            <p:cNvPr id="135" name="Oval 134"/>
+            <p:cNvSpPr/>
+            <p:nvPr/>
+          </p:nvSpPr>
+          <p:spPr>
+            <a:xfrm>
+              <a:off x="2328492" y="920316"/>
+              <a:ext cx="43030" cy="43030"/>
+            </a:xfrm>
+            <a:prstGeom prst="ellipse">
+              <a:avLst/>
+            </a:prstGeom>
+            <a:solidFill>
+              <a:srgbClr val="A65E1A"/>
+            </a:solidFill>
+            <a:ln>
+              <a:noFill/>
+            </a:ln>
+            <a:effectLst/>
+          </p:spPr>
+          <p:style>
+            <a:lnRef idx="1">
+              <a:schemeClr val="accent1"/>
+            </a:lnRef>
+            <a:fillRef idx="3">
+              <a:schemeClr val="accent1"/>
+            </a:fillRef>
+            <a:effectRef idx="2">
+              <a:schemeClr val="accent1"/>
+            </a:effectRef>
+            <a:fontRef idx="minor">
+              <a:schemeClr val="lt1"/>
+            </a:fontRef>
+          </p:style>
+          <p:txBody>
+            <a:bodyPr rtlCol="0" anchor="ctr"/>
+            <a:lstStyle/>
+            <a:p>
+              <a:pPr algn="ctr"/>
+            </a:p>
+          </p:txBody>
+        </p:sp>
+        <p:sp>
+          <p:nvSpPr>
+            <p:cNvPr id="136" name="Oval 135"/>
+            <p:cNvSpPr/>
+            <p:nvPr/>
+          </p:nvSpPr>
+          <p:spPr>
+            <a:xfrm>
+              <a:off x="2328492" y="1011756"/>
+              <a:ext cx="43030" cy="43030"/>
+            </a:xfrm>
+            <a:prstGeom prst="ellipse">
+              <a:avLst/>
+            </a:prstGeom>
+            <a:solidFill>
+              <a:srgbClr val="A65E1A"/>
+            </a:solidFill>
+            <a:ln>
+              <a:noFill/>
+            </a:ln>
+            <a:effectLst/>
+          </p:spPr>
+          <p:style>
+            <a:lnRef idx="1">
+              <a:schemeClr val="accent1"/>
+            </a:lnRef>
+            <a:fillRef idx="3">
+              <a:schemeClr val="accent1"/>
+            </a:fillRef>
+            <a:effectRef idx="2">
+              <a:schemeClr val="accent1"/>
+            </a:effectRef>
+            <a:fontRef idx="minor">
+              <a:schemeClr val="lt1"/>
+            </a:fontRef>
+          </p:style>
+          <p:txBody>
+            <a:bodyPr rtlCol="0" anchor="ctr"/>
+            <a:lstStyle/>
+            <a:p>
+              <a:pPr algn="ctr"/>
+            </a:p>
+          </p:txBody>
+        </p:sp>
         <p:sp>
           <p:nvSpPr>
             <p:cNvPr id="137" name="Oval 136"/>
@@ -8545,7 +8519,7 @@
           </p:nvSpPr>
           <p:spPr>
             <a:xfrm>
-              <a:off x="2767404" y="920316"/>
+              <a:off x="2328492" y="1103196"/>
               <a:ext cx="43030" cy="43030"/>
             </a:xfrm>
             <a:prstGeom prst="ellipse">
@@ -8589,7 +8563,7 @@
           </p:nvSpPr>
           <p:spPr>
             <a:xfrm>
-              <a:off x="2767404" y="1011756"/>
+              <a:off x="2465652" y="920316"/>
               <a:ext cx="43030" cy="43030"/>
             </a:xfrm>
             <a:prstGeom prst="ellipse">
@@ -8633,7 +8607,7 @@
           </p:nvSpPr>
           <p:spPr>
             <a:xfrm>
-              <a:off x="2767404" y="1103196"/>
+              <a:off x="2465652" y="1011756"/>
               <a:ext cx="43030" cy="43030"/>
             </a:xfrm>
             <a:prstGeom prst="ellipse">
@@ -8677,7 +8651,7 @@
           </p:nvSpPr>
           <p:spPr>
             <a:xfrm>
-              <a:off x="2904564" y="920316"/>
+              <a:off x="2465652" y="1103196"/>
               <a:ext cx="43030" cy="43030"/>
             </a:xfrm>
             <a:prstGeom prst="ellipse">
@@ -8721,7 +8695,7 @@
           </p:nvSpPr>
           <p:spPr>
             <a:xfrm>
-              <a:off x="2904564" y="1011756"/>
+              <a:off x="2602812" y="966036"/>
               <a:ext cx="43030" cy="43030"/>
             </a:xfrm>
             <a:prstGeom prst="ellipse">
@@ -8765,95 +8739,7 @@
           </p:nvSpPr>
           <p:spPr>
             <a:xfrm>
-              <a:off x="2904564" y="1103196"/>
-              <a:ext cx="43030" cy="43030"/>
-            </a:xfrm>
-            <a:prstGeom prst="ellipse">
-              <a:avLst/>
-            </a:prstGeom>
-            <a:solidFill>
-              <a:srgbClr val="A65E1A"/>
-            </a:solidFill>
-            <a:ln>
-              <a:noFill/>
-            </a:ln>
-            <a:effectLst/>
-          </p:spPr>
-          <p:style>
-            <a:lnRef idx="1">
-              <a:schemeClr val="accent1"/>
-            </a:lnRef>
-            <a:fillRef idx="3">
-              <a:schemeClr val="accent1"/>
-            </a:fillRef>
-            <a:effectRef idx="2">
-              <a:schemeClr val="accent1"/>
-            </a:effectRef>
-            <a:fontRef idx="minor">
-              <a:schemeClr val="lt1"/>
-            </a:fontRef>
-          </p:style>
-          <p:txBody>
-            <a:bodyPr rtlCol="0" anchor="ctr"/>
-            <a:lstStyle/>
-            <a:p>
-              <a:pPr algn="ctr"/>
-            </a:p>
-          </p:txBody>
-        </p:sp>
-        <p:sp>
-          <p:nvSpPr>
-            <p:cNvPr id="143" name="Oval 142"/>
-            <p:cNvSpPr/>
-            <p:nvPr/>
-          </p:nvSpPr>
-          <p:spPr>
-            <a:xfrm>
-              <a:off x="3041724" y="966036"/>
-              <a:ext cx="43030" cy="43030"/>
-            </a:xfrm>
-            <a:prstGeom prst="ellipse">
-              <a:avLst/>
-            </a:prstGeom>
-            <a:solidFill>
-              <a:srgbClr val="A65E1A"/>
-            </a:solidFill>
-            <a:ln>
-              <a:noFill/>
-            </a:ln>
-            <a:effectLst/>
-          </p:spPr>
-          <p:style>
-            <a:lnRef idx="1">
-              <a:schemeClr val="accent1"/>
-            </a:lnRef>
-            <a:fillRef idx="3">
-              <a:schemeClr val="accent1"/>
-            </a:fillRef>
-            <a:effectRef idx="2">
-              <a:schemeClr val="accent1"/>
-            </a:effectRef>
-            <a:fontRef idx="minor">
-              <a:schemeClr val="lt1"/>
-            </a:fontRef>
-          </p:style>
-          <p:txBody>
-            <a:bodyPr rtlCol="0" anchor="ctr"/>
-            <a:lstStyle/>
-            <a:p>
-              <a:pPr algn="ctr"/>
-            </a:p>
-          </p:txBody>
-        </p:sp>
-        <p:sp>
-          <p:nvSpPr>
-            <p:cNvPr id="144" name="Oval 143"/>
-            <p:cNvSpPr/>
-            <p:nvPr/>
-          </p:nvSpPr>
-          <p:spPr>
-            <a:xfrm>
-              <a:off x="3041724" y="1057476"/>
+              <a:off x="2602812" y="1057476"/>
               <a:ext cx="43030" cy="43030"/>
             </a:xfrm>
             <a:prstGeom prst="ellipse">
@@ -8892,13 +8778,13 @@
       </p:grpSp>
       <p:sp>
         <p:nvSpPr>
-          <p:cNvPr id="145" name="TextBox 144"/>
+          <p:cNvPr id="143" name="TextBox 142"/>
           <p:cNvSpPr txBox="1"/>
           <p:nvPr/>
         </p:nvSpPr>
         <p:spPr>
           <a:xfrm>
-            <a:off x="3145536" y="539496"/>
+            <a:off x="2706624" y="539496"/>
             <a:ext cx="384048" cy="292608"/>
           </a:xfrm>
           <a:prstGeom prst="rect">
@@ -8956,13 +8842,13 @@
       </p:sp>
       <p:sp>
         <p:nvSpPr>
-          <p:cNvPr id="146" name="TextBox 145"/>
+          <p:cNvPr id="144" name="TextBox 143"/>
           <p:cNvSpPr txBox="1"/>
           <p:nvPr/>
         </p:nvSpPr>
         <p:spPr>
           <a:xfrm>
-            <a:off x="3145536" y="886968"/>
+            <a:off x="2706624" y="886968"/>
             <a:ext cx="384048" cy="292608"/>
           </a:xfrm>
           <a:prstGeom prst="rect">
@@ -9011,14 +8897,14 @@
       </p:sp>
       <p:cxnSp>
         <p:nvCxnSpPr>
-          <p:cNvPr id="147" name="Connector 146"/>
+          <p:cNvPr id="145" name="Connector 144"/>
           <p:cNvCxnSpPr/>
           <p:nvPr/>
         </p:nvCxnSpPr>
         <p:spPr>
           <a:xfrm flipV="1">
-            <a:off x="2468880" y="685800"/>
-            <a:ext cx="256032" cy="100584"/>
+            <a:off x="1993392" y="685800"/>
+            <a:ext cx="292608" cy="100584"/>
           </a:xfrm>
           <a:prstGeom prst="line">
             <a:avLst/>
@@ -9049,14 +8935,14 @@
       </p:cxnSp>
       <p:cxnSp>
         <p:nvCxnSpPr>
-          <p:cNvPr id="148" name="Connector 147"/>
+          <p:cNvPr id="146" name="Connector 145"/>
           <p:cNvCxnSpPr/>
           <p:nvPr/>
         </p:nvCxnSpPr>
         <p:spPr>
           <a:xfrm>
-            <a:off x="2468880" y="896112"/>
-            <a:ext cx="256032" cy="137160"/>
+            <a:off x="1993392" y="896112"/>
+            <a:ext cx="292608" cy="137160"/>
           </a:xfrm>
           <a:prstGeom prst="line">
             <a:avLst/>
@@ -9087,13 +8973,13 @@
       </p:cxnSp>
       <p:sp>
         <p:nvSpPr>
-          <p:cNvPr id="149" name="Oval 148"/>
+          <p:cNvPr id="147" name="Oval 146"/>
           <p:cNvSpPr/>
           <p:nvPr/>
         </p:nvSpPr>
         <p:spPr>
           <a:xfrm>
-            <a:off x="3429000" y="676656"/>
+            <a:off x="3291840" y="676656"/>
             <a:ext cx="566928" cy="365760"/>
           </a:xfrm>
           <a:prstGeom prst="ellipse">
@@ -9135,13 +9021,13 @@
       </p:sp>
       <p:sp>
         <p:nvSpPr>
-          <p:cNvPr id="150" name="Oval 149"/>
+          <p:cNvPr id="148" name="Oval 147"/>
           <p:cNvSpPr/>
           <p:nvPr/>
         </p:nvSpPr>
         <p:spPr>
           <a:xfrm>
-            <a:off x="3520440" y="736092"/>
+            <a:off x="3383280" y="736092"/>
             <a:ext cx="384048" cy="246888"/>
           </a:xfrm>
           <a:prstGeom prst="ellipse">
@@ -9183,13 +9069,13 @@
       </p:sp>
       <p:sp>
         <p:nvSpPr>
-          <p:cNvPr id="151" name="Oval 150"/>
+          <p:cNvPr id="149" name="Oval 148"/>
           <p:cNvSpPr/>
           <p:nvPr/>
         </p:nvSpPr>
         <p:spPr>
           <a:xfrm>
-            <a:off x="3611880" y="795527"/>
+            <a:off x="3474720" y="795527"/>
             <a:ext cx="201168" cy="128016"/>
           </a:xfrm>
           <a:prstGeom prst="ellipse">
@@ -9231,13 +9117,13 @@
       </p:sp>
       <p:sp>
         <p:nvSpPr>
-          <p:cNvPr id="152" name="TextBox 151"/>
+          <p:cNvPr id="150" name="TextBox 149"/>
           <p:cNvSpPr txBox="1"/>
           <p:nvPr/>
         </p:nvSpPr>
         <p:spPr>
           <a:xfrm>
-            <a:off x="3904488" y="795527"/>
+            <a:off x="3767328" y="795527"/>
             <a:ext cx="91440" cy="128016"/>
           </a:xfrm>
           <a:prstGeom prst="rect">
@@ -9270,13 +9156,13 @@
       </p:sp>
       <p:sp>
         <p:nvSpPr>
-          <p:cNvPr id="153" name="TextBox 152"/>
+          <p:cNvPr id="151" name="TextBox 150"/>
           <p:cNvSpPr txBox="1"/>
           <p:nvPr/>
         </p:nvSpPr>
         <p:spPr>
           <a:xfrm>
-            <a:off x="3813048" y="795527"/>
+            <a:off x="3675888" y="795527"/>
             <a:ext cx="91440" cy="128016"/>
           </a:xfrm>
           <a:prstGeom prst="rect">
@@ -9309,13 +9195,13 @@
       </p:sp>
       <p:sp>
         <p:nvSpPr>
-          <p:cNvPr id="154" name="TextBox 153"/>
+          <p:cNvPr id="152" name="TextBox 151"/>
           <p:cNvSpPr txBox="1"/>
           <p:nvPr/>
         </p:nvSpPr>
         <p:spPr>
           <a:xfrm>
-            <a:off x="3666744" y="795527"/>
+            <a:off x="3529584" y="795527"/>
             <a:ext cx="91440" cy="128016"/>
           </a:xfrm>
           <a:prstGeom prst="rect">
@@ -9348,13 +9234,13 @@
       </p:sp>
       <p:sp>
         <p:nvSpPr>
-          <p:cNvPr id="155" name="TextBox 154"/>
+          <p:cNvPr id="153" name="TextBox 152"/>
           <p:cNvSpPr txBox="1"/>
           <p:nvPr/>
         </p:nvSpPr>
         <p:spPr>
           <a:xfrm>
-            <a:off x="3346704" y="530352"/>
+            <a:off x="3209544" y="530352"/>
             <a:ext cx="731520" cy="128016"/>
           </a:xfrm>
           <a:prstGeom prst="rect">
@@ -9441,14 +9327,14 @@
       </p:sp>
       <p:sp>
         <p:nvSpPr>
-          <p:cNvPr id="156" name="TextBox 155"/>
+          <p:cNvPr id="154" name="TextBox 153"/>
           <p:cNvSpPr txBox="1"/>
           <p:nvPr/>
         </p:nvSpPr>
         <p:spPr>
           <a:xfrm>
-            <a:off x="1335024" y="1161288"/>
-            <a:ext cx="2651760" cy="137160"/>
+            <a:off x="1463040" y="1243584"/>
+            <a:ext cx="2560320" cy="137160"/>
           </a:xfrm>
           <a:prstGeom prst="rect">
             <a:avLst/>
@@ -9461,190 +9347,664 @@
           </a:bodyPr>
           <a:lstStyle/>
           <a:p>
+            <a:pPr algn="l">
+              <a:lnSpc>
+                <a:spcPct val="105000"/>
+              </a:lnSpc>
+            </a:pPr>
+            <a:r>
+              <a:rPr sz="630" b="0" i="0">
+                <a:solidFill>
+                  <a:srgbClr val="A65E1A"/>
+                </a:solidFill>
+                <a:latin typeface="Times New Roman"/>
+              </a:rPr>
+              <a:t>one gear decision = option, gear held for </a:t>
+            </a:r>
+            <a:r>
+              <a:rPr sz="630" b="0" i="1">
+                <a:solidFill>
+                  <a:srgbClr val="A65E1A"/>
+                </a:solidFill>
+                <a:latin typeface="Times New Roman"/>
+              </a:rPr>
+              <a:t>D</a:t>
+            </a:r>
+            <a:r>
+              <a:rPr sz="630" b="0" i="1" baseline="-25000">
+                <a:solidFill>
+                  <a:srgbClr val="A65E1A"/>
+                </a:solidFill>
+                <a:latin typeface="Times New Roman"/>
+              </a:rPr>
+              <a:t>g</a:t>
+            </a:r>
+            <a:r>
+              <a:rPr sz="630" b="0" i="0">
+                <a:solidFill>
+                  <a:srgbClr val="A65E1A"/>
+                </a:solidFill>
+                <a:latin typeface="Times New Roman"/>
+              </a:rPr>
+              <a:t> steps</a:t>
+            </a:r>
+          </a:p>
+        </p:txBody>
+      </p:sp>
+      <p:sp>
+        <p:nvSpPr>
+          <p:cNvPr id="155" name="option_step_0"/>
+          <p:cNvSpPr/>
+          <p:nvPr/>
+        </p:nvSpPr>
+        <p:spPr>
+          <a:xfrm>
+            <a:off x="1463040" y="1426464"/>
+            <a:ext cx="201168" cy="182880"/>
+          </a:xfrm>
+          <a:prstGeom prst="roundRect">
+            <a:avLst>
+              <a:gd name="adj" fmla="val 20000"/>
+            </a:avLst>
+          </a:prstGeom>
+          <a:solidFill>
+            <a:srgbClr val="FBEFE3"/>
+          </a:solidFill>
+          <a:ln w="8890">
+            <a:solidFill>
+              <a:srgbClr val="A65E1A"/>
+            </a:solidFill>
+          </a:ln>
+          <a:effectLst/>
+        </p:spPr>
+        <p:style>
+          <a:lnRef idx="1">
+            <a:schemeClr val="accent1"/>
+          </a:lnRef>
+          <a:fillRef idx="3">
+            <a:schemeClr val="accent1"/>
+          </a:fillRef>
+          <a:effectRef idx="2">
+            <a:schemeClr val="accent1"/>
+          </a:effectRef>
+          <a:fontRef idx="minor">
+            <a:schemeClr val="lt1"/>
+          </a:fontRef>
+        </p:style>
+        <p:txBody>
+          <a:bodyPr rtlCol="0" anchor="ctr" wrap="none" lIns="0" rIns="0" tIns="0" bIns="0">
+            <a:noAutofit/>
+          </a:bodyPr>
+          <a:lstStyle/>
+          <a:p>
             <a:pPr algn="ctr">
               <a:lnSpc>
                 <a:spcPct val="105000"/>
               </a:lnSpc>
             </a:pPr>
             <a:r>
-              <a:rPr sz="640" b="0" i="0">
-                <a:solidFill>
-                  <a:srgbClr val="A65E1A"/>
+              <a:rPr sz="640" b="0" i="1">
+                <a:solidFill>
+                  <a:srgbClr val="000000"/>
                 </a:solidFill>
                 <a:latin typeface="Times New Roman"/>
               </a:rPr>
-              <a:t>one step target  </a:t>
-            </a:r>
-            <a:r>
-              <a:rPr sz="640" b="0" i="1">
-                <a:solidFill>
-                  <a:srgbClr val="A65E1A"/>
-                </a:solidFill>
-                <a:latin typeface="Times New Roman"/>
-              </a:rPr>
-              <a:t>y</a:t>
-            </a:r>
-            <a:r>
-              <a:rPr sz="640" b="0" i="0">
-                <a:solidFill>
-                  <a:srgbClr val="A65E1A"/>
-                </a:solidFill>
-                <a:latin typeface="Times New Roman"/>
-              </a:rPr>
-              <a:t> = (1 − </a:t>
-            </a:r>
-            <a:r>
-              <a:rPr sz="640" b="0" i="1">
-                <a:solidFill>
-                  <a:srgbClr val="A65E1A"/>
-                </a:solidFill>
-                <a:latin typeface="Times New Roman"/>
-              </a:rPr>
-              <a:t>γ</a:t>
-            </a:r>
-            <a:r>
-              <a:rPr sz="640" b="0" i="1" baseline="-25000">
-                <a:solidFill>
-                  <a:srgbClr val="A65E1A"/>
-                </a:solidFill>
-                <a:latin typeface="Times New Roman"/>
-              </a:rPr>
-              <a:t>h</a:t>
-            </a:r>
-            <a:r>
-              <a:rPr sz="640" b="0" i="0">
-                <a:solidFill>
-                  <a:srgbClr val="A65E1A"/>
-                </a:solidFill>
-                <a:latin typeface="Times New Roman"/>
-              </a:rPr>
-              <a:t>) </a:t>
-            </a:r>
-            <a:r>
-              <a:rPr sz="640" b="0" i="1">
-                <a:solidFill>
-                  <a:srgbClr val="A65E1A"/>
-                </a:solidFill>
-                <a:latin typeface="Times New Roman"/>
-              </a:rPr>
-              <a:t>h</a:t>
-            </a:r>
-            <a:r>
-              <a:rPr sz="640" b="0" i="0">
-                <a:solidFill>
-                  <a:srgbClr val="A65E1A"/>
-                </a:solidFill>
-                <a:latin typeface="Times New Roman"/>
-              </a:rPr>
-              <a:t> + </a:t>
-            </a:r>
-            <a:r>
-              <a:rPr sz="640" b="0" i="1">
-                <a:solidFill>
-                  <a:srgbClr val="A65E1A"/>
-                </a:solidFill>
-                <a:latin typeface="Times New Roman"/>
-              </a:rPr>
-              <a:t>γ</a:t>
-            </a:r>
-            <a:r>
-              <a:rPr sz="640" b="0" i="1" baseline="-25000">
-                <a:solidFill>
-                  <a:srgbClr val="A65E1A"/>
-                </a:solidFill>
-                <a:latin typeface="Times New Roman"/>
-              </a:rPr>
-              <a:t>h</a:t>
-            </a:r>
-            <a:r>
-              <a:rPr sz="640" b="0" i="0">
-                <a:solidFill>
-                  <a:srgbClr val="A65E1A"/>
-                </a:solidFill>
-                <a:latin typeface="Times New Roman"/>
-              </a:rPr>
-              <a:t> min{</a:t>
-            </a:r>
-            <a:r>
-              <a:rPr sz="640" b="0" i="1">
-                <a:solidFill>
-                  <a:srgbClr val="A65E1A"/>
-                </a:solidFill>
-                <a:latin typeface="Times New Roman"/>
-              </a:rPr>
-              <a:t>h</a:t>
-            </a:r>
-            <a:r>
-              <a:rPr sz="640" b="0" i="0">
-                <a:solidFill>
-                  <a:srgbClr val="A65E1A"/>
-                </a:solidFill>
-                <a:latin typeface="Times New Roman"/>
-              </a:rPr>
-              <a:t>, </a:t>
-            </a:r>
-            <a:r>
-              <a:rPr sz="640" b="0" i="1">
-                <a:solidFill>
-                  <a:srgbClr val="A65E1A"/>
-                </a:solidFill>
-                <a:latin typeface="Times New Roman"/>
-              </a:rPr>
-              <a:t>Q̄</a:t>
-            </a:r>
-            <a:r>
-              <a:rPr sz="640" b="0" i="1" baseline="-25000">
-                <a:solidFill>
-                  <a:srgbClr val="A65E1A"/>
-                </a:solidFill>
-                <a:latin typeface="Times New Roman"/>
-              </a:rPr>
-              <a:t>h</a:t>
-            </a:r>
-            <a:r>
-              <a:rPr sz="640" b="0" i="0">
-                <a:solidFill>
-                  <a:srgbClr val="A65E1A"/>
-                </a:solidFill>
-                <a:latin typeface="Times New Roman"/>
-              </a:rPr>
-              <a:t>(</a:t>
-            </a:r>
-            <a:r>
-              <a:rPr sz="640" b="0" i="1">
-                <a:solidFill>
-                  <a:srgbClr val="A65E1A"/>
-                </a:solidFill>
-                <a:latin typeface="Times New Roman"/>
-              </a:rPr>
-              <a:t>ξ</a:t>
-            </a:r>
-            <a:r>
-              <a:rPr sz="640" b="0" i="0">
-                <a:solidFill>
-                  <a:srgbClr val="A65E1A"/>
-                </a:solidFill>
-                <a:latin typeface="Times New Roman"/>
-              </a:rPr>
-              <a:t>′)}</a:t>
+              <a:t>ĝ</a:t>
             </a:r>
           </a:p>
         </p:txBody>
       </p:sp>
       <p:sp>
         <p:nvSpPr>
-          <p:cNvPr id="157" name="stage2"/>
+          <p:cNvPr id="156" name="option_step_1"/>
           <p:cNvSpPr/>
           <p:nvPr/>
         </p:nvSpPr>
         <p:spPr>
           <a:xfrm>
-            <a:off x="1243584" y="1389888"/>
-            <a:ext cx="2816352" cy="731520"/>
+            <a:off x="1709928" y="1426464"/>
+            <a:ext cx="201168" cy="182880"/>
           </a:xfrm>
           <a:prstGeom prst="roundRect">
             <a:avLst>
-              <a:gd name="adj" fmla="val 5000"/>
+              <a:gd name="adj" fmla="val 20000"/>
+            </a:avLst>
+          </a:prstGeom>
+          <a:solidFill>
+            <a:srgbClr val="FBEFE3"/>
+          </a:solidFill>
+          <a:ln w="8890">
+            <a:solidFill>
+              <a:srgbClr val="A65E1A"/>
+            </a:solidFill>
+          </a:ln>
+          <a:effectLst/>
+        </p:spPr>
+        <p:style>
+          <a:lnRef idx="1">
+            <a:schemeClr val="accent1"/>
+          </a:lnRef>
+          <a:fillRef idx="3">
+            <a:schemeClr val="accent1"/>
+          </a:fillRef>
+          <a:effectRef idx="2">
+            <a:schemeClr val="accent1"/>
+          </a:effectRef>
+          <a:fontRef idx="minor">
+            <a:schemeClr val="lt1"/>
+          </a:fontRef>
+        </p:style>
+        <p:txBody>
+          <a:bodyPr rtlCol="0" anchor="ctr" wrap="none" lIns="0" rIns="0" tIns="0" bIns="0">
+            <a:noAutofit/>
+          </a:bodyPr>
+          <a:lstStyle/>
+          <a:p>
+            <a:pPr algn="ctr">
+              <a:lnSpc>
+                <a:spcPct val="105000"/>
+              </a:lnSpc>
+            </a:pPr>
+            <a:r>
+              <a:rPr sz="640" b="0" i="1">
+                <a:solidFill>
+                  <a:srgbClr val="000000"/>
+                </a:solidFill>
+                <a:latin typeface="Times New Roman"/>
+              </a:rPr>
+              <a:t>ĝ</a:t>
+            </a:r>
+          </a:p>
+        </p:txBody>
+      </p:sp>
+      <p:sp>
+        <p:nvSpPr>
+          <p:cNvPr id="157" name="option_step_2"/>
+          <p:cNvSpPr/>
+          <p:nvPr/>
+        </p:nvSpPr>
+        <p:spPr>
+          <a:xfrm>
+            <a:off x="1956816" y="1426464"/>
+            <a:ext cx="201168" cy="182880"/>
+          </a:xfrm>
+          <a:prstGeom prst="roundRect">
+            <a:avLst>
+              <a:gd name="adj" fmla="val 20000"/>
+            </a:avLst>
+          </a:prstGeom>
+          <a:solidFill>
+            <a:srgbClr val="FBEFE3"/>
+          </a:solidFill>
+          <a:ln w="8890">
+            <a:solidFill>
+              <a:srgbClr val="A65E1A"/>
+            </a:solidFill>
+          </a:ln>
+          <a:effectLst/>
+        </p:spPr>
+        <p:style>
+          <a:lnRef idx="1">
+            <a:schemeClr val="accent1"/>
+          </a:lnRef>
+          <a:fillRef idx="3">
+            <a:schemeClr val="accent1"/>
+          </a:fillRef>
+          <a:effectRef idx="2">
+            <a:schemeClr val="accent1"/>
+          </a:effectRef>
+          <a:fontRef idx="minor">
+            <a:schemeClr val="lt1"/>
+          </a:fontRef>
+        </p:style>
+        <p:txBody>
+          <a:bodyPr rtlCol="0" anchor="ctr" wrap="none" lIns="0" rIns="0" tIns="0" bIns="0">
+            <a:noAutofit/>
+          </a:bodyPr>
+          <a:lstStyle/>
+          <a:p>
+            <a:pPr algn="ctr">
+              <a:lnSpc>
+                <a:spcPct val="105000"/>
+              </a:lnSpc>
+            </a:pPr>
+            <a:r>
+              <a:rPr sz="640" b="0" i="1">
+                <a:solidFill>
+                  <a:srgbClr val="000000"/>
+                </a:solidFill>
+                <a:latin typeface="Times New Roman"/>
+              </a:rPr>
+              <a:t>ĝ</a:t>
+            </a:r>
+          </a:p>
+        </p:txBody>
+      </p:sp>
+      <p:sp>
+        <p:nvSpPr>
+          <p:cNvPr id="158" name="option_step_3"/>
+          <p:cNvSpPr/>
+          <p:nvPr/>
+        </p:nvSpPr>
+        <p:spPr>
+          <a:xfrm>
+            <a:off x="2203704" y="1426464"/>
+            <a:ext cx="201168" cy="182880"/>
+          </a:xfrm>
+          <a:prstGeom prst="roundRect">
+            <a:avLst>
+              <a:gd name="adj" fmla="val 20000"/>
+            </a:avLst>
+          </a:prstGeom>
+          <a:solidFill>
+            <a:srgbClr val="FBEFE3"/>
+          </a:solidFill>
+          <a:ln w="8890">
+            <a:solidFill>
+              <a:srgbClr val="A65E1A"/>
+            </a:solidFill>
+          </a:ln>
+          <a:effectLst/>
+        </p:spPr>
+        <p:style>
+          <a:lnRef idx="1">
+            <a:schemeClr val="accent1"/>
+          </a:lnRef>
+          <a:fillRef idx="3">
+            <a:schemeClr val="accent1"/>
+          </a:fillRef>
+          <a:effectRef idx="2">
+            <a:schemeClr val="accent1"/>
+          </a:effectRef>
+          <a:fontRef idx="minor">
+            <a:schemeClr val="lt1"/>
+          </a:fontRef>
+        </p:style>
+        <p:txBody>
+          <a:bodyPr rtlCol="0" anchor="ctr" wrap="none" lIns="0" rIns="0" tIns="0" bIns="0">
+            <a:noAutofit/>
+          </a:bodyPr>
+          <a:lstStyle/>
+          <a:p>
+            <a:pPr algn="ctr">
+              <a:lnSpc>
+                <a:spcPct val="105000"/>
+              </a:lnSpc>
+            </a:pPr>
+            <a:r>
+              <a:rPr sz="640" b="0" i="1">
+                <a:solidFill>
+                  <a:srgbClr val="000000"/>
+                </a:solidFill>
+                <a:latin typeface="Times New Roman"/>
+              </a:rPr>
+              <a:t>ĝ</a:t>
+            </a:r>
+          </a:p>
+        </p:txBody>
+      </p:sp>
+      <p:sp>
+        <p:nvSpPr>
+          <p:cNvPr id="159" name="option_step_4"/>
+          <p:cNvSpPr/>
+          <p:nvPr/>
+        </p:nvSpPr>
+        <p:spPr>
+          <a:xfrm>
+            <a:off x="2450592" y="1426464"/>
+            <a:ext cx="201168" cy="182880"/>
+          </a:xfrm>
+          <a:prstGeom prst="roundRect">
+            <a:avLst>
+              <a:gd name="adj" fmla="val 20000"/>
+            </a:avLst>
+          </a:prstGeom>
+          <a:solidFill>
+            <a:srgbClr val="FBEFE3"/>
+          </a:solidFill>
+          <a:ln w="8890">
+            <a:solidFill>
+              <a:srgbClr val="A65E1A"/>
+            </a:solidFill>
+          </a:ln>
+          <a:effectLst/>
+        </p:spPr>
+        <p:style>
+          <a:lnRef idx="1">
+            <a:schemeClr val="accent1"/>
+          </a:lnRef>
+          <a:fillRef idx="3">
+            <a:schemeClr val="accent1"/>
+          </a:fillRef>
+          <a:effectRef idx="2">
+            <a:schemeClr val="accent1"/>
+          </a:effectRef>
+          <a:fontRef idx="minor">
+            <a:schemeClr val="lt1"/>
+          </a:fontRef>
+        </p:style>
+        <p:txBody>
+          <a:bodyPr rtlCol="0" anchor="ctr" wrap="none" lIns="0" rIns="0" tIns="0" bIns="0">
+            <a:noAutofit/>
+          </a:bodyPr>
+          <a:lstStyle/>
+          <a:p>
+            <a:pPr algn="ctr">
+              <a:lnSpc>
+                <a:spcPct val="105000"/>
+              </a:lnSpc>
+            </a:pPr>
+            <a:r>
+              <a:rPr sz="640" b="0" i="1">
+                <a:solidFill>
+                  <a:srgbClr val="000000"/>
+                </a:solidFill>
+                <a:latin typeface="Times New Roman"/>
+              </a:rPr>
+              <a:t>ĝ</a:t>
+            </a:r>
+          </a:p>
+        </p:txBody>
+      </p:sp>
+      <p:sp>
+        <p:nvSpPr>
+          <p:cNvPr id="160" name="option_step_5"/>
+          <p:cNvSpPr/>
+          <p:nvPr/>
+        </p:nvSpPr>
+        <p:spPr>
+          <a:xfrm>
+            <a:off x="2697480" y="1426464"/>
+            <a:ext cx="201168" cy="182880"/>
+          </a:xfrm>
+          <a:prstGeom prst="roundRect">
+            <a:avLst>
+              <a:gd name="adj" fmla="val 20000"/>
+            </a:avLst>
+          </a:prstGeom>
+          <a:solidFill>
+            <a:srgbClr val="FBEFE3"/>
+          </a:solidFill>
+          <a:ln w="8890">
+            <a:solidFill>
+              <a:srgbClr val="A65E1A"/>
+            </a:solidFill>
+          </a:ln>
+          <a:effectLst/>
+        </p:spPr>
+        <p:style>
+          <a:lnRef idx="1">
+            <a:schemeClr val="accent1"/>
+          </a:lnRef>
+          <a:fillRef idx="3">
+            <a:schemeClr val="accent1"/>
+          </a:fillRef>
+          <a:effectRef idx="2">
+            <a:schemeClr val="accent1"/>
+          </a:effectRef>
+          <a:fontRef idx="minor">
+            <a:schemeClr val="lt1"/>
+          </a:fontRef>
+        </p:style>
+        <p:txBody>
+          <a:bodyPr rtlCol="0" anchor="ctr" wrap="none" lIns="0" rIns="0" tIns="0" bIns="0">
+            <a:noAutofit/>
+          </a:bodyPr>
+          <a:lstStyle/>
+          <a:p>
+            <a:pPr algn="ctr">
+              <a:lnSpc>
+                <a:spcPct val="105000"/>
+              </a:lnSpc>
+            </a:pPr>
+            <a:r>
+              <a:rPr sz="640" b="0" i="1">
+                <a:solidFill>
+                  <a:srgbClr val="000000"/>
+                </a:solidFill>
+                <a:latin typeface="Times New Roman"/>
+              </a:rPr>
+              <a:t>ĝ</a:t>
+            </a:r>
+          </a:p>
+        </p:txBody>
+      </p:sp>
+      <p:cxnSp>
+        <p:nvCxnSpPr>
+          <p:cNvPr id="161" name="Connector 160"/>
+          <p:cNvCxnSpPr/>
+          <p:nvPr/>
+        </p:nvCxnSpPr>
+        <p:spPr>
+          <a:xfrm>
+            <a:off x="1664208" y="1517904"/>
+            <a:ext cx="45720" cy="0"/>
+          </a:xfrm>
+          <a:prstGeom prst="line">
+            <a:avLst/>
+          </a:prstGeom>
+          <a:ln w="7620">
+            <a:solidFill>
+              <a:srgbClr val="A65E1A"/>
+            </a:solidFill>
+            <a:tailEnd type="triangle" w="sm" len="sm"/>
+          </a:ln>
+          <a:effectLst/>
+        </p:spPr>
+        <p:style>
+          <a:lnRef idx="2">
+            <a:schemeClr val="accent1"/>
+          </a:lnRef>
+          <a:fillRef idx="0">
+            <a:schemeClr val="accent1"/>
+          </a:fillRef>
+          <a:effectRef idx="1">
+            <a:schemeClr val="accent1"/>
+          </a:effectRef>
+          <a:fontRef idx="minor">
+            <a:schemeClr val="tx1"/>
+          </a:fontRef>
+        </p:style>
+      </p:cxnSp>
+      <p:cxnSp>
+        <p:nvCxnSpPr>
+          <p:cNvPr id="162" name="Connector 161"/>
+          <p:cNvCxnSpPr/>
+          <p:nvPr/>
+        </p:nvCxnSpPr>
+        <p:spPr>
+          <a:xfrm>
+            <a:off x="1911096" y="1517904"/>
+            <a:ext cx="45720" cy="0"/>
+          </a:xfrm>
+          <a:prstGeom prst="line">
+            <a:avLst/>
+          </a:prstGeom>
+          <a:ln w="7620">
+            <a:solidFill>
+              <a:srgbClr val="A65E1A"/>
+            </a:solidFill>
+            <a:tailEnd type="triangle" w="sm" len="sm"/>
+          </a:ln>
+          <a:effectLst/>
+        </p:spPr>
+        <p:style>
+          <a:lnRef idx="2">
+            <a:schemeClr val="accent1"/>
+          </a:lnRef>
+          <a:fillRef idx="0">
+            <a:schemeClr val="accent1"/>
+          </a:fillRef>
+          <a:effectRef idx="1">
+            <a:schemeClr val="accent1"/>
+          </a:effectRef>
+          <a:fontRef idx="minor">
+            <a:schemeClr val="tx1"/>
+          </a:fontRef>
+        </p:style>
+      </p:cxnSp>
+      <p:cxnSp>
+        <p:nvCxnSpPr>
+          <p:cNvPr id="163" name="Connector 162"/>
+          <p:cNvCxnSpPr/>
+          <p:nvPr/>
+        </p:nvCxnSpPr>
+        <p:spPr>
+          <a:xfrm>
+            <a:off x="2157984" y="1517904"/>
+            <a:ext cx="45720" cy="0"/>
+          </a:xfrm>
+          <a:prstGeom prst="line">
+            <a:avLst/>
+          </a:prstGeom>
+          <a:ln w="7620">
+            <a:solidFill>
+              <a:srgbClr val="A65E1A"/>
+            </a:solidFill>
+            <a:tailEnd type="triangle" w="sm" len="sm"/>
+          </a:ln>
+          <a:effectLst/>
+        </p:spPr>
+        <p:style>
+          <a:lnRef idx="2">
+            <a:schemeClr val="accent1"/>
+          </a:lnRef>
+          <a:fillRef idx="0">
+            <a:schemeClr val="accent1"/>
+          </a:fillRef>
+          <a:effectRef idx="1">
+            <a:schemeClr val="accent1"/>
+          </a:effectRef>
+          <a:fontRef idx="minor">
+            <a:schemeClr val="tx1"/>
+          </a:fontRef>
+        </p:style>
+      </p:cxnSp>
+      <p:cxnSp>
+        <p:nvCxnSpPr>
+          <p:cNvPr id="164" name="Connector 163"/>
+          <p:cNvCxnSpPr/>
+          <p:nvPr/>
+        </p:nvCxnSpPr>
+        <p:spPr>
+          <a:xfrm>
+            <a:off x="2404872" y="1517904"/>
+            <a:ext cx="45720" cy="0"/>
+          </a:xfrm>
+          <a:prstGeom prst="line">
+            <a:avLst/>
+          </a:prstGeom>
+          <a:ln w="7620">
+            <a:solidFill>
+              <a:srgbClr val="A65E1A"/>
+            </a:solidFill>
+            <a:tailEnd type="triangle" w="sm" len="sm"/>
+          </a:ln>
+          <a:effectLst/>
+        </p:spPr>
+        <p:style>
+          <a:lnRef idx="2">
+            <a:schemeClr val="accent1"/>
+          </a:lnRef>
+          <a:fillRef idx="0">
+            <a:schemeClr val="accent1"/>
+          </a:fillRef>
+          <a:effectRef idx="1">
+            <a:schemeClr val="accent1"/>
+          </a:effectRef>
+          <a:fontRef idx="minor">
+            <a:schemeClr val="tx1"/>
+          </a:fontRef>
+        </p:style>
+      </p:cxnSp>
+      <p:cxnSp>
+        <p:nvCxnSpPr>
+          <p:cNvPr id="165" name="Connector 164"/>
+          <p:cNvCxnSpPr/>
+          <p:nvPr/>
+        </p:nvCxnSpPr>
+        <p:spPr>
+          <a:xfrm>
+            <a:off x="2651760" y="1517904"/>
+            <a:ext cx="45720" cy="0"/>
+          </a:xfrm>
+          <a:prstGeom prst="line">
+            <a:avLst/>
+          </a:prstGeom>
+          <a:ln w="7620">
+            <a:solidFill>
+              <a:srgbClr val="A65E1A"/>
+            </a:solidFill>
+            <a:tailEnd type="triangle" w="sm" len="sm"/>
+          </a:ln>
+          <a:effectLst/>
+        </p:spPr>
+        <p:style>
+          <a:lnRef idx="2">
+            <a:schemeClr val="accent1"/>
+          </a:lnRef>
+          <a:fillRef idx="0">
+            <a:schemeClr val="accent1"/>
+          </a:fillRef>
+          <a:effectRef idx="1">
+            <a:schemeClr val="accent1"/>
+          </a:effectRef>
+          <a:fontRef idx="minor">
+            <a:schemeClr val="tx1"/>
+          </a:fontRef>
+        </p:style>
+      </p:cxnSp>
+      <p:cxnSp>
+        <p:nvCxnSpPr>
+          <p:cNvPr id="166" name="Connector 165"/>
+          <p:cNvCxnSpPr/>
+          <p:nvPr/>
+        </p:nvCxnSpPr>
+        <p:spPr>
+          <a:xfrm>
+            <a:off x="2944368" y="1517904"/>
+            <a:ext cx="91440" cy="0"/>
+          </a:xfrm>
+          <a:prstGeom prst="line">
+            <a:avLst/>
+          </a:prstGeom>
+          <a:ln w="7620">
+            <a:solidFill>
+              <a:srgbClr val="A65E1A"/>
+            </a:solidFill>
+            <a:tailEnd type="triangle" w="sm" len="sm"/>
+          </a:ln>
+          <a:effectLst/>
+        </p:spPr>
+        <p:style>
+          <a:lnRef idx="2">
+            <a:schemeClr val="accent1"/>
+          </a:lnRef>
+          <a:fillRef idx="0">
+            <a:schemeClr val="accent1"/>
+          </a:fillRef>
+          <a:effectRef idx="1">
+            <a:schemeClr val="accent1"/>
+          </a:effectRef>
+          <a:fontRef idx="minor">
+            <a:schemeClr val="tx1"/>
+          </a:fontRef>
+        </p:style>
+      </p:cxnSp>
+      <p:sp>
+        <p:nvSpPr>
+          <p:cNvPr id="167" name="bootstrap"/>
+          <p:cNvSpPr/>
+          <p:nvPr/>
+        </p:nvSpPr>
+        <p:spPr>
+          <a:xfrm>
+            <a:off x="3035808" y="1417320"/>
+            <a:ext cx="274320" cy="201168"/>
+          </a:xfrm>
+          <a:prstGeom prst="roundRect">
+            <a:avLst>
+              <a:gd name="adj" fmla="val 18181"/>
             </a:avLst>
           </a:prstGeom>
           <a:solidFill>
@@ -9672,23 +10032,74 @@
           </a:fontRef>
         </p:style>
         <p:txBody>
-          <a:bodyPr rtlCol="0" anchor="ctr"/>
+          <a:bodyPr rtlCol="0" anchor="ctr" wrap="none" lIns="0" rIns="0" tIns="0" bIns="0">
+            <a:noAutofit/>
+          </a:bodyPr>
           <a:lstStyle/>
           <a:p>
-            <a:pPr algn="ctr"/>
+            <a:pPr algn="ctr">
+              <a:lnSpc>
+                <a:spcPct val="105000"/>
+              </a:lnSpc>
+            </a:pPr>
+            <a:r>
+              <a:rPr sz="660" b="0" i="1">
+                <a:solidFill>
+                  <a:srgbClr val="000000"/>
+                </a:solidFill>
+                <a:latin typeface="Times New Roman"/>
+              </a:rPr>
+              <a:t>V</a:t>
+            </a:r>
           </a:p>
         </p:txBody>
       </p:sp>
+      <p:cxnSp>
+        <p:nvCxnSpPr>
+          <p:cNvPr id="168" name="Connector 167"/>
+          <p:cNvCxnSpPr/>
+          <p:nvPr/>
+        </p:nvCxnSpPr>
+        <p:spPr>
+          <a:xfrm>
+            <a:off x="3150108" y="1467612"/>
+            <a:ext cx="64008" cy="0"/>
+          </a:xfrm>
+          <a:prstGeom prst="line">
+            <a:avLst/>
+          </a:prstGeom>
+          <a:ln w="7620">
+            <a:solidFill>
+              <a:srgbClr val="000000"/>
+            </a:solidFill>
+          </a:ln>
+          <a:effectLst/>
+        </p:spPr>
+        <p:style>
+          <a:lnRef idx="2">
+            <a:schemeClr val="accent1"/>
+          </a:lnRef>
+          <a:fillRef idx="0">
+            <a:schemeClr val="accent1"/>
+          </a:fillRef>
+          <a:effectRef idx="1">
+            <a:schemeClr val="accent1"/>
+          </a:effectRef>
+          <a:fontRef idx="minor">
+            <a:schemeClr val="tx1"/>
+          </a:fontRef>
+        </p:style>
+      </p:cxnSp>
       <p:sp>
         <p:nvSpPr>
-          <p:cNvPr id="158" name="TextBox 157"/>
+          <p:cNvPr id="169" name="TextBox 168"/>
           <p:cNvSpPr txBox="1"/>
           <p:nvPr/>
         </p:nvSpPr>
         <p:spPr>
           <a:xfrm>
-            <a:off x="1316736" y="1417320"/>
-            <a:ext cx="1828800" cy="164592"/>
+            <a:off x="3328416" y="1444752"/>
+            <a:ext cx="548640" cy="146304"/>
           </a:xfrm>
           <a:prstGeom prst="rect">
             <a:avLst/>
@@ -9707,36 +10118,27 @@
               </a:lnSpc>
             </a:pPr>
             <a:r>
-              <a:rPr sz="700" b="1" i="0">
-                <a:solidFill>
-                  <a:srgbClr val="A65E1A"/>
+              <a:rPr sz="580" b="0" i="0">
+                <a:solidFill>
+                  <a:srgbClr val="6B6B6B"/>
                 </a:solidFill>
                 <a:latin typeface="Times New Roman"/>
               </a:rPr>
-              <a:t>Stage 2</a:t>
-            </a:r>
-            <a:r>
-              <a:rPr sz="700" b="0" i="0">
-                <a:solidFill>
-                  <a:srgbClr val="A65E1A"/>
-                </a:solidFill>
-                <a:latin typeface="Times New Roman"/>
-              </a:rPr>
-              <a:t>  task policy by SAC</a:t>
+              <a:t>bootstrap</a:t>
             </a:r>
           </a:p>
         </p:txBody>
       </p:sp>
       <p:sp>
         <p:nvSpPr>
-          <p:cNvPr id="159" name="TextBox 158"/>
+          <p:cNvPr id="170" name="TextBox 169"/>
           <p:cNvSpPr txBox="1"/>
           <p:nvPr/>
         </p:nvSpPr>
         <p:spPr>
           <a:xfrm>
-            <a:off x="1335024" y="1664208"/>
-            <a:ext cx="914400" cy="329184"/>
+            <a:off x="1463040" y="1618488"/>
+            <a:ext cx="1481328" cy="137160"/>
           </a:xfrm>
           <a:prstGeom prst="rect">
             <a:avLst/>
@@ -9755,1437 +10157,136 @@
               </a:lnSpc>
             </a:pPr>
             <a:r>
-              <a:rPr sz="650" b="0" i="0">
-                <a:solidFill>
-                  <a:srgbClr val="000000"/>
+              <a:rPr sz="590" b="0" i="1">
+                <a:solidFill>
+                  <a:srgbClr val="6B6B6B"/>
                 </a:solidFill>
                 <a:latin typeface="Times New Roman"/>
               </a:rPr>
-              <a:t>maximize reward</a:t>
-            </a:r>
-          </a:p>
-          <a:p>
-            <a:pPr algn="ctr">
-              <a:lnSpc>
-                <a:spcPct val="105000"/>
-              </a:lnSpc>
-            </a:pPr>
-            <a:r>
-              <a:rPr sz="650" b="0" i="0">
-                <a:solidFill>
-                  <a:srgbClr val="000000"/>
+              <a:t>δ</a:t>
+            </a:r>
+            <a:r>
+              <a:rPr sz="590" b="0" i="0">
+                <a:solidFill>
+                  <a:srgbClr val="6B6B6B"/>
                 </a:solidFill>
                 <a:latin typeface="Times New Roman"/>
               </a:rPr>
-              <a:t>s.t. </a:t>
-            </a:r>
-            <a:r>
-              <a:rPr sz="650" b="0" i="1">
-                <a:solidFill>
-                  <a:srgbClr val="000000"/>
+              <a:t> = </a:t>
+            </a:r>
+            <a:r>
+              <a:rPr sz="590" b="0" i="1">
+                <a:solidFill>
+                  <a:srgbClr val="6B6B6B"/>
                 </a:solidFill>
                 <a:latin typeface="Times New Roman"/>
               </a:rPr>
-              <a:t>q</a:t>
-            </a:r>
-            <a:r>
-              <a:rPr sz="650" b="0" i="0">
-                <a:solidFill>
-                  <a:srgbClr val="000000"/>
+              <a:t>π</a:t>
+            </a:r>
+            <a:r>
+              <a:rPr sz="590" b="0" i="1" baseline="-25000">
+                <a:solidFill>
+                  <a:srgbClr val="6B6B6B"/>
                 </a:solidFill>
                 <a:latin typeface="Times New Roman"/>
               </a:rPr>
-              <a:t> ≥ </a:t>
-            </a:r>
-            <a:r>
-              <a:rPr sz="650" b="0" i="1">
-                <a:solidFill>
-                  <a:srgbClr val="000000"/>
+              <a:t>h</a:t>
+            </a:r>
+            <a:r>
+              <a:rPr sz="590" b="0" i="0">
+                <a:solidFill>
+                  <a:srgbClr val="6B6B6B"/>
                 </a:solidFill>
                 <a:latin typeface="Times New Roman"/>
               </a:rPr>
-              <a:t>τ</a:t>
+              <a:t>,  </a:t>
+            </a:r>
+            <a:r>
+              <a:rPr sz="590" b="0" i="1">
+                <a:solidFill>
+                  <a:srgbClr val="6B6B6B"/>
+                </a:solidFill>
+                <a:latin typeface="Times New Roman"/>
+              </a:rPr>
+              <a:t>d</a:t>
+            </a:r>
+            <a:r>
+              <a:rPr sz="590" b="0" i="0">
+                <a:solidFill>
+                  <a:srgbClr val="6B6B6B"/>
+                </a:solidFill>
+                <a:latin typeface="Times New Roman"/>
+              </a:rPr>
+              <a:t> = </a:t>
+            </a:r>
+            <a:r>
+              <a:rPr sz="590" b="0" i="1">
+                <a:solidFill>
+                  <a:srgbClr val="6B6B6B"/>
+                </a:solidFill>
+                <a:latin typeface="Times New Roman"/>
+              </a:rPr>
+              <a:t>μ</a:t>
+            </a:r>
+            <a:r>
+              <a:rPr sz="590" b="0" i="0">
+                <a:solidFill>
+                  <a:srgbClr val="6B6B6B"/>
+                </a:solidFill>
+                <a:latin typeface="Times New Roman"/>
+              </a:rPr>
+              <a:t>  at every step</a:t>
             </a:r>
           </a:p>
         </p:txBody>
       </p:sp>
-      <p:grpSp>
-        <p:nvGrpSpPr>
-          <p:cNvPr id="160" name="task_policy"/>
-          <p:cNvGrpSpPr/>
+      <p:cxnSp>
+        <p:nvCxnSpPr>
+          <p:cNvPr id="171" name="Connector 170"/>
+          <p:cNvCxnSpPr/>
           <p:nvPr/>
-        </p:nvGrpSpPr>
-        <p:grpSpPr>
-          <a:xfrm>
-            <a:off x="2450592" y="1645920"/>
-            <a:ext cx="457200" cy="329184"/>
-            <a:chOff x="2450592" y="1645920"/>
-            <a:chExt cx="457200" cy="329184"/>
+        </p:nvCxnSpPr>
+        <p:spPr>
+          <a:xfrm flipH="1">
+            <a:off x="1463040" y="1810512"/>
+            <a:ext cx="1709928" cy="0"/>
           </a:xfrm>
-        </p:grpSpPr>
-        <p:sp>
-          <p:nvSpPr>
-            <p:cNvPr id="161" name="Rounded Rectangle 160"/>
-            <p:cNvSpPr/>
-            <p:nvPr/>
-          </p:nvSpPr>
-          <p:spPr>
-            <a:xfrm>
-              <a:off x="2450592" y="1645920"/>
-              <a:ext cx="457200" cy="329184"/>
-            </a:xfrm>
-            <a:prstGeom prst="roundRect">
-              <a:avLst>
-                <a:gd name="adj" fmla="val 15000"/>
-              </a:avLst>
-            </a:prstGeom>
-            <a:solidFill>
-              <a:srgbClr val="FFFFFF"/>
-            </a:solidFill>
-            <a:ln w="8890">
-              <a:solidFill>
-                <a:srgbClr val="A65E1A"/>
-              </a:solidFill>
-            </a:ln>
-            <a:effectLst/>
-          </p:spPr>
-          <p:style>
-            <a:lnRef idx="1">
-              <a:schemeClr val="accent1"/>
-            </a:lnRef>
-            <a:fillRef idx="3">
-              <a:schemeClr val="accent1"/>
-            </a:fillRef>
-            <a:effectRef idx="2">
-              <a:schemeClr val="accent1"/>
-            </a:effectRef>
-            <a:fontRef idx="minor">
-              <a:schemeClr val="lt1"/>
-            </a:fontRef>
-          </p:style>
-          <p:txBody>
-            <a:bodyPr rtlCol="0" anchor="ctr"/>
-            <a:lstStyle/>
-            <a:p>
-              <a:pPr algn="ctr"/>
-            </a:p>
-          </p:txBody>
-        </p:sp>
-        <p:cxnSp>
-          <p:nvCxnSpPr>
-            <p:cNvPr id="162" name="Connector 161"/>
-            <p:cNvCxnSpPr/>
-            <p:nvPr/>
-          </p:nvCxnSpPr>
-          <p:spPr>
-            <a:xfrm flipV="1">
-              <a:off x="2514600" y="1691640"/>
-              <a:ext cx="164592" cy="39624"/>
-            </a:xfrm>
-            <a:prstGeom prst="line">
-              <a:avLst/>
-            </a:prstGeom>
-            <a:ln w="4445">
-              <a:solidFill>
-                <a:srgbClr val="E3B48A"/>
-              </a:solidFill>
-            </a:ln>
-            <a:effectLst/>
-          </p:spPr>
-          <p:style>
-            <a:lnRef idx="2">
-              <a:schemeClr val="accent1"/>
-            </a:lnRef>
-            <a:fillRef idx="0">
-              <a:schemeClr val="accent1"/>
-            </a:fillRef>
-            <a:effectRef idx="1">
-              <a:schemeClr val="accent1"/>
-            </a:effectRef>
-            <a:fontRef idx="minor">
-              <a:schemeClr val="tx1"/>
-            </a:fontRef>
-          </p:style>
-        </p:cxnSp>
-        <p:cxnSp>
-          <p:nvCxnSpPr>
-            <p:cNvPr id="163" name="Connector 162"/>
-            <p:cNvCxnSpPr/>
-            <p:nvPr/>
-          </p:nvCxnSpPr>
-          <p:spPr>
-            <a:xfrm>
-              <a:off x="2514600" y="1731264"/>
-              <a:ext cx="164592" cy="39624"/>
-            </a:xfrm>
-            <a:prstGeom prst="line">
-              <a:avLst/>
-            </a:prstGeom>
-            <a:ln w="4445">
-              <a:solidFill>
-                <a:srgbClr val="E3B48A"/>
-              </a:solidFill>
-            </a:ln>
-            <a:effectLst/>
-          </p:spPr>
-          <p:style>
-            <a:lnRef idx="2">
-              <a:schemeClr val="accent1"/>
-            </a:lnRef>
-            <a:fillRef idx="0">
-              <a:schemeClr val="accent1"/>
-            </a:fillRef>
-            <a:effectRef idx="1">
-              <a:schemeClr val="accent1"/>
-            </a:effectRef>
-            <a:fontRef idx="minor">
-              <a:schemeClr val="tx1"/>
-            </a:fontRef>
-          </p:style>
-        </p:cxnSp>
-        <p:cxnSp>
-          <p:nvCxnSpPr>
-            <p:cNvPr id="164" name="Connector 163"/>
-            <p:cNvCxnSpPr/>
-            <p:nvPr/>
-          </p:nvCxnSpPr>
-          <p:spPr>
-            <a:xfrm>
-              <a:off x="2514600" y="1731264"/>
-              <a:ext cx="164592" cy="118872"/>
-            </a:xfrm>
-            <a:prstGeom prst="line">
-              <a:avLst/>
-            </a:prstGeom>
-            <a:ln w="4445">
-              <a:solidFill>
-                <a:srgbClr val="E3B48A"/>
-              </a:solidFill>
-            </a:ln>
-            <a:effectLst/>
-          </p:spPr>
-          <p:style>
-            <a:lnRef idx="2">
-              <a:schemeClr val="accent1"/>
-            </a:lnRef>
-            <a:fillRef idx="0">
-              <a:schemeClr val="accent1"/>
-            </a:fillRef>
-            <a:effectRef idx="1">
-              <a:schemeClr val="accent1"/>
-            </a:effectRef>
-            <a:fontRef idx="minor">
-              <a:schemeClr val="tx1"/>
-            </a:fontRef>
-          </p:style>
-        </p:cxnSp>
-        <p:cxnSp>
-          <p:nvCxnSpPr>
-            <p:cNvPr id="165" name="Connector 164"/>
-            <p:cNvCxnSpPr/>
-            <p:nvPr/>
-          </p:nvCxnSpPr>
-          <p:spPr>
-            <a:xfrm>
-              <a:off x="2514600" y="1731264"/>
-              <a:ext cx="164592" cy="198120"/>
-            </a:xfrm>
-            <a:prstGeom prst="line">
-              <a:avLst/>
-            </a:prstGeom>
-            <a:ln w="4445">
-              <a:solidFill>
-                <a:srgbClr val="E3B48A"/>
-              </a:solidFill>
-            </a:ln>
-            <a:effectLst/>
-          </p:spPr>
-          <p:style>
-            <a:lnRef idx="2">
-              <a:schemeClr val="accent1"/>
-            </a:lnRef>
-            <a:fillRef idx="0">
-              <a:schemeClr val="accent1"/>
-            </a:fillRef>
-            <a:effectRef idx="1">
-              <a:schemeClr val="accent1"/>
-            </a:effectRef>
-            <a:fontRef idx="minor">
-              <a:schemeClr val="tx1"/>
-            </a:fontRef>
-          </p:style>
-        </p:cxnSp>
-        <p:cxnSp>
-          <p:nvCxnSpPr>
-            <p:cNvPr id="166" name="Connector 165"/>
-            <p:cNvCxnSpPr/>
-            <p:nvPr/>
-          </p:nvCxnSpPr>
-          <p:spPr>
-            <a:xfrm flipV="1">
-              <a:off x="2514600" y="1691640"/>
-              <a:ext cx="164592" cy="118872"/>
-            </a:xfrm>
-            <a:prstGeom prst="line">
-              <a:avLst/>
-            </a:prstGeom>
-            <a:ln w="4445">
-              <a:solidFill>
-                <a:srgbClr val="E3B48A"/>
-              </a:solidFill>
-            </a:ln>
-            <a:effectLst/>
-          </p:spPr>
-          <p:style>
-            <a:lnRef idx="2">
-              <a:schemeClr val="accent1"/>
-            </a:lnRef>
-            <a:fillRef idx="0">
-              <a:schemeClr val="accent1"/>
-            </a:fillRef>
-            <a:effectRef idx="1">
-              <a:schemeClr val="accent1"/>
-            </a:effectRef>
-            <a:fontRef idx="minor">
-              <a:schemeClr val="tx1"/>
-            </a:fontRef>
-          </p:style>
-        </p:cxnSp>
-        <p:cxnSp>
-          <p:nvCxnSpPr>
-            <p:cNvPr id="167" name="Connector 166"/>
-            <p:cNvCxnSpPr/>
-            <p:nvPr/>
-          </p:nvCxnSpPr>
-          <p:spPr>
-            <a:xfrm flipV="1">
-              <a:off x="2514600" y="1770888"/>
-              <a:ext cx="164592" cy="39624"/>
-            </a:xfrm>
-            <a:prstGeom prst="line">
-              <a:avLst/>
-            </a:prstGeom>
-            <a:ln w="4445">
-              <a:solidFill>
-                <a:srgbClr val="E3B48A"/>
-              </a:solidFill>
-            </a:ln>
-            <a:effectLst/>
-          </p:spPr>
-          <p:style>
-            <a:lnRef idx="2">
-              <a:schemeClr val="accent1"/>
-            </a:lnRef>
-            <a:fillRef idx="0">
-              <a:schemeClr val="accent1"/>
-            </a:fillRef>
-            <a:effectRef idx="1">
-              <a:schemeClr val="accent1"/>
-            </a:effectRef>
-            <a:fontRef idx="minor">
-              <a:schemeClr val="tx1"/>
-            </a:fontRef>
-          </p:style>
-        </p:cxnSp>
-        <p:cxnSp>
-          <p:nvCxnSpPr>
-            <p:cNvPr id="168" name="Connector 167"/>
-            <p:cNvCxnSpPr/>
-            <p:nvPr/>
-          </p:nvCxnSpPr>
-          <p:spPr>
-            <a:xfrm>
-              <a:off x="2514600" y="1810512"/>
-              <a:ext cx="164592" cy="39624"/>
-            </a:xfrm>
-            <a:prstGeom prst="line">
-              <a:avLst/>
-            </a:prstGeom>
-            <a:ln w="4445">
-              <a:solidFill>
-                <a:srgbClr val="E3B48A"/>
-              </a:solidFill>
-            </a:ln>
-            <a:effectLst/>
-          </p:spPr>
-          <p:style>
-            <a:lnRef idx="2">
-              <a:schemeClr val="accent1"/>
-            </a:lnRef>
-            <a:fillRef idx="0">
-              <a:schemeClr val="accent1"/>
-            </a:fillRef>
-            <a:effectRef idx="1">
-              <a:schemeClr val="accent1"/>
-            </a:effectRef>
-            <a:fontRef idx="minor">
-              <a:schemeClr val="tx1"/>
-            </a:fontRef>
-          </p:style>
-        </p:cxnSp>
-        <p:cxnSp>
-          <p:nvCxnSpPr>
-            <p:cNvPr id="169" name="Connector 168"/>
-            <p:cNvCxnSpPr/>
-            <p:nvPr/>
-          </p:nvCxnSpPr>
-          <p:spPr>
-            <a:xfrm>
-              <a:off x="2514600" y="1810512"/>
-              <a:ext cx="164592" cy="118872"/>
-            </a:xfrm>
-            <a:prstGeom prst="line">
-              <a:avLst/>
-            </a:prstGeom>
-            <a:ln w="4445">
-              <a:solidFill>
-                <a:srgbClr val="E3B48A"/>
-              </a:solidFill>
-            </a:ln>
-            <a:effectLst/>
-          </p:spPr>
-          <p:style>
-            <a:lnRef idx="2">
-              <a:schemeClr val="accent1"/>
-            </a:lnRef>
-            <a:fillRef idx="0">
-              <a:schemeClr val="accent1"/>
-            </a:fillRef>
-            <a:effectRef idx="1">
-              <a:schemeClr val="accent1"/>
-            </a:effectRef>
-            <a:fontRef idx="minor">
-              <a:schemeClr val="tx1"/>
-            </a:fontRef>
-          </p:style>
-        </p:cxnSp>
-        <p:cxnSp>
-          <p:nvCxnSpPr>
-            <p:cNvPr id="170" name="Connector 169"/>
-            <p:cNvCxnSpPr/>
-            <p:nvPr/>
-          </p:nvCxnSpPr>
-          <p:spPr>
-            <a:xfrm flipV="1">
-              <a:off x="2514600" y="1691640"/>
-              <a:ext cx="164592" cy="198119"/>
-            </a:xfrm>
-            <a:prstGeom prst="line">
-              <a:avLst/>
-            </a:prstGeom>
-            <a:ln w="4445">
-              <a:solidFill>
-                <a:srgbClr val="E3B48A"/>
-              </a:solidFill>
-            </a:ln>
-            <a:effectLst/>
-          </p:spPr>
-          <p:style>
-            <a:lnRef idx="2">
-              <a:schemeClr val="accent1"/>
-            </a:lnRef>
-            <a:fillRef idx="0">
-              <a:schemeClr val="accent1"/>
-            </a:fillRef>
-            <a:effectRef idx="1">
-              <a:schemeClr val="accent1"/>
-            </a:effectRef>
-            <a:fontRef idx="minor">
-              <a:schemeClr val="tx1"/>
-            </a:fontRef>
-          </p:style>
-        </p:cxnSp>
-        <p:cxnSp>
-          <p:nvCxnSpPr>
-            <p:cNvPr id="171" name="Connector 170"/>
-            <p:cNvCxnSpPr/>
-            <p:nvPr/>
-          </p:nvCxnSpPr>
-          <p:spPr>
-            <a:xfrm flipV="1">
-              <a:off x="2514600" y="1770888"/>
-              <a:ext cx="164592" cy="118871"/>
-            </a:xfrm>
-            <a:prstGeom prst="line">
-              <a:avLst/>
-            </a:prstGeom>
-            <a:ln w="4445">
-              <a:solidFill>
-                <a:srgbClr val="E3B48A"/>
-              </a:solidFill>
-            </a:ln>
-            <a:effectLst/>
-          </p:spPr>
-          <p:style>
-            <a:lnRef idx="2">
-              <a:schemeClr val="accent1"/>
-            </a:lnRef>
-            <a:fillRef idx="0">
-              <a:schemeClr val="accent1"/>
-            </a:fillRef>
-            <a:effectRef idx="1">
-              <a:schemeClr val="accent1"/>
-            </a:effectRef>
-            <a:fontRef idx="minor">
-              <a:schemeClr val="tx1"/>
-            </a:fontRef>
-          </p:style>
-        </p:cxnSp>
-        <p:cxnSp>
-          <p:nvCxnSpPr>
-            <p:cNvPr id="172" name="Connector 171"/>
-            <p:cNvCxnSpPr/>
-            <p:nvPr/>
-          </p:nvCxnSpPr>
-          <p:spPr>
-            <a:xfrm flipV="1">
-              <a:off x="2514600" y="1850136"/>
-              <a:ext cx="164592" cy="39623"/>
-            </a:xfrm>
-            <a:prstGeom prst="line">
-              <a:avLst/>
-            </a:prstGeom>
-            <a:ln w="4445">
-              <a:solidFill>
-                <a:srgbClr val="E3B48A"/>
-              </a:solidFill>
-            </a:ln>
-            <a:effectLst/>
-          </p:spPr>
-          <p:style>
-            <a:lnRef idx="2">
-              <a:schemeClr val="accent1"/>
-            </a:lnRef>
-            <a:fillRef idx="0">
-              <a:schemeClr val="accent1"/>
-            </a:fillRef>
-            <a:effectRef idx="1">
-              <a:schemeClr val="accent1"/>
-            </a:effectRef>
-            <a:fontRef idx="minor">
-              <a:schemeClr val="tx1"/>
-            </a:fontRef>
-          </p:style>
-        </p:cxnSp>
-        <p:cxnSp>
-          <p:nvCxnSpPr>
-            <p:cNvPr id="173" name="Connector 172"/>
-            <p:cNvCxnSpPr/>
-            <p:nvPr/>
-          </p:nvCxnSpPr>
-          <p:spPr>
-            <a:xfrm>
-              <a:off x="2514600" y="1889759"/>
-              <a:ext cx="164592" cy="39625"/>
-            </a:xfrm>
-            <a:prstGeom prst="line">
-              <a:avLst/>
-            </a:prstGeom>
-            <a:ln w="4445">
-              <a:solidFill>
-                <a:srgbClr val="E3B48A"/>
-              </a:solidFill>
-            </a:ln>
-            <a:effectLst/>
-          </p:spPr>
-          <p:style>
-            <a:lnRef idx="2">
-              <a:schemeClr val="accent1"/>
-            </a:lnRef>
-            <a:fillRef idx="0">
-              <a:schemeClr val="accent1"/>
-            </a:fillRef>
-            <a:effectRef idx="1">
-              <a:schemeClr val="accent1"/>
-            </a:effectRef>
-            <a:fontRef idx="minor">
-              <a:schemeClr val="tx1"/>
-            </a:fontRef>
-          </p:style>
-        </p:cxnSp>
-        <p:cxnSp>
-          <p:nvCxnSpPr>
-            <p:cNvPr id="174" name="Connector 173"/>
-            <p:cNvCxnSpPr/>
-            <p:nvPr/>
-          </p:nvCxnSpPr>
-          <p:spPr>
-            <a:xfrm>
-              <a:off x="2679192" y="1691640"/>
-              <a:ext cx="164592" cy="39624"/>
-            </a:xfrm>
-            <a:prstGeom prst="line">
-              <a:avLst/>
-            </a:prstGeom>
-            <a:ln w="4445">
-              <a:solidFill>
-                <a:srgbClr val="E3B48A"/>
-              </a:solidFill>
-            </a:ln>
-            <a:effectLst/>
-          </p:spPr>
-          <p:style>
-            <a:lnRef idx="2">
-              <a:schemeClr val="accent1"/>
-            </a:lnRef>
-            <a:fillRef idx="0">
-              <a:schemeClr val="accent1"/>
-            </a:fillRef>
-            <a:effectRef idx="1">
-              <a:schemeClr val="accent1"/>
-            </a:effectRef>
-            <a:fontRef idx="minor">
-              <a:schemeClr val="tx1"/>
-            </a:fontRef>
-          </p:style>
-        </p:cxnSp>
-        <p:cxnSp>
-          <p:nvCxnSpPr>
-            <p:cNvPr id="175" name="Connector 174"/>
-            <p:cNvCxnSpPr/>
-            <p:nvPr/>
-          </p:nvCxnSpPr>
-          <p:spPr>
-            <a:xfrm>
-              <a:off x="2679192" y="1691640"/>
-              <a:ext cx="164592" cy="118872"/>
-            </a:xfrm>
-            <a:prstGeom prst="line">
-              <a:avLst/>
-            </a:prstGeom>
-            <a:ln w="4445">
-              <a:solidFill>
-                <a:srgbClr val="E3B48A"/>
-              </a:solidFill>
-            </a:ln>
-            <a:effectLst/>
-          </p:spPr>
-          <p:style>
-            <a:lnRef idx="2">
-              <a:schemeClr val="accent1"/>
-            </a:lnRef>
-            <a:fillRef idx="0">
-              <a:schemeClr val="accent1"/>
-            </a:fillRef>
-            <a:effectRef idx="1">
-              <a:schemeClr val="accent1"/>
-            </a:effectRef>
-            <a:fontRef idx="minor">
-              <a:schemeClr val="tx1"/>
-            </a:fontRef>
-          </p:style>
-        </p:cxnSp>
-        <p:cxnSp>
-          <p:nvCxnSpPr>
-            <p:cNvPr id="176" name="Connector 175"/>
-            <p:cNvCxnSpPr/>
-            <p:nvPr/>
-          </p:nvCxnSpPr>
-          <p:spPr>
-            <a:xfrm>
-              <a:off x="2679192" y="1691640"/>
-              <a:ext cx="164592" cy="198119"/>
-            </a:xfrm>
-            <a:prstGeom prst="line">
-              <a:avLst/>
-            </a:prstGeom>
-            <a:ln w="4445">
-              <a:solidFill>
-                <a:srgbClr val="E3B48A"/>
-              </a:solidFill>
-            </a:ln>
-            <a:effectLst/>
-          </p:spPr>
-          <p:style>
-            <a:lnRef idx="2">
-              <a:schemeClr val="accent1"/>
-            </a:lnRef>
-            <a:fillRef idx="0">
-              <a:schemeClr val="accent1"/>
-            </a:fillRef>
-            <a:effectRef idx="1">
-              <a:schemeClr val="accent1"/>
-            </a:effectRef>
-            <a:fontRef idx="minor">
-              <a:schemeClr val="tx1"/>
-            </a:fontRef>
-          </p:style>
-        </p:cxnSp>
-        <p:cxnSp>
-          <p:nvCxnSpPr>
-            <p:cNvPr id="177" name="Connector 176"/>
-            <p:cNvCxnSpPr/>
-            <p:nvPr/>
-          </p:nvCxnSpPr>
-          <p:spPr>
-            <a:xfrm flipV="1">
-              <a:off x="2679192" y="1731264"/>
-              <a:ext cx="164592" cy="39624"/>
-            </a:xfrm>
-            <a:prstGeom prst="line">
-              <a:avLst/>
-            </a:prstGeom>
-            <a:ln w="4445">
-              <a:solidFill>
-                <a:srgbClr val="E3B48A"/>
-              </a:solidFill>
-            </a:ln>
-            <a:effectLst/>
-          </p:spPr>
-          <p:style>
-            <a:lnRef idx="2">
-              <a:schemeClr val="accent1"/>
-            </a:lnRef>
-            <a:fillRef idx="0">
-              <a:schemeClr val="accent1"/>
-            </a:fillRef>
-            <a:effectRef idx="1">
-              <a:schemeClr val="accent1"/>
-            </a:effectRef>
-            <a:fontRef idx="minor">
-              <a:schemeClr val="tx1"/>
-            </a:fontRef>
-          </p:style>
-        </p:cxnSp>
-        <p:cxnSp>
-          <p:nvCxnSpPr>
-            <p:cNvPr id="178" name="Connector 177"/>
-            <p:cNvCxnSpPr/>
-            <p:nvPr/>
-          </p:nvCxnSpPr>
-          <p:spPr>
-            <a:xfrm>
-              <a:off x="2679192" y="1770888"/>
-              <a:ext cx="164592" cy="39624"/>
-            </a:xfrm>
-            <a:prstGeom prst="line">
-              <a:avLst/>
-            </a:prstGeom>
-            <a:ln w="4445">
-              <a:solidFill>
-                <a:srgbClr val="E3B48A"/>
-              </a:solidFill>
-            </a:ln>
-            <a:effectLst/>
-          </p:spPr>
-          <p:style>
-            <a:lnRef idx="2">
-              <a:schemeClr val="accent1"/>
-            </a:lnRef>
-            <a:fillRef idx="0">
-              <a:schemeClr val="accent1"/>
-            </a:fillRef>
-            <a:effectRef idx="1">
-              <a:schemeClr val="accent1"/>
-            </a:effectRef>
-            <a:fontRef idx="minor">
-              <a:schemeClr val="tx1"/>
-            </a:fontRef>
-          </p:style>
-        </p:cxnSp>
-        <p:cxnSp>
-          <p:nvCxnSpPr>
-            <p:cNvPr id="179" name="Connector 178"/>
-            <p:cNvCxnSpPr/>
-            <p:nvPr/>
-          </p:nvCxnSpPr>
-          <p:spPr>
-            <a:xfrm>
-              <a:off x="2679192" y="1770888"/>
-              <a:ext cx="164592" cy="118871"/>
-            </a:xfrm>
-            <a:prstGeom prst="line">
-              <a:avLst/>
-            </a:prstGeom>
-            <a:ln w="4445">
-              <a:solidFill>
-                <a:srgbClr val="E3B48A"/>
-              </a:solidFill>
-            </a:ln>
-            <a:effectLst/>
-          </p:spPr>
-          <p:style>
-            <a:lnRef idx="2">
-              <a:schemeClr val="accent1"/>
-            </a:lnRef>
-            <a:fillRef idx="0">
-              <a:schemeClr val="accent1"/>
-            </a:fillRef>
-            <a:effectRef idx="1">
-              <a:schemeClr val="accent1"/>
-            </a:effectRef>
-            <a:fontRef idx="minor">
-              <a:schemeClr val="tx1"/>
-            </a:fontRef>
-          </p:style>
-        </p:cxnSp>
-        <p:cxnSp>
-          <p:nvCxnSpPr>
-            <p:cNvPr id="180" name="Connector 179"/>
-            <p:cNvCxnSpPr/>
-            <p:nvPr/>
-          </p:nvCxnSpPr>
-          <p:spPr>
-            <a:xfrm flipV="1">
-              <a:off x="2679192" y="1731264"/>
-              <a:ext cx="164592" cy="118872"/>
-            </a:xfrm>
-            <a:prstGeom prst="line">
-              <a:avLst/>
-            </a:prstGeom>
-            <a:ln w="4445">
-              <a:solidFill>
-                <a:srgbClr val="E3B48A"/>
-              </a:solidFill>
-            </a:ln>
-            <a:effectLst/>
-          </p:spPr>
-          <p:style>
-            <a:lnRef idx="2">
-              <a:schemeClr val="accent1"/>
-            </a:lnRef>
-            <a:fillRef idx="0">
-              <a:schemeClr val="accent1"/>
-            </a:fillRef>
-            <a:effectRef idx="1">
-              <a:schemeClr val="accent1"/>
-            </a:effectRef>
-            <a:fontRef idx="minor">
-              <a:schemeClr val="tx1"/>
-            </a:fontRef>
-          </p:style>
-        </p:cxnSp>
-        <p:cxnSp>
-          <p:nvCxnSpPr>
-            <p:cNvPr id="181" name="Connector 180"/>
-            <p:cNvCxnSpPr/>
-            <p:nvPr/>
-          </p:nvCxnSpPr>
-          <p:spPr>
-            <a:xfrm flipV="1">
-              <a:off x="2679192" y="1810512"/>
-              <a:ext cx="164592" cy="39624"/>
-            </a:xfrm>
-            <a:prstGeom prst="line">
-              <a:avLst/>
-            </a:prstGeom>
-            <a:ln w="4445">
-              <a:solidFill>
-                <a:srgbClr val="E3B48A"/>
-              </a:solidFill>
-            </a:ln>
-            <a:effectLst/>
-          </p:spPr>
-          <p:style>
-            <a:lnRef idx="2">
-              <a:schemeClr val="accent1"/>
-            </a:lnRef>
-            <a:fillRef idx="0">
-              <a:schemeClr val="accent1"/>
-            </a:fillRef>
-            <a:effectRef idx="1">
-              <a:schemeClr val="accent1"/>
-            </a:effectRef>
-            <a:fontRef idx="minor">
-              <a:schemeClr val="tx1"/>
-            </a:fontRef>
-          </p:style>
-        </p:cxnSp>
-        <p:cxnSp>
-          <p:nvCxnSpPr>
-            <p:cNvPr id="182" name="Connector 181"/>
-            <p:cNvCxnSpPr/>
-            <p:nvPr/>
-          </p:nvCxnSpPr>
-          <p:spPr>
-            <a:xfrm>
-              <a:off x="2679192" y="1850136"/>
-              <a:ext cx="164592" cy="39623"/>
-            </a:xfrm>
-            <a:prstGeom prst="line">
-              <a:avLst/>
-            </a:prstGeom>
-            <a:ln w="4445">
-              <a:solidFill>
-                <a:srgbClr val="E3B48A"/>
-              </a:solidFill>
-            </a:ln>
-            <a:effectLst/>
-          </p:spPr>
-          <p:style>
-            <a:lnRef idx="2">
-              <a:schemeClr val="accent1"/>
-            </a:lnRef>
-            <a:fillRef idx="0">
-              <a:schemeClr val="accent1"/>
-            </a:fillRef>
-            <a:effectRef idx="1">
-              <a:schemeClr val="accent1"/>
-            </a:effectRef>
-            <a:fontRef idx="minor">
-              <a:schemeClr val="tx1"/>
-            </a:fontRef>
-          </p:style>
-        </p:cxnSp>
-        <p:cxnSp>
-          <p:nvCxnSpPr>
-            <p:cNvPr id="183" name="Connector 182"/>
-            <p:cNvCxnSpPr/>
-            <p:nvPr/>
-          </p:nvCxnSpPr>
-          <p:spPr>
-            <a:xfrm flipV="1">
-              <a:off x="2679192" y="1731264"/>
-              <a:ext cx="164592" cy="198120"/>
-            </a:xfrm>
-            <a:prstGeom prst="line">
-              <a:avLst/>
-            </a:prstGeom>
-            <a:ln w="4445">
-              <a:solidFill>
-                <a:srgbClr val="E3B48A"/>
-              </a:solidFill>
-            </a:ln>
-            <a:effectLst/>
-          </p:spPr>
-          <p:style>
-            <a:lnRef idx="2">
-              <a:schemeClr val="accent1"/>
-            </a:lnRef>
-            <a:fillRef idx="0">
-              <a:schemeClr val="accent1"/>
-            </a:fillRef>
-            <a:effectRef idx="1">
-              <a:schemeClr val="accent1"/>
-            </a:effectRef>
-            <a:fontRef idx="minor">
-              <a:schemeClr val="tx1"/>
-            </a:fontRef>
-          </p:style>
-        </p:cxnSp>
-        <p:cxnSp>
-          <p:nvCxnSpPr>
-            <p:cNvPr id="184" name="Connector 183"/>
-            <p:cNvCxnSpPr/>
-            <p:nvPr/>
-          </p:nvCxnSpPr>
-          <p:spPr>
-            <a:xfrm flipV="1">
-              <a:off x="2679192" y="1810512"/>
-              <a:ext cx="164592" cy="118872"/>
-            </a:xfrm>
-            <a:prstGeom prst="line">
-              <a:avLst/>
-            </a:prstGeom>
-            <a:ln w="4445">
-              <a:solidFill>
-                <a:srgbClr val="E3B48A"/>
-              </a:solidFill>
-            </a:ln>
-            <a:effectLst/>
-          </p:spPr>
-          <p:style>
-            <a:lnRef idx="2">
-              <a:schemeClr val="accent1"/>
-            </a:lnRef>
-            <a:fillRef idx="0">
-              <a:schemeClr val="accent1"/>
-            </a:fillRef>
-            <a:effectRef idx="1">
-              <a:schemeClr val="accent1"/>
-            </a:effectRef>
-            <a:fontRef idx="minor">
-              <a:schemeClr val="tx1"/>
-            </a:fontRef>
-          </p:style>
-        </p:cxnSp>
-        <p:cxnSp>
-          <p:nvCxnSpPr>
-            <p:cNvPr id="185" name="Connector 184"/>
-            <p:cNvCxnSpPr/>
-            <p:nvPr/>
-          </p:nvCxnSpPr>
-          <p:spPr>
-            <a:xfrm flipV="1">
-              <a:off x="2679192" y="1889759"/>
-              <a:ext cx="164592" cy="39625"/>
-            </a:xfrm>
-            <a:prstGeom prst="line">
-              <a:avLst/>
-            </a:prstGeom>
-            <a:ln w="4445">
-              <a:solidFill>
-                <a:srgbClr val="E3B48A"/>
-              </a:solidFill>
-            </a:ln>
-            <a:effectLst/>
-          </p:spPr>
-          <p:style>
-            <a:lnRef idx="2">
-              <a:schemeClr val="accent1"/>
-            </a:lnRef>
-            <a:fillRef idx="0">
-              <a:schemeClr val="accent1"/>
-            </a:fillRef>
-            <a:effectRef idx="1">
-              <a:schemeClr val="accent1"/>
-            </a:effectRef>
-            <a:fontRef idx="minor">
-              <a:schemeClr val="tx1"/>
-            </a:fontRef>
-          </p:style>
-        </p:cxnSp>
-        <p:sp>
-          <p:nvSpPr>
-            <p:cNvPr id="186" name="Oval 185"/>
-            <p:cNvSpPr/>
-            <p:nvPr/>
-          </p:nvSpPr>
-          <p:spPr>
-            <a:xfrm>
-              <a:off x="2494429" y="1711093"/>
-              <a:ext cx="40341" cy="40341"/>
-            </a:xfrm>
-            <a:prstGeom prst="ellipse">
-              <a:avLst/>
-            </a:prstGeom>
+          <a:prstGeom prst="line">
+            <a:avLst/>
+          </a:prstGeom>
+          <a:ln w="10160">
             <a:solidFill>
               <a:srgbClr val="A65E1A"/>
             </a:solidFill>
-            <a:ln>
-              <a:noFill/>
-            </a:ln>
-            <a:effectLst/>
-          </p:spPr>
-          <p:style>
-            <a:lnRef idx="1">
-              <a:schemeClr val="accent1"/>
-            </a:lnRef>
-            <a:fillRef idx="3">
-              <a:schemeClr val="accent1"/>
-            </a:fillRef>
-            <a:effectRef idx="2">
-              <a:schemeClr val="accent1"/>
-            </a:effectRef>
-            <a:fontRef idx="minor">
-              <a:schemeClr val="lt1"/>
-            </a:fontRef>
-          </p:style>
-          <p:txBody>
-            <a:bodyPr rtlCol="0" anchor="ctr"/>
-            <a:lstStyle/>
-            <a:p>
-              <a:pPr algn="ctr"/>
-            </a:p>
-          </p:txBody>
-        </p:sp>
-        <p:sp>
-          <p:nvSpPr>
-            <p:cNvPr id="187" name="Oval 186"/>
-            <p:cNvSpPr/>
-            <p:nvPr/>
-          </p:nvSpPr>
-          <p:spPr>
-            <a:xfrm>
-              <a:off x="2494429" y="1790341"/>
-              <a:ext cx="40341" cy="40341"/>
-            </a:xfrm>
-            <a:prstGeom prst="ellipse">
-              <a:avLst/>
-            </a:prstGeom>
-            <a:solidFill>
-              <a:srgbClr val="A65E1A"/>
-            </a:solidFill>
-            <a:ln>
-              <a:noFill/>
-            </a:ln>
-            <a:effectLst/>
-          </p:spPr>
-          <p:style>
-            <a:lnRef idx="1">
-              <a:schemeClr val="accent1"/>
-            </a:lnRef>
-            <a:fillRef idx="3">
-              <a:schemeClr val="accent1"/>
-            </a:fillRef>
-            <a:effectRef idx="2">
-              <a:schemeClr val="accent1"/>
-            </a:effectRef>
-            <a:fontRef idx="minor">
-              <a:schemeClr val="lt1"/>
-            </a:fontRef>
-          </p:style>
-          <p:txBody>
-            <a:bodyPr rtlCol="0" anchor="ctr"/>
-            <a:lstStyle/>
-            <a:p>
-              <a:pPr algn="ctr"/>
-            </a:p>
-          </p:txBody>
-        </p:sp>
-        <p:sp>
-          <p:nvSpPr>
-            <p:cNvPr id="188" name="Oval 187"/>
-            <p:cNvSpPr/>
-            <p:nvPr/>
-          </p:nvSpPr>
-          <p:spPr>
-            <a:xfrm>
-              <a:off x="2494429" y="1869589"/>
-              <a:ext cx="40341" cy="40341"/>
-            </a:xfrm>
-            <a:prstGeom prst="ellipse">
-              <a:avLst/>
-            </a:prstGeom>
-            <a:solidFill>
-              <a:srgbClr val="A65E1A"/>
-            </a:solidFill>
-            <a:ln>
-              <a:noFill/>
-            </a:ln>
-            <a:effectLst/>
-          </p:spPr>
-          <p:style>
-            <a:lnRef idx="1">
-              <a:schemeClr val="accent1"/>
-            </a:lnRef>
-            <a:fillRef idx="3">
-              <a:schemeClr val="accent1"/>
-            </a:fillRef>
-            <a:effectRef idx="2">
-              <a:schemeClr val="accent1"/>
-            </a:effectRef>
-            <a:fontRef idx="minor">
-              <a:schemeClr val="lt1"/>
-            </a:fontRef>
-          </p:style>
-          <p:txBody>
-            <a:bodyPr rtlCol="0" anchor="ctr"/>
-            <a:lstStyle/>
-            <a:p>
-              <a:pPr algn="ctr"/>
-            </a:p>
-          </p:txBody>
-        </p:sp>
-        <p:sp>
-          <p:nvSpPr>
-            <p:cNvPr id="189" name="Oval 188"/>
-            <p:cNvSpPr/>
-            <p:nvPr/>
-          </p:nvSpPr>
-          <p:spPr>
-            <a:xfrm>
-              <a:off x="2659021" y="1671469"/>
-              <a:ext cx="40341" cy="40341"/>
-            </a:xfrm>
-            <a:prstGeom prst="ellipse">
-              <a:avLst/>
-            </a:prstGeom>
-            <a:solidFill>
-              <a:srgbClr val="A65E1A"/>
-            </a:solidFill>
-            <a:ln>
-              <a:noFill/>
-            </a:ln>
-            <a:effectLst/>
-          </p:spPr>
-          <p:style>
-            <a:lnRef idx="1">
-              <a:schemeClr val="accent1"/>
-            </a:lnRef>
-            <a:fillRef idx="3">
-              <a:schemeClr val="accent1"/>
-            </a:fillRef>
-            <a:effectRef idx="2">
-              <a:schemeClr val="accent1"/>
-            </a:effectRef>
-            <a:fontRef idx="minor">
-              <a:schemeClr val="lt1"/>
-            </a:fontRef>
-          </p:style>
-          <p:txBody>
-            <a:bodyPr rtlCol="0" anchor="ctr"/>
-            <a:lstStyle/>
-            <a:p>
-              <a:pPr algn="ctr"/>
-            </a:p>
-          </p:txBody>
-        </p:sp>
-        <p:sp>
-          <p:nvSpPr>
-            <p:cNvPr id="190" name="Oval 189"/>
-            <p:cNvSpPr/>
-            <p:nvPr/>
-          </p:nvSpPr>
-          <p:spPr>
-            <a:xfrm>
-              <a:off x="2659021" y="1750717"/>
-              <a:ext cx="40341" cy="40341"/>
-            </a:xfrm>
-            <a:prstGeom prst="ellipse">
-              <a:avLst/>
-            </a:prstGeom>
-            <a:solidFill>
-              <a:srgbClr val="A65E1A"/>
-            </a:solidFill>
-            <a:ln>
-              <a:noFill/>
-            </a:ln>
-            <a:effectLst/>
-          </p:spPr>
-          <p:style>
-            <a:lnRef idx="1">
-              <a:schemeClr val="accent1"/>
-            </a:lnRef>
-            <a:fillRef idx="3">
-              <a:schemeClr val="accent1"/>
-            </a:fillRef>
-            <a:effectRef idx="2">
-              <a:schemeClr val="accent1"/>
-            </a:effectRef>
-            <a:fontRef idx="minor">
-              <a:schemeClr val="lt1"/>
-            </a:fontRef>
-          </p:style>
-          <p:txBody>
-            <a:bodyPr rtlCol="0" anchor="ctr"/>
-            <a:lstStyle/>
-            <a:p>
-              <a:pPr algn="ctr"/>
-            </a:p>
-          </p:txBody>
-        </p:sp>
-        <p:sp>
-          <p:nvSpPr>
-            <p:cNvPr id="191" name="Oval 190"/>
-            <p:cNvSpPr/>
-            <p:nvPr/>
-          </p:nvSpPr>
-          <p:spPr>
-            <a:xfrm>
-              <a:off x="2659021" y="1829965"/>
-              <a:ext cx="40341" cy="40341"/>
-            </a:xfrm>
-            <a:prstGeom prst="ellipse">
-              <a:avLst/>
-            </a:prstGeom>
-            <a:solidFill>
-              <a:srgbClr val="A65E1A"/>
-            </a:solidFill>
-            <a:ln>
-              <a:noFill/>
-            </a:ln>
-            <a:effectLst/>
-          </p:spPr>
-          <p:style>
-            <a:lnRef idx="1">
-              <a:schemeClr val="accent1"/>
-            </a:lnRef>
-            <a:fillRef idx="3">
-              <a:schemeClr val="accent1"/>
-            </a:fillRef>
-            <a:effectRef idx="2">
-              <a:schemeClr val="accent1"/>
-            </a:effectRef>
-            <a:fontRef idx="minor">
-              <a:schemeClr val="lt1"/>
-            </a:fontRef>
-          </p:style>
-          <p:txBody>
-            <a:bodyPr rtlCol="0" anchor="ctr"/>
-            <a:lstStyle/>
-            <a:p>
-              <a:pPr algn="ctr"/>
-            </a:p>
-          </p:txBody>
-        </p:sp>
-        <p:sp>
-          <p:nvSpPr>
-            <p:cNvPr id="192" name="Oval 191"/>
-            <p:cNvSpPr/>
-            <p:nvPr/>
-          </p:nvSpPr>
-          <p:spPr>
-            <a:xfrm>
-              <a:off x="2659021" y="1909213"/>
-              <a:ext cx="40341" cy="40341"/>
-            </a:xfrm>
-            <a:prstGeom prst="ellipse">
-              <a:avLst/>
-            </a:prstGeom>
-            <a:solidFill>
-              <a:srgbClr val="A65E1A"/>
-            </a:solidFill>
-            <a:ln>
-              <a:noFill/>
-            </a:ln>
-            <a:effectLst/>
-          </p:spPr>
-          <p:style>
-            <a:lnRef idx="1">
-              <a:schemeClr val="accent1"/>
-            </a:lnRef>
-            <a:fillRef idx="3">
-              <a:schemeClr val="accent1"/>
-            </a:fillRef>
-            <a:effectRef idx="2">
-              <a:schemeClr val="accent1"/>
-            </a:effectRef>
-            <a:fontRef idx="minor">
-              <a:schemeClr val="lt1"/>
-            </a:fontRef>
-          </p:style>
-          <p:txBody>
-            <a:bodyPr rtlCol="0" anchor="ctr"/>
-            <a:lstStyle/>
-            <a:p>
-              <a:pPr algn="ctr"/>
-            </a:p>
-          </p:txBody>
-        </p:sp>
-        <p:sp>
-          <p:nvSpPr>
-            <p:cNvPr id="193" name="Oval 192"/>
-            <p:cNvSpPr/>
-            <p:nvPr/>
-          </p:nvSpPr>
-          <p:spPr>
-            <a:xfrm>
-              <a:off x="2823613" y="1711093"/>
-              <a:ext cx="40341" cy="40341"/>
-            </a:xfrm>
-            <a:prstGeom prst="ellipse">
-              <a:avLst/>
-            </a:prstGeom>
-            <a:solidFill>
-              <a:srgbClr val="A65E1A"/>
-            </a:solidFill>
-            <a:ln>
-              <a:noFill/>
-            </a:ln>
-            <a:effectLst/>
-          </p:spPr>
-          <p:style>
-            <a:lnRef idx="1">
-              <a:schemeClr val="accent1"/>
-            </a:lnRef>
-            <a:fillRef idx="3">
-              <a:schemeClr val="accent1"/>
-            </a:fillRef>
-            <a:effectRef idx="2">
-              <a:schemeClr val="accent1"/>
-            </a:effectRef>
-            <a:fontRef idx="minor">
-              <a:schemeClr val="lt1"/>
-            </a:fontRef>
-          </p:style>
-          <p:txBody>
-            <a:bodyPr rtlCol="0" anchor="ctr"/>
-            <a:lstStyle/>
-            <a:p>
-              <a:pPr algn="ctr"/>
-            </a:p>
-          </p:txBody>
-        </p:sp>
-        <p:sp>
-          <p:nvSpPr>
-            <p:cNvPr id="194" name="Oval 193"/>
-            <p:cNvSpPr/>
-            <p:nvPr/>
-          </p:nvSpPr>
-          <p:spPr>
-            <a:xfrm>
-              <a:off x="2823613" y="1790341"/>
-              <a:ext cx="40341" cy="40341"/>
-            </a:xfrm>
-            <a:prstGeom prst="ellipse">
-              <a:avLst/>
-            </a:prstGeom>
-            <a:solidFill>
-              <a:srgbClr val="A65E1A"/>
-            </a:solidFill>
-            <a:ln>
-              <a:noFill/>
-            </a:ln>
-            <a:effectLst/>
-          </p:spPr>
-          <p:style>
-            <a:lnRef idx="1">
-              <a:schemeClr val="accent1"/>
-            </a:lnRef>
-            <a:fillRef idx="3">
-              <a:schemeClr val="accent1"/>
-            </a:fillRef>
-            <a:effectRef idx="2">
-              <a:schemeClr val="accent1"/>
-            </a:effectRef>
-            <a:fontRef idx="minor">
-              <a:schemeClr val="lt1"/>
-            </a:fontRef>
-          </p:style>
-          <p:txBody>
-            <a:bodyPr rtlCol="0" anchor="ctr"/>
-            <a:lstStyle/>
-            <a:p>
-              <a:pPr algn="ctr"/>
-            </a:p>
-          </p:txBody>
-        </p:sp>
-        <p:sp>
-          <p:nvSpPr>
-            <p:cNvPr id="195" name="Oval 194"/>
-            <p:cNvSpPr/>
-            <p:nvPr/>
-          </p:nvSpPr>
-          <p:spPr>
-            <a:xfrm>
-              <a:off x="2823613" y="1869589"/>
-              <a:ext cx="40341" cy="40341"/>
-            </a:xfrm>
-            <a:prstGeom prst="ellipse">
-              <a:avLst/>
-            </a:prstGeom>
-            <a:solidFill>
-              <a:srgbClr val="A65E1A"/>
-            </a:solidFill>
-            <a:ln>
-              <a:noFill/>
-            </a:ln>
-            <a:effectLst/>
-          </p:spPr>
-          <p:style>
-            <a:lnRef idx="1">
-              <a:schemeClr val="accent1"/>
-            </a:lnRef>
-            <a:fillRef idx="3">
-              <a:schemeClr val="accent1"/>
-            </a:fillRef>
-            <a:effectRef idx="2">
-              <a:schemeClr val="accent1"/>
-            </a:effectRef>
-            <a:fontRef idx="minor">
-              <a:schemeClr val="lt1"/>
-            </a:fontRef>
-          </p:style>
-          <p:txBody>
-            <a:bodyPr rtlCol="0" anchor="ctr"/>
-            <a:lstStyle/>
-            <a:p>
-              <a:pPr algn="ctr"/>
-            </a:p>
-          </p:txBody>
-        </p:sp>
-      </p:grpSp>
+            <a:tailEnd type="triangle" w="sm" len="sm"/>
+          </a:ln>
+          <a:effectLst/>
+        </p:spPr>
+        <p:style>
+          <a:lnRef idx="2">
+            <a:schemeClr val="accent1"/>
+          </a:lnRef>
+          <a:fillRef idx="0">
+            <a:schemeClr val="accent1"/>
+          </a:fillRef>
+          <a:effectRef idx="1">
+            <a:schemeClr val="accent1"/>
+          </a:effectRef>
+          <a:fontRef idx="minor">
+            <a:schemeClr val="tx1"/>
+          </a:fontRef>
+        </p:style>
+      </p:cxnSp>
       <p:sp>
         <p:nvSpPr>
-          <p:cNvPr id="196" name="TextBox 195"/>
+          <p:cNvPr id="172" name="TextBox 171"/>
           <p:cNvSpPr txBox="1"/>
           <p:nvPr/>
         </p:nvSpPr>
         <p:spPr>
           <a:xfrm>
-            <a:off x="2359152" y="1984248"/>
-            <a:ext cx="640080" cy="128016"/>
+            <a:off x="2011680" y="1801368"/>
+            <a:ext cx="1280160" cy="128016"/>
           </a:xfrm>
           <a:prstGeom prst="rect">
             <a:avLst/>
@@ -11204,1404 +10305,27 @@
               </a:lnSpc>
             </a:pPr>
             <a:r>
-              <a:rPr sz="680" b="0" i="1">
-                <a:solidFill>
-                  <a:srgbClr val="000000"/>
+              <a:rPr sz="590" b="0" i="0">
+                <a:solidFill>
+                  <a:srgbClr val="A65E1A"/>
                 </a:solidFill>
                 <a:latin typeface="Times New Roman"/>
               </a:rPr>
-              <a:t>π</a:t>
-            </a:r>
-            <a:r>
-              <a:rPr sz="680" b="0" i="1" baseline="-25000">
-                <a:solidFill>
-                  <a:srgbClr val="000000"/>
-                </a:solidFill>
-                <a:latin typeface="Times New Roman"/>
-              </a:rPr>
-              <a:t>t</a:t>
+              <a:t>backward fold</a:t>
             </a:r>
           </a:p>
         </p:txBody>
       </p:sp>
-      <p:grpSp>
-        <p:nvGrpSpPr>
-          <p:cNvPr id="197" name="critic_frozen"/>
-          <p:cNvGrpSpPr/>
-          <p:nvPr/>
-        </p:nvGrpSpPr>
-        <p:grpSpPr>
-          <a:xfrm>
-            <a:off x="3401568" y="1645920"/>
-            <a:ext cx="457200" cy="329184"/>
-            <a:chOff x="3401568" y="1645920"/>
-            <a:chExt cx="457200" cy="329184"/>
-          </a:xfrm>
-        </p:grpSpPr>
-        <p:sp>
-          <p:nvSpPr>
-            <p:cNvPr id="198" name="Rounded Rectangle 197"/>
-            <p:cNvSpPr/>
-            <p:nvPr/>
-          </p:nvSpPr>
-          <p:spPr>
-            <a:xfrm>
-              <a:off x="3401568" y="1645920"/>
-              <a:ext cx="457200" cy="329184"/>
-            </a:xfrm>
-            <a:prstGeom prst="roundRect">
-              <a:avLst>
-                <a:gd name="adj" fmla="val 15000"/>
-              </a:avLst>
-            </a:prstGeom>
-            <a:solidFill>
-              <a:srgbClr val="F2F2F2"/>
-            </a:solidFill>
-            <a:ln w="8890">
-              <a:solidFill>
-                <a:srgbClr val="6B6B6B"/>
-              </a:solidFill>
-              <a:prstDash val="dash"/>
-            </a:ln>
-            <a:effectLst/>
-          </p:spPr>
-          <p:style>
-            <a:lnRef idx="1">
-              <a:schemeClr val="accent1"/>
-            </a:lnRef>
-            <a:fillRef idx="3">
-              <a:schemeClr val="accent1"/>
-            </a:fillRef>
-            <a:effectRef idx="2">
-              <a:schemeClr val="accent1"/>
-            </a:effectRef>
-            <a:fontRef idx="minor">
-              <a:schemeClr val="lt1"/>
-            </a:fontRef>
-          </p:style>
-          <p:txBody>
-            <a:bodyPr rtlCol="0" anchor="ctr"/>
-            <a:lstStyle/>
-            <a:p>
-              <a:pPr algn="ctr"/>
-            </a:p>
-          </p:txBody>
-        </p:sp>
-        <p:cxnSp>
-          <p:nvCxnSpPr>
-            <p:cNvPr id="199" name="Connector 198"/>
-            <p:cNvCxnSpPr/>
-            <p:nvPr/>
-          </p:nvCxnSpPr>
-          <p:spPr>
-            <a:xfrm flipV="1">
-              <a:off x="3465575" y="1691640"/>
-              <a:ext cx="164593" cy="39624"/>
-            </a:xfrm>
-            <a:prstGeom prst="line">
-              <a:avLst/>
-            </a:prstGeom>
-            <a:ln w="4445">
-              <a:solidFill>
-                <a:srgbClr val="C8C8C8"/>
-              </a:solidFill>
-            </a:ln>
-            <a:effectLst/>
-          </p:spPr>
-          <p:style>
-            <a:lnRef idx="2">
-              <a:schemeClr val="accent1"/>
-            </a:lnRef>
-            <a:fillRef idx="0">
-              <a:schemeClr val="accent1"/>
-            </a:fillRef>
-            <a:effectRef idx="1">
-              <a:schemeClr val="accent1"/>
-            </a:effectRef>
-            <a:fontRef idx="minor">
-              <a:schemeClr val="tx1"/>
-            </a:fontRef>
-          </p:style>
-        </p:cxnSp>
-        <p:cxnSp>
-          <p:nvCxnSpPr>
-            <p:cNvPr id="200" name="Connector 199"/>
-            <p:cNvCxnSpPr/>
-            <p:nvPr/>
-          </p:nvCxnSpPr>
-          <p:spPr>
-            <a:xfrm>
-              <a:off x="3465575" y="1731264"/>
-              <a:ext cx="164593" cy="39624"/>
-            </a:xfrm>
-            <a:prstGeom prst="line">
-              <a:avLst/>
-            </a:prstGeom>
-            <a:ln w="4445">
-              <a:solidFill>
-                <a:srgbClr val="C8C8C8"/>
-              </a:solidFill>
-            </a:ln>
-            <a:effectLst/>
-          </p:spPr>
-          <p:style>
-            <a:lnRef idx="2">
-              <a:schemeClr val="accent1"/>
-            </a:lnRef>
-            <a:fillRef idx="0">
-              <a:schemeClr val="accent1"/>
-            </a:fillRef>
-            <a:effectRef idx="1">
-              <a:schemeClr val="accent1"/>
-            </a:effectRef>
-            <a:fontRef idx="minor">
-              <a:schemeClr val="tx1"/>
-            </a:fontRef>
-          </p:style>
-        </p:cxnSp>
-        <p:cxnSp>
-          <p:nvCxnSpPr>
-            <p:cNvPr id="201" name="Connector 200"/>
-            <p:cNvCxnSpPr/>
-            <p:nvPr/>
-          </p:nvCxnSpPr>
-          <p:spPr>
-            <a:xfrm>
-              <a:off x="3465575" y="1731264"/>
-              <a:ext cx="164593" cy="118872"/>
-            </a:xfrm>
-            <a:prstGeom prst="line">
-              <a:avLst/>
-            </a:prstGeom>
-            <a:ln w="4445">
-              <a:solidFill>
-                <a:srgbClr val="C8C8C8"/>
-              </a:solidFill>
-            </a:ln>
-            <a:effectLst/>
-          </p:spPr>
-          <p:style>
-            <a:lnRef idx="2">
-              <a:schemeClr val="accent1"/>
-            </a:lnRef>
-            <a:fillRef idx="0">
-              <a:schemeClr val="accent1"/>
-            </a:fillRef>
-            <a:effectRef idx="1">
-              <a:schemeClr val="accent1"/>
-            </a:effectRef>
-            <a:fontRef idx="minor">
-              <a:schemeClr val="tx1"/>
-            </a:fontRef>
-          </p:style>
-        </p:cxnSp>
-        <p:cxnSp>
-          <p:nvCxnSpPr>
-            <p:cNvPr id="202" name="Connector 201"/>
-            <p:cNvCxnSpPr/>
-            <p:nvPr/>
-          </p:nvCxnSpPr>
-          <p:spPr>
-            <a:xfrm>
-              <a:off x="3465575" y="1731264"/>
-              <a:ext cx="164593" cy="198120"/>
-            </a:xfrm>
-            <a:prstGeom prst="line">
-              <a:avLst/>
-            </a:prstGeom>
-            <a:ln w="4445">
-              <a:solidFill>
-                <a:srgbClr val="C8C8C8"/>
-              </a:solidFill>
-            </a:ln>
-            <a:effectLst/>
-          </p:spPr>
-          <p:style>
-            <a:lnRef idx="2">
-              <a:schemeClr val="accent1"/>
-            </a:lnRef>
-            <a:fillRef idx="0">
-              <a:schemeClr val="accent1"/>
-            </a:fillRef>
-            <a:effectRef idx="1">
-              <a:schemeClr val="accent1"/>
-            </a:effectRef>
-            <a:fontRef idx="minor">
-              <a:schemeClr val="tx1"/>
-            </a:fontRef>
-          </p:style>
-        </p:cxnSp>
-        <p:cxnSp>
-          <p:nvCxnSpPr>
-            <p:cNvPr id="203" name="Connector 202"/>
-            <p:cNvCxnSpPr/>
-            <p:nvPr/>
-          </p:nvCxnSpPr>
-          <p:spPr>
-            <a:xfrm flipV="1">
-              <a:off x="3465575" y="1691640"/>
-              <a:ext cx="164593" cy="118872"/>
-            </a:xfrm>
-            <a:prstGeom prst="line">
-              <a:avLst/>
-            </a:prstGeom>
-            <a:ln w="4445">
-              <a:solidFill>
-                <a:srgbClr val="C8C8C8"/>
-              </a:solidFill>
-            </a:ln>
-            <a:effectLst/>
-          </p:spPr>
-          <p:style>
-            <a:lnRef idx="2">
-              <a:schemeClr val="accent1"/>
-            </a:lnRef>
-            <a:fillRef idx="0">
-              <a:schemeClr val="accent1"/>
-            </a:fillRef>
-            <a:effectRef idx="1">
-              <a:schemeClr val="accent1"/>
-            </a:effectRef>
-            <a:fontRef idx="minor">
-              <a:schemeClr val="tx1"/>
-            </a:fontRef>
-          </p:style>
-        </p:cxnSp>
-        <p:cxnSp>
-          <p:nvCxnSpPr>
-            <p:cNvPr id="204" name="Connector 203"/>
-            <p:cNvCxnSpPr/>
-            <p:nvPr/>
-          </p:nvCxnSpPr>
-          <p:spPr>
-            <a:xfrm flipV="1">
-              <a:off x="3465575" y="1770888"/>
-              <a:ext cx="164593" cy="39624"/>
-            </a:xfrm>
-            <a:prstGeom prst="line">
-              <a:avLst/>
-            </a:prstGeom>
-            <a:ln w="4445">
-              <a:solidFill>
-                <a:srgbClr val="C8C8C8"/>
-              </a:solidFill>
-            </a:ln>
-            <a:effectLst/>
-          </p:spPr>
-          <p:style>
-            <a:lnRef idx="2">
-              <a:schemeClr val="accent1"/>
-            </a:lnRef>
-            <a:fillRef idx="0">
-              <a:schemeClr val="accent1"/>
-            </a:fillRef>
-            <a:effectRef idx="1">
-              <a:schemeClr val="accent1"/>
-            </a:effectRef>
-            <a:fontRef idx="minor">
-              <a:schemeClr val="tx1"/>
-            </a:fontRef>
-          </p:style>
-        </p:cxnSp>
-        <p:cxnSp>
-          <p:nvCxnSpPr>
-            <p:cNvPr id="205" name="Connector 204"/>
-            <p:cNvCxnSpPr/>
-            <p:nvPr/>
-          </p:nvCxnSpPr>
-          <p:spPr>
-            <a:xfrm>
-              <a:off x="3465575" y="1810512"/>
-              <a:ext cx="164593" cy="39624"/>
-            </a:xfrm>
-            <a:prstGeom prst="line">
-              <a:avLst/>
-            </a:prstGeom>
-            <a:ln w="4445">
-              <a:solidFill>
-                <a:srgbClr val="C8C8C8"/>
-              </a:solidFill>
-            </a:ln>
-            <a:effectLst/>
-          </p:spPr>
-          <p:style>
-            <a:lnRef idx="2">
-              <a:schemeClr val="accent1"/>
-            </a:lnRef>
-            <a:fillRef idx="0">
-              <a:schemeClr val="accent1"/>
-            </a:fillRef>
-            <a:effectRef idx="1">
-              <a:schemeClr val="accent1"/>
-            </a:effectRef>
-            <a:fontRef idx="minor">
-              <a:schemeClr val="tx1"/>
-            </a:fontRef>
-          </p:style>
-        </p:cxnSp>
-        <p:cxnSp>
-          <p:nvCxnSpPr>
-            <p:cNvPr id="206" name="Connector 205"/>
-            <p:cNvCxnSpPr/>
-            <p:nvPr/>
-          </p:nvCxnSpPr>
-          <p:spPr>
-            <a:xfrm>
-              <a:off x="3465575" y="1810512"/>
-              <a:ext cx="164593" cy="118872"/>
-            </a:xfrm>
-            <a:prstGeom prst="line">
-              <a:avLst/>
-            </a:prstGeom>
-            <a:ln w="4445">
-              <a:solidFill>
-                <a:srgbClr val="C8C8C8"/>
-              </a:solidFill>
-            </a:ln>
-            <a:effectLst/>
-          </p:spPr>
-          <p:style>
-            <a:lnRef idx="2">
-              <a:schemeClr val="accent1"/>
-            </a:lnRef>
-            <a:fillRef idx="0">
-              <a:schemeClr val="accent1"/>
-            </a:fillRef>
-            <a:effectRef idx="1">
-              <a:schemeClr val="accent1"/>
-            </a:effectRef>
-            <a:fontRef idx="minor">
-              <a:schemeClr val="tx1"/>
-            </a:fontRef>
-          </p:style>
-        </p:cxnSp>
-        <p:cxnSp>
-          <p:nvCxnSpPr>
-            <p:cNvPr id="207" name="Connector 206"/>
-            <p:cNvCxnSpPr/>
-            <p:nvPr/>
-          </p:nvCxnSpPr>
-          <p:spPr>
-            <a:xfrm flipV="1">
-              <a:off x="3465575" y="1691640"/>
-              <a:ext cx="164593" cy="198119"/>
-            </a:xfrm>
-            <a:prstGeom prst="line">
-              <a:avLst/>
-            </a:prstGeom>
-            <a:ln w="4445">
-              <a:solidFill>
-                <a:srgbClr val="C8C8C8"/>
-              </a:solidFill>
-            </a:ln>
-            <a:effectLst/>
-          </p:spPr>
-          <p:style>
-            <a:lnRef idx="2">
-              <a:schemeClr val="accent1"/>
-            </a:lnRef>
-            <a:fillRef idx="0">
-              <a:schemeClr val="accent1"/>
-            </a:fillRef>
-            <a:effectRef idx="1">
-              <a:schemeClr val="accent1"/>
-            </a:effectRef>
-            <a:fontRef idx="minor">
-              <a:schemeClr val="tx1"/>
-            </a:fontRef>
-          </p:style>
-        </p:cxnSp>
-        <p:cxnSp>
-          <p:nvCxnSpPr>
-            <p:cNvPr id="208" name="Connector 207"/>
-            <p:cNvCxnSpPr/>
-            <p:nvPr/>
-          </p:nvCxnSpPr>
-          <p:spPr>
-            <a:xfrm flipV="1">
-              <a:off x="3465575" y="1770888"/>
-              <a:ext cx="164593" cy="118871"/>
-            </a:xfrm>
-            <a:prstGeom prst="line">
-              <a:avLst/>
-            </a:prstGeom>
-            <a:ln w="4445">
-              <a:solidFill>
-                <a:srgbClr val="C8C8C8"/>
-              </a:solidFill>
-            </a:ln>
-            <a:effectLst/>
-          </p:spPr>
-          <p:style>
-            <a:lnRef idx="2">
-              <a:schemeClr val="accent1"/>
-            </a:lnRef>
-            <a:fillRef idx="0">
-              <a:schemeClr val="accent1"/>
-            </a:fillRef>
-            <a:effectRef idx="1">
-              <a:schemeClr val="accent1"/>
-            </a:effectRef>
-            <a:fontRef idx="minor">
-              <a:schemeClr val="tx1"/>
-            </a:fontRef>
-          </p:style>
-        </p:cxnSp>
-        <p:cxnSp>
-          <p:nvCxnSpPr>
-            <p:cNvPr id="209" name="Connector 208"/>
-            <p:cNvCxnSpPr/>
-            <p:nvPr/>
-          </p:nvCxnSpPr>
-          <p:spPr>
-            <a:xfrm flipV="1">
-              <a:off x="3465575" y="1850136"/>
-              <a:ext cx="164593" cy="39623"/>
-            </a:xfrm>
-            <a:prstGeom prst="line">
-              <a:avLst/>
-            </a:prstGeom>
-            <a:ln w="4445">
-              <a:solidFill>
-                <a:srgbClr val="C8C8C8"/>
-              </a:solidFill>
-            </a:ln>
-            <a:effectLst/>
-          </p:spPr>
-          <p:style>
-            <a:lnRef idx="2">
-              <a:schemeClr val="accent1"/>
-            </a:lnRef>
-            <a:fillRef idx="0">
-              <a:schemeClr val="accent1"/>
-            </a:fillRef>
-            <a:effectRef idx="1">
-              <a:schemeClr val="accent1"/>
-            </a:effectRef>
-            <a:fontRef idx="minor">
-              <a:schemeClr val="tx1"/>
-            </a:fontRef>
-          </p:style>
-        </p:cxnSp>
-        <p:cxnSp>
-          <p:nvCxnSpPr>
-            <p:cNvPr id="210" name="Connector 209"/>
-            <p:cNvCxnSpPr/>
-            <p:nvPr/>
-          </p:nvCxnSpPr>
-          <p:spPr>
-            <a:xfrm>
-              <a:off x="3465575" y="1889759"/>
-              <a:ext cx="164593" cy="39625"/>
-            </a:xfrm>
-            <a:prstGeom prst="line">
-              <a:avLst/>
-            </a:prstGeom>
-            <a:ln w="4445">
-              <a:solidFill>
-                <a:srgbClr val="C8C8C8"/>
-              </a:solidFill>
-            </a:ln>
-            <a:effectLst/>
-          </p:spPr>
-          <p:style>
-            <a:lnRef idx="2">
-              <a:schemeClr val="accent1"/>
-            </a:lnRef>
-            <a:fillRef idx="0">
-              <a:schemeClr val="accent1"/>
-            </a:fillRef>
-            <a:effectRef idx="1">
-              <a:schemeClr val="accent1"/>
-            </a:effectRef>
-            <a:fontRef idx="minor">
-              <a:schemeClr val="tx1"/>
-            </a:fontRef>
-          </p:style>
-        </p:cxnSp>
-        <p:cxnSp>
-          <p:nvCxnSpPr>
-            <p:cNvPr id="211" name="Connector 210"/>
-            <p:cNvCxnSpPr/>
-            <p:nvPr/>
-          </p:nvCxnSpPr>
-          <p:spPr>
-            <a:xfrm>
-              <a:off x="3630168" y="1691640"/>
-              <a:ext cx="164591" cy="39624"/>
-            </a:xfrm>
-            <a:prstGeom prst="line">
-              <a:avLst/>
-            </a:prstGeom>
-            <a:ln w="4445">
-              <a:solidFill>
-                <a:srgbClr val="C8C8C8"/>
-              </a:solidFill>
-            </a:ln>
-            <a:effectLst/>
-          </p:spPr>
-          <p:style>
-            <a:lnRef idx="2">
-              <a:schemeClr val="accent1"/>
-            </a:lnRef>
-            <a:fillRef idx="0">
-              <a:schemeClr val="accent1"/>
-            </a:fillRef>
-            <a:effectRef idx="1">
-              <a:schemeClr val="accent1"/>
-            </a:effectRef>
-            <a:fontRef idx="minor">
-              <a:schemeClr val="tx1"/>
-            </a:fontRef>
-          </p:style>
-        </p:cxnSp>
-        <p:cxnSp>
-          <p:nvCxnSpPr>
-            <p:cNvPr id="212" name="Connector 211"/>
-            <p:cNvCxnSpPr/>
-            <p:nvPr/>
-          </p:nvCxnSpPr>
-          <p:spPr>
-            <a:xfrm>
-              <a:off x="3630168" y="1691640"/>
-              <a:ext cx="164591" cy="118872"/>
-            </a:xfrm>
-            <a:prstGeom prst="line">
-              <a:avLst/>
-            </a:prstGeom>
-            <a:ln w="4445">
-              <a:solidFill>
-                <a:srgbClr val="C8C8C8"/>
-              </a:solidFill>
-            </a:ln>
-            <a:effectLst/>
-          </p:spPr>
-          <p:style>
-            <a:lnRef idx="2">
-              <a:schemeClr val="accent1"/>
-            </a:lnRef>
-            <a:fillRef idx="0">
-              <a:schemeClr val="accent1"/>
-            </a:fillRef>
-            <a:effectRef idx="1">
-              <a:schemeClr val="accent1"/>
-            </a:effectRef>
-            <a:fontRef idx="minor">
-              <a:schemeClr val="tx1"/>
-            </a:fontRef>
-          </p:style>
-        </p:cxnSp>
-        <p:cxnSp>
-          <p:nvCxnSpPr>
-            <p:cNvPr id="213" name="Connector 212"/>
-            <p:cNvCxnSpPr/>
-            <p:nvPr/>
-          </p:nvCxnSpPr>
-          <p:spPr>
-            <a:xfrm>
-              <a:off x="3630168" y="1691640"/>
-              <a:ext cx="164591" cy="198119"/>
-            </a:xfrm>
-            <a:prstGeom prst="line">
-              <a:avLst/>
-            </a:prstGeom>
-            <a:ln w="4445">
-              <a:solidFill>
-                <a:srgbClr val="C8C8C8"/>
-              </a:solidFill>
-            </a:ln>
-            <a:effectLst/>
-          </p:spPr>
-          <p:style>
-            <a:lnRef idx="2">
-              <a:schemeClr val="accent1"/>
-            </a:lnRef>
-            <a:fillRef idx="0">
-              <a:schemeClr val="accent1"/>
-            </a:fillRef>
-            <a:effectRef idx="1">
-              <a:schemeClr val="accent1"/>
-            </a:effectRef>
-            <a:fontRef idx="minor">
-              <a:schemeClr val="tx1"/>
-            </a:fontRef>
-          </p:style>
-        </p:cxnSp>
-        <p:cxnSp>
-          <p:nvCxnSpPr>
-            <p:cNvPr id="214" name="Connector 213"/>
-            <p:cNvCxnSpPr/>
-            <p:nvPr/>
-          </p:nvCxnSpPr>
-          <p:spPr>
-            <a:xfrm flipV="1">
-              <a:off x="3630168" y="1731264"/>
-              <a:ext cx="164591" cy="39624"/>
-            </a:xfrm>
-            <a:prstGeom prst="line">
-              <a:avLst/>
-            </a:prstGeom>
-            <a:ln w="4445">
-              <a:solidFill>
-                <a:srgbClr val="C8C8C8"/>
-              </a:solidFill>
-            </a:ln>
-            <a:effectLst/>
-          </p:spPr>
-          <p:style>
-            <a:lnRef idx="2">
-              <a:schemeClr val="accent1"/>
-            </a:lnRef>
-            <a:fillRef idx="0">
-              <a:schemeClr val="accent1"/>
-            </a:fillRef>
-            <a:effectRef idx="1">
-              <a:schemeClr val="accent1"/>
-            </a:effectRef>
-            <a:fontRef idx="minor">
-              <a:schemeClr val="tx1"/>
-            </a:fontRef>
-          </p:style>
-        </p:cxnSp>
-        <p:cxnSp>
-          <p:nvCxnSpPr>
-            <p:cNvPr id="215" name="Connector 214"/>
-            <p:cNvCxnSpPr/>
-            <p:nvPr/>
-          </p:nvCxnSpPr>
-          <p:spPr>
-            <a:xfrm>
-              <a:off x="3630168" y="1770888"/>
-              <a:ext cx="164591" cy="39624"/>
-            </a:xfrm>
-            <a:prstGeom prst="line">
-              <a:avLst/>
-            </a:prstGeom>
-            <a:ln w="4445">
-              <a:solidFill>
-                <a:srgbClr val="C8C8C8"/>
-              </a:solidFill>
-            </a:ln>
-            <a:effectLst/>
-          </p:spPr>
-          <p:style>
-            <a:lnRef idx="2">
-              <a:schemeClr val="accent1"/>
-            </a:lnRef>
-            <a:fillRef idx="0">
-              <a:schemeClr val="accent1"/>
-            </a:fillRef>
-            <a:effectRef idx="1">
-              <a:schemeClr val="accent1"/>
-            </a:effectRef>
-            <a:fontRef idx="minor">
-              <a:schemeClr val="tx1"/>
-            </a:fontRef>
-          </p:style>
-        </p:cxnSp>
-        <p:cxnSp>
-          <p:nvCxnSpPr>
-            <p:cNvPr id="216" name="Connector 215"/>
-            <p:cNvCxnSpPr/>
-            <p:nvPr/>
-          </p:nvCxnSpPr>
-          <p:spPr>
-            <a:xfrm>
-              <a:off x="3630168" y="1770888"/>
-              <a:ext cx="164591" cy="118871"/>
-            </a:xfrm>
-            <a:prstGeom prst="line">
-              <a:avLst/>
-            </a:prstGeom>
-            <a:ln w="4445">
-              <a:solidFill>
-                <a:srgbClr val="C8C8C8"/>
-              </a:solidFill>
-            </a:ln>
-            <a:effectLst/>
-          </p:spPr>
-          <p:style>
-            <a:lnRef idx="2">
-              <a:schemeClr val="accent1"/>
-            </a:lnRef>
-            <a:fillRef idx="0">
-              <a:schemeClr val="accent1"/>
-            </a:fillRef>
-            <a:effectRef idx="1">
-              <a:schemeClr val="accent1"/>
-            </a:effectRef>
-            <a:fontRef idx="minor">
-              <a:schemeClr val="tx1"/>
-            </a:fontRef>
-          </p:style>
-        </p:cxnSp>
-        <p:cxnSp>
-          <p:nvCxnSpPr>
-            <p:cNvPr id="217" name="Connector 216"/>
-            <p:cNvCxnSpPr/>
-            <p:nvPr/>
-          </p:nvCxnSpPr>
-          <p:spPr>
-            <a:xfrm flipV="1">
-              <a:off x="3630168" y="1731264"/>
-              <a:ext cx="164591" cy="118872"/>
-            </a:xfrm>
-            <a:prstGeom prst="line">
-              <a:avLst/>
-            </a:prstGeom>
-            <a:ln w="4445">
-              <a:solidFill>
-                <a:srgbClr val="C8C8C8"/>
-              </a:solidFill>
-            </a:ln>
-            <a:effectLst/>
-          </p:spPr>
-          <p:style>
-            <a:lnRef idx="2">
-              <a:schemeClr val="accent1"/>
-            </a:lnRef>
-            <a:fillRef idx="0">
-              <a:schemeClr val="accent1"/>
-            </a:fillRef>
-            <a:effectRef idx="1">
-              <a:schemeClr val="accent1"/>
-            </a:effectRef>
-            <a:fontRef idx="minor">
-              <a:schemeClr val="tx1"/>
-            </a:fontRef>
-          </p:style>
-        </p:cxnSp>
-        <p:cxnSp>
-          <p:nvCxnSpPr>
-            <p:cNvPr id="218" name="Connector 217"/>
-            <p:cNvCxnSpPr/>
-            <p:nvPr/>
-          </p:nvCxnSpPr>
-          <p:spPr>
-            <a:xfrm flipV="1">
-              <a:off x="3630168" y="1810512"/>
-              <a:ext cx="164591" cy="39624"/>
-            </a:xfrm>
-            <a:prstGeom prst="line">
-              <a:avLst/>
-            </a:prstGeom>
-            <a:ln w="4445">
-              <a:solidFill>
-                <a:srgbClr val="C8C8C8"/>
-              </a:solidFill>
-            </a:ln>
-            <a:effectLst/>
-          </p:spPr>
-          <p:style>
-            <a:lnRef idx="2">
-              <a:schemeClr val="accent1"/>
-            </a:lnRef>
-            <a:fillRef idx="0">
-              <a:schemeClr val="accent1"/>
-            </a:fillRef>
-            <a:effectRef idx="1">
-              <a:schemeClr val="accent1"/>
-            </a:effectRef>
-            <a:fontRef idx="minor">
-              <a:schemeClr val="tx1"/>
-            </a:fontRef>
-          </p:style>
-        </p:cxnSp>
-        <p:cxnSp>
-          <p:nvCxnSpPr>
-            <p:cNvPr id="219" name="Connector 218"/>
-            <p:cNvCxnSpPr/>
-            <p:nvPr/>
-          </p:nvCxnSpPr>
-          <p:spPr>
-            <a:xfrm>
-              <a:off x="3630168" y="1850136"/>
-              <a:ext cx="164591" cy="39623"/>
-            </a:xfrm>
-            <a:prstGeom prst="line">
-              <a:avLst/>
-            </a:prstGeom>
-            <a:ln w="4445">
-              <a:solidFill>
-                <a:srgbClr val="C8C8C8"/>
-              </a:solidFill>
-            </a:ln>
-            <a:effectLst/>
-          </p:spPr>
-          <p:style>
-            <a:lnRef idx="2">
-              <a:schemeClr val="accent1"/>
-            </a:lnRef>
-            <a:fillRef idx="0">
-              <a:schemeClr val="accent1"/>
-            </a:fillRef>
-            <a:effectRef idx="1">
-              <a:schemeClr val="accent1"/>
-            </a:effectRef>
-            <a:fontRef idx="minor">
-              <a:schemeClr val="tx1"/>
-            </a:fontRef>
-          </p:style>
-        </p:cxnSp>
-        <p:cxnSp>
-          <p:nvCxnSpPr>
-            <p:cNvPr id="220" name="Connector 219"/>
-            <p:cNvCxnSpPr/>
-            <p:nvPr/>
-          </p:nvCxnSpPr>
-          <p:spPr>
-            <a:xfrm flipV="1">
-              <a:off x="3630168" y="1731264"/>
-              <a:ext cx="164591" cy="198120"/>
-            </a:xfrm>
-            <a:prstGeom prst="line">
-              <a:avLst/>
-            </a:prstGeom>
-            <a:ln w="4445">
-              <a:solidFill>
-                <a:srgbClr val="C8C8C8"/>
-              </a:solidFill>
-            </a:ln>
-            <a:effectLst/>
-          </p:spPr>
-          <p:style>
-            <a:lnRef idx="2">
-              <a:schemeClr val="accent1"/>
-            </a:lnRef>
-            <a:fillRef idx="0">
-              <a:schemeClr val="accent1"/>
-            </a:fillRef>
-            <a:effectRef idx="1">
-              <a:schemeClr val="accent1"/>
-            </a:effectRef>
-            <a:fontRef idx="minor">
-              <a:schemeClr val="tx1"/>
-            </a:fontRef>
-          </p:style>
-        </p:cxnSp>
-        <p:cxnSp>
-          <p:nvCxnSpPr>
-            <p:cNvPr id="221" name="Connector 220"/>
-            <p:cNvCxnSpPr/>
-            <p:nvPr/>
-          </p:nvCxnSpPr>
-          <p:spPr>
-            <a:xfrm flipV="1">
-              <a:off x="3630168" y="1810512"/>
-              <a:ext cx="164591" cy="118872"/>
-            </a:xfrm>
-            <a:prstGeom prst="line">
-              <a:avLst/>
-            </a:prstGeom>
-            <a:ln w="4445">
-              <a:solidFill>
-                <a:srgbClr val="C8C8C8"/>
-              </a:solidFill>
-            </a:ln>
-            <a:effectLst/>
-          </p:spPr>
-          <p:style>
-            <a:lnRef idx="2">
-              <a:schemeClr val="accent1"/>
-            </a:lnRef>
-            <a:fillRef idx="0">
-              <a:schemeClr val="accent1"/>
-            </a:fillRef>
-            <a:effectRef idx="1">
-              <a:schemeClr val="accent1"/>
-            </a:effectRef>
-            <a:fontRef idx="minor">
-              <a:schemeClr val="tx1"/>
-            </a:fontRef>
-          </p:style>
-        </p:cxnSp>
-        <p:cxnSp>
-          <p:nvCxnSpPr>
-            <p:cNvPr id="222" name="Connector 221"/>
-            <p:cNvCxnSpPr/>
-            <p:nvPr/>
-          </p:nvCxnSpPr>
-          <p:spPr>
-            <a:xfrm flipV="1">
-              <a:off x="3630168" y="1889759"/>
-              <a:ext cx="164591" cy="39625"/>
-            </a:xfrm>
-            <a:prstGeom prst="line">
-              <a:avLst/>
-            </a:prstGeom>
-            <a:ln w="4445">
-              <a:solidFill>
-                <a:srgbClr val="C8C8C8"/>
-              </a:solidFill>
-            </a:ln>
-            <a:effectLst/>
-          </p:spPr>
-          <p:style>
-            <a:lnRef idx="2">
-              <a:schemeClr val="accent1"/>
-            </a:lnRef>
-            <a:fillRef idx="0">
-              <a:schemeClr val="accent1"/>
-            </a:fillRef>
-            <a:effectRef idx="1">
-              <a:schemeClr val="accent1"/>
-            </a:effectRef>
-            <a:fontRef idx="minor">
-              <a:schemeClr val="tx1"/>
-            </a:fontRef>
-          </p:style>
-        </p:cxnSp>
-        <p:sp>
-          <p:nvSpPr>
-            <p:cNvPr id="223" name="Oval 222"/>
-            <p:cNvSpPr/>
-            <p:nvPr/>
-          </p:nvSpPr>
-          <p:spPr>
-            <a:xfrm>
-              <a:off x="3445405" y="1711093"/>
-              <a:ext cx="40341" cy="40341"/>
-            </a:xfrm>
-            <a:prstGeom prst="ellipse">
-              <a:avLst/>
-            </a:prstGeom>
-            <a:solidFill>
-              <a:srgbClr val="6B6B6B"/>
-            </a:solidFill>
-            <a:ln>
-              <a:noFill/>
-            </a:ln>
-            <a:effectLst/>
-          </p:spPr>
-          <p:style>
-            <a:lnRef idx="1">
-              <a:schemeClr val="accent1"/>
-            </a:lnRef>
-            <a:fillRef idx="3">
-              <a:schemeClr val="accent1"/>
-            </a:fillRef>
-            <a:effectRef idx="2">
-              <a:schemeClr val="accent1"/>
-            </a:effectRef>
-            <a:fontRef idx="minor">
-              <a:schemeClr val="lt1"/>
-            </a:fontRef>
-          </p:style>
-          <p:txBody>
-            <a:bodyPr rtlCol="0" anchor="ctr"/>
-            <a:lstStyle/>
-            <a:p>
-              <a:pPr algn="ctr"/>
-            </a:p>
-          </p:txBody>
-        </p:sp>
-        <p:sp>
-          <p:nvSpPr>
-            <p:cNvPr id="224" name="Oval 223"/>
-            <p:cNvSpPr/>
-            <p:nvPr/>
-          </p:nvSpPr>
-          <p:spPr>
-            <a:xfrm>
-              <a:off x="3445405" y="1790341"/>
-              <a:ext cx="40341" cy="40341"/>
-            </a:xfrm>
-            <a:prstGeom prst="ellipse">
-              <a:avLst/>
-            </a:prstGeom>
-            <a:solidFill>
-              <a:srgbClr val="6B6B6B"/>
-            </a:solidFill>
-            <a:ln>
-              <a:noFill/>
-            </a:ln>
-            <a:effectLst/>
-          </p:spPr>
-          <p:style>
-            <a:lnRef idx="1">
-              <a:schemeClr val="accent1"/>
-            </a:lnRef>
-            <a:fillRef idx="3">
-              <a:schemeClr val="accent1"/>
-            </a:fillRef>
-            <a:effectRef idx="2">
-              <a:schemeClr val="accent1"/>
-            </a:effectRef>
-            <a:fontRef idx="minor">
-              <a:schemeClr val="lt1"/>
-            </a:fontRef>
-          </p:style>
-          <p:txBody>
-            <a:bodyPr rtlCol="0" anchor="ctr"/>
-            <a:lstStyle/>
-            <a:p>
-              <a:pPr algn="ctr"/>
-            </a:p>
-          </p:txBody>
-        </p:sp>
-        <p:sp>
-          <p:nvSpPr>
-            <p:cNvPr id="225" name="Oval 224"/>
-            <p:cNvSpPr/>
-            <p:nvPr/>
-          </p:nvSpPr>
-          <p:spPr>
-            <a:xfrm>
-              <a:off x="3445405" y="1869589"/>
-              <a:ext cx="40341" cy="40341"/>
-            </a:xfrm>
-            <a:prstGeom prst="ellipse">
-              <a:avLst/>
-            </a:prstGeom>
-            <a:solidFill>
-              <a:srgbClr val="6B6B6B"/>
-            </a:solidFill>
-            <a:ln>
-              <a:noFill/>
-            </a:ln>
-            <a:effectLst/>
-          </p:spPr>
-          <p:style>
-            <a:lnRef idx="1">
-              <a:schemeClr val="accent1"/>
-            </a:lnRef>
-            <a:fillRef idx="3">
-              <a:schemeClr val="accent1"/>
-            </a:fillRef>
-            <a:effectRef idx="2">
-              <a:schemeClr val="accent1"/>
-            </a:effectRef>
-            <a:fontRef idx="minor">
-              <a:schemeClr val="lt1"/>
-            </a:fontRef>
-          </p:style>
-          <p:txBody>
-            <a:bodyPr rtlCol="0" anchor="ctr"/>
-            <a:lstStyle/>
-            <a:p>
-              <a:pPr algn="ctr"/>
-            </a:p>
-          </p:txBody>
-        </p:sp>
-        <p:sp>
-          <p:nvSpPr>
-            <p:cNvPr id="226" name="Oval 225"/>
-            <p:cNvSpPr/>
-            <p:nvPr/>
-          </p:nvSpPr>
-          <p:spPr>
-            <a:xfrm>
-              <a:off x="3609997" y="1671469"/>
-              <a:ext cx="40341" cy="40341"/>
-            </a:xfrm>
-            <a:prstGeom prst="ellipse">
-              <a:avLst/>
-            </a:prstGeom>
-            <a:solidFill>
-              <a:srgbClr val="6B6B6B"/>
-            </a:solidFill>
-            <a:ln>
-              <a:noFill/>
-            </a:ln>
-            <a:effectLst/>
-          </p:spPr>
-          <p:style>
-            <a:lnRef idx="1">
-              <a:schemeClr val="accent1"/>
-            </a:lnRef>
-            <a:fillRef idx="3">
-              <a:schemeClr val="accent1"/>
-            </a:fillRef>
-            <a:effectRef idx="2">
-              <a:schemeClr val="accent1"/>
-            </a:effectRef>
-            <a:fontRef idx="minor">
-              <a:schemeClr val="lt1"/>
-            </a:fontRef>
-          </p:style>
-          <p:txBody>
-            <a:bodyPr rtlCol="0" anchor="ctr"/>
-            <a:lstStyle/>
-            <a:p>
-              <a:pPr algn="ctr"/>
-            </a:p>
-          </p:txBody>
-        </p:sp>
-        <p:sp>
-          <p:nvSpPr>
-            <p:cNvPr id="227" name="Oval 226"/>
-            <p:cNvSpPr/>
-            <p:nvPr/>
-          </p:nvSpPr>
-          <p:spPr>
-            <a:xfrm>
-              <a:off x="3609997" y="1750717"/>
-              <a:ext cx="40341" cy="40341"/>
-            </a:xfrm>
-            <a:prstGeom prst="ellipse">
-              <a:avLst/>
-            </a:prstGeom>
-            <a:solidFill>
-              <a:srgbClr val="6B6B6B"/>
-            </a:solidFill>
-            <a:ln>
-              <a:noFill/>
-            </a:ln>
-            <a:effectLst/>
-          </p:spPr>
-          <p:style>
-            <a:lnRef idx="1">
-              <a:schemeClr val="accent1"/>
-            </a:lnRef>
-            <a:fillRef idx="3">
-              <a:schemeClr val="accent1"/>
-            </a:fillRef>
-            <a:effectRef idx="2">
-              <a:schemeClr val="accent1"/>
-            </a:effectRef>
-            <a:fontRef idx="minor">
-              <a:schemeClr val="lt1"/>
-            </a:fontRef>
-          </p:style>
-          <p:txBody>
-            <a:bodyPr rtlCol="0" anchor="ctr"/>
-            <a:lstStyle/>
-            <a:p>
-              <a:pPr algn="ctr"/>
-            </a:p>
-          </p:txBody>
-        </p:sp>
-        <p:sp>
-          <p:nvSpPr>
-            <p:cNvPr id="228" name="Oval 227"/>
-            <p:cNvSpPr/>
-            <p:nvPr/>
-          </p:nvSpPr>
-          <p:spPr>
-            <a:xfrm>
-              <a:off x="3609997" y="1829965"/>
-              <a:ext cx="40341" cy="40341"/>
-            </a:xfrm>
-            <a:prstGeom prst="ellipse">
-              <a:avLst/>
-            </a:prstGeom>
-            <a:solidFill>
-              <a:srgbClr val="6B6B6B"/>
-            </a:solidFill>
-            <a:ln>
-              <a:noFill/>
-            </a:ln>
-            <a:effectLst/>
-          </p:spPr>
-          <p:style>
-            <a:lnRef idx="1">
-              <a:schemeClr val="accent1"/>
-            </a:lnRef>
-            <a:fillRef idx="3">
-              <a:schemeClr val="accent1"/>
-            </a:fillRef>
-            <a:effectRef idx="2">
-              <a:schemeClr val="accent1"/>
-            </a:effectRef>
-            <a:fontRef idx="minor">
-              <a:schemeClr val="lt1"/>
-            </a:fontRef>
-          </p:style>
-          <p:txBody>
-            <a:bodyPr rtlCol="0" anchor="ctr"/>
-            <a:lstStyle/>
-            <a:p>
-              <a:pPr algn="ctr"/>
-            </a:p>
-          </p:txBody>
-        </p:sp>
-        <p:sp>
-          <p:nvSpPr>
-            <p:cNvPr id="229" name="Oval 228"/>
-            <p:cNvSpPr/>
-            <p:nvPr/>
-          </p:nvSpPr>
-          <p:spPr>
-            <a:xfrm>
-              <a:off x="3609997" y="1909213"/>
-              <a:ext cx="40341" cy="40341"/>
-            </a:xfrm>
-            <a:prstGeom prst="ellipse">
-              <a:avLst/>
-            </a:prstGeom>
-            <a:solidFill>
-              <a:srgbClr val="6B6B6B"/>
-            </a:solidFill>
-            <a:ln>
-              <a:noFill/>
-            </a:ln>
-            <a:effectLst/>
-          </p:spPr>
-          <p:style>
-            <a:lnRef idx="1">
-              <a:schemeClr val="accent1"/>
-            </a:lnRef>
-            <a:fillRef idx="3">
-              <a:schemeClr val="accent1"/>
-            </a:fillRef>
-            <a:effectRef idx="2">
-              <a:schemeClr val="accent1"/>
-            </a:effectRef>
-            <a:fontRef idx="minor">
-              <a:schemeClr val="lt1"/>
-            </a:fontRef>
-          </p:style>
-          <p:txBody>
-            <a:bodyPr rtlCol="0" anchor="ctr"/>
-            <a:lstStyle/>
-            <a:p>
-              <a:pPr algn="ctr"/>
-            </a:p>
-          </p:txBody>
-        </p:sp>
-        <p:sp>
-          <p:nvSpPr>
-            <p:cNvPr id="230" name="Oval 229"/>
-            <p:cNvSpPr/>
-            <p:nvPr/>
-          </p:nvSpPr>
-          <p:spPr>
-            <a:xfrm>
-              <a:off x="3774589" y="1711093"/>
-              <a:ext cx="40341" cy="40341"/>
-            </a:xfrm>
-            <a:prstGeom prst="ellipse">
-              <a:avLst/>
-            </a:prstGeom>
-            <a:solidFill>
-              <a:srgbClr val="6B6B6B"/>
-            </a:solidFill>
-            <a:ln>
-              <a:noFill/>
-            </a:ln>
-            <a:effectLst/>
-          </p:spPr>
-          <p:style>
-            <a:lnRef idx="1">
-              <a:schemeClr val="accent1"/>
-            </a:lnRef>
-            <a:fillRef idx="3">
-              <a:schemeClr val="accent1"/>
-            </a:fillRef>
-            <a:effectRef idx="2">
-              <a:schemeClr val="accent1"/>
-            </a:effectRef>
-            <a:fontRef idx="minor">
-              <a:schemeClr val="lt1"/>
-            </a:fontRef>
-          </p:style>
-          <p:txBody>
-            <a:bodyPr rtlCol="0" anchor="ctr"/>
-            <a:lstStyle/>
-            <a:p>
-              <a:pPr algn="ctr"/>
-            </a:p>
-          </p:txBody>
-        </p:sp>
-        <p:sp>
-          <p:nvSpPr>
-            <p:cNvPr id="231" name="Oval 230"/>
-            <p:cNvSpPr/>
-            <p:nvPr/>
-          </p:nvSpPr>
-          <p:spPr>
-            <a:xfrm>
-              <a:off x="3774589" y="1790341"/>
-              <a:ext cx="40341" cy="40341"/>
-            </a:xfrm>
-            <a:prstGeom prst="ellipse">
-              <a:avLst/>
-            </a:prstGeom>
-            <a:solidFill>
-              <a:srgbClr val="6B6B6B"/>
-            </a:solidFill>
-            <a:ln>
-              <a:noFill/>
-            </a:ln>
-            <a:effectLst/>
-          </p:spPr>
-          <p:style>
-            <a:lnRef idx="1">
-              <a:schemeClr val="accent1"/>
-            </a:lnRef>
-            <a:fillRef idx="3">
-              <a:schemeClr val="accent1"/>
-            </a:fillRef>
-            <a:effectRef idx="2">
-              <a:schemeClr val="accent1"/>
-            </a:effectRef>
-            <a:fontRef idx="minor">
-              <a:schemeClr val="lt1"/>
-            </a:fontRef>
-          </p:style>
-          <p:txBody>
-            <a:bodyPr rtlCol="0" anchor="ctr"/>
-            <a:lstStyle/>
-            <a:p>
-              <a:pPr algn="ctr"/>
-            </a:p>
-          </p:txBody>
-        </p:sp>
-        <p:sp>
-          <p:nvSpPr>
-            <p:cNvPr id="232" name="Oval 231"/>
-            <p:cNvSpPr/>
-            <p:nvPr/>
-          </p:nvSpPr>
-          <p:spPr>
-            <a:xfrm>
-              <a:off x="3774589" y="1869589"/>
-              <a:ext cx="40341" cy="40341"/>
-            </a:xfrm>
-            <a:prstGeom prst="ellipse">
-              <a:avLst/>
-            </a:prstGeom>
-            <a:solidFill>
-              <a:srgbClr val="6B6B6B"/>
-            </a:solidFill>
-            <a:ln>
-              <a:noFill/>
-            </a:ln>
-            <a:effectLst/>
-          </p:spPr>
-          <p:style>
-            <a:lnRef idx="1">
-              <a:schemeClr val="accent1"/>
-            </a:lnRef>
-            <a:fillRef idx="3">
-              <a:schemeClr val="accent1"/>
-            </a:fillRef>
-            <a:effectRef idx="2">
-              <a:schemeClr val="accent1"/>
-            </a:effectRef>
-            <a:fontRef idx="minor">
-              <a:schemeClr val="lt1"/>
-            </a:fontRef>
-          </p:style>
-          <p:txBody>
-            <a:bodyPr rtlCol="0" anchor="ctr"/>
-            <a:lstStyle/>
-            <a:p>
-              <a:pPr algn="ctr"/>
-            </a:p>
-          </p:txBody>
-        </p:sp>
-      </p:grpSp>
       <p:sp>
         <p:nvSpPr>
-          <p:cNvPr id="233" name="TextBox 232"/>
+          <p:cNvPr id="173" name="TextBox 172"/>
           <p:cNvSpPr txBox="1"/>
           <p:nvPr/>
         </p:nvSpPr>
         <p:spPr>
           <a:xfrm>
-            <a:off x="3264408" y="1984248"/>
-            <a:ext cx="731520" cy="128016"/>
+            <a:off x="1316736" y="1901952"/>
+            <a:ext cx="2697480" cy="137160"/>
           </a:xfrm>
           <a:prstGeom prst="rect">
             <a:avLst/>
@@ -12620,45 +10344,216 @@
               </a:lnSpc>
             </a:pPr>
             <a:r>
-              <a:rPr sz="650" b="0" i="1">
-                <a:solidFill>
-                  <a:srgbClr val="6B6B6B"/>
+              <a:rPr sz="630" b="0" i="1">
+                <a:solidFill>
+                  <a:srgbClr val="A65E1A"/>
                 </a:solidFill>
                 <a:latin typeface="Times New Roman"/>
               </a:rPr>
-              <a:t>Q</a:t>
-            </a:r>
-            <a:r>
-              <a:rPr sz="650" b="0" i="1" baseline="-25000">
-                <a:solidFill>
-                  <a:srgbClr val="6B6B6B"/>
+              <a:t>g</a:t>
+            </a:r>
+            <a:r>
+              <a:rPr sz="630" b="0" i="1" baseline="-25000">
+                <a:solidFill>
+                  <a:srgbClr val="A65E1A"/>
+                </a:solidFill>
+                <a:latin typeface="Times New Roman"/>
+              </a:rPr>
+              <a:t>j</a:t>
+            </a:r>
+            <a:r>
+              <a:rPr sz="630" b="0" i="0">
+                <a:solidFill>
+                  <a:srgbClr val="A65E1A"/>
+                </a:solidFill>
+                <a:latin typeface="Times New Roman"/>
+              </a:rPr>
+              <a:t> = (1 − </a:t>
+            </a:r>
+            <a:r>
+              <a:rPr sz="630" b="0" i="1">
+                <a:solidFill>
+                  <a:srgbClr val="A65E1A"/>
+                </a:solidFill>
+                <a:latin typeface="Times New Roman"/>
+              </a:rPr>
+              <a:t>γ</a:t>
+            </a:r>
+            <a:r>
+              <a:rPr sz="630" b="0" i="1" baseline="-25000">
+                <a:solidFill>
+                  <a:srgbClr val="A65E1A"/>
                 </a:solidFill>
                 <a:latin typeface="Times New Roman"/>
               </a:rPr>
               <a:t>h</a:t>
             </a:r>
             <a:r>
-              <a:rPr sz="650" b="0" i="0">
-                <a:solidFill>
-                  <a:srgbClr val="6B6B6B"/>
+              <a:rPr sz="630" b="0" i="0">
+                <a:solidFill>
+                  <a:srgbClr val="A65E1A"/>
                 </a:solidFill>
                 <a:latin typeface="Times New Roman"/>
               </a:rPr>
-              <a:t> frozen</a:t>
+              <a:t>) </a:t>
+            </a:r>
+            <a:r>
+              <a:rPr sz="630" b="0" i="1">
+                <a:solidFill>
+                  <a:srgbClr val="A65E1A"/>
+                </a:solidFill>
+                <a:latin typeface="Times New Roman"/>
+              </a:rPr>
+              <a:t>h</a:t>
+            </a:r>
+            <a:r>
+              <a:rPr sz="630" b="0" i="1" baseline="-25000">
+                <a:solidFill>
+                  <a:srgbClr val="A65E1A"/>
+                </a:solidFill>
+                <a:latin typeface="Times New Roman"/>
+              </a:rPr>
+              <a:t>j</a:t>
+            </a:r>
+            <a:r>
+              <a:rPr sz="630" b="0" i="0">
+                <a:solidFill>
+                  <a:srgbClr val="A65E1A"/>
+                </a:solidFill>
+                <a:latin typeface="Times New Roman"/>
+              </a:rPr>
+              <a:t> + </a:t>
+            </a:r>
+            <a:r>
+              <a:rPr sz="630" b="0" i="1">
+                <a:solidFill>
+                  <a:srgbClr val="A65E1A"/>
+                </a:solidFill>
+                <a:latin typeface="Times New Roman"/>
+              </a:rPr>
+              <a:t>γ</a:t>
+            </a:r>
+            <a:r>
+              <a:rPr sz="630" b="0" i="1" baseline="-25000">
+                <a:solidFill>
+                  <a:srgbClr val="A65E1A"/>
+                </a:solidFill>
+                <a:latin typeface="Times New Roman"/>
+              </a:rPr>
+              <a:t>h</a:t>
+            </a:r>
+            <a:r>
+              <a:rPr sz="630" b="0" i="0">
+                <a:solidFill>
+                  <a:srgbClr val="A65E1A"/>
+                </a:solidFill>
+                <a:latin typeface="Times New Roman"/>
+              </a:rPr>
+              <a:t> min{</a:t>
+            </a:r>
+            <a:r>
+              <a:rPr sz="630" b="0" i="1">
+                <a:solidFill>
+                  <a:srgbClr val="A65E1A"/>
+                </a:solidFill>
+                <a:latin typeface="Times New Roman"/>
+              </a:rPr>
+              <a:t>h</a:t>
+            </a:r>
+            <a:r>
+              <a:rPr sz="630" b="0" i="1" baseline="-25000">
+                <a:solidFill>
+                  <a:srgbClr val="A65E1A"/>
+                </a:solidFill>
+                <a:latin typeface="Times New Roman"/>
+              </a:rPr>
+              <a:t>j</a:t>
+            </a:r>
+            <a:r>
+              <a:rPr sz="630" b="0" i="0">
+                <a:solidFill>
+                  <a:srgbClr val="A65E1A"/>
+                </a:solidFill>
+                <a:latin typeface="Times New Roman"/>
+              </a:rPr>
+              <a:t>, </a:t>
+            </a:r>
+            <a:r>
+              <a:rPr sz="630" b="0" i="1">
+                <a:solidFill>
+                  <a:srgbClr val="A65E1A"/>
+                </a:solidFill>
+                <a:latin typeface="Times New Roman"/>
+              </a:rPr>
+              <a:t>g</a:t>
+            </a:r>
+            <a:r>
+              <a:rPr sz="630" b="0" i="1" baseline="-25000">
+                <a:solidFill>
+                  <a:srgbClr val="A65E1A"/>
+                </a:solidFill>
+                <a:latin typeface="Times New Roman"/>
+              </a:rPr>
+              <a:t>j+1</a:t>
+            </a:r>
+            <a:r>
+              <a:rPr sz="630" b="0" i="0">
+                <a:solidFill>
+                  <a:srgbClr val="A65E1A"/>
+                </a:solidFill>
+                <a:latin typeface="Times New Roman"/>
+              </a:rPr>
+              <a:t>},   </a:t>
+            </a:r>
+            <a:r>
+              <a:rPr sz="630" b="0" i="1">
+                <a:solidFill>
+                  <a:srgbClr val="A65E1A"/>
+                </a:solidFill>
+                <a:latin typeface="Times New Roman"/>
+              </a:rPr>
+              <a:t>y</a:t>
+            </a:r>
+            <a:r>
+              <a:rPr sz="630" b="0" i="0">
+                <a:solidFill>
+                  <a:srgbClr val="A65E1A"/>
+                </a:solidFill>
+                <a:latin typeface="Times New Roman"/>
+              </a:rPr>
+              <a:t> = </a:t>
+            </a:r>
+            <a:r>
+              <a:rPr sz="630" b="0" i="1">
+                <a:solidFill>
+                  <a:srgbClr val="A65E1A"/>
+                </a:solidFill>
+                <a:latin typeface="Times New Roman"/>
+              </a:rPr>
+              <a:t>g</a:t>
+            </a:r>
+            <a:r>
+              <a:rPr sz="630" b="0" i="1" baseline="-25000">
+                <a:solidFill>
+                  <a:srgbClr val="A65E1A"/>
+                </a:solidFill>
+                <a:latin typeface="Times New Roman"/>
+              </a:rPr>
+              <a:t>0</a:t>
             </a:r>
           </a:p>
         </p:txBody>
       </p:sp>
       <p:cxnSp>
         <p:nvCxnSpPr>
-          <p:cNvPr id="234" name="Connector 233"/>
+          <p:cNvPr id="174" name="Connector 173"/>
           <p:cNvCxnSpPr/>
           <p:nvPr/>
         </p:nvCxnSpPr>
         <p:spPr>
-          <a:xfrm flipH="1">
-            <a:off x="2907792" y="1810512"/>
-            <a:ext cx="493776" cy="0"/>
+          <a:xfrm flipV="1">
+            <a:off x="1371600" y="1024128"/>
+            <a:ext cx="0" cy="402336"/>
           </a:xfrm>
           <a:prstGeom prst="line">
             <a:avLst/>
@@ -12688,14 +10583,14 @@
       </p:cxnSp>
       <p:sp>
         <p:nvSpPr>
-          <p:cNvPr id="235" name="TextBox 234"/>
+          <p:cNvPr id="175" name="TextBox 174"/>
           <p:cNvSpPr txBox="1"/>
           <p:nvPr/>
         </p:nvSpPr>
         <p:spPr>
           <a:xfrm>
-            <a:off x="2907792" y="1636776"/>
-            <a:ext cx="493776" cy="146304"/>
+            <a:off x="1389888" y="1152144"/>
+            <a:ext cx="365760" cy="128016"/>
           </a:xfrm>
           <a:prstGeom prst="rect">
             <a:avLst/>
@@ -12708,135 +10603,32 @@
           </a:bodyPr>
           <a:lstStyle/>
           <a:p>
-            <a:pPr algn="ctr">
+            <a:pPr algn="l">
               <a:lnSpc>
                 <a:spcPct val="105000"/>
               </a:lnSpc>
             </a:pPr>
             <a:r>
-              <a:rPr sz="620" b="0" i="1">
-                <a:solidFill>
-                  <a:srgbClr val="000000"/>
+              <a:rPr sz="630" b="0" i="1">
+                <a:solidFill>
+                  <a:srgbClr val="A65E1A"/>
                 </a:solidFill>
                 <a:latin typeface="Times New Roman"/>
               </a:rPr>
-              <a:t>λ</a:t>
-            </a:r>
-            <a:r>
-              <a:rPr sz="620" b="0" i="0">
-                <a:solidFill>
-                  <a:srgbClr val="000000"/>
-                </a:solidFill>
-                <a:latin typeface="Times New Roman"/>
-              </a:rPr>
-              <a:t> ≥ </a:t>
-            </a:r>
-            <a:r>
-              <a:rPr sz="620" b="0" i="1">
-                <a:solidFill>
-                  <a:srgbClr val="000000"/>
-                </a:solidFill>
-                <a:latin typeface="Times New Roman"/>
-              </a:rPr>
-              <a:t>λ</a:t>
-            </a:r>
-            <a:r>
-              <a:rPr sz="620" b="0" i="0" baseline="-25000">
-                <a:solidFill>
-                  <a:srgbClr val="000000"/>
-                </a:solidFill>
-                <a:latin typeface="Times New Roman"/>
-              </a:rPr>
-              <a:t>min</a:t>
+              <a:t>y</a:t>
             </a:r>
           </a:p>
         </p:txBody>
       </p:sp>
       <p:cxnSp>
         <p:nvCxnSpPr>
-          <p:cNvPr id="236" name="Connector 235"/>
+          <p:cNvPr id="176" name="Connector 175"/>
           <p:cNvCxnSpPr/>
           <p:nvPr/>
         </p:nvCxnSpPr>
         <p:spPr>
           <a:xfrm>
-            <a:off x="3712464" y="1316736"/>
-            <a:ext cx="0" cy="329184"/>
-          </a:xfrm>
-          <a:prstGeom prst="line">
-            <a:avLst/>
-          </a:prstGeom>
-          <a:ln w="11430">
-            <a:solidFill>
-              <a:srgbClr val="A65E1A"/>
-            </a:solidFill>
-            <a:tailEnd type="triangle" w="sm" len="sm"/>
-          </a:ln>
-          <a:effectLst/>
-        </p:spPr>
-        <p:style>
-          <a:lnRef idx="2">
-            <a:schemeClr val="accent1"/>
-          </a:lnRef>
-          <a:fillRef idx="0">
-            <a:schemeClr val="accent1"/>
-          </a:fillRef>
-          <a:effectRef idx="1">
-            <a:schemeClr val="accent1"/>
-          </a:effectRef>
-          <a:fontRef idx="minor">
-            <a:schemeClr val="tx1"/>
-          </a:fontRef>
-        </p:style>
-      </p:cxnSp>
-      <p:sp>
-        <p:nvSpPr>
-          <p:cNvPr id="237" name="TextBox 236"/>
-          <p:cNvSpPr txBox="1"/>
-          <p:nvPr/>
-        </p:nvSpPr>
-        <p:spPr>
-          <a:xfrm>
-            <a:off x="3749040" y="1426464"/>
-            <a:ext cx="457200" cy="128016"/>
-          </a:xfrm>
-          <a:prstGeom prst="rect">
-            <a:avLst/>
-          </a:prstGeom>
-          <a:noFill/>
-        </p:spPr>
-        <p:txBody>
-          <a:bodyPr wrap="none" lIns="0" rIns="0" tIns="0" bIns="0" anchor="ctr">
-            <a:noAutofit/>
-          </a:bodyPr>
-          <a:lstStyle/>
-          <a:p>
-            <a:pPr algn="l">
-              <a:lnSpc>
-                <a:spcPct val="105000"/>
-              </a:lnSpc>
-            </a:pPr>
-            <a:r>
-              <a:rPr sz="600" b="0" i="0">
-                <a:solidFill>
-                  <a:srgbClr val="6B6B6B"/>
-                </a:solidFill>
-                <a:latin typeface="Times New Roman"/>
-              </a:rPr>
-              <a:t>freeze</a:t>
-            </a:r>
-          </a:p>
-        </p:txBody>
-      </p:sp>
-      <p:cxnSp>
-        <p:nvCxnSpPr>
-          <p:cNvPr id="238" name="Connector 237"/>
-          <p:cNvCxnSpPr/>
-          <p:nvPr/>
-        </p:nvCxnSpPr>
-        <p:spPr>
-          <a:xfrm>
-            <a:off x="1024128" y="841247"/>
+            <a:off x="1024128" y="1517904"/>
             <a:ext cx="219456" cy="0"/>
           </a:xfrm>
           <a:prstGeom prst="line">
@@ -12868,14 +10660,14 @@
       </p:cxnSp>
       <p:sp>
         <p:nvSpPr>
-          <p:cNvPr id="239" name="TextBox 238"/>
+          <p:cNvPr id="177" name="TextBox 176"/>
           <p:cNvSpPr txBox="1"/>
           <p:nvPr/>
         </p:nvSpPr>
         <p:spPr>
           <a:xfrm>
-            <a:off x="1005840" y="685799"/>
-            <a:ext cx="256032" cy="128016"/>
+            <a:off x="969264" y="1362456"/>
+            <a:ext cx="292608" cy="128016"/>
           </a:xfrm>
           <a:prstGeom prst="rect">
             <a:avLst/>
@@ -12900,21 +10692,57 @@
                 </a:solidFill>
                 <a:latin typeface="Times New Roman"/>
               </a:rPr>
-              <a:t>c, d</a:t>
+              <a:t>ĝ</a:t>
+            </a:r>
+            <a:r>
+              <a:rPr sz="600" b="0" i="0">
+                <a:solidFill>
+                  <a:srgbClr val="2E5A87"/>
+                </a:solidFill>
+                <a:latin typeface="Times New Roman"/>
+              </a:rPr>
+              <a:t>, </a:t>
+            </a:r>
+            <a:r>
+              <a:rPr sz="600" b="0" i="1">
+                <a:solidFill>
+                  <a:srgbClr val="2E5A87"/>
+                </a:solidFill>
+                <a:latin typeface="Times New Roman"/>
+              </a:rPr>
+              <a:t>δ</a:t>
+            </a:r>
+            <a:r>
+              <a:rPr sz="600" b="0" i="0">
+                <a:solidFill>
+                  <a:srgbClr val="2E5A87"/>
+                </a:solidFill>
+                <a:latin typeface="Times New Roman"/>
+              </a:rPr>
+              <a:t>, </a:t>
+            </a:r>
+            <a:r>
+              <a:rPr sz="600" b="0" i="1">
+                <a:solidFill>
+                  <a:srgbClr val="2E5A87"/>
+                </a:solidFill>
+                <a:latin typeface="Times New Roman"/>
+              </a:rPr>
+              <a:t>d</a:t>
             </a:r>
           </a:p>
         </p:txBody>
       </p:sp>
       <p:sp>
         <p:nvSpPr>
-          <p:cNvPr id="240" name="TextBox 239"/>
+          <p:cNvPr id="178" name="TextBox 177"/>
           <p:cNvSpPr txBox="1"/>
           <p:nvPr/>
         </p:nvSpPr>
         <p:spPr>
           <a:xfrm>
-            <a:off x="1005840" y="859536"/>
-            <a:ext cx="256032" cy="128016"/>
+            <a:off x="969264" y="1536192"/>
+            <a:ext cx="292608" cy="128016"/>
           </a:xfrm>
           <a:prstGeom prst="rect">
             <a:avLst/>
@@ -12939,130 +10767,50 @@
                 </a:solidFill>
                 <a:latin typeface="Times New Roman"/>
               </a:rPr>
-              <a:t>ξ′, h</a:t>
+              <a:t>ξ</a:t>
+            </a:r>
+            <a:r>
+              <a:rPr sz="600" b="0" i="1" baseline="-25000">
+                <a:solidFill>
+                  <a:srgbClr val="2E5A87"/>
+                </a:solidFill>
+                <a:latin typeface="Times New Roman"/>
+              </a:rPr>
+              <a:t>j</a:t>
+            </a:r>
+            <a:r>
+              <a:rPr sz="600" b="0" i="0">
+                <a:solidFill>
+                  <a:srgbClr val="2E5A87"/>
+                </a:solidFill>
+                <a:latin typeface="Times New Roman"/>
+              </a:rPr>
+              <a:t>, </a:t>
+            </a:r>
+            <a:r>
+              <a:rPr sz="600" b="0" i="1">
+                <a:solidFill>
+                  <a:srgbClr val="2E5A87"/>
+                </a:solidFill>
+                <a:latin typeface="Times New Roman"/>
+              </a:rPr>
+              <a:t>h</a:t>
+            </a:r>
+            <a:r>
+              <a:rPr sz="600" b="0" i="1" baseline="-25000">
+                <a:solidFill>
+                  <a:srgbClr val="2E5A87"/>
+                </a:solidFill>
+                <a:latin typeface="Times New Roman"/>
+              </a:rPr>
+              <a:t>j</a:t>
             </a:r>
           </a:p>
         </p:txBody>
       </p:sp>
       <p:cxnSp>
         <p:nvCxnSpPr>
-          <p:cNvPr id="241" name="Connector 240"/>
-          <p:cNvCxnSpPr/>
-          <p:nvPr/>
-        </p:nvCxnSpPr>
-        <p:spPr>
-          <a:xfrm>
-            <a:off x="1024128" y="1755648"/>
-            <a:ext cx="219456" cy="0"/>
-          </a:xfrm>
-          <a:prstGeom prst="line">
-            <a:avLst/>
-          </a:prstGeom>
-          <a:ln w="11430">
-            <a:solidFill>
-              <a:srgbClr val="2E5A87"/>
-            </a:solidFill>
-            <a:headEnd type="triangle" w="sm" len="sm"/>
-            <a:tailEnd type="triangle" w="sm" len="sm"/>
-          </a:ln>
-          <a:effectLst/>
-        </p:spPr>
-        <p:style>
-          <a:lnRef idx="2">
-            <a:schemeClr val="accent1"/>
-          </a:lnRef>
-          <a:fillRef idx="0">
-            <a:schemeClr val="accent1"/>
-          </a:fillRef>
-          <a:effectRef idx="1">
-            <a:schemeClr val="accent1"/>
-          </a:effectRef>
-          <a:fontRef idx="minor">
-            <a:schemeClr val="tx1"/>
-          </a:fontRef>
-        </p:style>
-      </p:cxnSp>
-      <p:sp>
-        <p:nvSpPr>
-          <p:cNvPr id="242" name="TextBox 241"/>
-          <p:cNvSpPr txBox="1"/>
-          <p:nvPr/>
-        </p:nvSpPr>
-        <p:spPr>
-          <a:xfrm>
-            <a:off x="1005840" y="1600200"/>
-            <a:ext cx="256032" cy="128016"/>
-          </a:xfrm>
-          <a:prstGeom prst="rect">
-            <a:avLst/>
-          </a:prstGeom>
-          <a:noFill/>
-        </p:spPr>
-        <p:txBody>
-          <a:bodyPr wrap="none" lIns="0" rIns="0" tIns="0" bIns="0" anchor="ctr">
-            <a:noAutofit/>
-          </a:bodyPr>
-          <a:lstStyle/>
-          <a:p>
-            <a:pPr algn="ctr">
-              <a:lnSpc>
-                <a:spcPct val="105000"/>
-              </a:lnSpc>
-            </a:pPr>
-            <a:r>
-              <a:rPr sz="600" b="0" i="1">
-                <a:solidFill>
-                  <a:srgbClr val="2E5A87"/>
-                </a:solidFill>
-                <a:latin typeface="Times New Roman"/>
-              </a:rPr>
-              <a:t>a</a:t>
-            </a:r>
-          </a:p>
-        </p:txBody>
-      </p:sp>
-      <p:sp>
-        <p:nvSpPr>
-          <p:cNvPr id="243" name="TextBox 242"/>
-          <p:cNvSpPr txBox="1"/>
-          <p:nvPr/>
-        </p:nvSpPr>
-        <p:spPr>
-          <a:xfrm>
-            <a:off x="1005840" y="1773936"/>
-            <a:ext cx="256032" cy="128016"/>
-          </a:xfrm>
-          <a:prstGeom prst="rect">
-            <a:avLst/>
-          </a:prstGeom>
-          <a:noFill/>
-        </p:spPr>
-        <p:txBody>
-          <a:bodyPr wrap="none" lIns="0" rIns="0" tIns="0" bIns="0" anchor="ctr">
-            <a:noAutofit/>
-          </a:bodyPr>
-          <a:lstStyle/>
-          <a:p>
-            <a:pPr algn="ctr">
-              <a:lnSpc>
-                <a:spcPct val="105000"/>
-              </a:lnSpc>
-            </a:pPr>
-            <a:r>
-              <a:rPr sz="600" b="0" i="1">
-                <a:solidFill>
-                  <a:srgbClr val="2E5A87"/>
-                </a:solidFill>
-                <a:latin typeface="Times New Roman"/>
-              </a:rPr>
-              <a:t>ξ′, r</a:t>
-            </a:r>
-          </a:p>
-        </p:txBody>
-      </p:sp>
-      <p:cxnSp>
-        <p:nvCxnSpPr>
-          <p:cNvPr id="244" name="Connector 243"/>
+          <p:cNvPr id="179" name="Connector 178"/>
           <p:cNvCxnSpPr/>
           <p:nvPr/>
         </p:nvCxnSpPr>
@@ -13099,7 +10847,7 @@
       </p:cxnSp>
       <p:sp>
         <p:nvSpPr>
-          <p:cNvPr id="245" name="TextBox 244"/>
+          <p:cNvPr id="180" name="TextBox 179"/>
           <p:cNvSpPr txBox="1"/>
           <p:nvPr/>
         </p:nvSpPr>
@@ -13138,7 +10886,7 @@
       </p:sp>
       <p:sp>
         <p:nvSpPr>
-          <p:cNvPr id="246" name="TextBox 245"/>
+          <p:cNvPr id="181" name="TextBox 180"/>
           <p:cNvSpPr txBox="1"/>
           <p:nvPr/>
         </p:nvSpPr>
@@ -13177,7 +10925,7 @@
       </p:sp>
       <p:sp>
         <p:nvSpPr>
-          <p:cNvPr id="247" name="Rounded Rectangle 246"/>
+          <p:cNvPr id="182" name="Rounded Rectangle 181"/>
           <p:cNvSpPr/>
           <p:nvPr/>
         </p:nvSpPr>
@@ -13240,7 +10988,7 @@
       </p:sp>
       <p:grpSp>
         <p:nvGrpSpPr>
-          <p:cNvPr id="248" name="task_policy_onboard"/>
+          <p:cNvPr id="183" name="safety_policy_onboard"/>
           <p:cNvGrpSpPr/>
           <p:nvPr/>
         </p:nvGrpSpPr>
@@ -13254,7 +11002,7 @@
         </p:grpSpPr>
         <p:sp>
           <p:nvSpPr>
-            <p:cNvPr id="249" name="Rounded Rectangle 248"/>
+            <p:cNvPr id="184" name="Rounded Rectangle 183"/>
             <p:cNvSpPr/>
             <p:nvPr/>
           </p:nvSpPr>
@@ -13302,7 +11050,7 @@
         </p:sp>
         <p:cxnSp>
           <p:nvCxnSpPr>
-            <p:cNvPr id="250" name="Connector 249"/>
+            <p:cNvPr id="185" name="Connector 184"/>
             <p:cNvCxnSpPr/>
             <p:nvPr/>
           </p:nvCxnSpPr>
@@ -13338,7 +11086,7 @@
         </p:cxnSp>
         <p:cxnSp>
           <p:nvCxnSpPr>
-            <p:cNvPr id="251" name="Connector 250"/>
+            <p:cNvPr id="186" name="Connector 185"/>
             <p:cNvCxnSpPr/>
             <p:nvPr/>
           </p:nvCxnSpPr>
@@ -13374,7 +11122,7 @@
         </p:cxnSp>
         <p:cxnSp>
           <p:nvCxnSpPr>
-            <p:cNvPr id="252" name="Connector 251"/>
+            <p:cNvPr id="187" name="Connector 186"/>
             <p:cNvCxnSpPr/>
             <p:nvPr/>
           </p:nvCxnSpPr>
@@ -13410,7 +11158,7 @@
         </p:cxnSp>
         <p:cxnSp>
           <p:nvCxnSpPr>
-            <p:cNvPr id="253" name="Connector 252"/>
+            <p:cNvPr id="188" name="Connector 187"/>
             <p:cNvCxnSpPr/>
             <p:nvPr/>
           </p:nvCxnSpPr>
@@ -13446,7 +11194,7 @@
         </p:cxnSp>
         <p:cxnSp>
           <p:nvCxnSpPr>
-            <p:cNvPr id="254" name="Connector 253"/>
+            <p:cNvPr id="189" name="Connector 188"/>
             <p:cNvCxnSpPr/>
             <p:nvPr/>
           </p:nvCxnSpPr>
@@ -13482,7 +11230,7 @@
         </p:cxnSp>
         <p:cxnSp>
           <p:nvCxnSpPr>
-            <p:cNvPr id="255" name="Connector 254"/>
+            <p:cNvPr id="190" name="Connector 189"/>
             <p:cNvCxnSpPr/>
             <p:nvPr/>
           </p:nvCxnSpPr>
@@ -13518,7 +11266,7 @@
         </p:cxnSp>
         <p:cxnSp>
           <p:nvCxnSpPr>
-            <p:cNvPr id="256" name="Connector 255"/>
+            <p:cNvPr id="191" name="Connector 190"/>
             <p:cNvCxnSpPr/>
             <p:nvPr/>
           </p:nvCxnSpPr>
@@ -13554,7 +11302,7 @@
         </p:cxnSp>
         <p:cxnSp>
           <p:nvCxnSpPr>
-            <p:cNvPr id="257" name="Connector 256"/>
+            <p:cNvPr id="192" name="Connector 191"/>
             <p:cNvCxnSpPr/>
             <p:nvPr/>
           </p:nvCxnSpPr>
@@ -13590,7 +11338,7 @@
         </p:cxnSp>
         <p:cxnSp>
           <p:nvCxnSpPr>
-            <p:cNvPr id="258" name="Connector 257"/>
+            <p:cNvPr id="193" name="Connector 192"/>
             <p:cNvCxnSpPr/>
             <p:nvPr/>
           </p:nvCxnSpPr>
@@ -13626,7 +11374,7 @@
         </p:cxnSp>
         <p:cxnSp>
           <p:nvCxnSpPr>
-            <p:cNvPr id="259" name="Connector 258"/>
+            <p:cNvPr id="194" name="Connector 193"/>
             <p:cNvCxnSpPr/>
             <p:nvPr/>
           </p:nvCxnSpPr>
@@ -13662,7 +11410,7 @@
         </p:cxnSp>
         <p:cxnSp>
           <p:nvCxnSpPr>
-            <p:cNvPr id="260" name="Connector 259"/>
+            <p:cNvPr id="195" name="Connector 194"/>
             <p:cNvCxnSpPr/>
             <p:nvPr/>
           </p:nvCxnSpPr>
@@ -13698,7 +11446,7 @@
         </p:cxnSp>
         <p:cxnSp>
           <p:nvCxnSpPr>
-            <p:cNvPr id="261" name="Connector 260"/>
+            <p:cNvPr id="196" name="Connector 195"/>
             <p:cNvCxnSpPr/>
             <p:nvPr/>
           </p:nvCxnSpPr>
@@ -13734,7 +11482,7 @@
         </p:cxnSp>
         <p:cxnSp>
           <p:nvCxnSpPr>
-            <p:cNvPr id="262" name="Connector 261"/>
+            <p:cNvPr id="197" name="Connector 196"/>
             <p:cNvCxnSpPr/>
             <p:nvPr/>
           </p:nvCxnSpPr>
@@ -13770,7 +11518,7 @@
         </p:cxnSp>
         <p:cxnSp>
           <p:nvCxnSpPr>
-            <p:cNvPr id="263" name="Connector 262"/>
+            <p:cNvPr id="198" name="Connector 197"/>
             <p:cNvCxnSpPr/>
             <p:nvPr/>
           </p:nvCxnSpPr>
@@ -13806,7 +11554,7 @@
         </p:cxnSp>
         <p:cxnSp>
           <p:nvCxnSpPr>
-            <p:cNvPr id="264" name="Connector 263"/>
+            <p:cNvPr id="199" name="Connector 198"/>
             <p:cNvCxnSpPr/>
             <p:nvPr/>
           </p:nvCxnSpPr>
@@ -13842,7 +11590,7 @@
         </p:cxnSp>
         <p:cxnSp>
           <p:nvCxnSpPr>
-            <p:cNvPr id="265" name="Connector 264"/>
+            <p:cNvPr id="200" name="Connector 199"/>
             <p:cNvCxnSpPr/>
             <p:nvPr/>
           </p:nvCxnSpPr>
@@ -13878,7 +11626,7 @@
         </p:cxnSp>
         <p:cxnSp>
           <p:nvCxnSpPr>
-            <p:cNvPr id="266" name="Connector 265"/>
+            <p:cNvPr id="201" name="Connector 200"/>
             <p:cNvCxnSpPr/>
             <p:nvPr/>
           </p:nvCxnSpPr>
@@ -13914,7 +11662,7 @@
         </p:cxnSp>
         <p:cxnSp>
           <p:nvCxnSpPr>
-            <p:cNvPr id="267" name="Connector 266"/>
+            <p:cNvPr id="202" name="Connector 201"/>
             <p:cNvCxnSpPr/>
             <p:nvPr/>
           </p:nvCxnSpPr>
@@ -13950,7 +11698,7 @@
         </p:cxnSp>
         <p:cxnSp>
           <p:nvCxnSpPr>
-            <p:cNvPr id="268" name="Connector 267"/>
+            <p:cNvPr id="203" name="Connector 202"/>
             <p:cNvCxnSpPr/>
             <p:nvPr/>
           </p:nvCxnSpPr>
@@ -13986,7 +11734,7 @@
         </p:cxnSp>
         <p:cxnSp>
           <p:nvCxnSpPr>
-            <p:cNvPr id="269" name="Connector 268"/>
+            <p:cNvPr id="204" name="Connector 203"/>
             <p:cNvCxnSpPr/>
             <p:nvPr/>
           </p:nvCxnSpPr>
@@ -14022,7 +11770,7 @@
         </p:cxnSp>
         <p:cxnSp>
           <p:nvCxnSpPr>
-            <p:cNvPr id="270" name="Connector 269"/>
+            <p:cNvPr id="205" name="Connector 204"/>
             <p:cNvCxnSpPr/>
             <p:nvPr/>
           </p:nvCxnSpPr>
@@ -14058,7 +11806,7 @@
         </p:cxnSp>
         <p:cxnSp>
           <p:nvCxnSpPr>
-            <p:cNvPr id="271" name="Connector 270"/>
+            <p:cNvPr id="206" name="Connector 205"/>
             <p:cNvCxnSpPr/>
             <p:nvPr/>
           </p:nvCxnSpPr>
@@ -14094,7 +11842,7 @@
         </p:cxnSp>
         <p:cxnSp>
           <p:nvCxnSpPr>
-            <p:cNvPr id="272" name="Connector 271"/>
+            <p:cNvPr id="207" name="Connector 206"/>
             <p:cNvCxnSpPr/>
             <p:nvPr/>
           </p:nvCxnSpPr>
@@ -14130,7 +11878,7 @@
         </p:cxnSp>
         <p:cxnSp>
           <p:nvCxnSpPr>
-            <p:cNvPr id="273" name="Connector 272"/>
+            <p:cNvPr id="208" name="Connector 207"/>
             <p:cNvCxnSpPr/>
             <p:nvPr/>
           </p:nvCxnSpPr>
@@ -14166,7 +11914,7 @@
         </p:cxnSp>
         <p:sp>
           <p:nvSpPr>
-            <p:cNvPr id="274" name="Oval 273"/>
+            <p:cNvPr id="209" name="Oval 208"/>
             <p:cNvSpPr/>
             <p:nvPr/>
           </p:nvSpPr>
@@ -14210,7 +11958,7 @@
         </p:sp>
         <p:sp>
           <p:nvSpPr>
-            <p:cNvPr id="275" name="Oval 274"/>
+            <p:cNvPr id="210" name="Oval 209"/>
             <p:cNvSpPr/>
             <p:nvPr/>
           </p:nvSpPr>
@@ -14254,7 +12002,7 @@
         </p:sp>
         <p:sp>
           <p:nvSpPr>
-            <p:cNvPr id="276" name="Oval 275"/>
+            <p:cNvPr id="211" name="Oval 210"/>
             <p:cNvSpPr/>
             <p:nvPr/>
           </p:nvSpPr>
@@ -14298,7 +12046,7 @@
         </p:sp>
         <p:sp>
           <p:nvSpPr>
-            <p:cNvPr id="277" name="Oval 276"/>
+            <p:cNvPr id="212" name="Oval 211"/>
             <p:cNvSpPr/>
             <p:nvPr/>
           </p:nvSpPr>
@@ -14342,7 +12090,7 @@
         </p:sp>
         <p:sp>
           <p:nvSpPr>
-            <p:cNvPr id="278" name="Oval 277"/>
+            <p:cNvPr id="213" name="Oval 212"/>
             <p:cNvSpPr/>
             <p:nvPr/>
           </p:nvSpPr>
@@ -14386,7 +12134,7 @@
         </p:sp>
         <p:sp>
           <p:nvSpPr>
-            <p:cNvPr id="279" name="Oval 278"/>
+            <p:cNvPr id="214" name="Oval 213"/>
             <p:cNvSpPr/>
             <p:nvPr/>
           </p:nvSpPr>
@@ -14430,7 +12178,7 @@
         </p:sp>
         <p:sp>
           <p:nvSpPr>
-            <p:cNvPr id="280" name="Oval 279"/>
+            <p:cNvPr id="215" name="Oval 214"/>
             <p:cNvSpPr/>
             <p:nvPr/>
           </p:nvSpPr>
@@ -14474,7 +12222,7 @@
         </p:sp>
         <p:sp>
           <p:nvSpPr>
-            <p:cNvPr id="281" name="Oval 280"/>
+            <p:cNvPr id="216" name="Oval 215"/>
             <p:cNvSpPr/>
             <p:nvPr/>
           </p:nvSpPr>
@@ -14518,7 +12266,7 @@
         </p:sp>
         <p:sp>
           <p:nvSpPr>
-            <p:cNvPr id="282" name="Oval 281"/>
+            <p:cNvPr id="217" name="Oval 216"/>
             <p:cNvSpPr/>
             <p:nvPr/>
           </p:nvSpPr>
@@ -14562,7 +12310,7 @@
         </p:sp>
         <p:sp>
           <p:nvSpPr>
-            <p:cNvPr id="283" name="Oval 282"/>
+            <p:cNvPr id="218" name="Oval 217"/>
             <p:cNvSpPr/>
             <p:nvPr/>
           </p:nvSpPr>
@@ -14607,14 +12355,14 @@
       </p:grpSp>
       <p:sp>
         <p:nvSpPr>
-          <p:cNvPr id="284" name="TextBox 283"/>
+          <p:cNvPr id="219" name="TextBox 218"/>
           <p:cNvSpPr txBox="1"/>
           <p:nvPr/>
         </p:nvSpPr>
         <p:spPr>
           <a:xfrm>
-            <a:off x="5248656" y="667512"/>
-            <a:ext cx="420624" cy="118872"/>
+            <a:off x="5175504" y="667512"/>
+            <a:ext cx="566928" cy="118872"/>
           </a:xfrm>
           <a:prstGeom prst="rect">
             <a:avLst/>
@@ -14648,14 +12396,41 @@
                 </a:solidFill>
                 <a:latin typeface="Times New Roman"/>
               </a:rPr>
-              <a:t>t</a:t>
+              <a:t>h</a:t>
+            </a:r>
+            <a:r>
+              <a:rPr sz="660" b="0" i="0">
+                <a:solidFill>
+                  <a:srgbClr val="000000"/>
+                </a:solidFill>
+                <a:latin typeface="Times New Roman"/>
+              </a:rPr>
+              <a:t>, </a:t>
+            </a:r>
+            <a:r>
+              <a:rPr sz="660" b="0" i="1">
+                <a:solidFill>
+                  <a:srgbClr val="000000"/>
+                </a:solidFill>
+                <a:latin typeface="Times New Roman"/>
+              </a:rPr>
+              <a:t>Q</a:t>
+            </a:r>
+            <a:r>
+              <a:rPr sz="660" b="0" i="1" baseline="-25000">
+                <a:solidFill>
+                  <a:srgbClr val="000000"/>
+                </a:solidFill>
+                <a:latin typeface="Times New Roman"/>
+              </a:rPr>
+              <a:t>h</a:t>
             </a:r>
           </a:p>
         </p:txBody>
       </p:sp>
       <p:sp>
         <p:nvSpPr>
-          <p:cNvPr id="285" name="Rounded Rectangle 284"/>
+          <p:cNvPr id="220" name="Rounded Rectangle 219"/>
           <p:cNvSpPr/>
           <p:nvPr/>
         </p:nvSpPr>
@@ -14705,13 +12480,13 @@
               </a:lnSpc>
             </a:pPr>
             <a:r>
-              <a:rPr sz="660" b="0" i="0">
+              <a:rPr sz="640" b="0" i="0">
                 <a:solidFill>
                   <a:srgbClr val="000000"/>
                 </a:solidFill>
                 <a:latin typeface="Times New Roman"/>
               </a:rPr>
-              <a:t>Shield</a:t>
+              <a:t>legal gear</a:t>
             </a:r>
           </a:p>
           <a:p>
@@ -14721,72 +12496,38 @@
               </a:lnSpc>
             </a:pPr>
             <a:r>
-              <a:rPr sz="660" b="0" i="1">
+              <a:rPr sz="640" b="0" i="1">
+                <a:solidFill>
+                  <a:srgbClr val="000000"/>
+                </a:solidFill>
+                <a:latin typeface="Times New Roman"/>
+              </a:rPr>
+              <a:t>g</a:t>
+            </a:r>
+            <a:r>
+              <a:rPr sz="640" b="0" i="0">
+                <a:solidFill>
+                  <a:srgbClr val="000000"/>
+                </a:solidFill>
+                <a:latin typeface="Times New Roman"/>
+              </a:rPr>
+              <a:t>* = argmax </a:t>
+            </a:r>
+            <a:r>
+              <a:rPr sz="640" b="0" i="1">
                 <a:solidFill>
                   <a:srgbClr val="000000"/>
                 </a:solidFill>
                 <a:latin typeface="Times New Roman"/>
               </a:rPr>
               <a:t>q</a:t>
-            </a:r>
-            <a:r>
-              <a:rPr sz="660" b="0" i="0">
-                <a:solidFill>
-                  <a:srgbClr val="000000"/>
-                </a:solidFill>
-                <a:latin typeface="Times New Roman"/>
-              </a:rPr>
-              <a:t> ≥ </a:t>
-            </a:r>
-            <a:r>
-              <a:rPr sz="660" b="0" i="1">
-                <a:solidFill>
-                  <a:srgbClr val="000000"/>
-                </a:solidFill>
-                <a:latin typeface="Times New Roman"/>
-              </a:rPr>
-              <a:t>τ</a:t>
-            </a:r>
-          </a:p>
-          <a:p>
-            <a:pPr algn="ctr">
-              <a:lnSpc>
-                <a:spcPct val="105000"/>
-              </a:lnSpc>
-            </a:pPr>
-            <a:r>
-              <a:rPr sz="660" b="0" i="0">
-                <a:solidFill>
-                  <a:srgbClr val="000000"/>
-                </a:solidFill>
-                <a:latin typeface="Times New Roman"/>
-              </a:rPr>
-              <a:t>else </a:t>
-            </a:r>
-            <a:r>
-              <a:rPr sz="660" b="0" i="1">
-                <a:solidFill>
-                  <a:srgbClr val="000000"/>
-                </a:solidFill>
-                <a:latin typeface="Times New Roman"/>
-              </a:rPr>
-              <a:t>π</a:t>
-            </a:r>
-            <a:r>
-              <a:rPr sz="660" b="0" i="1" baseline="-25000">
-                <a:solidFill>
-                  <a:srgbClr val="000000"/>
-                </a:solidFill>
-                <a:latin typeface="Times New Roman"/>
-              </a:rPr>
-              <a:t>h</a:t>
             </a:r>
           </a:p>
         </p:txBody>
       </p:sp>
       <p:cxnSp>
         <p:nvCxnSpPr>
-          <p:cNvPr id="286" name="Connector 285"/>
+          <p:cNvPr id="221" name="Connector 220"/>
           <p:cNvCxnSpPr/>
           <p:nvPr/>
         </p:nvCxnSpPr>
@@ -14823,7 +12564,7 @@
       </p:cxnSp>
       <p:cxnSp>
         <p:nvCxnSpPr>
-          <p:cNvPr id="287" name="Connector 286"/>
+          <p:cNvPr id="222" name="Connector 221"/>
           <p:cNvCxnSpPr/>
           <p:nvPr/>
         </p:nvCxnSpPr>
@@ -14860,7 +12601,7 @@
       </p:cxnSp>
       <p:pic>
         <p:nvPicPr>
-          <p:cNvPr id="288" name="photo_vessel" descr="fig1_vessel.jpg"/>
+          <p:cNvPr id="223" name="photo_vessel" descr="fig1_vessel.jpg"/>
           <p:cNvPicPr>
             <a:picLocks noChangeAspect="1"/>
           </p:cNvPicPr>
@@ -14884,7 +12625,7 @@
       </p:pic>
       <p:cxnSp>
         <p:nvCxnSpPr>
-          <p:cNvPr id="289" name="Connector 288"/>
+          <p:cNvPr id="224" name="Connector 223"/>
           <p:cNvCxnSpPr/>
           <p:nvPr/>
         </p:nvCxnSpPr>
@@ -14921,7 +12662,7 @@
       </p:cxnSp>
       <p:cxnSp>
         <p:nvCxnSpPr>
-          <p:cNvPr id="290" name="Connector 289"/>
+          <p:cNvPr id="225" name="Connector 224"/>
           <p:cNvCxnSpPr/>
           <p:nvPr/>
         </p:nvCxnSpPr>
@@ -14958,7 +12699,7 @@
       </p:cxnSp>
       <p:cxnSp>
         <p:nvCxnSpPr>
-          <p:cNvPr id="291" name="Connector 290"/>
+          <p:cNvPr id="226" name="Connector 225"/>
           <p:cNvCxnSpPr/>
           <p:nvPr/>
         </p:nvCxnSpPr>
@@ -14995,7 +12736,7 @@
       </p:cxnSp>
       <p:sp>
         <p:nvSpPr>
-          <p:cNvPr id="292" name="TextBox 291"/>
+          <p:cNvPr id="227" name="TextBox 226"/>
           <p:cNvSpPr txBox="1"/>
           <p:nvPr/>
         </p:nvSpPr>
@@ -15034,7 +12775,7 @@
       </p:sp>
       <p:cxnSp>
         <p:nvCxnSpPr>
-          <p:cNvPr id="293" name="Connector 292"/>
+          <p:cNvPr id="228" name="Connector 227"/>
           <p:cNvCxnSpPr/>
           <p:nvPr/>
         </p:nvCxnSpPr>
@@ -15071,7 +12812,7 @@
       </p:cxnSp>
       <p:sp>
         <p:nvSpPr>
-          <p:cNvPr id="294" name="TextBox 293"/>
+          <p:cNvPr id="229" name="TextBox 228"/>
           <p:cNvSpPr txBox="1"/>
           <p:nvPr/>
         </p:nvSpPr>
@@ -15128,7 +12869,7 @@
       </p:sp>
       <p:cxnSp>
         <p:nvCxnSpPr>
-          <p:cNvPr id="295" name="Connector 294"/>
+          <p:cNvPr id="230" name="Connector 229"/>
           <p:cNvCxnSpPr/>
           <p:nvPr/>
         </p:nvCxnSpPr>
@@ -15165,7 +12906,7 @@
       </p:cxnSp>
       <p:sp>
         <p:nvSpPr>
-          <p:cNvPr id="296" name="TextBox 295"/>
+          <p:cNvPr id="231" name="TextBox 230"/>
           <p:cNvSpPr txBox="1"/>
           <p:nvPr/>
         </p:nvSpPr>

--- a/figures/ppt/fig1_framework.pptx
+++ b/figures/ppt/fig1_framework.pptx
@@ -3626,7 +3626,7 @@
                 </a:solidFill>
                 <a:latin typeface="Times New Roman"/>
               </a:rPr>
-              <a:t>d</a:t>
+              <a:t>w</a:t>
             </a:r>
             <a:r>
               <a:rPr sz="640" b="0" i="0">
@@ -3956,7 +3956,7 @@
                 </a:solidFill>
                 <a:latin typeface="Times New Roman"/>
               </a:rPr>
-              <a:t>d</a:t>
+              <a:t>w</a:t>
             </a:r>
           </a:p>
         </p:txBody>
@@ -10208,7 +10208,7 @@
                 </a:solidFill>
                 <a:latin typeface="Times New Roman"/>
               </a:rPr>
-              <a:t>d</a:t>
+              <a:t>w</a:t>
             </a:r>
             <a:r>
               <a:rPr sz="590" b="0" i="0">
@@ -10728,7 +10728,7 @@
                 </a:solidFill>
                 <a:latin typeface="Times New Roman"/>
               </a:rPr>
-              <a:t>d</a:t>
+              <a:t>w</a:t>
             </a:r>
           </a:p>
         </p:txBody>
@@ -12768,7 +12768,7 @@
                 </a:solidFill>
                 <a:latin typeface="Times New Roman"/>
               </a:rPr>
-              <a:t>d</a:t>
+              <a:t>w</a:t>
             </a:r>
           </a:p>
         </p:txBody>

--- a/figures/ppt/fig1_framework.pptx
+++ b/figures/ppt/fig1_framework.pptx
@@ -3922,16 +3922,7 @@
                 </a:solidFill>
                 <a:latin typeface="Times New Roman"/>
               </a:rPr>
-              <a:t>steering </a:t>
-            </a:r>
-            <a:r>
-              <a:rPr sz="640" b="0" i="1">
-                <a:solidFill>
-                  <a:srgbClr val="000000"/>
-                </a:solidFill>
-                <a:latin typeface="Times New Roman"/>
-              </a:rPr>
-              <a:t>δ</a:t>
+              <a:t>steering rate</a:t>
             </a:r>
           </a:p>
           <a:p>
@@ -10163,24 +10154,6 @@
                 </a:solidFill>
                 <a:latin typeface="Times New Roman"/>
               </a:rPr>
-              <a:t>δ</a:t>
-            </a:r>
-            <a:r>
-              <a:rPr sz="590" b="0" i="0">
-                <a:solidFill>
-                  <a:srgbClr val="6B6B6B"/>
-                </a:solidFill>
-                <a:latin typeface="Times New Roman"/>
-              </a:rPr>
-              <a:t> = </a:t>
-            </a:r>
-            <a:r>
-              <a:rPr sz="590" b="0" i="1">
-                <a:solidFill>
-                  <a:srgbClr val="6B6B6B"/>
-                </a:solidFill>
-                <a:latin typeface="Times New Roman"/>
-              </a:rPr>
               <a:t>π</a:t>
             </a:r>
             <a:r>
@@ -10199,25 +10172,7 @@
                 </a:solidFill>
                 <a:latin typeface="Times New Roman"/>
               </a:rPr>
-              <a:t>,  </a:t>
-            </a:r>
-            <a:r>
-              <a:rPr sz="590" b="0" i="1">
-                <a:solidFill>
-                  <a:srgbClr val="6B6B6B"/>
-                </a:solidFill>
-                <a:latin typeface="Times New Roman"/>
-              </a:rPr>
-              <a:t>w</a:t>
-            </a:r>
-            <a:r>
-              <a:rPr sz="590" b="0" i="0">
-                <a:solidFill>
-                  <a:srgbClr val="6B6B6B"/>
-                </a:solidFill>
-                <a:latin typeface="Times New Roman"/>
-              </a:rPr>
-              <a:t> = </a:t>
+              <a:t> and </a:t>
             </a:r>
             <a:r>
               <a:rPr sz="590" b="0" i="1">
@@ -10235,7 +10190,7 @@
                 </a:solidFill>
                 <a:latin typeface="Times New Roman"/>
               </a:rPr>
-              <a:t>  at every step</a:t>
+              <a:t> act at every step</a:t>
             </a:r>
           </a:p>
         </p:txBody>
@@ -10692,25 +10647,7 @@
                 </a:solidFill>
                 <a:latin typeface="Times New Roman"/>
               </a:rPr>
-              <a:t>ĝ</a:t>
-            </a:r>
-            <a:r>
-              <a:rPr sz="600" b="0" i="0">
-                <a:solidFill>
-                  <a:srgbClr val="2E5A87"/>
-                </a:solidFill>
-                <a:latin typeface="Times New Roman"/>
-              </a:rPr>
-              <a:t>, </a:t>
-            </a:r>
-            <a:r>
-              <a:rPr sz="600" b="0" i="1">
-                <a:solidFill>
-                  <a:srgbClr val="2E5A87"/>
-                </a:solidFill>
-                <a:latin typeface="Times New Roman"/>
-              </a:rPr>
-              <a:t>δ</a:t>
+              <a:t>c</a:t>
             </a:r>
             <a:r>
               <a:rPr sz="600" b="0" i="0">

--- a/figures/ppt/fig1_framework.pptx
+++ b/figures/ppt/fig1_framework.pptx
@@ -4043,7 +4043,7 @@
                 </a:solidFill>
                 <a:latin typeface="Times New Roman"/>
               </a:rPr>
-              <a:t>  by adversarial RL on the SMDP</a:t>
+              <a:t>  by adversarial RL with legality masking</a:t>
             </a:r>
           </a:p>
         </p:txBody>
@@ -9350,7 +9350,25 @@
                 </a:solidFill>
                 <a:latin typeface="Times New Roman"/>
               </a:rPr>
-              <a:t>one gear decision = option, gear held for </a:t>
+              <a:t>unroll over </a:t>
+            </a:r>
+            <a:r>
+              <a:rPr sz="630" b="0" i="1">
+                <a:solidFill>
+                  <a:srgbClr val="A65E1A"/>
+                </a:solidFill>
+                <a:latin typeface="Times New Roman"/>
+              </a:rPr>
+              <a:t>n</a:t>
+            </a:r>
+            <a:r>
+              <a:rPr sz="630" b="0" i="0">
+                <a:solidFill>
+                  <a:srgbClr val="A65E1A"/>
+                </a:solidFill>
+                <a:latin typeface="Times New Roman"/>
+              </a:rPr>
+              <a:t> ≥ </a:t>
             </a:r>
             <a:r>
               <a:rPr sz="630" b="0" i="1">
@@ -9377,14 +9395,14 @@
                 </a:solidFill>
                 <a:latin typeface="Times New Roman"/>
               </a:rPr>
-              <a:t> steps</a:t>
+              <a:t> steps, legal gear chosen at every step</a:t>
             </a:r>
           </a:p>
         </p:txBody>
       </p:sp>
       <p:sp>
         <p:nvSpPr>
-          <p:cNvPr id="155" name="option_step_0"/>
+          <p:cNvPr id="155" name="unroll_step_0"/>
           <p:cNvSpPr/>
           <p:nvPr/>
         </p:nvSpPr>
@@ -9399,7 +9417,7 @@
             </a:avLst>
           </a:prstGeom>
           <a:solidFill>
-            <a:srgbClr val="FBEFE3"/>
+            <a:srgbClr val="FFFFFF"/>
           </a:solidFill>
           <a:ln w="8890">
             <a:solidFill>
@@ -9440,14 +9458,23 @@
                 </a:solidFill>
                 <a:latin typeface="Times New Roman"/>
               </a:rPr>
-              <a:t>ĝ</a:t>
+              <a:t>g</a:t>
+            </a:r>
+            <a:r>
+              <a:rPr sz="640" b="0" i="1" baseline="-25000">
+                <a:solidFill>
+                  <a:srgbClr val="000000"/>
+                </a:solidFill>
+                <a:latin typeface="Times New Roman"/>
+              </a:rPr>
+              <a:t>c</a:t>
             </a:r>
           </a:p>
         </p:txBody>
       </p:sp>
       <p:sp>
         <p:nvSpPr>
-          <p:cNvPr id="156" name="option_step_1"/>
+          <p:cNvPr id="156" name="unroll_step_1"/>
           <p:cNvSpPr/>
           <p:nvPr/>
         </p:nvSpPr>
@@ -9503,14 +9530,23 @@
                 </a:solidFill>
                 <a:latin typeface="Times New Roman"/>
               </a:rPr>
-              <a:t>ĝ</a:t>
+              <a:t>g</a:t>
+            </a:r>
+            <a:r>
+              <a:rPr sz="640" b="0" i="0">
+                <a:solidFill>
+                  <a:srgbClr val="000000"/>
+                </a:solidFill>
+                <a:latin typeface="Times New Roman"/>
+              </a:rPr>
+              <a:t>*</a:t>
             </a:r>
           </a:p>
         </p:txBody>
       </p:sp>
       <p:sp>
         <p:nvSpPr>
-          <p:cNvPr id="157" name="option_step_2"/>
+          <p:cNvPr id="157" name="unroll_step_2"/>
           <p:cNvSpPr/>
           <p:nvPr/>
         </p:nvSpPr>
@@ -9566,14 +9602,23 @@
                 </a:solidFill>
                 <a:latin typeface="Times New Roman"/>
               </a:rPr>
-              <a:t>ĝ</a:t>
+              <a:t>g</a:t>
+            </a:r>
+            <a:r>
+              <a:rPr sz="640" b="0" i="0">
+                <a:solidFill>
+                  <a:srgbClr val="000000"/>
+                </a:solidFill>
+                <a:latin typeface="Times New Roman"/>
+              </a:rPr>
+              <a:t>*</a:t>
             </a:r>
           </a:p>
         </p:txBody>
       </p:sp>
       <p:sp>
         <p:nvSpPr>
-          <p:cNvPr id="158" name="option_step_3"/>
+          <p:cNvPr id="158" name="unroll_step_3"/>
           <p:cNvSpPr/>
           <p:nvPr/>
         </p:nvSpPr>
@@ -9629,14 +9674,23 @@
                 </a:solidFill>
                 <a:latin typeface="Times New Roman"/>
               </a:rPr>
-              <a:t>ĝ</a:t>
+              <a:t>g</a:t>
+            </a:r>
+            <a:r>
+              <a:rPr sz="640" b="0" i="0">
+                <a:solidFill>
+                  <a:srgbClr val="000000"/>
+                </a:solidFill>
+                <a:latin typeface="Times New Roman"/>
+              </a:rPr>
+              <a:t>*</a:t>
             </a:r>
           </a:p>
         </p:txBody>
       </p:sp>
       <p:sp>
         <p:nvSpPr>
-          <p:cNvPr id="159" name="option_step_4"/>
+          <p:cNvPr id="159" name="unroll_step_4"/>
           <p:cNvSpPr/>
           <p:nvPr/>
         </p:nvSpPr>
@@ -9692,14 +9746,23 @@
                 </a:solidFill>
                 <a:latin typeface="Times New Roman"/>
               </a:rPr>
-              <a:t>ĝ</a:t>
+              <a:t>g</a:t>
+            </a:r>
+            <a:r>
+              <a:rPr sz="640" b="0" i="0">
+                <a:solidFill>
+                  <a:srgbClr val="000000"/>
+                </a:solidFill>
+                <a:latin typeface="Times New Roman"/>
+              </a:rPr>
+              <a:t>*</a:t>
             </a:r>
           </a:p>
         </p:txBody>
       </p:sp>
       <p:sp>
         <p:nvSpPr>
-          <p:cNvPr id="160" name="option_step_5"/>
+          <p:cNvPr id="160" name="unroll_step_5"/>
           <p:cNvSpPr/>
           <p:nvPr/>
         </p:nvSpPr>
@@ -9749,13 +9812,13 @@
               </a:lnSpc>
             </a:pPr>
             <a:r>
-              <a:rPr sz="640" b="0" i="1">
+              <a:rPr sz="640" b="0" i="0">
                 <a:solidFill>
                   <a:srgbClr val="000000"/>
                 </a:solidFill>
                 <a:latin typeface="Times New Roman"/>
               </a:rPr>
-              <a:t>ĝ</a:t>
+              <a:t>…</a:t>
             </a:r>
           </a:p>
         </p:txBody>

--- a/figures/ppt/fig1_framework.pptx
+++ b/figures/ppt/fig1_framework.pptx
@@ -10368,7 +10368,7 @@
                 </a:solidFill>
                 <a:latin typeface="Times New Roman"/>
               </a:rPr>
-              <a:t>g</a:t>
+              <a:t>y</a:t>
             </a:r>
             <a:r>
               <a:rPr sz="630" b="0" i="1" baseline="-25000">
@@ -10503,7 +10503,7 @@
                 </a:solidFill>
                 <a:latin typeface="Times New Roman"/>
               </a:rPr>
-              <a:t>g</a:t>
+              <a:t>y</a:t>
             </a:r>
             <a:r>
               <a:rPr sz="630" b="0" i="1" baseline="-25000">
@@ -10548,7 +10548,7 @@
                 </a:solidFill>
                 <a:latin typeface="Times New Roman"/>
               </a:rPr>
-              <a:t>g</a:t>
+              <a:t>y</a:t>
             </a:r>
             <a:r>
               <a:rPr sz="630" b="0" i="1" baseline="-25000">
